--- a/figures/Figures.pptx
+++ b/figures/Figures.pptx
@@ -120,7 +120,7 @@
 <file path=ppt/revisionInfo.xml><?xml version="1.0" encoding="utf-8"?>
 <p1510:revInfo xmlns:a="http://schemas.openxmlformats.org/drawingml/2006/main" xmlns:r="http://schemas.openxmlformats.org/officeDocument/2006/relationships" xmlns:p1510="http://schemas.microsoft.com/office/powerpoint/2015/10/main">
   <p1510:revLst>
-    <p1510:client id="{845851A7-F1C6-4417-B1A2-7AC72DF2D5EA}" v="44" dt="2026-01-21T05:25:19.192"/>
+    <p1510:client id="{845851A7-F1C6-4417-B1A2-7AC72DF2D5EA}" v="130" dt="2026-01-25T02:01:15.206"/>
   </p1510:revLst>
 </p1510:revInfo>
 </file>
@@ -130,10 +130,113 @@
   <pc:docChgLst>
     <pc:chgData name="Daniel Bauman" userId="b4990c641f0077cd" providerId="LiveId" clId="{6DEDCE68-9D2E-4C8C-9998-BD219A3A306C}"/>
     <pc:docChg chg="undo custSel addSld modSld">
-      <pc:chgData name="Daniel Bauman" userId="b4990c641f0077cd" providerId="LiveId" clId="{6DEDCE68-9D2E-4C8C-9998-BD219A3A306C}" dt="2026-01-21T05:25:19.192" v="258" actId="20577"/>
+      <pc:chgData name="Daniel Bauman" userId="b4990c641f0077cd" providerId="LiveId" clId="{6DEDCE68-9D2E-4C8C-9998-BD219A3A306C}" dt="2026-01-25T02:01:15.206" v="374" actId="20577"/>
       <pc:docMkLst>
         <pc:docMk/>
       </pc:docMkLst>
+      <pc:sldChg chg="modSp mod">
+        <pc:chgData name="Daniel Bauman" userId="b4990c641f0077cd" providerId="LiveId" clId="{6DEDCE68-9D2E-4C8C-9998-BD219A3A306C}" dt="2026-01-25T02:01:15.206" v="374" actId="20577"/>
+        <pc:sldMkLst>
+          <pc:docMk/>
+          <pc:sldMk cId="4184697988" sldId="259"/>
+        </pc:sldMkLst>
+        <pc:spChg chg="mod">
+          <ac:chgData name="Daniel Bauman" userId="b4990c641f0077cd" providerId="LiveId" clId="{6DEDCE68-9D2E-4C8C-9998-BD219A3A306C}" dt="2026-01-25T02:01:02.906" v="366" actId="20577"/>
+          <ac:spMkLst>
+            <pc:docMk/>
+            <pc:sldMk cId="4184697988" sldId="259"/>
+            <ac:spMk id="5" creationId="{E4F2E5B9-7CAA-6D1A-5662-42FAE55F75EE}"/>
+          </ac:spMkLst>
+        </pc:spChg>
+        <pc:spChg chg="mod">
+          <ac:chgData name="Daniel Bauman" userId="b4990c641f0077cd" providerId="LiveId" clId="{6DEDCE68-9D2E-4C8C-9998-BD219A3A306C}" dt="2026-01-25T02:01:02.906" v="366" actId="20577"/>
+          <ac:spMkLst>
+            <pc:docMk/>
+            <pc:sldMk cId="4184697988" sldId="259"/>
+            <ac:spMk id="6" creationId="{0D2B9634-26F4-E6D1-392D-478A9286917C}"/>
+          </ac:spMkLst>
+        </pc:spChg>
+        <pc:spChg chg="mod">
+          <ac:chgData name="Daniel Bauman" userId="b4990c641f0077cd" providerId="LiveId" clId="{6DEDCE68-9D2E-4C8C-9998-BD219A3A306C}" dt="2026-01-25T02:01:02.906" v="366" actId="20577"/>
+          <ac:spMkLst>
+            <pc:docMk/>
+            <pc:sldMk cId="4184697988" sldId="259"/>
+            <ac:spMk id="7" creationId="{2B085A2B-8C0E-4102-1495-B8A3257073DD}"/>
+          </ac:spMkLst>
+        </pc:spChg>
+        <pc:spChg chg="mod">
+          <ac:chgData name="Daniel Bauman" userId="b4990c641f0077cd" providerId="LiveId" clId="{6DEDCE68-9D2E-4C8C-9998-BD219A3A306C}" dt="2026-01-25T02:01:02.906" v="366" actId="20577"/>
+          <ac:spMkLst>
+            <pc:docMk/>
+            <pc:sldMk cId="4184697988" sldId="259"/>
+            <ac:spMk id="8" creationId="{7D0999FA-FD2A-1B9D-903A-4F19A0FBD985}"/>
+          </ac:spMkLst>
+        </pc:spChg>
+        <pc:spChg chg="mod">
+          <ac:chgData name="Daniel Bauman" userId="b4990c641f0077cd" providerId="LiveId" clId="{6DEDCE68-9D2E-4C8C-9998-BD219A3A306C}" dt="2026-01-25T02:01:02.906" v="366" actId="20577"/>
+          <ac:spMkLst>
+            <pc:docMk/>
+            <pc:sldMk cId="4184697988" sldId="259"/>
+            <ac:spMk id="10" creationId="{267AFE90-EC66-2C91-276E-F0AFAADA9666}"/>
+          </ac:spMkLst>
+        </pc:spChg>
+        <pc:spChg chg="mod">
+          <ac:chgData name="Daniel Bauman" userId="b4990c641f0077cd" providerId="LiveId" clId="{6DEDCE68-9D2E-4C8C-9998-BD219A3A306C}" dt="2026-01-25T02:01:15.206" v="374" actId="20577"/>
+          <ac:spMkLst>
+            <pc:docMk/>
+            <pc:sldMk cId="4184697988" sldId="259"/>
+            <ac:spMk id="36" creationId="{51B26E3B-EA35-43C7-9863-6B0102168276}"/>
+          </ac:spMkLst>
+        </pc:spChg>
+        <pc:spChg chg="mod">
+          <ac:chgData name="Daniel Bauman" userId="b4990c641f0077cd" providerId="LiveId" clId="{6DEDCE68-9D2E-4C8C-9998-BD219A3A306C}" dt="2026-01-25T02:01:02.906" v="366" actId="20577"/>
+          <ac:spMkLst>
+            <pc:docMk/>
+            <pc:sldMk cId="4184697988" sldId="259"/>
+            <ac:spMk id="39" creationId="{0556EBC3-D0B4-FCAA-0E74-52FB9838D1FE}"/>
+          </ac:spMkLst>
+        </pc:spChg>
+        <pc:spChg chg="mod">
+          <ac:chgData name="Daniel Bauman" userId="b4990c641f0077cd" providerId="LiveId" clId="{6DEDCE68-9D2E-4C8C-9998-BD219A3A306C}" dt="2026-01-25T02:01:09.975" v="370" actId="20577"/>
+          <ac:spMkLst>
+            <pc:docMk/>
+            <pc:sldMk cId="4184697988" sldId="259"/>
+            <ac:spMk id="40" creationId="{CE2FD0A3-B525-E8A7-0A39-812B1F167652}"/>
+          </ac:spMkLst>
+        </pc:spChg>
+        <pc:spChg chg="mod">
+          <ac:chgData name="Daniel Bauman" userId="b4990c641f0077cd" providerId="LiveId" clId="{6DEDCE68-9D2E-4C8C-9998-BD219A3A306C}" dt="2026-01-25T02:01:02.631" v="364" actId="20577"/>
+          <ac:spMkLst>
+            <pc:docMk/>
+            <pc:sldMk cId="4184697988" sldId="259"/>
+            <ac:spMk id="72" creationId="{CD6A14B6-8B20-F770-8E05-042A66C3653E}"/>
+          </ac:spMkLst>
+        </pc:spChg>
+        <pc:spChg chg="mod">
+          <ac:chgData name="Daniel Bauman" userId="b4990c641f0077cd" providerId="LiveId" clId="{6DEDCE68-9D2E-4C8C-9998-BD219A3A306C}" dt="2026-01-25T02:01:02.906" v="366" actId="20577"/>
+          <ac:spMkLst>
+            <pc:docMk/>
+            <pc:sldMk cId="4184697988" sldId="259"/>
+            <ac:spMk id="74" creationId="{54A940E5-1306-7A7F-A8BB-4C6B7D36526E}"/>
+          </ac:spMkLst>
+        </pc:spChg>
+        <pc:spChg chg="mod">
+          <ac:chgData name="Daniel Bauman" userId="b4990c641f0077cd" providerId="LiveId" clId="{6DEDCE68-9D2E-4C8C-9998-BD219A3A306C}" dt="2026-01-25T02:01:02.906" v="366" actId="20577"/>
+          <ac:spMkLst>
+            <pc:docMk/>
+            <pc:sldMk cId="4184697988" sldId="259"/>
+            <ac:spMk id="75" creationId="{E72D8483-B4B5-CA84-31D0-8BBAF83A4550}"/>
+          </ac:spMkLst>
+        </pc:spChg>
+        <pc:spChg chg="mod">
+          <ac:chgData name="Daniel Bauman" userId="b4990c641f0077cd" providerId="LiveId" clId="{6DEDCE68-9D2E-4C8C-9998-BD219A3A306C}" dt="2026-01-25T02:01:02.906" v="366" actId="20577"/>
+          <ac:spMkLst>
+            <pc:docMk/>
+            <pc:sldMk cId="4184697988" sldId="259"/>
+            <ac:spMk id="79" creationId="{B3D2E14D-3527-4212-7E79-1E2E471484CF}"/>
+          </ac:spMkLst>
+        </pc:spChg>
+      </pc:sldChg>
       <pc:sldChg chg="addSp delSp modSp add mod">
         <pc:chgData name="Daniel Bauman" userId="b4990c641f0077cd" providerId="LiveId" clId="{6DEDCE68-9D2E-4C8C-9998-BD219A3A306C}" dt="2026-01-12T23:44:52.868" v="25" actId="1076"/>
         <pc:sldMkLst>
@@ -1235,7 +1338,7 @@
           <a:p>
             <a:fld id="{3C4E944E-439C-4400-9867-B448A42A17A7}" type="datetimeFigureOut">
               <a:rPr lang="en-US" smtClean="0"/>
-              <a:t>1/20/2026</a:t>
+              <a:t>1/24/2026</a:t>
             </a:fld>
             <a:endParaRPr lang="en-US"/>
           </a:p>
@@ -1405,7 +1508,7 @@
           <a:p>
             <a:fld id="{3C4E944E-439C-4400-9867-B448A42A17A7}" type="datetimeFigureOut">
               <a:rPr lang="en-US" smtClean="0"/>
-              <a:t>1/20/2026</a:t>
+              <a:t>1/24/2026</a:t>
             </a:fld>
             <a:endParaRPr lang="en-US"/>
           </a:p>
@@ -1585,7 +1688,7 @@
           <a:p>
             <a:fld id="{3C4E944E-439C-4400-9867-B448A42A17A7}" type="datetimeFigureOut">
               <a:rPr lang="en-US" smtClean="0"/>
-              <a:t>1/20/2026</a:t>
+              <a:t>1/24/2026</a:t>
             </a:fld>
             <a:endParaRPr lang="en-US"/>
           </a:p>
@@ -1755,7 +1858,7 @@
           <a:p>
             <a:fld id="{3C4E944E-439C-4400-9867-B448A42A17A7}" type="datetimeFigureOut">
               <a:rPr lang="en-US" smtClean="0"/>
-              <a:t>1/20/2026</a:t>
+              <a:t>1/24/2026</a:t>
             </a:fld>
             <a:endParaRPr lang="en-US"/>
           </a:p>
@@ -2001,7 +2104,7 @@
           <a:p>
             <a:fld id="{3C4E944E-439C-4400-9867-B448A42A17A7}" type="datetimeFigureOut">
               <a:rPr lang="en-US" smtClean="0"/>
-              <a:t>1/20/2026</a:t>
+              <a:t>1/24/2026</a:t>
             </a:fld>
             <a:endParaRPr lang="en-US"/>
           </a:p>
@@ -2233,7 +2336,7 @@
           <a:p>
             <a:fld id="{3C4E944E-439C-4400-9867-B448A42A17A7}" type="datetimeFigureOut">
               <a:rPr lang="en-US" smtClean="0"/>
-              <a:t>1/20/2026</a:t>
+              <a:t>1/24/2026</a:t>
             </a:fld>
             <a:endParaRPr lang="en-US"/>
           </a:p>
@@ -2600,7 +2703,7 @@
           <a:p>
             <a:fld id="{3C4E944E-439C-4400-9867-B448A42A17A7}" type="datetimeFigureOut">
               <a:rPr lang="en-US" smtClean="0"/>
-              <a:t>1/20/2026</a:t>
+              <a:t>1/24/2026</a:t>
             </a:fld>
             <a:endParaRPr lang="en-US"/>
           </a:p>
@@ -2718,7 +2821,7 @@
           <a:p>
             <a:fld id="{3C4E944E-439C-4400-9867-B448A42A17A7}" type="datetimeFigureOut">
               <a:rPr lang="en-US" smtClean="0"/>
-              <a:t>1/20/2026</a:t>
+              <a:t>1/24/2026</a:t>
             </a:fld>
             <a:endParaRPr lang="en-US"/>
           </a:p>
@@ -2813,7 +2916,7 @@
           <a:p>
             <a:fld id="{3C4E944E-439C-4400-9867-B448A42A17A7}" type="datetimeFigureOut">
               <a:rPr lang="en-US" smtClean="0"/>
-              <a:t>1/20/2026</a:t>
+              <a:t>1/24/2026</a:t>
             </a:fld>
             <a:endParaRPr lang="en-US"/>
           </a:p>
@@ -3090,7 +3193,7 @@
           <a:p>
             <a:fld id="{3C4E944E-439C-4400-9867-B448A42A17A7}" type="datetimeFigureOut">
               <a:rPr lang="en-US" smtClean="0"/>
-              <a:t>1/20/2026</a:t>
+              <a:t>1/24/2026</a:t>
             </a:fld>
             <a:endParaRPr lang="en-US"/>
           </a:p>
@@ -3347,7 +3450,7 @@
           <a:p>
             <a:fld id="{3C4E944E-439C-4400-9867-B448A42A17A7}" type="datetimeFigureOut">
               <a:rPr lang="en-US" smtClean="0"/>
-              <a:t>1/20/2026</a:t>
+              <a:t>1/24/2026</a:t>
             </a:fld>
             <a:endParaRPr lang="en-US"/>
           </a:p>
@@ -3560,7 +3663,7 @@
           <a:p>
             <a:fld id="{3C4E944E-439C-4400-9867-B448A42A17A7}" type="datetimeFigureOut">
               <a:rPr lang="en-US" smtClean="0"/>
-              <a:t>1/20/2026</a:t>
+              <a:t>1/24/2026</a:t>
             </a:fld>
             <a:endParaRPr lang="en-US"/>
           </a:p>
@@ -9436,8 +9539,8 @@
             </p:sp>
           </mc:Fallback>
         </mc:AlternateContent>
-        <mc:AlternateContent xmlns:mc="http://schemas.openxmlformats.org/markup-compatibility/2006">
-          <mc:Choice xmlns:a14="http://schemas.microsoft.com/office/drawing/2010/main" Requires="a14">
+        <mc:AlternateContent xmlns:mc="http://schemas.openxmlformats.org/markup-compatibility/2006" xmlns:a14="http://schemas.microsoft.com/office/drawing/2010/main">
+          <mc:Choice Requires="a14">
             <p:sp>
               <p:nvSpPr>
                 <p:cNvPr id="46" name="TextBox 45">
@@ -9512,7 +9615,7 @@
               </p:txBody>
             </p:sp>
           </mc:Choice>
-          <mc:Fallback>
+          <mc:Fallback xmlns="">
             <p:sp>
               <p:nvSpPr>
                 <p:cNvPr id="46" name="TextBox 45">
@@ -10353,8 +10456,8 @@
             </p:sp>
           </mc:Fallback>
         </mc:AlternateContent>
-        <mc:AlternateContent xmlns:mc="http://schemas.openxmlformats.org/markup-compatibility/2006">
-          <mc:Choice xmlns:a14="http://schemas.microsoft.com/office/drawing/2010/main" Requires="a14">
+        <mc:AlternateContent xmlns:mc="http://schemas.openxmlformats.org/markup-compatibility/2006" xmlns:a14="http://schemas.microsoft.com/office/drawing/2010/main">
+          <mc:Choice Requires="a14">
             <p:sp>
               <p:nvSpPr>
                 <p:cNvPr id="59" name="TextBox 58">
@@ -10429,7 +10532,7 @@
               </p:txBody>
             </p:sp>
           </mc:Choice>
-          <mc:Fallback>
+          <mc:Fallback xmlns="">
             <p:sp>
               <p:nvSpPr>
                 <p:cNvPr id="59" name="TextBox 58">
@@ -10474,8 +10577,8 @@
             </p:sp>
           </mc:Fallback>
         </mc:AlternateContent>
-        <mc:AlternateContent xmlns:mc="http://schemas.openxmlformats.org/markup-compatibility/2006">
-          <mc:Choice xmlns:a14="http://schemas.microsoft.com/office/drawing/2010/main" Requires="a14">
+        <mc:AlternateContent xmlns:mc="http://schemas.openxmlformats.org/markup-compatibility/2006" xmlns:a14="http://schemas.microsoft.com/office/drawing/2010/main">
+          <mc:Choice Requires="a14">
             <p:sp>
               <p:nvSpPr>
                 <p:cNvPr id="60" name="TextBox 59">
@@ -10550,7 +10653,7 @@
               </p:txBody>
             </p:sp>
           </mc:Choice>
-          <mc:Fallback>
+          <mc:Fallback xmlns="">
             <p:sp>
               <p:nvSpPr>
                 <p:cNvPr id="60" name="TextBox 59">
@@ -21468,8 +21571,8 @@
             </p:sp>
           </mc:Fallback>
         </mc:AlternateContent>
-        <mc:AlternateContent xmlns:mc="http://schemas.openxmlformats.org/markup-compatibility/2006" xmlns:a14="http://schemas.microsoft.com/office/drawing/2010/main">
-          <mc:Choice Requires="a14">
+        <mc:AlternateContent xmlns:mc="http://schemas.openxmlformats.org/markup-compatibility/2006">
+          <mc:Choice xmlns:a14="http://schemas.microsoft.com/office/drawing/2010/main" Requires="a14">
             <p:sp>
               <p:nvSpPr>
                 <p:cNvPr id="7" name="Rectangle 6">
@@ -21535,38 +21638,24 @@
                   </a:r>
                   <a:r>
                     <a:rPr lang="en-US" sz="1600" dirty="0"/>
-                    <a:t>fraction</a:t>
+                    <a:t>fraction distribution </a:t>
                   </a:r>
-                </a:p>
-                <a:p>
-                  <a:pPr algn="ctr"/>
                   <a14:m>
-                    <m:oMathPara xmlns:m="http://schemas.openxmlformats.org/officeDocument/2006/math">
-                      <m:oMathParaPr>
-                        <m:jc m:val="centerGroup"/>
-                      </m:oMathParaPr>
-                      <m:oMath xmlns:m="http://schemas.openxmlformats.org/officeDocument/2006/math">
-                        <m:r>
-                          <a:rPr lang="en-US" sz="1600" b="0" i="1" smtClean="0">
-                            <a:latin typeface="Cambria Math" panose="02040503050406030204" pitchFamily="18" charset="0"/>
-                          </a:rPr>
-                          <m:t>𝜆</m:t>
-                        </m:r>
-                        <m:r>
-                          <a:rPr lang="en-US" sz="1600" b="0" i="1" smtClean="0">
-                            <a:latin typeface="Cambria Math" panose="02040503050406030204" pitchFamily="18" charset="0"/>
-                          </a:rPr>
-                          <m:t>∈[0,1]</m:t>
-                        </m:r>
-                      </m:oMath>
-                    </m:oMathPara>
+                    <m:oMath xmlns:m="http://schemas.openxmlformats.org/officeDocument/2006/math">
+                      <m:r>
+                        <a:rPr lang="en-US" sz="1600" b="0" i="1" smtClean="0">
+                          <a:latin typeface="Cambria Math" panose="02040503050406030204" pitchFamily="18" charset="0"/>
+                        </a:rPr>
+                        <m:t>𝑋</m:t>
+                      </m:r>
+                    </m:oMath>
                   </a14:m>
                   <a:endParaRPr lang="en-US" sz="1600" dirty="0"/>
                 </a:p>
               </p:txBody>
             </p:sp>
           </mc:Choice>
-          <mc:Fallback xmlns="">
+          <mc:Fallback>
             <p:sp>
               <p:nvSpPr>
                 <p:cNvPr id="7" name="Rectangle 6">
@@ -21616,8 +21705,8 @@
             </p:sp>
           </mc:Fallback>
         </mc:AlternateContent>
-        <mc:AlternateContent xmlns:mc="http://schemas.openxmlformats.org/markup-compatibility/2006" xmlns:a14="http://schemas.microsoft.com/office/drawing/2010/main">
-          <mc:Choice Requires="a14">
+        <mc:AlternateContent xmlns:mc="http://schemas.openxmlformats.org/markup-compatibility/2006">
+          <mc:Choice xmlns:a14="http://schemas.microsoft.com/office/drawing/2010/main" Requires="a14">
             <p:sp>
               <p:nvSpPr>
                 <p:cNvPr id="8" name="Rectangle 7">
@@ -21665,19 +21754,8 @@
                   <a:pPr algn="ctr"/>
                   <a:r>
                     <a:rPr lang="en-US" sz="1600" b="1" dirty="0"/>
-                    <a:t>Biased speciation, constant </a:t>
+                    <a:t>Biased speciation, constant split fraction</a:t>
                   </a:r>
-                  <a14:m>
-                    <m:oMath xmlns:m="http://schemas.openxmlformats.org/officeDocument/2006/math">
-                      <m:r>
-                        <a:rPr lang="en-US" sz="1600" b="1" i="1" smtClean="0">
-                          <a:latin typeface="Cambria Math" panose="02040503050406030204" pitchFamily="18" charset="0"/>
-                        </a:rPr>
-                        <m:t>𝝀</m:t>
-                      </m:r>
-                    </m:oMath>
-                  </a14:m>
-                  <a:endParaRPr lang="en-US" sz="1600" b="1" dirty="0"/>
                 </a:p>
                 <a:p>
                   <a:pPr algn="ctr"/>
@@ -21698,7 +21776,7 @@
                           <a:rPr lang="en-US" sz="1600" b="0" i="1" smtClean="0">
                             <a:latin typeface="Cambria Math" panose="02040503050406030204" pitchFamily="18" charset="0"/>
                           </a:rPr>
-                          <m:t>𝑝</m:t>
+                          <m:t>𝜆</m:t>
                         </m:r>
                         <m:r>
                           <a:rPr lang="en-US" sz="1600" b="0" i="1" smtClean="0">
@@ -21714,7 +21792,7 @@
               </p:txBody>
             </p:sp>
           </mc:Choice>
-          <mc:Fallback xmlns="">
+          <mc:Fallback>
             <p:sp>
               <p:nvSpPr>
                 <p:cNvPr id="8" name="Rectangle 7">
@@ -22572,8 +22650,8 @@
             </a:fontRef>
           </p:style>
         </p:cxnSp>
-        <mc:AlternateContent xmlns:mc="http://schemas.openxmlformats.org/markup-compatibility/2006" xmlns:a14="http://schemas.microsoft.com/office/drawing/2010/main">
-          <mc:Choice Requires="a14">
+        <mc:AlternateContent xmlns:mc="http://schemas.openxmlformats.org/markup-compatibility/2006">
+          <mc:Choice xmlns:a14="http://schemas.microsoft.com/office/drawing/2010/main" Requires="a14">
             <p:sp>
               <p:nvSpPr>
                 <p:cNvPr id="36" name="TextBox 35">
@@ -22613,7 +22691,7 @@
                           <a:rPr lang="en-US" sz="1400" b="0" i="1" smtClean="0">
                             <a:latin typeface="Cambria Math" panose="02040503050406030204" pitchFamily="18" charset="0"/>
                           </a:rPr>
-                          <m:t>𝜆</m:t>
+                          <m:t>𝑋</m:t>
                         </m:r>
                         <m:r>
                           <a:rPr lang="en-US" sz="1400" b="0" i="1" smtClean="0">
@@ -22665,7 +22743,7 @@
               </p:txBody>
             </p:sp>
           </mc:Choice>
-          <mc:Fallback xmlns="">
+          <mc:Fallback>
             <p:sp>
               <p:nvSpPr>
                 <p:cNvPr id="36" name="TextBox 35">
@@ -22710,8 +22788,8 @@
             </p:sp>
           </mc:Fallback>
         </mc:AlternateContent>
-        <mc:AlternateContent xmlns:mc="http://schemas.openxmlformats.org/markup-compatibility/2006" xmlns:a14="http://schemas.microsoft.com/office/drawing/2010/main">
-          <mc:Choice Requires="a14">
+        <mc:AlternateContent xmlns:mc="http://schemas.openxmlformats.org/markup-compatibility/2006">
+          <mc:Choice xmlns:a14="http://schemas.microsoft.com/office/drawing/2010/main" Requires="a14">
             <p:sp>
               <p:nvSpPr>
                 <p:cNvPr id="39" name="TextBox 38">
@@ -22751,7 +22829,7 @@
                           <a:rPr lang="en-US" sz="1400" b="0" i="1" smtClean="0">
                             <a:latin typeface="Cambria Math" panose="02040503050406030204" pitchFamily="18" charset="0"/>
                           </a:rPr>
-                          <m:t>𝜆</m:t>
+                          <m:t>𝑋</m:t>
                         </m:r>
                         <m:r>
                           <a:rPr lang="en-US" sz="1400" b="0" i="1" smtClean="0">
@@ -22763,7 +22841,7 @@
                           <a:rPr lang="en-US" sz="1400" b="0" i="1" smtClean="0">
                             <a:latin typeface="Cambria Math" panose="02040503050406030204" pitchFamily="18" charset="0"/>
                           </a:rPr>
-                          <m:t>𝑝</m:t>
+                          <m:t>𝜆</m:t>
                         </m:r>
                       </m:oMath>
                     </m:oMathPara>
@@ -22773,7 +22851,7 @@
               </p:txBody>
             </p:sp>
           </mc:Choice>
-          <mc:Fallback xmlns="">
+          <mc:Fallback>
             <p:sp>
               <p:nvSpPr>
                 <p:cNvPr id="39" name="TextBox 38">
@@ -22818,8 +22896,8 @@
             </p:sp>
           </mc:Fallback>
         </mc:AlternateContent>
-        <mc:AlternateContent xmlns:mc="http://schemas.openxmlformats.org/markup-compatibility/2006" xmlns:a14="http://schemas.microsoft.com/office/drawing/2010/main">
-          <mc:Choice Requires="a14">
+        <mc:AlternateContent xmlns:mc="http://schemas.openxmlformats.org/markup-compatibility/2006">
+          <mc:Choice xmlns:a14="http://schemas.microsoft.com/office/drawing/2010/main" Requires="a14">
             <p:sp>
               <p:nvSpPr>
                 <p:cNvPr id="40" name="TextBox 39">
@@ -22859,7 +22937,7 @@
                           <a:rPr lang="en-US" sz="1400" b="0" i="1" smtClean="0">
                             <a:latin typeface="Cambria Math" panose="02040503050406030204" pitchFamily="18" charset="0"/>
                           </a:rPr>
-                          <m:t>𝜆</m:t>
+                          <m:t>𝑋</m:t>
                         </m:r>
                         <m:r>
                           <a:rPr lang="en-US" sz="1400" b="0" i="1" smtClean="0">
@@ -22911,7 +22989,7 @@
               </p:txBody>
             </p:sp>
           </mc:Choice>
-          <mc:Fallback xmlns="">
+          <mc:Fallback>
             <p:sp>
               <p:nvSpPr>
                 <p:cNvPr id="40" name="TextBox 39">
@@ -23064,8 +23142,8 @@
             </p:sp>
           </mc:Fallback>
         </mc:AlternateContent>
-        <mc:AlternateContent xmlns:mc="http://schemas.openxmlformats.org/markup-compatibility/2006" xmlns:a14="http://schemas.microsoft.com/office/drawing/2010/main">
-          <mc:Choice Requires="a14">
+        <mc:AlternateContent xmlns:mc="http://schemas.openxmlformats.org/markup-compatibility/2006">
+          <mc:Choice xmlns:a14="http://schemas.microsoft.com/office/drawing/2010/main" Requires="a14">
             <p:sp>
               <p:nvSpPr>
                 <p:cNvPr id="72" name="TextBox 71">
@@ -23105,7 +23183,7 @@
                           <a:rPr lang="en-US" sz="1400" b="0" i="1" smtClean="0">
                             <a:latin typeface="Cambria Math" panose="02040503050406030204" pitchFamily="18" charset="0"/>
                           </a:rPr>
-                          <m:t>𝑝</m:t>
+                          <m:t>𝜆</m:t>
                         </m:r>
                         <m:r>
                           <a:rPr lang="en-US" sz="1400" b="0" i="1" smtClean="0">
@@ -23117,7 +23195,7 @@
                           <a:rPr lang="en-US" sz="1400" b="0" i="1" smtClean="0">
                             <a:latin typeface="Cambria Math" panose="02040503050406030204" pitchFamily="18" charset="0"/>
                           </a:rPr>
-                          <m:t>𝑝</m:t>
+                          <m:t>𝜆</m:t>
                         </m:r>
                         <m:r>
                           <a:rPr lang="en-US" sz="1400" b="0" i="1" smtClean="0">
@@ -23133,7 +23211,7 @@
               </p:txBody>
             </p:sp>
           </mc:Choice>
-          <mc:Fallback xmlns="">
+          <mc:Fallback>
             <p:sp>
               <p:nvSpPr>
                 <p:cNvPr id="72" name="TextBox 71">
@@ -23159,7 +23237,7 @@
                 <a:blipFill>
                   <a:blip r:embed="rId11"/>
                   <a:stretch>
-                    <a:fillRect b="-2000"/>
+                    <a:fillRect/>
                   </a:stretch>
                 </a:blipFill>
               </p:spPr>

--- a/figures/Figures.pptx
+++ b/figures/Figures.pptx
@@ -11,6 +11,7 @@
     <p:sldId id="261" r:id="rId5"/>
     <p:sldId id="258" r:id="rId6"/>
     <p:sldId id="259" r:id="rId7"/>
+    <p:sldId id="263" r:id="rId8"/>
   </p:sldIdLst>
   <p:sldSz cx="12192000" cy="9144000"/>
   <p:notesSz cx="6858000" cy="9144000"/>
@@ -117,1090 +118,53 @@
 </p:presentation>
 </file>
 
-<file path=ppt/revisionInfo.xml><?xml version="1.0" encoding="utf-8"?>
-<p1510:revInfo xmlns:a="http://schemas.openxmlformats.org/drawingml/2006/main" xmlns:r="http://schemas.openxmlformats.org/officeDocument/2006/relationships" xmlns:p1510="http://schemas.microsoft.com/office/powerpoint/2015/10/main">
-  <p1510:revLst>
-    <p1510:client id="{845851A7-F1C6-4417-B1A2-7AC72DF2D5EA}" v="130" dt="2026-01-25T02:01:15.206"/>
-  </p1510:revLst>
-</p1510:revInfo>
-</file>
-
 <file path=ppt/changesInfos/changesInfo1.xml><?xml version="1.0" encoding="utf-8"?>
 <pc:chgInfo xmlns:a="http://schemas.openxmlformats.org/drawingml/2006/main" xmlns:r="http://schemas.openxmlformats.org/officeDocument/2006/relationships" xmlns:ac="http://schemas.microsoft.com/office/drawing/2013/main/command" xmlns:pc="http://schemas.microsoft.com/office/powerpoint/2013/main/command">
   <pc:docChgLst>
     <pc:chgData name="Daniel Bauman" userId="b4990c641f0077cd" providerId="LiveId" clId="{6DEDCE68-9D2E-4C8C-9998-BD219A3A306C}"/>
     <pc:docChg chg="undo custSel addSld modSld">
-      <pc:chgData name="Daniel Bauman" userId="b4990c641f0077cd" providerId="LiveId" clId="{6DEDCE68-9D2E-4C8C-9998-BD219A3A306C}" dt="2026-01-25T02:01:15.206" v="374" actId="20577"/>
+      <pc:chgData name="Daniel Bauman" userId="b4990c641f0077cd" providerId="LiveId" clId="{6DEDCE68-9D2E-4C8C-9998-BD219A3A306C}" dt="2026-03-03T05:36:49.728" v="385" actId="931"/>
       <pc:docMkLst>
         <pc:docMk/>
       </pc:docMkLst>
-      <pc:sldChg chg="modSp mod">
-        <pc:chgData name="Daniel Bauman" userId="b4990c641f0077cd" providerId="LiveId" clId="{6DEDCE68-9D2E-4C8C-9998-BD219A3A306C}" dt="2026-01-25T02:01:15.206" v="374" actId="20577"/>
+      <pc:sldChg chg="addSp delSp modSp new mod">
+        <pc:chgData name="Daniel Bauman" userId="b4990c641f0077cd" providerId="LiveId" clId="{6DEDCE68-9D2E-4C8C-9998-BD219A3A306C}" dt="2026-03-03T05:36:49.728" v="385" actId="931"/>
         <pc:sldMkLst>
           <pc:docMk/>
-          <pc:sldMk cId="4184697988" sldId="259"/>
+          <pc:sldMk cId="3365830087" sldId="263"/>
         </pc:sldMkLst>
-        <pc:spChg chg="mod">
-          <ac:chgData name="Daniel Bauman" userId="b4990c641f0077cd" providerId="LiveId" clId="{6DEDCE68-9D2E-4C8C-9998-BD219A3A306C}" dt="2026-01-25T02:01:02.906" v="366" actId="20577"/>
-          <ac:spMkLst>
+        <pc:picChg chg="add del mod">
+          <ac:chgData name="Daniel Bauman" userId="b4990c641f0077cd" providerId="LiveId" clId="{6DEDCE68-9D2E-4C8C-9998-BD219A3A306C}" dt="2026-03-03T05:36:49.728" v="385" actId="931"/>
+          <ac:picMkLst>
             <pc:docMk/>
-            <pc:sldMk cId="4184697988" sldId="259"/>
-            <ac:spMk id="5" creationId="{E4F2E5B9-7CAA-6D1A-5662-42FAE55F75EE}"/>
-          </ac:spMkLst>
-        </pc:spChg>
-        <pc:spChg chg="mod">
-          <ac:chgData name="Daniel Bauman" userId="b4990c641f0077cd" providerId="LiveId" clId="{6DEDCE68-9D2E-4C8C-9998-BD219A3A306C}" dt="2026-01-25T02:01:02.906" v="366" actId="20577"/>
-          <ac:spMkLst>
+            <pc:sldMk cId="3365830087" sldId="263"/>
+            <ac:picMk id="3" creationId="{4B8A6FBF-3397-ABC7-FE8C-5C06F78066DA}"/>
+          </ac:picMkLst>
+        </pc:picChg>
+        <pc:picChg chg="add del mod">
+          <ac:chgData name="Daniel Bauman" userId="b4990c641f0077cd" providerId="LiveId" clId="{6DEDCE68-9D2E-4C8C-9998-BD219A3A306C}" dt="2026-03-03T05:36:49.728" v="385" actId="931"/>
+          <ac:picMkLst>
             <pc:docMk/>
-            <pc:sldMk cId="4184697988" sldId="259"/>
-            <ac:spMk id="6" creationId="{0D2B9634-26F4-E6D1-392D-478A9286917C}"/>
-          </ac:spMkLst>
-        </pc:spChg>
-        <pc:spChg chg="mod">
-          <ac:chgData name="Daniel Bauman" userId="b4990c641f0077cd" providerId="LiveId" clId="{6DEDCE68-9D2E-4C8C-9998-BD219A3A306C}" dt="2026-01-25T02:01:02.906" v="366" actId="20577"/>
-          <ac:spMkLst>
+            <pc:sldMk cId="3365830087" sldId="263"/>
+            <ac:picMk id="5" creationId="{FEDCF395-86DE-3062-59B9-413FA1D6F9E1}"/>
+          </ac:picMkLst>
+        </pc:picChg>
+        <pc:picChg chg="add del mod">
+          <ac:chgData name="Daniel Bauman" userId="b4990c641f0077cd" providerId="LiveId" clId="{6DEDCE68-9D2E-4C8C-9998-BD219A3A306C}" dt="2026-03-03T05:36:49.728" v="385" actId="931"/>
+          <ac:picMkLst>
             <pc:docMk/>
-            <pc:sldMk cId="4184697988" sldId="259"/>
-            <ac:spMk id="7" creationId="{2B085A2B-8C0E-4102-1495-B8A3257073DD}"/>
-          </ac:spMkLst>
-        </pc:spChg>
-        <pc:spChg chg="mod">
-          <ac:chgData name="Daniel Bauman" userId="b4990c641f0077cd" providerId="LiveId" clId="{6DEDCE68-9D2E-4C8C-9998-BD219A3A306C}" dt="2026-01-25T02:01:02.906" v="366" actId="20577"/>
-          <ac:spMkLst>
+            <pc:sldMk cId="3365830087" sldId="263"/>
+            <ac:picMk id="7" creationId="{34E70C03-6112-87C3-AF89-F756ACC34697}"/>
+          </ac:picMkLst>
+        </pc:picChg>
+        <pc:picChg chg="add del mod">
+          <ac:chgData name="Daniel Bauman" userId="b4990c641f0077cd" providerId="LiveId" clId="{6DEDCE68-9D2E-4C8C-9998-BD219A3A306C}" dt="2026-03-03T05:36:49.728" v="385" actId="931"/>
+          <ac:picMkLst>
             <pc:docMk/>
-            <pc:sldMk cId="4184697988" sldId="259"/>
-            <ac:spMk id="8" creationId="{7D0999FA-FD2A-1B9D-903A-4F19A0FBD985}"/>
-          </ac:spMkLst>
-        </pc:spChg>
-        <pc:spChg chg="mod">
-          <ac:chgData name="Daniel Bauman" userId="b4990c641f0077cd" providerId="LiveId" clId="{6DEDCE68-9D2E-4C8C-9998-BD219A3A306C}" dt="2026-01-25T02:01:02.906" v="366" actId="20577"/>
-          <ac:spMkLst>
-            <pc:docMk/>
-            <pc:sldMk cId="4184697988" sldId="259"/>
-            <ac:spMk id="10" creationId="{267AFE90-EC66-2C91-276E-F0AFAADA9666}"/>
-          </ac:spMkLst>
-        </pc:spChg>
-        <pc:spChg chg="mod">
-          <ac:chgData name="Daniel Bauman" userId="b4990c641f0077cd" providerId="LiveId" clId="{6DEDCE68-9D2E-4C8C-9998-BD219A3A306C}" dt="2026-01-25T02:01:15.206" v="374" actId="20577"/>
-          <ac:spMkLst>
-            <pc:docMk/>
-            <pc:sldMk cId="4184697988" sldId="259"/>
-            <ac:spMk id="36" creationId="{51B26E3B-EA35-43C7-9863-6B0102168276}"/>
-          </ac:spMkLst>
-        </pc:spChg>
-        <pc:spChg chg="mod">
-          <ac:chgData name="Daniel Bauman" userId="b4990c641f0077cd" providerId="LiveId" clId="{6DEDCE68-9D2E-4C8C-9998-BD219A3A306C}" dt="2026-01-25T02:01:02.906" v="366" actId="20577"/>
-          <ac:spMkLst>
-            <pc:docMk/>
-            <pc:sldMk cId="4184697988" sldId="259"/>
-            <ac:spMk id="39" creationId="{0556EBC3-D0B4-FCAA-0E74-52FB9838D1FE}"/>
-          </ac:spMkLst>
-        </pc:spChg>
-        <pc:spChg chg="mod">
-          <ac:chgData name="Daniel Bauman" userId="b4990c641f0077cd" providerId="LiveId" clId="{6DEDCE68-9D2E-4C8C-9998-BD219A3A306C}" dt="2026-01-25T02:01:09.975" v="370" actId="20577"/>
-          <ac:spMkLst>
-            <pc:docMk/>
-            <pc:sldMk cId="4184697988" sldId="259"/>
-            <ac:spMk id="40" creationId="{CE2FD0A3-B525-E8A7-0A39-812B1F167652}"/>
-          </ac:spMkLst>
-        </pc:spChg>
-        <pc:spChg chg="mod">
-          <ac:chgData name="Daniel Bauman" userId="b4990c641f0077cd" providerId="LiveId" clId="{6DEDCE68-9D2E-4C8C-9998-BD219A3A306C}" dt="2026-01-25T02:01:02.631" v="364" actId="20577"/>
-          <ac:spMkLst>
-            <pc:docMk/>
-            <pc:sldMk cId="4184697988" sldId="259"/>
-            <ac:spMk id="72" creationId="{CD6A14B6-8B20-F770-8E05-042A66C3653E}"/>
-          </ac:spMkLst>
-        </pc:spChg>
-        <pc:spChg chg="mod">
-          <ac:chgData name="Daniel Bauman" userId="b4990c641f0077cd" providerId="LiveId" clId="{6DEDCE68-9D2E-4C8C-9998-BD219A3A306C}" dt="2026-01-25T02:01:02.906" v="366" actId="20577"/>
-          <ac:spMkLst>
-            <pc:docMk/>
-            <pc:sldMk cId="4184697988" sldId="259"/>
-            <ac:spMk id="74" creationId="{54A940E5-1306-7A7F-A8BB-4C6B7D36526E}"/>
-          </ac:spMkLst>
-        </pc:spChg>
-        <pc:spChg chg="mod">
-          <ac:chgData name="Daniel Bauman" userId="b4990c641f0077cd" providerId="LiveId" clId="{6DEDCE68-9D2E-4C8C-9998-BD219A3A306C}" dt="2026-01-25T02:01:02.906" v="366" actId="20577"/>
-          <ac:spMkLst>
-            <pc:docMk/>
-            <pc:sldMk cId="4184697988" sldId="259"/>
-            <ac:spMk id="75" creationId="{E72D8483-B4B5-CA84-31D0-8BBAF83A4550}"/>
-          </ac:spMkLst>
-        </pc:spChg>
-        <pc:spChg chg="mod">
-          <ac:chgData name="Daniel Bauman" userId="b4990c641f0077cd" providerId="LiveId" clId="{6DEDCE68-9D2E-4C8C-9998-BD219A3A306C}" dt="2026-01-25T02:01:02.906" v="366" actId="20577"/>
-          <ac:spMkLst>
-            <pc:docMk/>
-            <pc:sldMk cId="4184697988" sldId="259"/>
-            <ac:spMk id="79" creationId="{B3D2E14D-3527-4212-7E79-1E2E471484CF}"/>
-          </ac:spMkLst>
-        </pc:spChg>
-      </pc:sldChg>
-      <pc:sldChg chg="addSp delSp modSp add mod">
-        <pc:chgData name="Daniel Bauman" userId="b4990c641f0077cd" providerId="LiveId" clId="{6DEDCE68-9D2E-4C8C-9998-BD219A3A306C}" dt="2026-01-12T23:44:52.868" v="25" actId="1076"/>
-        <pc:sldMkLst>
-          <pc:docMk/>
-          <pc:sldMk cId="715583163" sldId="260"/>
-        </pc:sldMkLst>
-        <pc:spChg chg="mod">
-          <ac:chgData name="Daniel Bauman" userId="b4990c641f0077cd" providerId="LiveId" clId="{6DEDCE68-9D2E-4C8C-9998-BD219A3A306C}" dt="2026-01-12T23:41:28.846" v="2" actId="1076"/>
-          <ac:spMkLst>
-            <pc:docMk/>
-            <pc:sldMk cId="715583163" sldId="260"/>
-            <ac:spMk id="2" creationId="{2F26121A-13F5-F3FC-EC7C-5624B20B17A8}"/>
-          </ac:spMkLst>
-        </pc:spChg>
-        <pc:spChg chg="add mod">
-          <ac:chgData name="Daniel Bauman" userId="b4990c641f0077cd" providerId="LiveId" clId="{6DEDCE68-9D2E-4C8C-9998-BD219A3A306C}" dt="2026-01-12T23:42:05.149" v="9" actId="20577"/>
-          <ac:spMkLst>
-            <pc:docMk/>
-            <pc:sldMk cId="715583163" sldId="260"/>
-            <ac:spMk id="3" creationId="{2BB1CA29-33A4-3620-2B25-B632D247D678}"/>
-          </ac:spMkLst>
-        </pc:spChg>
-        <pc:spChg chg="mod">
-          <ac:chgData name="Daniel Bauman" userId="b4990c641f0077cd" providerId="LiveId" clId="{6DEDCE68-9D2E-4C8C-9998-BD219A3A306C}" dt="2026-01-12T23:43:54.777" v="17" actId="14100"/>
-          <ac:spMkLst>
-            <pc:docMk/>
-            <pc:sldMk cId="715583163" sldId="260"/>
-            <ac:spMk id="7" creationId="{62572A94-2E43-B375-995F-36D80A0CEE3D}"/>
-          </ac:spMkLst>
-        </pc:spChg>
-        <pc:spChg chg="add mod">
-          <ac:chgData name="Daniel Bauman" userId="b4990c641f0077cd" providerId="LiveId" clId="{6DEDCE68-9D2E-4C8C-9998-BD219A3A306C}" dt="2026-01-12T23:44:52.868" v="25" actId="1076"/>
-          <ac:spMkLst>
-            <pc:docMk/>
-            <pc:sldMk cId="715583163" sldId="260"/>
-            <ac:spMk id="13" creationId="{7AA2B855-2056-48DF-9D60-BEE7D8C7926B}"/>
-          </ac:spMkLst>
-        </pc:spChg>
-        <pc:spChg chg="mod">
-          <ac:chgData name="Daniel Bauman" userId="b4990c641f0077cd" providerId="LiveId" clId="{6DEDCE68-9D2E-4C8C-9998-BD219A3A306C}" dt="2026-01-12T23:41:23.086" v="1" actId="165"/>
-          <ac:spMkLst>
-            <pc:docMk/>
-            <pc:sldMk cId="715583163" sldId="260"/>
-            <ac:spMk id="14" creationId="{3A356DFD-3A87-4F91-5BF8-9E9B345C5E20}"/>
-          </ac:spMkLst>
-        </pc:spChg>
-        <pc:spChg chg="mod topLvl">
-          <ac:chgData name="Daniel Bauman" userId="b4990c641f0077cd" providerId="LiveId" clId="{6DEDCE68-9D2E-4C8C-9998-BD219A3A306C}" dt="2026-01-12T23:44:04.012" v="18" actId="165"/>
-          <ac:spMkLst>
-            <pc:docMk/>
-            <pc:sldMk cId="715583163" sldId="260"/>
-            <ac:spMk id="26" creationId="{B9A0EBEB-47B0-7D39-8CA9-27B257903C29}"/>
-          </ac:spMkLst>
-        </pc:spChg>
-        <pc:spChg chg="mod topLvl">
-          <ac:chgData name="Daniel Bauman" userId="b4990c641f0077cd" providerId="LiveId" clId="{6DEDCE68-9D2E-4C8C-9998-BD219A3A306C}" dt="2026-01-12T23:44:31.851" v="21" actId="1076"/>
-          <ac:spMkLst>
-            <pc:docMk/>
-            <pc:sldMk cId="715583163" sldId="260"/>
-            <ac:spMk id="29" creationId="{547BEB6C-EE52-CC9C-D1F3-E3F3FA0642E6}"/>
-          </ac:spMkLst>
-        </pc:spChg>
-        <pc:spChg chg="mod topLvl">
-          <ac:chgData name="Daniel Bauman" userId="b4990c641f0077cd" providerId="LiveId" clId="{6DEDCE68-9D2E-4C8C-9998-BD219A3A306C}" dt="2026-01-12T23:44:38.280" v="23" actId="1076"/>
-          <ac:spMkLst>
-            <pc:docMk/>
-            <pc:sldMk cId="715583163" sldId="260"/>
-            <ac:spMk id="30" creationId="{8DDB0A1D-F023-A82B-436B-D32F9C4BD5CD}"/>
-          </ac:spMkLst>
-        </pc:spChg>
-        <pc:spChg chg="mod topLvl">
-          <ac:chgData name="Daniel Bauman" userId="b4990c641f0077cd" providerId="LiveId" clId="{6DEDCE68-9D2E-4C8C-9998-BD219A3A306C}" dt="2026-01-12T23:44:04.012" v="18" actId="165"/>
-          <ac:spMkLst>
-            <pc:docMk/>
-            <pc:sldMk cId="715583163" sldId="260"/>
-            <ac:spMk id="31" creationId="{4E100D77-514E-1935-0D7D-672B75F2B065}"/>
-          </ac:spMkLst>
-        </pc:spChg>
-        <pc:spChg chg="mod topLvl">
-          <ac:chgData name="Daniel Bauman" userId="b4990c641f0077cd" providerId="LiveId" clId="{6DEDCE68-9D2E-4C8C-9998-BD219A3A306C}" dt="2026-01-12T23:44:14.205" v="19" actId="165"/>
-          <ac:spMkLst>
-            <pc:docMk/>
-            <pc:sldMk cId="715583163" sldId="260"/>
-            <ac:spMk id="35" creationId="{CA2D1237-B5BF-3A0B-D470-B07DB1A5D0E0}"/>
-          </ac:spMkLst>
-        </pc:spChg>
-        <pc:spChg chg="mod topLvl">
-          <ac:chgData name="Daniel Bauman" userId="b4990c641f0077cd" providerId="LiveId" clId="{6DEDCE68-9D2E-4C8C-9998-BD219A3A306C}" dt="2026-01-12T23:44:14.205" v="19" actId="165"/>
-          <ac:spMkLst>
-            <pc:docMk/>
-            <pc:sldMk cId="715583163" sldId="260"/>
-            <ac:spMk id="36" creationId="{A8CD67A0-B1FB-4B3F-8F26-1586B6AC956A}"/>
-          </ac:spMkLst>
-        </pc:spChg>
-        <pc:spChg chg="mod topLvl">
-          <ac:chgData name="Daniel Bauman" userId="b4990c641f0077cd" providerId="LiveId" clId="{6DEDCE68-9D2E-4C8C-9998-BD219A3A306C}" dt="2026-01-12T23:44:14.205" v="19" actId="165"/>
-          <ac:spMkLst>
-            <pc:docMk/>
-            <pc:sldMk cId="715583163" sldId="260"/>
-            <ac:spMk id="37" creationId="{6FFE2F3B-C823-76AC-F2C9-25EDDDC1D8F1}"/>
-          </ac:spMkLst>
-        </pc:spChg>
-        <pc:spChg chg="mod topLvl">
-          <ac:chgData name="Daniel Bauman" userId="b4990c641f0077cd" providerId="LiveId" clId="{6DEDCE68-9D2E-4C8C-9998-BD219A3A306C}" dt="2026-01-12T23:41:32.776" v="3" actId="1076"/>
-          <ac:spMkLst>
-            <pc:docMk/>
-            <pc:sldMk cId="715583163" sldId="260"/>
-            <ac:spMk id="40" creationId="{8A63B8F0-8B51-EFE7-9FE6-1896D70B681A}"/>
-          </ac:spMkLst>
-        </pc:spChg>
-        <pc:spChg chg="mod topLvl">
-          <ac:chgData name="Daniel Bauman" userId="b4990c641f0077cd" providerId="LiveId" clId="{6DEDCE68-9D2E-4C8C-9998-BD219A3A306C}" dt="2026-01-12T23:41:36.519" v="4" actId="1076"/>
-          <ac:spMkLst>
-            <pc:docMk/>
-            <pc:sldMk cId="715583163" sldId="260"/>
-            <ac:spMk id="41" creationId="{E1D776B5-48C5-2B03-7755-CF3C98539935}"/>
-          </ac:spMkLst>
-        </pc:spChg>
-        <pc:spChg chg="mod">
-          <ac:chgData name="Daniel Bauman" userId="b4990c641f0077cd" providerId="LiveId" clId="{6DEDCE68-9D2E-4C8C-9998-BD219A3A306C}" dt="2026-01-12T23:41:41.174" v="5" actId="1076"/>
-          <ac:spMkLst>
-            <pc:docMk/>
-            <pc:sldMk cId="715583163" sldId="260"/>
-            <ac:spMk id="42" creationId="{13423F05-C832-95A2-02BF-481A33B51E09}"/>
-          </ac:spMkLst>
-        </pc:spChg>
-        <pc:spChg chg="mod topLvl">
-          <ac:chgData name="Daniel Bauman" userId="b4990c641f0077cd" providerId="LiveId" clId="{6DEDCE68-9D2E-4C8C-9998-BD219A3A306C}" dt="2026-01-12T23:41:23.086" v="1" actId="165"/>
-          <ac:spMkLst>
-            <pc:docMk/>
-            <pc:sldMk cId="715583163" sldId="260"/>
-            <ac:spMk id="43" creationId="{DB104DAC-DF16-6F8D-C1B0-15544809ED75}"/>
-          </ac:spMkLst>
-        </pc:spChg>
-        <pc:spChg chg="mod topLvl">
-          <ac:chgData name="Daniel Bauman" userId="b4990c641f0077cd" providerId="LiveId" clId="{6DEDCE68-9D2E-4C8C-9998-BD219A3A306C}" dt="2026-01-12T23:41:23.086" v="1" actId="165"/>
-          <ac:spMkLst>
-            <pc:docMk/>
-            <pc:sldMk cId="715583163" sldId="260"/>
-            <ac:spMk id="46" creationId="{6B2D3142-9DF6-1ECF-F829-ED4824C1D9CC}"/>
-          </ac:spMkLst>
-        </pc:spChg>
-        <pc:spChg chg="mod">
-          <ac:chgData name="Daniel Bauman" userId="b4990c641f0077cd" providerId="LiveId" clId="{6DEDCE68-9D2E-4C8C-9998-BD219A3A306C}" dt="2026-01-12T23:42:48.671" v="14" actId="1076"/>
-          <ac:spMkLst>
-            <pc:docMk/>
-            <pc:sldMk cId="715583163" sldId="260"/>
-            <ac:spMk id="47" creationId="{4CA26644-B23F-8405-C671-4FF35A354ECE}"/>
-          </ac:spMkLst>
-        </pc:spChg>
-        <pc:spChg chg="mod topLvl">
-          <ac:chgData name="Daniel Bauman" userId="b4990c641f0077cd" providerId="LiveId" clId="{6DEDCE68-9D2E-4C8C-9998-BD219A3A306C}" dt="2026-01-12T23:41:23.086" v="1" actId="165"/>
-          <ac:spMkLst>
-            <pc:docMk/>
-            <pc:sldMk cId="715583163" sldId="260"/>
-            <ac:spMk id="56" creationId="{56F0C9ED-1882-EA69-F3B1-CE547730C3EE}"/>
-          </ac:spMkLst>
-        </pc:spChg>
-        <pc:spChg chg="mod topLvl">
-          <ac:chgData name="Daniel Bauman" userId="b4990c641f0077cd" providerId="LiveId" clId="{6DEDCE68-9D2E-4C8C-9998-BD219A3A306C}" dt="2026-01-12T23:41:23.086" v="1" actId="165"/>
-          <ac:spMkLst>
-            <pc:docMk/>
-            <pc:sldMk cId="715583163" sldId="260"/>
-            <ac:spMk id="59" creationId="{779D2B87-31F1-BC0C-8F36-7EB9D95784AF}"/>
-          </ac:spMkLst>
-        </pc:spChg>
-        <pc:spChg chg="mod topLvl">
-          <ac:chgData name="Daniel Bauman" userId="b4990c641f0077cd" providerId="LiveId" clId="{6DEDCE68-9D2E-4C8C-9998-BD219A3A306C}" dt="2026-01-12T23:41:23.086" v="1" actId="165"/>
-          <ac:spMkLst>
-            <pc:docMk/>
-            <pc:sldMk cId="715583163" sldId="260"/>
-            <ac:spMk id="62" creationId="{6C84EE0F-2C3B-5118-5CFE-AB599AF16686}"/>
-          </ac:spMkLst>
-        </pc:spChg>
-        <pc:spChg chg="mod topLvl">
-          <ac:chgData name="Daniel Bauman" userId="b4990c641f0077cd" providerId="LiveId" clId="{6DEDCE68-9D2E-4C8C-9998-BD219A3A306C}" dt="2026-01-12T23:41:23.086" v="1" actId="165"/>
-          <ac:spMkLst>
-            <pc:docMk/>
-            <pc:sldMk cId="715583163" sldId="260"/>
-            <ac:spMk id="64" creationId="{001216A3-985C-6AC1-DE92-32C827B04218}"/>
-          </ac:spMkLst>
-        </pc:spChg>
-        <pc:grpChg chg="mod">
-          <ac:chgData name="Daniel Bauman" userId="b4990c641f0077cd" providerId="LiveId" clId="{6DEDCE68-9D2E-4C8C-9998-BD219A3A306C}" dt="2026-01-12T23:43:54.777" v="17" actId="14100"/>
-          <ac:grpSpMkLst>
-            <pc:docMk/>
-            <pc:sldMk cId="715583163" sldId="260"/>
-            <ac:grpSpMk id="15" creationId="{B8117478-55F4-D299-F74F-DA4E7B50B395}"/>
-          </ac:grpSpMkLst>
-        </pc:grpChg>
-        <pc:grpChg chg="mod">
-          <ac:chgData name="Daniel Bauman" userId="b4990c641f0077cd" providerId="LiveId" clId="{6DEDCE68-9D2E-4C8C-9998-BD219A3A306C}" dt="2026-01-12T23:43:54.777" v="17" actId="14100"/>
-          <ac:grpSpMkLst>
-            <pc:docMk/>
-            <pc:sldMk cId="715583163" sldId="260"/>
-            <ac:grpSpMk id="38" creationId="{C074FAD4-F15B-F77B-5884-7A823A2E4F94}"/>
-          </ac:grpSpMkLst>
-        </pc:grpChg>
-        <pc:cxnChg chg="mod topLvl">
-          <ac:chgData name="Daniel Bauman" userId="b4990c641f0077cd" providerId="LiveId" clId="{6DEDCE68-9D2E-4C8C-9998-BD219A3A306C}" dt="2026-01-12T23:44:04.012" v="18" actId="165"/>
-          <ac:cxnSpMkLst>
-            <pc:docMk/>
-            <pc:sldMk cId="715583163" sldId="260"/>
-            <ac:cxnSpMk id="24" creationId="{6983D89C-B472-4A1C-29B6-2171366662AD}"/>
-          </ac:cxnSpMkLst>
-        </pc:cxnChg>
-        <pc:cxnChg chg="mod">
-          <ac:chgData name="Daniel Bauman" userId="b4990c641f0077cd" providerId="LiveId" clId="{6DEDCE68-9D2E-4C8C-9998-BD219A3A306C}" dt="2026-01-12T23:44:35.813" v="22" actId="1076"/>
-          <ac:cxnSpMkLst>
-            <pc:docMk/>
-            <pc:sldMk cId="715583163" sldId="260"/>
-            <ac:cxnSpMk id="27" creationId="{43E9D88B-C81C-EB6A-D91D-772DBC62D46B}"/>
-          </ac:cxnSpMkLst>
-        </pc:cxnChg>
-        <pc:cxnChg chg="mod topLvl">
-          <ac:chgData name="Daniel Bauman" userId="b4990c641f0077cd" providerId="LiveId" clId="{6DEDCE68-9D2E-4C8C-9998-BD219A3A306C}" dt="2026-01-12T23:44:14.205" v="19" actId="165"/>
-          <ac:cxnSpMkLst>
-            <pc:docMk/>
-            <pc:sldMk cId="715583163" sldId="260"/>
-            <ac:cxnSpMk id="33" creationId="{A3AF3716-7977-11C4-39C1-B919A4A03960}"/>
-          </ac:cxnSpMkLst>
-        </pc:cxnChg>
-        <pc:cxnChg chg="mod topLvl">
-          <ac:chgData name="Daniel Bauman" userId="b4990c641f0077cd" providerId="LiveId" clId="{6DEDCE68-9D2E-4C8C-9998-BD219A3A306C}" dt="2026-01-12T23:44:14.205" v="19" actId="165"/>
-          <ac:cxnSpMkLst>
-            <pc:docMk/>
-            <pc:sldMk cId="715583163" sldId="260"/>
-            <ac:cxnSpMk id="34" creationId="{08D1E583-C08A-5B55-4798-7314ED323284}"/>
-          </ac:cxnSpMkLst>
-        </pc:cxnChg>
-      </pc:sldChg>
-      <pc:sldChg chg="addSp delSp modSp new mod">
-        <pc:chgData name="Daniel Bauman" userId="b4990c641f0077cd" providerId="LiveId" clId="{6DEDCE68-9D2E-4C8C-9998-BD219A3A306C}" dt="2026-01-13T00:00:35.081" v="217" actId="1076"/>
-        <pc:sldMkLst>
-          <pc:docMk/>
-          <pc:sldMk cId="4290982170" sldId="261"/>
-        </pc:sldMkLst>
-        <pc:spChg chg="add mod">
-          <ac:chgData name="Daniel Bauman" userId="b4990c641f0077cd" providerId="LiveId" clId="{6DEDCE68-9D2E-4C8C-9998-BD219A3A306C}" dt="2026-01-12T23:58:05.525" v="200" actId="164"/>
-          <ac:spMkLst>
-            <pc:docMk/>
-            <pc:sldMk cId="4290982170" sldId="261"/>
-            <ac:spMk id="4" creationId="{C9B7B1A1-72EB-8BCA-0D7C-77B1073DF71B}"/>
-          </ac:spMkLst>
-        </pc:spChg>
-        <pc:spChg chg="add mod">
-          <ac:chgData name="Daniel Bauman" userId="b4990c641f0077cd" providerId="LiveId" clId="{6DEDCE68-9D2E-4C8C-9998-BD219A3A306C}" dt="2026-01-12T23:58:05.525" v="200" actId="164"/>
-          <ac:spMkLst>
-            <pc:docMk/>
-            <pc:sldMk cId="4290982170" sldId="261"/>
-            <ac:spMk id="12" creationId="{F5F802EE-7CCF-BF99-DDD7-61AA40B6E25D}"/>
-          </ac:spMkLst>
-        </pc:spChg>
-        <pc:spChg chg="add mod ord">
-          <ac:chgData name="Daniel Bauman" userId="b4990c641f0077cd" providerId="LiveId" clId="{6DEDCE68-9D2E-4C8C-9998-BD219A3A306C}" dt="2026-01-12T23:58:05.525" v="200" actId="164"/>
-          <ac:spMkLst>
-            <pc:docMk/>
-            <pc:sldMk cId="4290982170" sldId="261"/>
-            <ac:spMk id="13" creationId="{203EC756-43D9-A6BE-601A-707126A769B8}"/>
-          </ac:spMkLst>
-        </pc:spChg>
-        <pc:spChg chg="add mod">
-          <ac:chgData name="Daniel Bauman" userId="b4990c641f0077cd" providerId="LiveId" clId="{6DEDCE68-9D2E-4C8C-9998-BD219A3A306C}" dt="2026-01-12T23:58:05.525" v="200" actId="164"/>
-          <ac:spMkLst>
-            <pc:docMk/>
-            <pc:sldMk cId="4290982170" sldId="261"/>
-            <ac:spMk id="14" creationId="{9AB5D0BC-9C04-7420-6A34-80330E9B713C}"/>
-          </ac:spMkLst>
-        </pc:spChg>
-        <pc:spChg chg="add mod ord">
-          <ac:chgData name="Daniel Bauman" userId="b4990c641f0077cd" providerId="LiveId" clId="{6DEDCE68-9D2E-4C8C-9998-BD219A3A306C}" dt="2026-01-12T23:58:05.525" v="200" actId="164"/>
-          <ac:spMkLst>
-            <pc:docMk/>
-            <pc:sldMk cId="4290982170" sldId="261"/>
-            <ac:spMk id="15" creationId="{67FDEF06-A581-9B69-6B94-8DA788EE3BB0}"/>
-          </ac:spMkLst>
-        </pc:spChg>
-        <pc:spChg chg="add mod">
-          <ac:chgData name="Daniel Bauman" userId="b4990c641f0077cd" providerId="LiveId" clId="{6DEDCE68-9D2E-4C8C-9998-BD219A3A306C}" dt="2026-01-12T23:58:05.525" v="200" actId="164"/>
-          <ac:spMkLst>
-            <pc:docMk/>
-            <pc:sldMk cId="4290982170" sldId="261"/>
-            <ac:spMk id="33" creationId="{E19917B3-CD2E-E00A-259B-FAD245217231}"/>
-          </ac:spMkLst>
-        </pc:spChg>
-        <pc:spChg chg="add mod">
-          <ac:chgData name="Daniel Bauman" userId="b4990c641f0077cd" providerId="LiveId" clId="{6DEDCE68-9D2E-4C8C-9998-BD219A3A306C}" dt="2026-01-12T23:58:05.525" v="200" actId="164"/>
-          <ac:spMkLst>
-            <pc:docMk/>
-            <pc:sldMk cId="4290982170" sldId="261"/>
-            <ac:spMk id="34" creationId="{6EA17E5F-A0B3-397E-FCAB-D25CB8BEDAD7}"/>
-          </ac:spMkLst>
-        </pc:spChg>
-        <pc:spChg chg="add mod">
-          <ac:chgData name="Daniel Bauman" userId="b4990c641f0077cd" providerId="LiveId" clId="{6DEDCE68-9D2E-4C8C-9998-BD219A3A306C}" dt="2026-01-12T23:58:05.525" v="200" actId="164"/>
-          <ac:spMkLst>
-            <pc:docMk/>
-            <pc:sldMk cId="4290982170" sldId="261"/>
-            <ac:spMk id="36" creationId="{E41D58EC-4340-1563-3598-9E89D1941F35}"/>
-          </ac:spMkLst>
-        </pc:spChg>
-        <pc:spChg chg="add mod">
-          <ac:chgData name="Daniel Bauman" userId="b4990c641f0077cd" providerId="LiveId" clId="{6DEDCE68-9D2E-4C8C-9998-BD219A3A306C}" dt="2026-01-12T23:58:05.525" v="200" actId="164"/>
-          <ac:spMkLst>
-            <pc:docMk/>
-            <pc:sldMk cId="4290982170" sldId="261"/>
-            <ac:spMk id="40" creationId="{FD564555-866E-6A12-4D59-B4DB116D735B}"/>
-          </ac:spMkLst>
-        </pc:spChg>
-        <pc:spChg chg="add mod">
-          <ac:chgData name="Daniel Bauman" userId="b4990c641f0077cd" providerId="LiveId" clId="{6DEDCE68-9D2E-4C8C-9998-BD219A3A306C}" dt="2026-01-12T23:57:57.420" v="199" actId="164"/>
-          <ac:spMkLst>
-            <pc:docMk/>
-            <pc:sldMk cId="4290982170" sldId="261"/>
-            <ac:spMk id="42" creationId="{A860037B-6C94-0ED9-753A-E1E1DC1D9D39}"/>
-          </ac:spMkLst>
-        </pc:spChg>
-        <pc:spChg chg="add mod">
-          <ac:chgData name="Daniel Bauman" userId="b4990c641f0077cd" providerId="LiveId" clId="{6DEDCE68-9D2E-4C8C-9998-BD219A3A306C}" dt="2026-01-12T23:57:57.420" v="199" actId="164"/>
-          <ac:spMkLst>
-            <pc:docMk/>
-            <pc:sldMk cId="4290982170" sldId="261"/>
-            <ac:spMk id="47" creationId="{127C1DC0-90AC-C245-1337-2484E69E7BF2}"/>
-          </ac:spMkLst>
-        </pc:spChg>
-        <pc:spChg chg="add mod">
-          <ac:chgData name="Daniel Bauman" userId="b4990c641f0077cd" providerId="LiveId" clId="{6DEDCE68-9D2E-4C8C-9998-BD219A3A306C}" dt="2026-01-12T23:57:57.420" v="199" actId="164"/>
-          <ac:spMkLst>
-            <pc:docMk/>
-            <pc:sldMk cId="4290982170" sldId="261"/>
-            <ac:spMk id="51" creationId="{3AA8DC02-AC99-E77F-3A1D-FBCA35C27AF0}"/>
-          </ac:spMkLst>
-        </pc:spChg>
-        <pc:spChg chg="add mod">
-          <ac:chgData name="Daniel Bauman" userId="b4990c641f0077cd" providerId="LiveId" clId="{6DEDCE68-9D2E-4C8C-9998-BD219A3A306C}" dt="2026-01-12T23:57:57.420" v="199" actId="164"/>
-          <ac:spMkLst>
-            <pc:docMk/>
-            <pc:sldMk cId="4290982170" sldId="261"/>
-            <ac:spMk id="52" creationId="{5B48E297-3142-9B6F-A97E-67106C2AE1FA}"/>
-          </ac:spMkLst>
-        </pc:spChg>
-        <pc:spChg chg="add mod">
-          <ac:chgData name="Daniel Bauman" userId="b4990c641f0077cd" providerId="LiveId" clId="{6DEDCE68-9D2E-4C8C-9998-BD219A3A306C}" dt="2026-01-12T23:57:57.420" v="199" actId="164"/>
-          <ac:spMkLst>
-            <pc:docMk/>
-            <pc:sldMk cId="4290982170" sldId="261"/>
-            <ac:spMk id="54" creationId="{1BC92B10-973E-CA10-4D81-427557084780}"/>
-          </ac:spMkLst>
-        </pc:spChg>
-        <pc:spChg chg="add mod">
-          <ac:chgData name="Daniel Bauman" userId="b4990c641f0077cd" providerId="LiveId" clId="{6DEDCE68-9D2E-4C8C-9998-BD219A3A306C}" dt="2026-01-12T23:57:57.420" v="199" actId="164"/>
-          <ac:spMkLst>
-            <pc:docMk/>
-            <pc:sldMk cId="4290982170" sldId="261"/>
-            <ac:spMk id="55" creationId="{042F27CF-D4C4-9CE0-45A5-C1AE26F6501D}"/>
-          </ac:spMkLst>
-        </pc:spChg>
-        <pc:spChg chg="add mod">
-          <ac:chgData name="Daniel Bauman" userId="b4990c641f0077cd" providerId="LiveId" clId="{6DEDCE68-9D2E-4C8C-9998-BD219A3A306C}" dt="2026-01-12T23:57:57.420" v="199" actId="164"/>
-          <ac:spMkLst>
-            <pc:docMk/>
-            <pc:sldMk cId="4290982170" sldId="261"/>
-            <ac:spMk id="56" creationId="{24A7858D-D176-7CBE-EB6A-6A7A8CD5FD24}"/>
-          </ac:spMkLst>
-        </pc:spChg>
-        <pc:spChg chg="add mod">
-          <ac:chgData name="Daniel Bauman" userId="b4990c641f0077cd" providerId="LiveId" clId="{6DEDCE68-9D2E-4C8C-9998-BD219A3A306C}" dt="2026-01-12T23:57:42.634" v="197" actId="164"/>
-          <ac:spMkLst>
-            <pc:docMk/>
-            <pc:sldMk cId="4290982170" sldId="261"/>
-            <ac:spMk id="63" creationId="{6A8A1C72-3E0E-54B4-7AC6-048554049530}"/>
-          </ac:spMkLst>
-        </pc:spChg>
-        <pc:spChg chg="add mod">
-          <ac:chgData name="Daniel Bauman" userId="b4990c641f0077cd" providerId="LiveId" clId="{6DEDCE68-9D2E-4C8C-9998-BD219A3A306C}" dt="2026-01-12T23:57:42.634" v="197" actId="164"/>
-          <ac:spMkLst>
-            <pc:docMk/>
-            <pc:sldMk cId="4290982170" sldId="261"/>
-            <ac:spMk id="64" creationId="{2F05083E-6B91-2D2A-9845-8C16AF5D8217}"/>
-          </ac:spMkLst>
-        </pc:spChg>
-        <pc:spChg chg="add mod">
-          <ac:chgData name="Daniel Bauman" userId="b4990c641f0077cd" providerId="LiveId" clId="{6DEDCE68-9D2E-4C8C-9998-BD219A3A306C}" dt="2026-01-12T23:57:42.634" v="197" actId="164"/>
-          <ac:spMkLst>
-            <pc:docMk/>
-            <pc:sldMk cId="4290982170" sldId="261"/>
-            <ac:spMk id="66" creationId="{6149F712-0674-9680-8C3A-14CEA6BF1D85}"/>
-          </ac:spMkLst>
-        </pc:spChg>
-        <pc:spChg chg="add mod">
-          <ac:chgData name="Daniel Bauman" userId="b4990c641f0077cd" providerId="LiveId" clId="{6DEDCE68-9D2E-4C8C-9998-BD219A3A306C}" dt="2026-01-12T23:57:42.634" v="197" actId="164"/>
-          <ac:spMkLst>
-            <pc:docMk/>
-            <pc:sldMk cId="4290982170" sldId="261"/>
-            <ac:spMk id="67" creationId="{86A1FE2B-FA75-FA0B-4F32-F343EDF91172}"/>
-          </ac:spMkLst>
-        </pc:spChg>
-        <pc:spChg chg="add mod">
-          <ac:chgData name="Daniel Bauman" userId="b4990c641f0077cd" providerId="LiveId" clId="{6DEDCE68-9D2E-4C8C-9998-BD219A3A306C}" dt="2026-01-12T23:57:42.634" v="197" actId="164"/>
-          <ac:spMkLst>
-            <pc:docMk/>
-            <pc:sldMk cId="4290982170" sldId="261"/>
-            <ac:spMk id="68" creationId="{6EA890EA-51B4-3843-D851-78DDCEF59FF8}"/>
-          </ac:spMkLst>
-        </pc:spChg>
-        <pc:spChg chg="add mod">
-          <ac:chgData name="Daniel Bauman" userId="b4990c641f0077cd" providerId="LiveId" clId="{6DEDCE68-9D2E-4C8C-9998-BD219A3A306C}" dt="2026-01-12T23:57:48.357" v="198" actId="164"/>
-          <ac:spMkLst>
-            <pc:docMk/>
-            <pc:sldMk cId="4290982170" sldId="261"/>
-            <ac:spMk id="70" creationId="{A02130FE-CE03-74AC-196C-3904DB72F796}"/>
-          </ac:spMkLst>
-        </pc:spChg>
-        <pc:spChg chg="add mod">
-          <ac:chgData name="Daniel Bauman" userId="b4990c641f0077cd" providerId="LiveId" clId="{6DEDCE68-9D2E-4C8C-9998-BD219A3A306C}" dt="2026-01-12T23:57:48.357" v="198" actId="164"/>
-          <ac:spMkLst>
-            <pc:docMk/>
-            <pc:sldMk cId="4290982170" sldId="261"/>
-            <ac:spMk id="71" creationId="{2BF028DE-22B9-F788-7624-328CA5B9EC2D}"/>
-          </ac:spMkLst>
-        </pc:spChg>
-        <pc:spChg chg="add mod">
-          <ac:chgData name="Daniel Bauman" userId="b4990c641f0077cd" providerId="LiveId" clId="{6DEDCE68-9D2E-4C8C-9998-BD219A3A306C}" dt="2026-01-12T23:57:48.357" v="198" actId="164"/>
-          <ac:spMkLst>
-            <pc:docMk/>
-            <pc:sldMk cId="4290982170" sldId="261"/>
-            <ac:spMk id="73" creationId="{F2927191-C52F-8E62-B001-2F2371444795}"/>
-          </ac:spMkLst>
-        </pc:spChg>
-        <pc:spChg chg="add mod">
-          <ac:chgData name="Daniel Bauman" userId="b4990c641f0077cd" providerId="LiveId" clId="{6DEDCE68-9D2E-4C8C-9998-BD219A3A306C}" dt="2026-01-12T23:59:56.677" v="213" actId="1076"/>
-          <ac:spMkLst>
-            <pc:docMk/>
-            <pc:sldMk cId="4290982170" sldId="261"/>
-            <ac:spMk id="83" creationId="{B07D8358-866E-7DC8-F5B2-32CF9C1AF490}"/>
-          </ac:spMkLst>
-        </pc:spChg>
-        <pc:spChg chg="add mod">
-          <ac:chgData name="Daniel Bauman" userId="b4990c641f0077cd" providerId="LiveId" clId="{6DEDCE68-9D2E-4C8C-9998-BD219A3A306C}" dt="2026-01-13T00:00:25.175" v="215" actId="1076"/>
-          <ac:spMkLst>
-            <pc:docMk/>
-            <pc:sldMk cId="4290982170" sldId="261"/>
-            <ac:spMk id="84" creationId="{6BE82CC7-4671-5EE1-0972-A9ECE609321A}"/>
-          </ac:spMkLst>
-        </pc:spChg>
-        <pc:spChg chg="add mod">
-          <ac:chgData name="Daniel Bauman" userId="b4990c641f0077cd" providerId="LiveId" clId="{6DEDCE68-9D2E-4C8C-9998-BD219A3A306C}" dt="2026-01-13T00:00:30.320" v="216" actId="1076"/>
-          <ac:spMkLst>
-            <pc:docMk/>
-            <pc:sldMk cId="4290982170" sldId="261"/>
-            <ac:spMk id="86" creationId="{6929A6C2-C445-45E1-FCC2-9C0CF8234D63}"/>
-          </ac:spMkLst>
-        </pc:spChg>
-        <pc:spChg chg="add mod">
-          <ac:chgData name="Daniel Bauman" userId="b4990c641f0077cd" providerId="LiveId" clId="{6DEDCE68-9D2E-4C8C-9998-BD219A3A306C}" dt="2026-01-13T00:00:35.081" v="217" actId="1076"/>
-          <ac:spMkLst>
-            <pc:docMk/>
-            <pc:sldMk cId="4290982170" sldId="261"/>
-            <ac:spMk id="87" creationId="{C707C6BA-B5FE-CB8A-8CD2-03AD32883661}"/>
-          </ac:spMkLst>
-        </pc:spChg>
-        <pc:spChg chg="add mod">
-          <ac:chgData name="Daniel Bauman" userId="b4990c641f0077cd" providerId="LiveId" clId="{6DEDCE68-9D2E-4C8C-9998-BD219A3A306C}" dt="2026-01-13T00:00:13.475" v="214"/>
-          <ac:spMkLst>
-            <pc:docMk/>
-            <pc:sldMk cId="4290982170" sldId="261"/>
-            <ac:spMk id="89" creationId="{26340BBC-FE5F-7DE1-414A-F265C3EEDC8C}"/>
-          </ac:spMkLst>
-        </pc:spChg>
-        <pc:spChg chg="add mod">
-          <ac:chgData name="Daniel Bauman" userId="b4990c641f0077cd" providerId="LiveId" clId="{6DEDCE68-9D2E-4C8C-9998-BD219A3A306C}" dt="2026-01-13T00:00:13.475" v="214"/>
-          <ac:spMkLst>
-            <pc:docMk/>
-            <pc:sldMk cId="4290982170" sldId="261"/>
-            <ac:spMk id="90" creationId="{5BBE4C97-FA8B-EC42-A2A1-777C18B1FAD4}"/>
-          </ac:spMkLst>
-        </pc:spChg>
-        <pc:spChg chg="add mod">
-          <ac:chgData name="Daniel Bauman" userId="b4990c641f0077cd" providerId="LiveId" clId="{6DEDCE68-9D2E-4C8C-9998-BD219A3A306C}" dt="2026-01-13T00:00:13.475" v="214"/>
-          <ac:spMkLst>
-            <pc:docMk/>
-            <pc:sldMk cId="4290982170" sldId="261"/>
-            <ac:spMk id="91" creationId="{AF729F03-4974-45E9-EF85-E162DA1E82CB}"/>
-          </ac:spMkLst>
-        </pc:spChg>
-        <pc:spChg chg="add mod">
-          <ac:chgData name="Daniel Bauman" userId="b4990c641f0077cd" providerId="LiveId" clId="{6DEDCE68-9D2E-4C8C-9998-BD219A3A306C}" dt="2026-01-13T00:00:13.475" v="214"/>
-          <ac:spMkLst>
-            <pc:docMk/>
-            <pc:sldMk cId="4290982170" sldId="261"/>
-            <ac:spMk id="93" creationId="{56C035A7-43E7-4B8C-8D4F-31B68BF7AA79}"/>
-          </ac:spMkLst>
-        </pc:spChg>
-        <pc:spChg chg="add mod">
-          <ac:chgData name="Daniel Bauman" userId="b4990c641f0077cd" providerId="LiveId" clId="{6DEDCE68-9D2E-4C8C-9998-BD219A3A306C}" dt="2026-01-13T00:00:13.475" v="214"/>
-          <ac:spMkLst>
-            <pc:docMk/>
-            <pc:sldMk cId="4290982170" sldId="261"/>
-            <ac:spMk id="94" creationId="{F4C50C96-71B9-FF1F-B1E0-D372887C4A73}"/>
-          </ac:spMkLst>
-        </pc:spChg>
-        <pc:spChg chg="add mod">
-          <ac:chgData name="Daniel Bauman" userId="b4990c641f0077cd" providerId="LiveId" clId="{6DEDCE68-9D2E-4C8C-9998-BD219A3A306C}" dt="2026-01-13T00:00:13.475" v="214"/>
-          <ac:spMkLst>
-            <pc:docMk/>
-            <pc:sldMk cId="4290982170" sldId="261"/>
-            <ac:spMk id="95" creationId="{976DB453-863C-64B8-7B1F-5EB73935D0B6}"/>
-          </ac:spMkLst>
-        </pc:spChg>
-        <pc:spChg chg="add mod">
-          <ac:chgData name="Daniel Bauman" userId="b4990c641f0077cd" providerId="LiveId" clId="{6DEDCE68-9D2E-4C8C-9998-BD219A3A306C}" dt="2026-01-13T00:00:13.475" v="214"/>
-          <ac:spMkLst>
-            <pc:docMk/>
-            <pc:sldMk cId="4290982170" sldId="261"/>
-            <ac:spMk id="96" creationId="{A33BBE18-B1F2-F457-EE5C-7DD08EC5C8F5}"/>
-          </ac:spMkLst>
-        </pc:spChg>
-        <pc:grpChg chg="add mod">
-          <ac:chgData name="Daniel Bauman" userId="b4990c641f0077cd" providerId="LiveId" clId="{6DEDCE68-9D2E-4C8C-9998-BD219A3A306C}" dt="2026-01-12T23:58:28.258" v="201" actId="1076"/>
-          <ac:grpSpMkLst>
-            <pc:docMk/>
-            <pc:sldMk cId="4290982170" sldId="261"/>
-            <ac:grpSpMk id="77" creationId="{A40865E8-2062-B697-DB3F-572D44B21173}"/>
-          </ac:grpSpMkLst>
-        </pc:grpChg>
-        <pc:grpChg chg="add mod">
-          <ac:chgData name="Daniel Bauman" userId="b4990c641f0077cd" providerId="LiveId" clId="{6DEDCE68-9D2E-4C8C-9998-BD219A3A306C}" dt="2026-01-12T23:57:48.357" v="198" actId="164"/>
-          <ac:grpSpMkLst>
-            <pc:docMk/>
-            <pc:sldMk cId="4290982170" sldId="261"/>
-            <ac:grpSpMk id="78" creationId="{ABE1DED3-E515-C5AD-4ACC-1FA7BC56E767}"/>
-          </ac:grpSpMkLst>
-        </pc:grpChg>
-        <pc:grpChg chg="add mod">
-          <ac:chgData name="Daniel Bauman" userId="b4990c641f0077cd" providerId="LiveId" clId="{6DEDCE68-9D2E-4C8C-9998-BD219A3A306C}" dt="2026-01-12T23:59:00.327" v="204" actId="1076"/>
-          <ac:grpSpMkLst>
-            <pc:docMk/>
-            <pc:sldMk cId="4290982170" sldId="261"/>
-            <ac:grpSpMk id="79" creationId="{8DA2FEA8-BE6B-424C-A97C-00DC9E4DF1D7}"/>
-          </ac:grpSpMkLst>
-        </pc:grpChg>
-        <pc:grpChg chg="add mod">
-          <ac:chgData name="Daniel Bauman" userId="b4990c641f0077cd" providerId="LiveId" clId="{6DEDCE68-9D2E-4C8C-9998-BD219A3A306C}" dt="2026-01-12T23:58:52.921" v="203" actId="1076"/>
-          <ac:grpSpMkLst>
-            <pc:docMk/>
-            <pc:sldMk cId="4290982170" sldId="261"/>
-            <ac:grpSpMk id="80" creationId="{8132106A-80F7-0774-A926-3CEE4C922F40}"/>
-          </ac:grpSpMkLst>
-        </pc:grpChg>
-        <pc:cxnChg chg="mod">
-          <ac:chgData name="Daniel Bauman" userId="b4990c641f0077cd" providerId="LiveId" clId="{6DEDCE68-9D2E-4C8C-9998-BD219A3A306C}" dt="2026-01-12T23:48:08.715" v="61" actId="1076"/>
-          <ac:cxnSpMkLst>
-            <pc:docMk/>
-            <pc:sldMk cId="4290982170" sldId="261"/>
-            <ac:cxnSpMk id="3" creationId="{1D2B7D95-6CB6-63B8-E541-EC4FE3D469C4}"/>
-          </ac:cxnSpMkLst>
-        </pc:cxnChg>
-        <pc:cxnChg chg="add mod">
-          <ac:chgData name="Daniel Bauman" userId="b4990c641f0077cd" providerId="LiveId" clId="{6DEDCE68-9D2E-4C8C-9998-BD219A3A306C}" dt="2026-01-12T23:54:01.097" v="158" actId="1076"/>
-          <ac:cxnSpMkLst>
-            <pc:docMk/>
-            <pc:sldMk cId="4290982170" sldId="261"/>
-            <ac:cxnSpMk id="11" creationId="{D8CE16D1-3F5D-B8AD-BE92-337A39F80FAF}"/>
-          </ac:cxnSpMkLst>
-        </pc:cxnChg>
-        <pc:cxnChg chg="add mod">
-          <ac:chgData name="Daniel Bauman" userId="b4990c641f0077cd" providerId="LiveId" clId="{6DEDCE68-9D2E-4C8C-9998-BD219A3A306C}" dt="2026-01-12T23:51:42.253" v="132" actId="14100"/>
-          <ac:cxnSpMkLst>
-            <pc:docMk/>
-            <pc:sldMk cId="4290982170" sldId="261"/>
-            <ac:cxnSpMk id="19" creationId="{B7EF9838-E95B-1AE9-444B-E2DCEB80CEEE}"/>
-          </ac:cxnSpMkLst>
-        </pc:cxnChg>
-        <pc:cxnChg chg="add mod">
-          <ac:chgData name="Daniel Bauman" userId="b4990c641f0077cd" providerId="LiveId" clId="{6DEDCE68-9D2E-4C8C-9998-BD219A3A306C}" dt="2026-01-12T23:53:01.423" v="146" actId="1076"/>
-          <ac:cxnSpMkLst>
-            <pc:docMk/>
-            <pc:sldMk cId="4290982170" sldId="261"/>
-            <ac:cxnSpMk id="21" creationId="{AF5F2555-2855-A88A-C78A-E3BEE533F67A}"/>
-          </ac:cxnSpMkLst>
-        </pc:cxnChg>
-        <pc:cxnChg chg="add mod">
-          <ac:chgData name="Daniel Bauman" userId="b4990c641f0077cd" providerId="LiveId" clId="{6DEDCE68-9D2E-4C8C-9998-BD219A3A306C}" dt="2026-01-12T23:53:33.554" v="152" actId="14100"/>
-          <ac:cxnSpMkLst>
-            <pc:docMk/>
-            <pc:sldMk cId="4290982170" sldId="261"/>
-            <ac:cxnSpMk id="28" creationId="{8BF16D13-C5E3-22F5-681F-43DD3AF41A98}"/>
-          </ac:cxnSpMkLst>
-        </pc:cxnChg>
-        <pc:cxnChg chg="add mod">
-          <ac:chgData name="Daniel Bauman" userId="b4990c641f0077cd" providerId="LiveId" clId="{6DEDCE68-9D2E-4C8C-9998-BD219A3A306C}" dt="2026-01-12T23:52:44.487" v="141" actId="1076"/>
-          <ac:cxnSpMkLst>
-            <pc:docMk/>
-            <pc:sldMk cId="4290982170" sldId="261"/>
-            <ac:cxnSpMk id="32" creationId="{533CA66A-1F64-75DF-6534-41CFE4E064A7}"/>
-          </ac:cxnSpMkLst>
-        </pc:cxnChg>
-        <pc:cxnChg chg="add mod">
-          <ac:chgData name="Daniel Bauman" userId="b4990c641f0077cd" providerId="LiveId" clId="{6DEDCE68-9D2E-4C8C-9998-BD219A3A306C}" dt="2026-01-12T23:52:44.487" v="141" actId="1076"/>
-          <ac:cxnSpMkLst>
-            <pc:docMk/>
-            <pc:sldMk cId="4290982170" sldId="261"/>
-            <ac:cxnSpMk id="35" creationId="{FFB0913D-B48C-84A4-1F6E-9497D390B461}"/>
-          </ac:cxnSpMkLst>
-        </pc:cxnChg>
-        <pc:cxnChg chg="mod">
-          <ac:chgData name="Daniel Bauman" userId="b4990c641f0077cd" providerId="LiveId" clId="{6DEDCE68-9D2E-4C8C-9998-BD219A3A306C}" dt="2026-01-12T23:55:30.528" v="175" actId="14100"/>
-          <ac:cxnSpMkLst>
-            <pc:docMk/>
-            <pc:sldMk cId="4290982170" sldId="261"/>
-            <ac:cxnSpMk id="41" creationId="{3528B99B-A1B3-FDCE-EEFB-AAD81A7A34A7}"/>
-          </ac:cxnSpMkLst>
-        </pc:cxnChg>
-        <pc:cxnChg chg="mod">
-          <ac:chgData name="Daniel Bauman" userId="b4990c641f0077cd" providerId="LiveId" clId="{6DEDCE68-9D2E-4C8C-9998-BD219A3A306C}" dt="2026-01-12T23:54:53.917" v="167" actId="14100"/>
-          <ac:cxnSpMkLst>
-            <pc:docMk/>
-            <pc:sldMk cId="4290982170" sldId="261"/>
-            <ac:cxnSpMk id="48" creationId="{DC086589-EA29-640C-ADFC-28472E6E3DEA}"/>
-          </ac:cxnSpMkLst>
-        </pc:cxnChg>
-        <pc:cxnChg chg="add mod">
-          <ac:chgData name="Daniel Bauman" userId="b4990c641f0077cd" providerId="LiveId" clId="{6DEDCE68-9D2E-4C8C-9998-BD219A3A306C}" dt="2026-01-12T23:57:57.420" v="199" actId="164"/>
-          <ac:cxnSpMkLst>
-            <pc:docMk/>
-            <pc:sldMk cId="4290982170" sldId="261"/>
-            <ac:cxnSpMk id="50" creationId="{FCD34A22-B524-750B-EA7C-F154C5C630B2}"/>
-          </ac:cxnSpMkLst>
-        </pc:cxnChg>
-        <pc:cxnChg chg="mod">
-          <ac:chgData name="Daniel Bauman" userId="b4990c641f0077cd" providerId="LiveId" clId="{6DEDCE68-9D2E-4C8C-9998-BD219A3A306C}" dt="2026-01-12T23:57:57.420" v="199" actId="164"/>
-          <ac:cxnSpMkLst>
-            <pc:docMk/>
-            <pc:sldMk cId="4290982170" sldId="261"/>
-            <ac:cxnSpMk id="53" creationId="{777BB286-CA49-DA39-5381-E1B3CFDFE929}"/>
-          </ac:cxnSpMkLst>
-        </pc:cxnChg>
-        <pc:cxnChg chg="add mod">
-          <ac:chgData name="Daniel Bauman" userId="b4990c641f0077cd" providerId="LiveId" clId="{6DEDCE68-9D2E-4C8C-9998-BD219A3A306C}" dt="2026-01-12T23:57:42.634" v="197" actId="164"/>
-          <ac:cxnSpMkLst>
-            <pc:docMk/>
-            <pc:sldMk cId="4290982170" sldId="261"/>
-            <ac:cxnSpMk id="61" creationId="{D76F8045-4AD8-3F5B-B25B-4F5320B18F53}"/>
-          </ac:cxnSpMkLst>
-        </pc:cxnChg>
-        <pc:cxnChg chg="add mod">
-          <ac:chgData name="Daniel Bauman" userId="b4990c641f0077cd" providerId="LiveId" clId="{6DEDCE68-9D2E-4C8C-9998-BD219A3A306C}" dt="2026-01-12T23:57:42.634" v="197" actId="164"/>
-          <ac:cxnSpMkLst>
-            <pc:docMk/>
-            <pc:sldMk cId="4290982170" sldId="261"/>
-            <ac:cxnSpMk id="62" creationId="{6D72B4B0-E124-7907-13BB-38793C46096A}"/>
-          </ac:cxnSpMkLst>
-        </pc:cxnChg>
-        <pc:cxnChg chg="add mod">
-          <ac:chgData name="Daniel Bauman" userId="b4990c641f0077cd" providerId="LiveId" clId="{6DEDCE68-9D2E-4C8C-9998-BD219A3A306C}" dt="2026-01-12T23:57:42.634" v="197" actId="164"/>
-          <ac:cxnSpMkLst>
-            <pc:docMk/>
-            <pc:sldMk cId="4290982170" sldId="261"/>
-            <ac:cxnSpMk id="65" creationId="{97553787-5605-2085-1221-B795405B7A69}"/>
-          </ac:cxnSpMkLst>
-        </pc:cxnChg>
-        <pc:cxnChg chg="add mod">
-          <ac:chgData name="Daniel Bauman" userId="b4990c641f0077cd" providerId="LiveId" clId="{6DEDCE68-9D2E-4C8C-9998-BD219A3A306C}" dt="2026-01-12T23:57:48.357" v="198" actId="164"/>
-          <ac:cxnSpMkLst>
-            <pc:docMk/>
-            <pc:sldMk cId="4290982170" sldId="261"/>
-            <ac:cxnSpMk id="69" creationId="{ADF802CE-4C04-8DAF-7A7F-063620E625C4}"/>
-          </ac:cxnSpMkLst>
-        </pc:cxnChg>
-        <pc:cxnChg chg="add mod">
-          <ac:chgData name="Daniel Bauman" userId="b4990c641f0077cd" providerId="LiveId" clId="{6DEDCE68-9D2E-4C8C-9998-BD219A3A306C}" dt="2026-01-12T23:57:48.357" v="198" actId="164"/>
-          <ac:cxnSpMkLst>
-            <pc:docMk/>
-            <pc:sldMk cId="4290982170" sldId="261"/>
-            <ac:cxnSpMk id="72" creationId="{B7F66CE9-94DA-9826-EF80-71AD9E456CFA}"/>
-          </ac:cxnSpMkLst>
-        </pc:cxnChg>
-      </pc:sldChg>
-      <pc:sldChg chg="addSp delSp modSp add mod">
-        <pc:chgData name="Daniel Bauman" userId="b4990c641f0077cd" providerId="LiveId" clId="{6DEDCE68-9D2E-4C8C-9998-BD219A3A306C}" dt="2026-01-21T05:25:19.192" v="258" actId="20577"/>
-        <pc:sldMkLst>
-          <pc:docMk/>
-          <pc:sldMk cId="413350594" sldId="262"/>
-        </pc:sldMkLst>
-        <pc:spChg chg="mod">
-          <ac:chgData name="Daniel Bauman" userId="b4990c641f0077cd" providerId="LiveId" clId="{6DEDCE68-9D2E-4C8C-9998-BD219A3A306C}" dt="2026-01-21T05:25:19.192" v="258" actId="20577"/>
-          <ac:spMkLst>
-            <pc:docMk/>
-            <pc:sldMk cId="413350594" sldId="262"/>
-            <ac:spMk id="2" creationId="{707BFED8-B447-57C8-033D-FC0421618995}"/>
-          </ac:spMkLst>
-        </pc:spChg>
-        <pc:spChg chg="mod">
-          <ac:chgData name="Daniel Bauman" userId="b4990c641f0077cd" providerId="LiveId" clId="{6DEDCE68-9D2E-4C8C-9998-BD219A3A306C}" dt="2026-01-21T05:25:14.724" v="254" actId="20577"/>
-          <ac:spMkLst>
-            <pc:docMk/>
-            <pc:sldMk cId="413350594" sldId="262"/>
-            <ac:spMk id="6" creationId="{0D8B1CE7-D220-8B65-BB58-841601A815CD}"/>
-          </ac:spMkLst>
-        </pc:spChg>
-        <pc:spChg chg="mod">
-          <ac:chgData name="Daniel Bauman" userId="b4990c641f0077cd" providerId="LiveId" clId="{6DEDCE68-9D2E-4C8C-9998-BD219A3A306C}" dt="2026-01-13T00:04:08.640" v="244" actId="14100"/>
-          <ac:spMkLst>
-            <pc:docMk/>
-            <pc:sldMk cId="413350594" sldId="262"/>
-            <ac:spMk id="7" creationId="{3B5E4F1E-DA06-D655-6A14-D7BD7557C355}"/>
-          </ac:spMkLst>
-        </pc:spChg>
-        <pc:spChg chg="mod">
-          <ac:chgData name="Daniel Bauman" userId="b4990c641f0077cd" providerId="LiveId" clId="{6DEDCE68-9D2E-4C8C-9998-BD219A3A306C}" dt="2026-01-21T05:25:14.724" v="254" actId="20577"/>
-          <ac:spMkLst>
-            <pc:docMk/>
-            <pc:sldMk cId="413350594" sldId="262"/>
-            <ac:spMk id="8" creationId="{98305963-C95C-8861-CC7C-B30B2C97107F}"/>
-          </ac:spMkLst>
-        </pc:spChg>
-        <pc:spChg chg="mod">
-          <ac:chgData name="Daniel Bauman" userId="b4990c641f0077cd" providerId="LiveId" clId="{6DEDCE68-9D2E-4C8C-9998-BD219A3A306C}" dt="2026-01-21T05:25:19.192" v="258" actId="20577"/>
-          <ac:spMkLst>
-            <pc:docMk/>
-            <pc:sldMk cId="413350594" sldId="262"/>
-            <ac:spMk id="9" creationId="{C70792C5-09B5-9873-0B79-3E67050139AD}"/>
-          </ac:spMkLst>
-        </pc:spChg>
-        <pc:spChg chg="mod">
-          <ac:chgData name="Daniel Bauman" userId="b4990c641f0077cd" providerId="LiveId" clId="{6DEDCE68-9D2E-4C8C-9998-BD219A3A306C}" dt="2026-01-13T00:02:42.286" v="235" actId="13822"/>
-          <ac:spMkLst>
-            <pc:docMk/>
-            <pc:sldMk cId="413350594" sldId="262"/>
-            <ac:spMk id="12" creationId="{F2BD7315-F929-6E45-0773-7A7C6F568C3F}"/>
-          </ac:spMkLst>
-        </pc:spChg>
-        <pc:spChg chg="mod">
-          <ac:chgData name="Daniel Bauman" userId="b4990c641f0077cd" providerId="LiveId" clId="{6DEDCE68-9D2E-4C8C-9998-BD219A3A306C}" dt="2026-01-13T00:02:20.191" v="232" actId="20577"/>
-          <ac:spMkLst>
-            <pc:docMk/>
-            <pc:sldMk cId="413350594" sldId="262"/>
-            <ac:spMk id="18" creationId="{347E8468-80B3-F7B5-C12D-D7599610C986}"/>
-          </ac:spMkLst>
-        </pc:spChg>
-        <pc:spChg chg="mod">
-          <ac:chgData name="Daniel Bauman" userId="b4990c641f0077cd" providerId="LiveId" clId="{6DEDCE68-9D2E-4C8C-9998-BD219A3A306C}" dt="2026-01-21T05:25:19.192" v="258" actId="20577"/>
-          <ac:spMkLst>
-            <pc:docMk/>
-            <pc:sldMk cId="413350594" sldId="262"/>
-            <ac:spMk id="19" creationId="{8DA840A1-D639-D28F-627F-9BEABF3CFA69}"/>
-          </ac:spMkLst>
-        </pc:spChg>
-        <pc:spChg chg="mod">
-          <ac:chgData name="Daniel Bauman" userId="b4990c641f0077cd" providerId="LiveId" clId="{6DEDCE68-9D2E-4C8C-9998-BD219A3A306C}" dt="2026-01-21T05:25:19.192" v="258" actId="20577"/>
-          <ac:spMkLst>
-            <pc:docMk/>
-            <pc:sldMk cId="413350594" sldId="262"/>
-            <ac:spMk id="20" creationId="{E6BF1079-A48A-1B30-354C-39D05B8FCFF4}"/>
-          </ac:spMkLst>
-        </pc:spChg>
-        <pc:spChg chg="mod">
-          <ac:chgData name="Daniel Bauman" userId="b4990c641f0077cd" providerId="LiveId" clId="{6DEDCE68-9D2E-4C8C-9998-BD219A3A306C}" dt="2026-01-13T00:04:00.366" v="242" actId="165"/>
-          <ac:spMkLst>
-            <pc:docMk/>
-            <pc:sldMk cId="413350594" sldId="262"/>
-            <ac:spMk id="29" creationId="{AEDA0048-A047-B629-5440-4DFE39AB33E4}"/>
-          </ac:spMkLst>
-        </pc:spChg>
-        <pc:spChg chg="mod">
-          <ac:chgData name="Daniel Bauman" userId="b4990c641f0077cd" providerId="LiveId" clId="{6DEDCE68-9D2E-4C8C-9998-BD219A3A306C}" dt="2026-01-21T05:25:19.192" v="258" actId="20577"/>
-          <ac:spMkLst>
-            <pc:docMk/>
-            <pc:sldMk cId="413350594" sldId="262"/>
-            <ac:spMk id="30" creationId="{7919ABCD-A4F5-EB3E-9748-95FA57B6B805}"/>
-          </ac:spMkLst>
-        </pc:spChg>
-        <pc:spChg chg="mod">
-          <ac:chgData name="Daniel Bauman" userId="b4990c641f0077cd" providerId="LiveId" clId="{6DEDCE68-9D2E-4C8C-9998-BD219A3A306C}" dt="2026-01-21T05:25:19.192" v="258" actId="20577"/>
-          <ac:spMkLst>
-            <pc:docMk/>
-            <pc:sldMk cId="413350594" sldId="262"/>
-            <ac:spMk id="35" creationId="{83E429E3-E41E-74FD-BF6A-1E5915949BDE}"/>
-          </ac:spMkLst>
-        </pc:spChg>
-        <pc:spChg chg="mod">
-          <ac:chgData name="Daniel Bauman" userId="b4990c641f0077cd" providerId="LiveId" clId="{6DEDCE68-9D2E-4C8C-9998-BD219A3A306C}" dt="2026-01-13T00:04:00.366" v="242" actId="165"/>
-          <ac:spMkLst>
-            <pc:docMk/>
-            <pc:sldMk cId="413350594" sldId="262"/>
-            <ac:spMk id="36" creationId="{5D97F270-07E9-9673-E7BB-12095EFAF862}"/>
-          </ac:spMkLst>
-        </pc:spChg>
-        <pc:spChg chg="mod">
-          <ac:chgData name="Daniel Bauman" userId="b4990c641f0077cd" providerId="LiveId" clId="{6DEDCE68-9D2E-4C8C-9998-BD219A3A306C}" dt="2026-01-13T00:02:31.905" v="233" actId="207"/>
-          <ac:spMkLst>
-            <pc:docMk/>
-            <pc:sldMk cId="413350594" sldId="262"/>
-            <ac:spMk id="37" creationId="{62034F6B-8AAD-8FE7-F44F-B3EF88C92179}"/>
-          </ac:spMkLst>
-        </pc:spChg>
-        <pc:spChg chg="mod">
-          <ac:chgData name="Daniel Bauman" userId="b4990c641f0077cd" providerId="LiveId" clId="{6DEDCE68-9D2E-4C8C-9998-BD219A3A306C}" dt="2026-01-13T00:05:13.283" v="252" actId="164"/>
-          <ac:spMkLst>
-            <pc:docMk/>
-            <pc:sldMk cId="413350594" sldId="262"/>
-            <ac:spMk id="41" creationId="{7D2737DE-6859-4D07-61CE-02DD88CDA143}"/>
-          </ac:spMkLst>
-        </pc:spChg>
-        <pc:spChg chg="mod topLvl">
-          <ac:chgData name="Daniel Bauman" userId="b4990c641f0077cd" providerId="LiveId" clId="{6DEDCE68-9D2E-4C8C-9998-BD219A3A306C}" dt="2026-01-21T05:25:19.192" v="258" actId="20577"/>
-          <ac:spMkLst>
-            <pc:docMk/>
-            <pc:sldMk cId="413350594" sldId="262"/>
-            <ac:spMk id="42" creationId="{1D3FEEF6-E558-8108-B754-667B8C04C2BF}"/>
-          </ac:spMkLst>
-        </pc:spChg>
-        <pc:spChg chg="mod">
-          <ac:chgData name="Daniel Bauman" userId="b4990c641f0077cd" providerId="LiveId" clId="{6DEDCE68-9D2E-4C8C-9998-BD219A3A306C}" dt="2026-01-13T00:04:56.405" v="250" actId="1076"/>
-          <ac:spMkLst>
-            <pc:docMk/>
-            <pc:sldMk cId="413350594" sldId="262"/>
-            <ac:spMk id="46" creationId="{1483317C-3D61-512C-F9A2-43C03D9D8529}"/>
-          </ac:spMkLst>
-        </pc:spChg>
-        <pc:spChg chg="mod topLvl">
-          <ac:chgData name="Daniel Bauman" userId="b4990c641f0077cd" providerId="LiveId" clId="{6DEDCE68-9D2E-4C8C-9998-BD219A3A306C}" dt="2026-01-13T00:05:13.283" v="252" actId="164"/>
-          <ac:spMkLst>
-            <pc:docMk/>
-            <pc:sldMk cId="413350594" sldId="262"/>
-            <ac:spMk id="47" creationId="{40ACB0E9-8D82-D668-68A7-1D1068A40EDA}"/>
-          </ac:spMkLst>
-        </pc:spChg>
-        <pc:spChg chg="mod">
-          <ac:chgData name="Daniel Bauman" userId="b4990c641f0077cd" providerId="LiveId" clId="{6DEDCE68-9D2E-4C8C-9998-BD219A3A306C}" dt="2026-01-21T05:25:14.724" v="254" actId="20577"/>
-          <ac:spMkLst>
-            <pc:docMk/>
-            <pc:sldMk cId="413350594" sldId="262"/>
-            <ac:spMk id="54" creationId="{C928B158-BDBB-465E-A338-D1921C87417A}"/>
-          </ac:spMkLst>
-        </pc:spChg>
-        <pc:spChg chg="mod topLvl">
-          <ac:chgData name="Daniel Bauman" userId="b4990c641f0077cd" providerId="LiveId" clId="{6DEDCE68-9D2E-4C8C-9998-BD219A3A306C}" dt="2026-01-21T05:25:19.192" v="258" actId="20577"/>
-          <ac:spMkLst>
-            <pc:docMk/>
-            <pc:sldMk cId="413350594" sldId="262"/>
-            <ac:spMk id="55" creationId="{46E2F094-45C8-94C5-C786-6B43B277FBC8}"/>
-          </ac:spMkLst>
-        </pc:spChg>
-        <pc:spChg chg="mod">
-          <ac:chgData name="Daniel Bauman" userId="b4990c641f0077cd" providerId="LiveId" clId="{6DEDCE68-9D2E-4C8C-9998-BD219A3A306C}" dt="2026-01-21T05:25:19.192" v="258" actId="20577"/>
-          <ac:spMkLst>
-            <pc:docMk/>
-            <pc:sldMk cId="413350594" sldId="262"/>
-            <ac:spMk id="56" creationId="{D740D595-1F53-C3C5-56D3-24B192CA6023}"/>
-          </ac:spMkLst>
-        </pc:spChg>
-        <pc:spChg chg="mod topLvl">
-          <ac:chgData name="Daniel Bauman" userId="b4990c641f0077cd" providerId="LiveId" clId="{6DEDCE68-9D2E-4C8C-9998-BD219A3A306C}" dt="2026-01-21T05:25:14.724" v="254" actId="20577"/>
-          <ac:spMkLst>
-            <pc:docMk/>
-            <pc:sldMk cId="413350594" sldId="262"/>
-            <ac:spMk id="57" creationId="{E1F7D2D5-4E74-501D-5A75-300C4FEDB18C}"/>
-          </ac:spMkLst>
-        </pc:spChg>
-        <pc:spChg chg="mod">
-          <ac:chgData name="Daniel Bauman" userId="b4990c641f0077cd" providerId="LiveId" clId="{6DEDCE68-9D2E-4C8C-9998-BD219A3A306C}" dt="2026-01-13T00:02:20.191" v="232" actId="20577"/>
-          <ac:spMkLst>
-            <pc:docMk/>
-            <pc:sldMk cId="413350594" sldId="262"/>
-            <ac:spMk id="58" creationId="{074CC74D-8EBC-EA01-9F6F-51C04CB151B0}"/>
-          </ac:spMkLst>
-        </pc:spChg>
-        <pc:spChg chg="mod topLvl">
-          <ac:chgData name="Daniel Bauman" userId="b4990c641f0077cd" providerId="LiveId" clId="{6DEDCE68-9D2E-4C8C-9998-BD219A3A306C}" dt="2026-01-13T00:05:13.283" v="252" actId="164"/>
-          <ac:spMkLst>
-            <pc:docMk/>
-            <pc:sldMk cId="413350594" sldId="262"/>
-            <ac:spMk id="59" creationId="{58A5CF51-62D5-CB61-7452-79F44F904532}"/>
-          </ac:spMkLst>
-        </pc:spChg>
-        <pc:spChg chg="mod">
-          <ac:chgData name="Daniel Bauman" userId="b4990c641f0077cd" providerId="LiveId" clId="{6DEDCE68-9D2E-4C8C-9998-BD219A3A306C}" dt="2026-01-21T05:25:19.192" v="258" actId="20577"/>
-          <ac:spMkLst>
-            <pc:docMk/>
-            <pc:sldMk cId="413350594" sldId="262"/>
-            <ac:spMk id="60" creationId="{60D52E4E-B2F6-805F-CEF3-638EC693F6C2}"/>
-          </ac:spMkLst>
-        </pc:spChg>
-        <pc:spChg chg="mod">
-          <ac:chgData name="Daniel Bauman" userId="b4990c641f0077cd" providerId="LiveId" clId="{6DEDCE68-9D2E-4C8C-9998-BD219A3A306C}" dt="2026-01-21T05:25:14.724" v="254" actId="20577"/>
-          <ac:spMkLst>
-            <pc:docMk/>
-            <pc:sldMk cId="413350594" sldId="262"/>
-            <ac:spMk id="61" creationId="{5FD09119-A486-A2D8-0FD3-3CF9627811D2}"/>
-          </ac:spMkLst>
-        </pc:spChg>
-        <pc:spChg chg="mod">
-          <ac:chgData name="Daniel Bauman" userId="b4990c641f0077cd" providerId="LiveId" clId="{6DEDCE68-9D2E-4C8C-9998-BD219A3A306C}" dt="2026-01-13T00:05:13.283" v="252" actId="164"/>
-          <ac:spMkLst>
-            <pc:docMk/>
-            <pc:sldMk cId="413350594" sldId="262"/>
-            <ac:spMk id="62" creationId="{123AC3B1-2DDE-5672-C3C4-9127DCF567DD}"/>
-          </ac:spMkLst>
-        </pc:spChg>
-        <pc:spChg chg="mod">
-          <ac:chgData name="Daniel Bauman" userId="b4990c641f0077cd" providerId="LiveId" clId="{6DEDCE68-9D2E-4C8C-9998-BD219A3A306C}" dt="2026-01-21T05:25:14.724" v="254" actId="20577"/>
-          <ac:spMkLst>
-            <pc:docMk/>
-            <pc:sldMk cId="413350594" sldId="262"/>
-            <ac:spMk id="63" creationId="{8C6986AF-6113-54B3-4CFE-3D01F217ABC1}"/>
-          </ac:spMkLst>
-        </pc:spChg>
-        <pc:spChg chg="mod topLvl">
-          <ac:chgData name="Daniel Bauman" userId="b4990c641f0077cd" providerId="LiveId" clId="{6DEDCE68-9D2E-4C8C-9998-BD219A3A306C}" dt="2026-01-13T00:05:13.283" v="252" actId="164"/>
-          <ac:spMkLst>
-            <pc:docMk/>
-            <pc:sldMk cId="413350594" sldId="262"/>
-            <ac:spMk id="64" creationId="{98D85E6D-1DD8-5D9D-36D7-EA818EF4F40C}"/>
-          </ac:spMkLst>
-        </pc:spChg>
-        <pc:grpChg chg="mod">
-          <ac:chgData name="Daniel Bauman" userId="b4990c641f0077cd" providerId="LiveId" clId="{6DEDCE68-9D2E-4C8C-9998-BD219A3A306C}" dt="2026-01-13T00:04:08.640" v="244" actId="14100"/>
-          <ac:grpSpMkLst>
-            <pc:docMk/>
-            <pc:sldMk cId="413350594" sldId="262"/>
-            <ac:grpSpMk id="15" creationId="{48D0738F-1234-8182-A098-5FACEC383D1D}"/>
-          </ac:grpSpMkLst>
-        </pc:grpChg>
-        <pc:grpChg chg="mod">
-          <ac:chgData name="Daniel Bauman" userId="b4990c641f0077cd" providerId="LiveId" clId="{6DEDCE68-9D2E-4C8C-9998-BD219A3A306C}" dt="2026-01-13T00:04:08.640" v="244" actId="14100"/>
-          <ac:grpSpMkLst>
-            <pc:docMk/>
-            <pc:sldMk cId="413350594" sldId="262"/>
-            <ac:grpSpMk id="38" creationId="{DFDB6F18-4F56-4F68-AB8A-9A4ED9404CBD}"/>
-          </ac:grpSpMkLst>
-        </pc:grpChg>
-        <pc:grpChg chg="mod">
-          <ac:chgData name="Daniel Bauman" userId="b4990c641f0077cd" providerId="LiveId" clId="{6DEDCE68-9D2E-4C8C-9998-BD219A3A306C}" dt="2026-01-13T00:04:08.640" v="244" actId="14100"/>
-          <ac:grpSpMkLst>
-            <pc:docMk/>
-            <pc:sldMk cId="413350594" sldId="262"/>
-            <ac:grpSpMk id="39" creationId="{238C3E7C-01FC-4880-800A-16C4C2E98067}"/>
-          </ac:grpSpMkLst>
-        </pc:grpChg>
-        <pc:cxnChg chg="mod">
-          <ac:chgData name="Daniel Bauman" userId="b4990c641f0077cd" providerId="LiveId" clId="{6DEDCE68-9D2E-4C8C-9998-BD219A3A306C}" dt="2026-01-13T00:04:44.562" v="249" actId="14100"/>
-          <ac:cxnSpMkLst>
-            <pc:docMk/>
-            <pc:sldMk cId="413350594" sldId="262"/>
-            <ac:cxnSpMk id="49" creationId="{2E07CD3B-4079-CBE4-6499-340943F12D9A}"/>
-          </ac:cxnSpMkLst>
-        </pc:cxnChg>
-        <pc:cxnChg chg="mod">
-          <ac:chgData name="Daniel Bauman" userId="b4990c641f0077cd" providerId="LiveId" clId="{6DEDCE68-9D2E-4C8C-9998-BD219A3A306C}" dt="2026-01-13T00:04:38.811" v="248" actId="14100"/>
-          <ac:cxnSpMkLst>
-            <pc:docMk/>
-            <pc:sldMk cId="413350594" sldId="262"/>
-            <ac:cxnSpMk id="51" creationId="{0C07CDDA-4A02-10E9-2E28-EC7BDADB6191}"/>
-          </ac:cxnSpMkLst>
-        </pc:cxnChg>
-        <pc:cxnChg chg="mod">
-          <ac:chgData name="Daniel Bauman" userId="b4990c641f0077cd" providerId="LiveId" clId="{6DEDCE68-9D2E-4C8C-9998-BD219A3A306C}" dt="2026-01-13T00:04:33.464" v="247" actId="14100"/>
-          <ac:cxnSpMkLst>
-            <pc:docMk/>
-            <pc:sldMk cId="413350594" sldId="262"/>
-            <ac:cxnSpMk id="52" creationId="{82F091DA-840D-BB81-F02A-444C5502C952}"/>
-          </ac:cxnSpMkLst>
-        </pc:cxnChg>
+            <pc:sldMk cId="3365830087" sldId="263"/>
+            <ac:picMk id="9" creationId="{1D90D720-C212-4F03-3A81-C8779D2BB1C8}"/>
+          </ac:picMkLst>
+        </pc:picChg>
       </pc:sldChg>
     </pc:docChg>
   </pc:docChgLst>
@@ -1338,7 +302,7 @@
           <a:p>
             <a:fld id="{3C4E944E-439C-4400-9867-B448A42A17A7}" type="datetimeFigureOut">
               <a:rPr lang="en-US" smtClean="0"/>
-              <a:t>1/24/2026</a:t>
+              <a:t>3/2/2026</a:t>
             </a:fld>
             <a:endParaRPr lang="en-US"/>
           </a:p>
@@ -1508,7 +472,7 @@
           <a:p>
             <a:fld id="{3C4E944E-439C-4400-9867-B448A42A17A7}" type="datetimeFigureOut">
               <a:rPr lang="en-US" smtClean="0"/>
-              <a:t>1/24/2026</a:t>
+              <a:t>3/2/2026</a:t>
             </a:fld>
             <a:endParaRPr lang="en-US"/>
           </a:p>
@@ -1688,7 +652,7 @@
           <a:p>
             <a:fld id="{3C4E944E-439C-4400-9867-B448A42A17A7}" type="datetimeFigureOut">
               <a:rPr lang="en-US" smtClean="0"/>
-              <a:t>1/24/2026</a:t>
+              <a:t>3/2/2026</a:t>
             </a:fld>
             <a:endParaRPr lang="en-US"/>
           </a:p>
@@ -1858,7 +822,7 @@
           <a:p>
             <a:fld id="{3C4E944E-439C-4400-9867-B448A42A17A7}" type="datetimeFigureOut">
               <a:rPr lang="en-US" smtClean="0"/>
-              <a:t>1/24/2026</a:t>
+              <a:t>3/2/2026</a:t>
             </a:fld>
             <a:endParaRPr lang="en-US"/>
           </a:p>
@@ -2104,7 +1068,7 @@
           <a:p>
             <a:fld id="{3C4E944E-439C-4400-9867-B448A42A17A7}" type="datetimeFigureOut">
               <a:rPr lang="en-US" smtClean="0"/>
-              <a:t>1/24/2026</a:t>
+              <a:t>3/2/2026</a:t>
             </a:fld>
             <a:endParaRPr lang="en-US"/>
           </a:p>
@@ -2336,7 +1300,7 @@
           <a:p>
             <a:fld id="{3C4E944E-439C-4400-9867-B448A42A17A7}" type="datetimeFigureOut">
               <a:rPr lang="en-US" smtClean="0"/>
-              <a:t>1/24/2026</a:t>
+              <a:t>3/2/2026</a:t>
             </a:fld>
             <a:endParaRPr lang="en-US"/>
           </a:p>
@@ -2703,7 +1667,7 @@
           <a:p>
             <a:fld id="{3C4E944E-439C-4400-9867-B448A42A17A7}" type="datetimeFigureOut">
               <a:rPr lang="en-US" smtClean="0"/>
-              <a:t>1/24/2026</a:t>
+              <a:t>3/2/2026</a:t>
             </a:fld>
             <a:endParaRPr lang="en-US"/>
           </a:p>
@@ -2821,7 +1785,7 @@
           <a:p>
             <a:fld id="{3C4E944E-439C-4400-9867-B448A42A17A7}" type="datetimeFigureOut">
               <a:rPr lang="en-US" smtClean="0"/>
-              <a:t>1/24/2026</a:t>
+              <a:t>3/2/2026</a:t>
             </a:fld>
             <a:endParaRPr lang="en-US"/>
           </a:p>
@@ -2916,7 +1880,7 @@
           <a:p>
             <a:fld id="{3C4E944E-439C-4400-9867-B448A42A17A7}" type="datetimeFigureOut">
               <a:rPr lang="en-US" smtClean="0"/>
-              <a:t>1/24/2026</a:t>
+              <a:t>3/2/2026</a:t>
             </a:fld>
             <a:endParaRPr lang="en-US"/>
           </a:p>
@@ -3193,7 +2157,7 @@
           <a:p>
             <a:fld id="{3C4E944E-439C-4400-9867-B448A42A17A7}" type="datetimeFigureOut">
               <a:rPr lang="en-US" smtClean="0"/>
-              <a:t>1/24/2026</a:t>
+              <a:t>3/2/2026</a:t>
             </a:fld>
             <a:endParaRPr lang="en-US"/>
           </a:p>
@@ -3450,7 +2414,7 @@
           <a:p>
             <a:fld id="{3C4E944E-439C-4400-9867-B448A42A17A7}" type="datetimeFigureOut">
               <a:rPr lang="en-US" smtClean="0"/>
-              <a:t>1/24/2026</a:t>
+              <a:t>3/2/2026</a:t>
             </a:fld>
             <a:endParaRPr lang="en-US"/>
           </a:p>
@@ -3663,7 +2627,7 @@
           <a:p>
             <a:fld id="{3C4E944E-439C-4400-9867-B448A42A17A7}" type="datetimeFigureOut">
               <a:rPr lang="en-US" smtClean="0"/>
-              <a:t>1/24/2026</a:t>
+              <a:t>3/2/2026</a:t>
             </a:fld>
             <a:endParaRPr lang="en-US"/>
           </a:p>
@@ -21571,8 +20535,8 @@
             </p:sp>
           </mc:Fallback>
         </mc:AlternateContent>
-        <mc:AlternateContent xmlns:mc="http://schemas.openxmlformats.org/markup-compatibility/2006">
-          <mc:Choice xmlns:a14="http://schemas.microsoft.com/office/drawing/2010/main" Requires="a14">
+        <mc:AlternateContent xmlns:mc="http://schemas.openxmlformats.org/markup-compatibility/2006" xmlns:a14="http://schemas.microsoft.com/office/drawing/2010/main">
+          <mc:Choice Requires="a14">
             <p:sp>
               <p:nvSpPr>
                 <p:cNvPr id="7" name="Rectangle 6">
@@ -21655,7 +20619,7 @@
               </p:txBody>
             </p:sp>
           </mc:Choice>
-          <mc:Fallback>
+          <mc:Fallback xmlns="">
             <p:sp>
               <p:nvSpPr>
                 <p:cNvPr id="7" name="Rectangle 6">
@@ -21705,8 +20669,8 @@
             </p:sp>
           </mc:Fallback>
         </mc:AlternateContent>
-        <mc:AlternateContent xmlns:mc="http://schemas.openxmlformats.org/markup-compatibility/2006">
-          <mc:Choice xmlns:a14="http://schemas.microsoft.com/office/drawing/2010/main" Requires="a14">
+        <mc:AlternateContent xmlns:mc="http://schemas.openxmlformats.org/markup-compatibility/2006" xmlns:a14="http://schemas.microsoft.com/office/drawing/2010/main">
+          <mc:Choice Requires="a14">
             <p:sp>
               <p:nvSpPr>
                 <p:cNvPr id="8" name="Rectangle 7">
@@ -21792,7 +20756,7 @@
               </p:txBody>
             </p:sp>
           </mc:Choice>
-          <mc:Fallback>
+          <mc:Fallback xmlns="">
             <p:sp>
               <p:nvSpPr>
                 <p:cNvPr id="8" name="Rectangle 7">
@@ -22650,8 +21614,8 @@
             </a:fontRef>
           </p:style>
         </p:cxnSp>
-        <mc:AlternateContent xmlns:mc="http://schemas.openxmlformats.org/markup-compatibility/2006">
-          <mc:Choice xmlns:a14="http://schemas.microsoft.com/office/drawing/2010/main" Requires="a14">
+        <mc:AlternateContent xmlns:mc="http://schemas.openxmlformats.org/markup-compatibility/2006" xmlns:a14="http://schemas.microsoft.com/office/drawing/2010/main">
+          <mc:Choice Requires="a14">
             <p:sp>
               <p:nvSpPr>
                 <p:cNvPr id="36" name="TextBox 35">
@@ -22743,7 +21707,7 @@
               </p:txBody>
             </p:sp>
           </mc:Choice>
-          <mc:Fallback>
+          <mc:Fallback xmlns="">
             <p:sp>
               <p:nvSpPr>
                 <p:cNvPr id="36" name="TextBox 35">
@@ -22788,8 +21752,8 @@
             </p:sp>
           </mc:Fallback>
         </mc:AlternateContent>
-        <mc:AlternateContent xmlns:mc="http://schemas.openxmlformats.org/markup-compatibility/2006">
-          <mc:Choice xmlns:a14="http://schemas.microsoft.com/office/drawing/2010/main" Requires="a14">
+        <mc:AlternateContent xmlns:mc="http://schemas.openxmlformats.org/markup-compatibility/2006" xmlns:a14="http://schemas.microsoft.com/office/drawing/2010/main">
+          <mc:Choice Requires="a14">
             <p:sp>
               <p:nvSpPr>
                 <p:cNvPr id="39" name="TextBox 38">
@@ -22851,7 +21815,7 @@
               </p:txBody>
             </p:sp>
           </mc:Choice>
-          <mc:Fallback>
+          <mc:Fallback xmlns="">
             <p:sp>
               <p:nvSpPr>
                 <p:cNvPr id="39" name="TextBox 38">
@@ -22896,8 +21860,8 @@
             </p:sp>
           </mc:Fallback>
         </mc:AlternateContent>
-        <mc:AlternateContent xmlns:mc="http://schemas.openxmlformats.org/markup-compatibility/2006">
-          <mc:Choice xmlns:a14="http://schemas.microsoft.com/office/drawing/2010/main" Requires="a14">
+        <mc:AlternateContent xmlns:mc="http://schemas.openxmlformats.org/markup-compatibility/2006" xmlns:a14="http://schemas.microsoft.com/office/drawing/2010/main">
+          <mc:Choice Requires="a14">
             <p:sp>
               <p:nvSpPr>
                 <p:cNvPr id="40" name="TextBox 39">
@@ -22989,7 +21953,7 @@
               </p:txBody>
             </p:sp>
           </mc:Choice>
-          <mc:Fallback>
+          <mc:Fallback xmlns="">
             <p:sp>
               <p:nvSpPr>
                 <p:cNvPr id="40" name="TextBox 39">
@@ -23142,8 +22106,8 @@
             </p:sp>
           </mc:Fallback>
         </mc:AlternateContent>
-        <mc:AlternateContent xmlns:mc="http://schemas.openxmlformats.org/markup-compatibility/2006">
-          <mc:Choice xmlns:a14="http://schemas.microsoft.com/office/drawing/2010/main" Requires="a14">
+        <mc:AlternateContent xmlns:mc="http://schemas.openxmlformats.org/markup-compatibility/2006" xmlns:a14="http://schemas.microsoft.com/office/drawing/2010/main">
+          <mc:Choice Requires="a14">
             <p:sp>
               <p:nvSpPr>
                 <p:cNvPr id="72" name="TextBox 71">
@@ -23211,7 +22175,7 @@
               </p:txBody>
             </p:sp>
           </mc:Choice>
-          <mc:Fallback>
+          <mc:Fallback xmlns="">
             <p:sp>
               <p:nvSpPr>
                 <p:cNvPr id="72" name="TextBox 71">
@@ -24040,6 +23004,36 @@
 </p:sld>
 </file>
 
+<file path=ppt/slides/slide7.xml><?xml version="1.0" encoding="utf-8"?>
+<p:sld xmlns:a="http://schemas.openxmlformats.org/drawingml/2006/main" xmlns:r="http://schemas.openxmlformats.org/officeDocument/2006/relationships" xmlns:p="http://schemas.openxmlformats.org/presentationml/2006/main">
+  <p:cSld>
+    <p:spTree>
+      <p:nvGrpSpPr>
+        <p:cNvPr id="1" name=""/>
+        <p:cNvGrpSpPr/>
+        <p:nvPr/>
+      </p:nvGrpSpPr>
+      <p:grpSpPr>
+        <a:xfrm>
+          <a:off x="0" y="0"/>
+          <a:ext cx="0" cy="0"/>
+          <a:chOff x="0" y="0"/>
+          <a:chExt cx="0" cy="0"/>
+        </a:xfrm>
+      </p:grpSpPr>
+    </p:spTree>
+    <p:extLst>
+      <p:ext uri="{BB962C8B-B14F-4D97-AF65-F5344CB8AC3E}">
+        <p14:creationId xmlns:p14="http://schemas.microsoft.com/office/powerpoint/2010/main" val="3365830087"/>
+      </p:ext>
+    </p:extLst>
+  </p:cSld>
+  <p:clrMapOvr>
+    <a:masterClrMapping/>
+  </p:clrMapOvr>
+</p:sld>
+</file>
+
 <file path=ppt/theme/theme1.xml><?xml version="1.0" encoding="utf-8"?>
 <a:theme xmlns:a="http://schemas.openxmlformats.org/drawingml/2006/main" name="Office Theme">
   <a:themeElements>

--- a/figures/Figures.pptx
+++ b/figures/Figures.pptx
@@ -2,18 +2,19 @@
 <file path=ppt/presentation.xml><?xml version="1.0" encoding="utf-8"?>
 <p:presentation xmlns:a="http://schemas.openxmlformats.org/drawingml/2006/main" xmlns:r="http://schemas.openxmlformats.org/officeDocument/2006/relationships" xmlns:p="http://schemas.openxmlformats.org/presentationml/2006/main" saveSubsetFonts="1">
   <p:sldMasterIdLst>
-    <p:sldMasterId id="2147483660" r:id="rId1"/>
+    <p:sldMasterId id="2147483672" r:id="rId1"/>
   </p:sldMasterIdLst>
   <p:sldIdLst>
     <p:sldId id="257" r:id="rId2"/>
     <p:sldId id="262" r:id="rId3"/>
-    <p:sldId id="260" r:id="rId4"/>
-    <p:sldId id="261" r:id="rId5"/>
-    <p:sldId id="258" r:id="rId6"/>
-    <p:sldId id="259" r:id="rId7"/>
-    <p:sldId id="263" r:id="rId8"/>
+    <p:sldId id="264" r:id="rId4"/>
+    <p:sldId id="260" r:id="rId5"/>
+    <p:sldId id="261" r:id="rId6"/>
+    <p:sldId id="258" r:id="rId7"/>
+    <p:sldId id="259" r:id="rId8"/>
+    <p:sldId id="263" r:id="rId9"/>
   </p:sldIdLst>
-  <p:sldSz cx="12192000" cy="9144000"/>
+  <p:sldSz cx="16256000" cy="9144000"/>
   <p:notesSz cx="6858000" cy="9144000"/>
   <p:defaultTextStyle>
     <a:defPPr>
@@ -200,8 +201,8 @@
         </p:nvSpPr>
         <p:spPr>
           <a:xfrm>
-            <a:off x="914400" y="1496484"/>
-            <a:ext cx="10363200" cy="3183467"/>
+            <a:off x="2032000" y="1496484"/>
+            <a:ext cx="12192000" cy="3183467"/>
           </a:xfrm>
         </p:spPr>
         <p:txBody>
@@ -232,8 +233,8 @@
         </p:nvSpPr>
         <p:spPr>
           <a:xfrm>
-            <a:off x="1524000" y="4802717"/>
-            <a:ext cx="9144000" cy="2207683"/>
+            <a:off x="2032000" y="4802717"/>
+            <a:ext cx="12192000" cy="2207683"/>
           </a:xfrm>
         </p:spPr>
         <p:txBody>
@@ -302,7 +303,7 @@
           <a:p>
             <a:fld id="{3C4E944E-439C-4400-9867-B448A42A17A7}" type="datetimeFigureOut">
               <a:rPr lang="en-US" smtClean="0"/>
-              <a:t>3/2/2026</a:t>
+              <a:t>3/19/2026</a:t>
             </a:fld>
             <a:endParaRPr lang="en-US"/>
           </a:p>
@@ -353,7 +354,7 @@
     </p:spTree>
     <p:extLst>
       <p:ext uri="{BB962C8B-B14F-4D97-AF65-F5344CB8AC3E}">
-        <p14:creationId xmlns:p14="http://schemas.microsoft.com/office/powerpoint/2010/main" val="2967313475"/>
+        <p14:creationId xmlns:p14="http://schemas.microsoft.com/office/powerpoint/2010/main" val="1778340119"/>
       </p:ext>
     </p:extLst>
   </p:cSld>
@@ -472,7 +473,7 @@
           <a:p>
             <a:fld id="{3C4E944E-439C-4400-9867-B448A42A17A7}" type="datetimeFigureOut">
               <a:rPr lang="en-US" smtClean="0"/>
-              <a:t>3/2/2026</a:t>
+              <a:t>3/19/2026</a:t>
             </a:fld>
             <a:endParaRPr lang="en-US"/>
           </a:p>
@@ -523,7 +524,7 @@
     </p:spTree>
     <p:extLst>
       <p:ext uri="{BB962C8B-B14F-4D97-AF65-F5344CB8AC3E}">
-        <p14:creationId xmlns:p14="http://schemas.microsoft.com/office/powerpoint/2010/main" val="4084768409"/>
+        <p14:creationId xmlns:p14="http://schemas.microsoft.com/office/powerpoint/2010/main" val="1057319114"/>
       </p:ext>
     </p:extLst>
   </p:cSld>
@@ -562,8 +563,8 @@
         </p:nvSpPr>
         <p:spPr>
           <a:xfrm>
-            <a:off x="8724901" y="486834"/>
-            <a:ext cx="2628900" cy="7749117"/>
+            <a:off x="11633200" y="486834"/>
+            <a:ext cx="3505200" cy="7749117"/>
           </a:xfrm>
         </p:spPr>
         <p:txBody>
@@ -590,8 +591,8 @@
         </p:nvSpPr>
         <p:spPr>
           <a:xfrm>
-            <a:off x="838201" y="486834"/>
-            <a:ext cx="7734300" cy="7749117"/>
+            <a:off x="1117600" y="486834"/>
+            <a:ext cx="10312400" cy="7749117"/>
           </a:xfrm>
         </p:spPr>
         <p:txBody>
@@ -652,7 +653,7 @@
           <a:p>
             <a:fld id="{3C4E944E-439C-4400-9867-B448A42A17A7}" type="datetimeFigureOut">
               <a:rPr lang="en-US" smtClean="0"/>
-              <a:t>3/2/2026</a:t>
+              <a:t>3/19/2026</a:t>
             </a:fld>
             <a:endParaRPr lang="en-US"/>
           </a:p>
@@ -703,7 +704,7 @@
     </p:spTree>
     <p:extLst>
       <p:ext uri="{BB962C8B-B14F-4D97-AF65-F5344CB8AC3E}">
-        <p14:creationId xmlns:p14="http://schemas.microsoft.com/office/powerpoint/2010/main" val="2162044226"/>
+        <p14:creationId xmlns:p14="http://schemas.microsoft.com/office/powerpoint/2010/main" val="2588944377"/>
       </p:ext>
     </p:extLst>
   </p:cSld>
@@ -822,7 +823,7 @@
           <a:p>
             <a:fld id="{3C4E944E-439C-4400-9867-B448A42A17A7}" type="datetimeFigureOut">
               <a:rPr lang="en-US" smtClean="0"/>
-              <a:t>3/2/2026</a:t>
+              <a:t>3/19/2026</a:t>
             </a:fld>
             <a:endParaRPr lang="en-US"/>
           </a:p>
@@ -873,7 +874,7 @@
     </p:spTree>
     <p:extLst>
       <p:ext uri="{BB962C8B-B14F-4D97-AF65-F5344CB8AC3E}">
-        <p14:creationId xmlns:p14="http://schemas.microsoft.com/office/powerpoint/2010/main" val="1822178771"/>
+        <p14:creationId xmlns:p14="http://schemas.microsoft.com/office/powerpoint/2010/main" val="1703579355"/>
       </p:ext>
     </p:extLst>
   </p:cSld>
@@ -912,8 +913,8 @@
         </p:nvSpPr>
         <p:spPr>
           <a:xfrm>
-            <a:off x="831851" y="2279653"/>
-            <a:ext cx="10515600" cy="3803649"/>
+            <a:off x="1109133" y="2279652"/>
+            <a:ext cx="14020800" cy="3803649"/>
           </a:xfrm>
         </p:spPr>
         <p:txBody>
@@ -944,8 +945,8 @@
         </p:nvSpPr>
         <p:spPr>
           <a:xfrm>
-            <a:off x="831851" y="6119286"/>
-            <a:ext cx="10515600" cy="2000249"/>
+            <a:off x="1109133" y="6119285"/>
+            <a:ext cx="14020800" cy="2000249"/>
           </a:xfrm>
         </p:spPr>
         <p:txBody>
@@ -1068,7 +1069,7 @@
           <a:p>
             <a:fld id="{3C4E944E-439C-4400-9867-B448A42A17A7}" type="datetimeFigureOut">
               <a:rPr lang="en-US" smtClean="0"/>
-              <a:t>3/2/2026</a:t>
+              <a:t>3/19/2026</a:t>
             </a:fld>
             <a:endParaRPr lang="en-US"/>
           </a:p>
@@ -1119,7 +1120,7 @@
     </p:spTree>
     <p:extLst>
       <p:ext uri="{BB962C8B-B14F-4D97-AF65-F5344CB8AC3E}">
-        <p14:creationId xmlns:p14="http://schemas.microsoft.com/office/powerpoint/2010/main" val="617305771"/>
+        <p14:creationId xmlns:p14="http://schemas.microsoft.com/office/powerpoint/2010/main" val="1392042784"/>
       </p:ext>
     </p:extLst>
   </p:cSld>
@@ -1181,8 +1182,8 @@
         </p:nvSpPr>
         <p:spPr>
           <a:xfrm>
-            <a:off x="838200" y="2434167"/>
-            <a:ext cx="5181600" cy="5801784"/>
+            <a:off x="1117600" y="2434167"/>
+            <a:ext cx="6908800" cy="5801784"/>
           </a:xfrm>
         </p:spPr>
         <p:txBody>
@@ -1238,8 +1239,8 @@
         </p:nvSpPr>
         <p:spPr>
           <a:xfrm>
-            <a:off x="6172200" y="2434167"/>
-            <a:ext cx="5181600" cy="5801784"/>
+            <a:off x="8229600" y="2434167"/>
+            <a:ext cx="6908800" cy="5801784"/>
           </a:xfrm>
         </p:spPr>
         <p:txBody>
@@ -1300,7 +1301,7 @@
           <a:p>
             <a:fld id="{3C4E944E-439C-4400-9867-B448A42A17A7}" type="datetimeFigureOut">
               <a:rPr lang="en-US" smtClean="0"/>
-              <a:t>3/2/2026</a:t>
+              <a:t>3/19/2026</a:t>
             </a:fld>
             <a:endParaRPr lang="en-US"/>
           </a:p>
@@ -1351,7 +1352,7 @@
     </p:spTree>
     <p:extLst>
       <p:ext uri="{BB962C8B-B14F-4D97-AF65-F5344CB8AC3E}">
-        <p14:creationId xmlns:p14="http://schemas.microsoft.com/office/powerpoint/2010/main" val="530002606"/>
+        <p14:creationId xmlns:p14="http://schemas.microsoft.com/office/powerpoint/2010/main" val="2629591744"/>
       </p:ext>
     </p:extLst>
   </p:cSld>
@@ -1390,8 +1391,8 @@
         </p:nvSpPr>
         <p:spPr>
           <a:xfrm>
-            <a:off x="839788" y="486836"/>
-            <a:ext cx="10515600" cy="1767417"/>
+            <a:off x="1119717" y="486834"/>
+            <a:ext cx="14020800" cy="1767417"/>
           </a:xfrm>
         </p:spPr>
         <p:txBody>
@@ -1418,8 +1419,8 @@
         </p:nvSpPr>
         <p:spPr>
           <a:xfrm>
-            <a:off x="839789" y="2241551"/>
-            <a:ext cx="5157787" cy="1098549"/>
+            <a:off x="1119718" y="2241551"/>
+            <a:ext cx="6877049" cy="1098549"/>
           </a:xfrm>
         </p:spPr>
         <p:txBody>
@@ -1483,8 +1484,8 @@
         </p:nvSpPr>
         <p:spPr>
           <a:xfrm>
-            <a:off x="839789" y="3340100"/>
-            <a:ext cx="5157787" cy="4912784"/>
+            <a:off x="1119718" y="3340100"/>
+            <a:ext cx="6877049" cy="4912784"/>
           </a:xfrm>
         </p:spPr>
         <p:txBody>
@@ -1540,8 +1541,8 @@
         </p:nvSpPr>
         <p:spPr>
           <a:xfrm>
-            <a:off x="6172201" y="2241551"/>
-            <a:ext cx="5183188" cy="1098549"/>
+            <a:off x="8229600" y="2241551"/>
+            <a:ext cx="6910917" cy="1098549"/>
           </a:xfrm>
         </p:spPr>
         <p:txBody>
@@ -1605,8 +1606,8 @@
         </p:nvSpPr>
         <p:spPr>
           <a:xfrm>
-            <a:off x="6172201" y="3340100"/>
-            <a:ext cx="5183188" cy="4912784"/>
+            <a:off x="8229600" y="3340100"/>
+            <a:ext cx="6910917" cy="4912784"/>
           </a:xfrm>
         </p:spPr>
         <p:txBody>
@@ -1667,7 +1668,7 @@
           <a:p>
             <a:fld id="{3C4E944E-439C-4400-9867-B448A42A17A7}" type="datetimeFigureOut">
               <a:rPr lang="en-US" smtClean="0"/>
-              <a:t>3/2/2026</a:t>
+              <a:t>3/19/2026</a:t>
             </a:fld>
             <a:endParaRPr lang="en-US"/>
           </a:p>
@@ -1718,7 +1719,7 @@
     </p:spTree>
     <p:extLst>
       <p:ext uri="{BB962C8B-B14F-4D97-AF65-F5344CB8AC3E}">
-        <p14:creationId xmlns:p14="http://schemas.microsoft.com/office/powerpoint/2010/main" val="1202767478"/>
+        <p14:creationId xmlns:p14="http://schemas.microsoft.com/office/powerpoint/2010/main" val="935735238"/>
       </p:ext>
     </p:extLst>
   </p:cSld>
@@ -1785,7 +1786,7 @@
           <a:p>
             <a:fld id="{3C4E944E-439C-4400-9867-B448A42A17A7}" type="datetimeFigureOut">
               <a:rPr lang="en-US" smtClean="0"/>
-              <a:t>3/2/2026</a:t>
+              <a:t>3/19/2026</a:t>
             </a:fld>
             <a:endParaRPr lang="en-US"/>
           </a:p>
@@ -1836,7 +1837,7 @@
     </p:spTree>
     <p:extLst>
       <p:ext uri="{BB962C8B-B14F-4D97-AF65-F5344CB8AC3E}">
-        <p14:creationId xmlns:p14="http://schemas.microsoft.com/office/powerpoint/2010/main" val="1321242933"/>
+        <p14:creationId xmlns:p14="http://schemas.microsoft.com/office/powerpoint/2010/main" val="2780816356"/>
       </p:ext>
     </p:extLst>
   </p:cSld>
@@ -1880,7 +1881,7 @@
           <a:p>
             <a:fld id="{3C4E944E-439C-4400-9867-B448A42A17A7}" type="datetimeFigureOut">
               <a:rPr lang="en-US" smtClean="0"/>
-              <a:t>3/2/2026</a:t>
+              <a:t>3/19/2026</a:t>
             </a:fld>
             <a:endParaRPr lang="en-US"/>
           </a:p>
@@ -1931,7 +1932,7 @@
     </p:spTree>
     <p:extLst>
       <p:ext uri="{BB962C8B-B14F-4D97-AF65-F5344CB8AC3E}">
-        <p14:creationId xmlns:p14="http://schemas.microsoft.com/office/powerpoint/2010/main" val="281639028"/>
+        <p14:creationId xmlns:p14="http://schemas.microsoft.com/office/powerpoint/2010/main" val="4105302381"/>
       </p:ext>
     </p:extLst>
   </p:cSld>
@@ -1970,8 +1971,8 @@
         </p:nvSpPr>
         <p:spPr>
           <a:xfrm>
-            <a:off x="839788" y="609600"/>
-            <a:ext cx="3932237" cy="2133600"/>
+            <a:off x="1119718" y="609600"/>
+            <a:ext cx="5242983" cy="2133600"/>
           </a:xfrm>
         </p:spPr>
         <p:txBody>
@@ -2002,8 +2003,8 @@
         </p:nvSpPr>
         <p:spPr>
           <a:xfrm>
-            <a:off x="5183188" y="1316569"/>
-            <a:ext cx="6172200" cy="6498167"/>
+            <a:off x="6910917" y="1316567"/>
+            <a:ext cx="8229600" cy="6498167"/>
           </a:xfrm>
         </p:spPr>
         <p:txBody>
@@ -2087,8 +2088,8 @@
         </p:nvSpPr>
         <p:spPr>
           <a:xfrm>
-            <a:off x="839788" y="2743200"/>
-            <a:ext cx="3932237" cy="5082117"/>
+            <a:off x="1119718" y="2743200"/>
+            <a:ext cx="5242983" cy="5082117"/>
           </a:xfrm>
         </p:spPr>
         <p:txBody>
@@ -2157,7 +2158,7 @@
           <a:p>
             <a:fld id="{3C4E944E-439C-4400-9867-B448A42A17A7}" type="datetimeFigureOut">
               <a:rPr lang="en-US" smtClean="0"/>
-              <a:t>3/2/2026</a:t>
+              <a:t>3/19/2026</a:t>
             </a:fld>
             <a:endParaRPr lang="en-US"/>
           </a:p>
@@ -2208,7 +2209,7 @@
     </p:spTree>
     <p:extLst>
       <p:ext uri="{BB962C8B-B14F-4D97-AF65-F5344CB8AC3E}">
-        <p14:creationId xmlns:p14="http://schemas.microsoft.com/office/powerpoint/2010/main" val="3407165699"/>
+        <p14:creationId xmlns:p14="http://schemas.microsoft.com/office/powerpoint/2010/main" val="3900600250"/>
       </p:ext>
     </p:extLst>
   </p:cSld>
@@ -2247,8 +2248,8 @@
         </p:nvSpPr>
         <p:spPr>
           <a:xfrm>
-            <a:off x="839788" y="609600"/>
-            <a:ext cx="3932237" cy="2133600"/>
+            <a:off x="1119718" y="609600"/>
+            <a:ext cx="5242983" cy="2133600"/>
           </a:xfrm>
         </p:spPr>
         <p:txBody>
@@ -2279,8 +2280,8 @@
         </p:nvSpPr>
         <p:spPr>
           <a:xfrm>
-            <a:off x="5183188" y="1316569"/>
-            <a:ext cx="6172200" cy="6498167"/>
+            <a:off x="6910917" y="1316567"/>
+            <a:ext cx="8229600" cy="6498167"/>
           </a:xfrm>
         </p:spPr>
         <p:txBody>
@@ -2344,8 +2345,8 @@
         </p:nvSpPr>
         <p:spPr>
           <a:xfrm>
-            <a:off x="839788" y="2743200"/>
-            <a:ext cx="3932237" cy="5082117"/>
+            <a:off x="1119718" y="2743200"/>
+            <a:ext cx="5242983" cy="5082117"/>
           </a:xfrm>
         </p:spPr>
         <p:txBody>
@@ -2414,7 +2415,7 @@
           <a:p>
             <a:fld id="{3C4E944E-439C-4400-9867-B448A42A17A7}" type="datetimeFigureOut">
               <a:rPr lang="en-US" smtClean="0"/>
-              <a:t>3/2/2026</a:t>
+              <a:t>3/19/2026</a:t>
             </a:fld>
             <a:endParaRPr lang="en-US"/>
           </a:p>
@@ -2465,7 +2466,7 @@
     </p:spTree>
     <p:extLst>
       <p:ext uri="{BB962C8B-B14F-4D97-AF65-F5344CB8AC3E}">
-        <p14:creationId xmlns:p14="http://schemas.microsoft.com/office/powerpoint/2010/main" val="1899367022"/>
+        <p14:creationId xmlns:p14="http://schemas.microsoft.com/office/powerpoint/2010/main" val="226172270"/>
       </p:ext>
     </p:extLst>
   </p:cSld>
@@ -2509,8 +2510,8 @@
         </p:nvSpPr>
         <p:spPr>
           <a:xfrm>
-            <a:off x="838200" y="486836"/>
-            <a:ext cx="10515600" cy="1767417"/>
+            <a:off x="1117600" y="486834"/>
+            <a:ext cx="14020800" cy="1767417"/>
           </a:xfrm>
           <a:prstGeom prst="rect">
             <a:avLst/>
@@ -2542,8 +2543,8 @@
         </p:nvSpPr>
         <p:spPr>
           <a:xfrm>
-            <a:off x="838200" y="2434167"/>
-            <a:ext cx="10515600" cy="5801784"/>
+            <a:off x="1117600" y="2434167"/>
+            <a:ext cx="14020800" cy="5801784"/>
           </a:xfrm>
           <a:prstGeom prst="rect">
             <a:avLst/>
@@ -2604,8 +2605,8 @@
         </p:nvSpPr>
         <p:spPr>
           <a:xfrm>
-            <a:off x="838200" y="8475136"/>
-            <a:ext cx="2743200" cy="486833"/>
+            <a:off x="1117600" y="8475134"/>
+            <a:ext cx="3657600" cy="486833"/>
           </a:xfrm>
           <a:prstGeom prst="rect">
             <a:avLst/>
@@ -2627,7 +2628,7 @@
           <a:p>
             <a:fld id="{3C4E944E-439C-4400-9867-B448A42A17A7}" type="datetimeFigureOut">
               <a:rPr lang="en-US" smtClean="0"/>
-              <a:t>3/2/2026</a:t>
+              <a:t>3/19/2026</a:t>
             </a:fld>
             <a:endParaRPr lang="en-US"/>
           </a:p>
@@ -2645,8 +2646,8 @@
         </p:nvSpPr>
         <p:spPr>
           <a:xfrm>
-            <a:off x="4038600" y="8475136"/>
-            <a:ext cx="4114800" cy="486833"/>
+            <a:off x="5384800" y="8475134"/>
+            <a:ext cx="5486400" cy="486833"/>
           </a:xfrm>
           <a:prstGeom prst="rect">
             <a:avLst/>
@@ -2682,8 +2683,8 @@
         </p:nvSpPr>
         <p:spPr>
           <a:xfrm>
-            <a:off x="8610600" y="8475136"/>
-            <a:ext cx="2743200" cy="486833"/>
+            <a:off x="11480800" y="8475134"/>
+            <a:ext cx="3657600" cy="486833"/>
           </a:xfrm>
           <a:prstGeom prst="rect">
             <a:avLst/>
@@ -2714,23 +2715,23 @@
     </p:spTree>
     <p:extLst>
       <p:ext uri="{BB962C8B-B14F-4D97-AF65-F5344CB8AC3E}">
-        <p14:creationId xmlns:p14="http://schemas.microsoft.com/office/powerpoint/2010/main" val="2722729353"/>
+        <p14:creationId xmlns:p14="http://schemas.microsoft.com/office/powerpoint/2010/main" val="4095837608"/>
       </p:ext>
     </p:extLst>
   </p:cSld>
   <p:clrMap bg1="lt1" tx1="dk1" bg2="lt2" tx2="dk2" accent1="accent1" accent2="accent2" accent3="accent3" accent4="accent4" accent5="accent5" accent6="accent6" hlink="hlink" folHlink="folHlink"/>
   <p:sldLayoutIdLst>
-    <p:sldLayoutId id="2147483661" r:id="rId1"/>
-    <p:sldLayoutId id="2147483662" r:id="rId2"/>
-    <p:sldLayoutId id="2147483663" r:id="rId3"/>
-    <p:sldLayoutId id="2147483664" r:id="rId4"/>
-    <p:sldLayoutId id="2147483665" r:id="rId5"/>
-    <p:sldLayoutId id="2147483666" r:id="rId6"/>
-    <p:sldLayoutId id="2147483667" r:id="rId7"/>
-    <p:sldLayoutId id="2147483668" r:id="rId8"/>
-    <p:sldLayoutId id="2147483669" r:id="rId9"/>
-    <p:sldLayoutId id="2147483670" r:id="rId10"/>
-    <p:sldLayoutId id="2147483671" r:id="rId11"/>
+    <p:sldLayoutId id="2147483673" r:id="rId1"/>
+    <p:sldLayoutId id="2147483674" r:id="rId2"/>
+    <p:sldLayoutId id="2147483675" r:id="rId3"/>
+    <p:sldLayoutId id="2147483676" r:id="rId4"/>
+    <p:sldLayoutId id="2147483677" r:id="rId5"/>
+    <p:sldLayoutId id="2147483678" r:id="rId6"/>
+    <p:sldLayoutId id="2147483679" r:id="rId7"/>
+    <p:sldLayoutId id="2147483680" r:id="rId8"/>
+    <p:sldLayoutId id="2147483681" r:id="rId9"/>
+    <p:sldLayoutId id="2147483682" r:id="rId10"/>
+    <p:sldLayoutId id="2147483683" r:id="rId11"/>
   </p:sldLayoutIdLst>
   <p:txStyles>
     <p:titleStyle>
@@ -3046,14 +3047,14 @@
         </p:nvGrpSpPr>
         <p:grpSpPr>
           <a:xfrm>
-            <a:off x="469907" y="3454401"/>
+            <a:off x="2501908" y="3454401"/>
             <a:ext cx="11351879" cy="3202606"/>
             <a:chOff x="469905" y="2311400"/>
             <a:chExt cx="11351879" cy="3202606"/>
           </a:xfrm>
         </p:grpSpPr>
-        <mc:AlternateContent xmlns:mc="http://schemas.openxmlformats.org/markup-compatibility/2006" xmlns:a14="http://schemas.microsoft.com/office/drawing/2010/main">
-          <mc:Choice Requires="a14">
+        <mc:AlternateContent xmlns:mc="http://schemas.openxmlformats.org/markup-compatibility/2006">
+          <mc:Choice xmlns:a14="http://schemas.microsoft.com/office/drawing/2010/main" Requires="a14">
             <p:sp>
               <p:nvSpPr>
                 <p:cNvPr id="2" name="TextBox 1">
@@ -3122,7 +3123,7 @@
               </p:txBody>
             </p:sp>
           </mc:Choice>
-          <mc:Fallback xmlns="">
+          <mc:Fallback>
             <p:sp>
               <p:nvSpPr>
                 <p:cNvPr id="2" name="TextBox 1">
@@ -4440,8 +4441,8 @@
             </p:sp>
           </p:grpSp>
         </p:grpSp>
-        <mc:AlternateContent xmlns:mc="http://schemas.openxmlformats.org/markup-compatibility/2006" xmlns:a14="http://schemas.microsoft.com/office/drawing/2010/main">
-          <mc:Choice Requires="a14">
+        <mc:AlternateContent xmlns:mc="http://schemas.openxmlformats.org/markup-compatibility/2006">
+          <mc:Choice xmlns:a14="http://schemas.microsoft.com/office/drawing/2010/main" Requires="a14">
             <p:sp>
               <p:nvSpPr>
                 <p:cNvPr id="40" name="TextBox 39">
@@ -4510,7 +4511,7 @@
               </p:txBody>
             </p:sp>
           </mc:Choice>
-          <mc:Fallback xmlns="">
+          <mc:Fallback>
             <p:sp>
               <p:nvSpPr>
                 <p:cNvPr id="40" name="TextBox 39">
@@ -4555,8 +4556,8 @@
             </p:sp>
           </mc:Fallback>
         </mc:AlternateContent>
-        <mc:AlternateContent xmlns:mc="http://schemas.openxmlformats.org/markup-compatibility/2006" xmlns:a14="http://schemas.microsoft.com/office/drawing/2010/main">
-          <mc:Choice Requires="a14">
+        <mc:AlternateContent xmlns:mc="http://schemas.openxmlformats.org/markup-compatibility/2006">
+          <mc:Choice xmlns:a14="http://schemas.microsoft.com/office/drawing/2010/main" Requires="a14">
             <p:sp>
               <p:nvSpPr>
                 <p:cNvPr id="41" name="TextBox 40">
@@ -4625,7 +4626,7 @@
               </p:txBody>
             </p:sp>
           </mc:Choice>
-          <mc:Fallback xmlns="">
+          <mc:Fallback>
             <p:sp>
               <p:nvSpPr>
                 <p:cNvPr id="41" name="TextBox 40">
@@ -4670,8 +4671,8 @@
             </p:sp>
           </mc:Fallback>
         </mc:AlternateContent>
-        <mc:AlternateContent xmlns:mc="http://schemas.openxmlformats.org/markup-compatibility/2006" xmlns:a14="http://schemas.microsoft.com/office/drawing/2010/main">
-          <mc:Choice Requires="a14">
+        <mc:AlternateContent xmlns:mc="http://schemas.openxmlformats.org/markup-compatibility/2006">
+          <mc:Choice xmlns:a14="http://schemas.microsoft.com/office/drawing/2010/main" Requires="a14">
             <p:sp>
               <p:nvSpPr>
                 <p:cNvPr id="42" name="TextBox 41">
@@ -4740,7 +4741,7 @@
               </p:txBody>
             </p:sp>
           </mc:Choice>
-          <mc:Fallback xmlns="">
+          <mc:Fallback>
             <p:sp>
               <p:nvSpPr>
                 <p:cNvPr id="42" name="TextBox 41">
@@ -4785,8 +4786,8 @@
             </p:sp>
           </mc:Fallback>
         </mc:AlternateContent>
-        <mc:AlternateContent xmlns:mc="http://schemas.openxmlformats.org/markup-compatibility/2006" xmlns:a14="http://schemas.microsoft.com/office/drawing/2010/main">
-          <mc:Choice Requires="a14">
+        <mc:AlternateContent xmlns:mc="http://schemas.openxmlformats.org/markup-compatibility/2006">
+          <mc:Choice xmlns:a14="http://schemas.microsoft.com/office/drawing/2010/main" Requires="a14">
             <p:sp>
               <p:nvSpPr>
                 <p:cNvPr id="43" name="TextBox 42">
@@ -4867,7 +4868,7 @@
               </p:txBody>
             </p:sp>
           </mc:Choice>
-          <mc:Fallback xmlns="">
+          <mc:Fallback>
             <p:sp>
               <p:nvSpPr>
                 <p:cNvPr id="43" name="TextBox 42">
@@ -4912,8 +4913,8 @@
             </p:sp>
           </mc:Fallback>
         </mc:AlternateContent>
-        <mc:AlternateContent xmlns:mc="http://schemas.openxmlformats.org/markup-compatibility/2006" xmlns:a14="http://schemas.microsoft.com/office/drawing/2010/main">
-          <mc:Choice Requires="a14">
+        <mc:AlternateContent xmlns:mc="http://schemas.openxmlformats.org/markup-compatibility/2006">
+          <mc:Choice xmlns:a14="http://schemas.microsoft.com/office/drawing/2010/main" Requires="a14">
             <p:sp>
               <p:nvSpPr>
                 <p:cNvPr id="46" name="TextBox 45">
@@ -4988,7 +4989,7 @@
               </p:txBody>
             </p:sp>
           </mc:Choice>
-          <mc:Fallback xmlns="">
+          <mc:Fallback>
             <p:sp>
               <p:nvSpPr>
                 <p:cNvPr id="46" name="TextBox 45">
@@ -5194,8 +5195,8 @@
             </a:fontRef>
           </p:style>
         </p:cxnSp>
-        <mc:AlternateContent xmlns:mc="http://schemas.openxmlformats.org/markup-compatibility/2006" xmlns:a14="http://schemas.microsoft.com/office/drawing/2010/main">
-          <mc:Choice Requires="a14">
+        <mc:AlternateContent xmlns:mc="http://schemas.openxmlformats.org/markup-compatibility/2006">
+          <mc:Choice xmlns:a14="http://schemas.microsoft.com/office/drawing/2010/main" Requires="a14">
             <p:sp>
               <p:nvSpPr>
                 <p:cNvPr id="54" name="TextBox 53">
@@ -5276,7 +5277,7 @@
               </p:txBody>
             </p:sp>
           </mc:Choice>
-          <mc:Fallback xmlns="">
+          <mc:Fallback>
             <p:sp>
               <p:nvSpPr>
                 <p:cNvPr id="54" name="TextBox 53">
@@ -5321,8 +5322,8 @@
             </p:sp>
           </mc:Fallback>
         </mc:AlternateContent>
-        <mc:AlternateContent xmlns:mc="http://schemas.openxmlformats.org/markup-compatibility/2006" xmlns:a14="http://schemas.microsoft.com/office/drawing/2010/main">
-          <mc:Choice Requires="a14">
+        <mc:AlternateContent xmlns:mc="http://schemas.openxmlformats.org/markup-compatibility/2006">
+          <mc:Choice xmlns:a14="http://schemas.microsoft.com/office/drawing/2010/main" Requires="a14">
             <p:sp>
               <p:nvSpPr>
                 <p:cNvPr id="55" name="TextBox 54">
@@ -5403,7 +5404,7 @@
               </p:txBody>
             </p:sp>
           </mc:Choice>
-          <mc:Fallback xmlns="">
+          <mc:Fallback>
             <p:sp>
               <p:nvSpPr>
                 <p:cNvPr id="55" name="TextBox 54">
@@ -5448,8 +5449,8 @@
             </p:sp>
           </mc:Fallback>
         </mc:AlternateContent>
-        <mc:AlternateContent xmlns:mc="http://schemas.openxmlformats.org/markup-compatibility/2006" xmlns:a14="http://schemas.microsoft.com/office/drawing/2010/main">
-          <mc:Choice Requires="a14">
+        <mc:AlternateContent xmlns:mc="http://schemas.openxmlformats.org/markup-compatibility/2006">
+          <mc:Choice xmlns:a14="http://schemas.microsoft.com/office/drawing/2010/main" Requires="a14">
             <p:sp>
               <p:nvSpPr>
                 <p:cNvPr id="56" name="TextBox 55">
@@ -5530,7 +5531,7 @@
               </p:txBody>
             </p:sp>
           </mc:Choice>
-          <mc:Fallback xmlns="">
+          <mc:Fallback>
             <p:sp>
               <p:nvSpPr>
                 <p:cNvPr id="56" name="TextBox 55">
@@ -5554,7 +5555,7 @@
                   <a:avLst/>
                 </a:prstGeom>
                 <a:blipFill>
-                  <a:blip r:embed="rId10"/>
+                  <a:blip r:embed="rId8"/>
                   <a:stretch>
                     <a:fillRect/>
                   </a:stretch>
@@ -5575,8 +5576,8 @@
             </p:sp>
           </mc:Fallback>
         </mc:AlternateContent>
-        <mc:AlternateContent xmlns:mc="http://schemas.openxmlformats.org/markup-compatibility/2006" xmlns:a14="http://schemas.microsoft.com/office/drawing/2010/main">
-          <mc:Choice Requires="a14">
+        <mc:AlternateContent xmlns:mc="http://schemas.openxmlformats.org/markup-compatibility/2006">
+          <mc:Choice xmlns:a14="http://schemas.microsoft.com/office/drawing/2010/main" Requires="a14">
             <p:sp>
               <p:nvSpPr>
                 <p:cNvPr id="57" name="TextBox 56">
@@ -5657,7 +5658,7 @@
               </p:txBody>
             </p:sp>
           </mc:Choice>
-          <mc:Fallback xmlns="">
+          <mc:Fallback>
             <p:sp>
               <p:nvSpPr>
                 <p:cNvPr id="57" name="TextBox 56">
@@ -5681,7 +5682,7 @@
                   <a:avLst/>
                 </a:prstGeom>
                 <a:blipFill>
-                  <a:blip r:embed="rId11"/>
+                  <a:blip r:embed="rId10"/>
                   <a:stretch>
                     <a:fillRect b="-2000"/>
                   </a:stretch>
@@ -5702,8 +5703,8 @@
             </p:sp>
           </mc:Fallback>
         </mc:AlternateContent>
-        <mc:AlternateContent xmlns:mc="http://schemas.openxmlformats.org/markup-compatibility/2006" xmlns:a14="http://schemas.microsoft.com/office/drawing/2010/main">
-          <mc:Choice Requires="a14">
+        <mc:AlternateContent xmlns:mc="http://schemas.openxmlformats.org/markup-compatibility/2006">
+          <mc:Choice xmlns:a14="http://schemas.microsoft.com/office/drawing/2010/main" Requires="a14">
             <p:sp>
               <p:nvSpPr>
                 <p:cNvPr id="58" name="TextBox 57">
@@ -5784,7 +5785,7 @@
               </p:txBody>
             </p:sp>
           </mc:Choice>
-          <mc:Fallback xmlns="">
+          <mc:Fallback>
             <p:sp>
               <p:nvSpPr>
                 <p:cNvPr id="58" name="TextBox 57">
@@ -5808,7 +5809,7 @@
                   <a:avLst/>
                 </a:prstGeom>
                 <a:blipFill>
-                  <a:blip r:embed="rId12"/>
+                  <a:blip r:embed="rId11"/>
                   <a:stretch>
                     <a:fillRect b="-2000"/>
                   </a:stretch>
@@ -5829,8 +5830,8 @@
             </p:sp>
           </mc:Fallback>
         </mc:AlternateContent>
-        <mc:AlternateContent xmlns:mc="http://schemas.openxmlformats.org/markup-compatibility/2006" xmlns:a14="http://schemas.microsoft.com/office/drawing/2010/main">
-          <mc:Choice Requires="a14">
+        <mc:AlternateContent xmlns:mc="http://schemas.openxmlformats.org/markup-compatibility/2006">
+          <mc:Choice xmlns:a14="http://schemas.microsoft.com/office/drawing/2010/main" Requires="a14">
             <p:sp>
               <p:nvSpPr>
                 <p:cNvPr id="59" name="TextBox 58">
@@ -5905,7 +5906,7 @@
               </p:txBody>
             </p:sp>
           </mc:Choice>
-          <mc:Fallback xmlns="">
+          <mc:Fallback>
             <p:sp>
               <p:nvSpPr>
                 <p:cNvPr id="59" name="TextBox 58">
@@ -5929,7 +5930,7 @@
                   <a:avLst/>
                 </a:prstGeom>
                 <a:blipFill>
-                  <a:blip r:embed="rId13"/>
+                  <a:blip r:embed="rId12"/>
                   <a:stretch>
                     <a:fillRect/>
                   </a:stretch>
@@ -5950,8 +5951,8 @@
             </p:sp>
           </mc:Fallback>
         </mc:AlternateContent>
-        <mc:AlternateContent xmlns:mc="http://schemas.openxmlformats.org/markup-compatibility/2006" xmlns:a14="http://schemas.microsoft.com/office/drawing/2010/main">
-          <mc:Choice Requires="a14">
+        <mc:AlternateContent xmlns:mc="http://schemas.openxmlformats.org/markup-compatibility/2006">
+          <mc:Choice xmlns:a14="http://schemas.microsoft.com/office/drawing/2010/main" Requires="a14">
             <p:sp>
               <p:nvSpPr>
                 <p:cNvPr id="60" name="TextBox 59">
@@ -6026,7 +6027,7 @@
               </p:txBody>
             </p:sp>
           </mc:Choice>
-          <mc:Fallback xmlns="">
+          <mc:Fallback>
             <p:sp>
               <p:nvSpPr>
                 <p:cNvPr id="60" name="TextBox 59">
@@ -6050,7 +6051,7 @@
                   <a:avLst/>
                 </a:prstGeom>
                 <a:blipFill>
-                  <a:blip r:embed="rId14"/>
+                  <a:blip r:embed="rId13"/>
                   <a:stretch>
                     <a:fillRect/>
                   </a:stretch>
@@ -6071,8 +6072,8 @@
             </p:sp>
           </mc:Fallback>
         </mc:AlternateContent>
-        <mc:AlternateContent xmlns:mc="http://schemas.openxmlformats.org/markup-compatibility/2006" xmlns:a14="http://schemas.microsoft.com/office/drawing/2010/main">
-          <mc:Choice Requires="a14">
+        <mc:AlternateContent xmlns:mc="http://schemas.openxmlformats.org/markup-compatibility/2006">
+          <mc:Choice xmlns:a14="http://schemas.microsoft.com/office/drawing/2010/main" Requires="a14">
             <p:sp>
               <p:nvSpPr>
                 <p:cNvPr id="61" name="TextBox 60">
@@ -6153,7 +6154,7 @@
               </p:txBody>
             </p:sp>
           </mc:Choice>
-          <mc:Fallback xmlns="">
+          <mc:Fallback>
             <p:sp>
               <p:nvSpPr>
                 <p:cNvPr id="61" name="TextBox 60">
@@ -6177,7 +6178,7 @@
                   <a:avLst/>
                 </a:prstGeom>
                 <a:blipFill>
-                  <a:blip r:embed="rId15"/>
+                  <a:blip r:embed="rId14"/>
                   <a:stretch>
                     <a:fillRect/>
                   </a:stretch>
@@ -6198,8 +6199,8 @@
             </p:sp>
           </mc:Fallback>
         </mc:AlternateContent>
-        <mc:AlternateContent xmlns:mc="http://schemas.openxmlformats.org/markup-compatibility/2006" xmlns:a14="http://schemas.microsoft.com/office/drawing/2010/main">
-          <mc:Choice Requires="a14">
+        <mc:AlternateContent xmlns:mc="http://schemas.openxmlformats.org/markup-compatibility/2006">
+          <mc:Choice xmlns:a14="http://schemas.microsoft.com/office/drawing/2010/main" Requires="a14">
             <p:sp>
               <p:nvSpPr>
                 <p:cNvPr id="62" name="TextBox 61">
@@ -6280,7 +6281,7 @@
               </p:txBody>
             </p:sp>
           </mc:Choice>
-          <mc:Fallback xmlns="">
+          <mc:Fallback>
             <p:sp>
               <p:nvSpPr>
                 <p:cNvPr id="62" name="TextBox 61">
@@ -6304,7 +6305,7 @@
                   <a:avLst/>
                 </a:prstGeom>
                 <a:blipFill>
-                  <a:blip r:embed="rId16"/>
+                  <a:blip r:embed="rId15"/>
                   <a:stretch>
                     <a:fillRect/>
                   </a:stretch>
@@ -6325,8 +6326,8 @@
             </p:sp>
           </mc:Fallback>
         </mc:AlternateContent>
-        <mc:AlternateContent xmlns:mc="http://schemas.openxmlformats.org/markup-compatibility/2006" xmlns:a14="http://schemas.microsoft.com/office/drawing/2010/main">
-          <mc:Choice Requires="a14">
+        <mc:AlternateContent xmlns:mc="http://schemas.openxmlformats.org/markup-compatibility/2006">
+          <mc:Choice xmlns:a14="http://schemas.microsoft.com/office/drawing/2010/main" Requires="a14">
             <p:sp>
               <p:nvSpPr>
                 <p:cNvPr id="63" name="TextBox 62">
@@ -6407,7 +6408,7 @@
               </p:txBody>
             </p:sp>
           </mc:Choice>
-          <mc:Fallback xmlns="">
+          <mc:Fallback>
             <p:sp>
               <p:nvSpPr>
                 <p:cNvPr id="63" name="TextBox 62">
@@ -6431,7 +6432,7 @@
                   <a:avLst/>
                 </a:prstGeom>
                 <a:blipFill>
-                  <a:blip r:embed="rId17"/>
+                  <a:blip r:embed="rId16"/>
                   <a:stretch>
                     <a:fillRect b="-2000"/>
                   </a:stretch>
@@ -6452,8 +6453,8 @@
             </p:sp>
           </mc:Fallback>
         </mc:AlternateContent>
-        <mc:AlternateContent xmlns:mc="http://schemas.openxmlformats.org/markup-compatibility/2006" xmlns:a14="http://schemas.microsoft.com/office/drawing/2010/main">
-          <mc:Choice Requires="a14">
+        <mc:AlternateContent xmlns:mc="http://schemas.openxmlformats.org/markup-compatibility/2006">
+          <mc:Choice xmlns:a14="http://schemas.microsoft.com/office/drawing/2010/main" Requires="a14">
             <p:sp>
               <p:nvSpPr>
                 <p:cNvPr id="64" name="TextBox 63">
@@ -6534,7 +6535,7 @@
               </p:txBody>
             </p:sp>
           </mc:Choice>
-          <mc:Fallback xmlns="">
+          <mc:Fallback>
             <p:sp>
               <p:nvSpPr>
                 <p:cNvPr id="64" name="TextBox 63">
@@ -6558,7 +6559,7 @@
                   <a:avLst/>
                 </a:prstGeom>
                 <a:blipFill>
-                  <a:blip r:embed="rId18"/>
+                  <a:blip r:embed="rId17"/>
                   <a:stretch>
                     <a:fillRect b="-2000"/>
                   </a:stretch>
@@ -6630,14 +6631,14 @@
         </p:nvGrpSpPr>
         <p:grpSpPr>
           <a:xfrm>
-            <a:off x="469907" y="3454400"/>
+            <a:off x="2501908" y="3454402"/>
             <a:ext cx="11351879" cy="3407645"/>
             <a:chOff x="469907" y="3454400"/>
             <a:chExt cx="11351879" cy="3407645"/>
           </a:xfrm>
         </p:grpSpPr>
-        <mc:AlternateContent xmlns:mc="http://schemas.openxmlformats.org/markup-compatibility/2006" xmlns:a14="http://schemas.microsoft.com/office/drawing/2010/main">
-          <mc:Choice Requires="a14">
+        <mc:AlternateContent xmlns:mc="http://schemas.openxmlformats.org/markup-compatibility/2006">
+          <mc:Choice xmlns:a14="http://schemas.microsoft.com/office/drawing/2010/main" Requires="a14">
             <p:sp>
               <p:nvSpPr>
                 <p:cNvPr id="2" name="TextBox 1">
@@ -6706,7 +6707,7 @@
               </p:txBody>
             </p:sp>
           </mc:Choice>
-          <mc:Fallback xmlns="">
+          <mc:Fallback>
             <p:sp>
               <p:nvSpPr>
                 <p:cNvPr id="2" name="TextBox 1">
@@ -8031,8 +8032,8 @@
             </p:sp>
           </p:grpSp>
         </p:grpSp>
-        <mc:AlternateContent xmlns:mc="http://schemas.openxmlformats.org/markup-compatibility/2006" xmlns:a14="http://schemas.microsoft.com/office/drawing/2010/main">
-          <mc:Choice Requires="a14">
+        <mc:AlternateContent xmlns:mc="http://schemas.openxmlformats.org/markup-compatibility/2006">
+          <mc:Choice xmlns:a14="http://schemas.microsoft.com/office/drawing/2010/main" Requires="a14">
             <p:sp>
               <p:nvSpPr>
                 <p:cNvPr id="40" name="TextBox 39">
@@ -8101,7 +8102,7 @@
               </p:txBody>
             </p:sp>
           </mc:Choice>
-          <mc:Fallback xmlns="">
+          <mc:Fallback>
             <p:sp>
               <p:nvSpPr>
                 <p:cNvPr id="40" name="TextBox 39">
@@ -8146,8 +8147,8 @@
             </p:sp>
           </mc:Fallback>
         </mc:AlternateContent>
-        <mc:AlternateContent xmlns:mc="http://schemas.openxmlformats.org/markup-compatibility/2006" xmlns:a14="http://schemas.microsoft.com/office/drawing/2010/main">
-          <mc:Choice Requires="a14">
+        <mc:AlternateContent xmlns:mc="http://schemas.openxmlformats.org/markup-compatibility/2006">
+          <mc:Choice xmlns:a14="http://schemas.microsoft.com/office/drawing/2010/main" Requires="a14">
             <p:sp>
               <p:nvSpPr>
                 <p:cNvPr id="41" name="TextBox 40">
@@ -8216,7 +8217,7 @@
               </p:txBody>
             </p:sp>
           </mc:Choice>
-          <mc:Fallback xmlns="">
+          <mc:Fallback>
             <p:sp>
               <p:nvSpPr>
                 <p:cNvPr id="41" name="TextBox 40">
@@ -8261,8 +8262,8 @@
             </p:sp>
           </mc:Fallback>
         </mc:AlternateContent>
-        <mc:AlternateContent xmlns:mc="http://schemas.openxmlformats.org/markup-compatibility/2006" xmlns:a14="http://schemas.microsoft.com/office/drawing/2010/main">
-          <mc:Choice Requires="a14">
+        <mc:AlternateContent xmlns:mc="http://schemas.openxmlformats.org/markup-compatibility/2006">
+          <mc:Choice xmlns:a14="http://schemas.microsoft.com/office/drawing/2010/main" Requires="a14">
             <p:sp>
               <p:nvSpPr>
                 <p:cNvPr id="42" name="TextBox 41">
@@ -8331,7 +8332,7 @@
               </p:txBody>
             </p:sp>
           </mc:Choice>
-          <mc:Fallback xmlns="">
+          <mc:Fallback>
             <p:sp>
               <p:nvSpPr>
                 <p:cNvPr id="42" name="TextBox 41">
@@ -8376,8 +8377,8 @@
             </p:sp>
           </mc:Fallback>
         </mc:AlternateContent>
-        <mc:AlternateContent xmlns:mc="http://schemas.openxmlformats.org/markup-compatibility/2006" xmlns:a14="http://schemas.microsoft.com/office/drawing/2010/main">
-          <mc:Choice Requires="a14">
+        <mc:AlternateContent xmlns:mc="http://schemas.openxmlformats.org/markup-compatibility/2006">
+          <mc:Choice xmlns:a14="http://schemas.microsoft.com/office/drawing/2010/main" Requires="a14">
             <p:sp>
               <p:nvSpPr>
                 <p:cNvPr id="43" name="TextBox 42">
@@ -8458,7 +8459,7 @@
               </p:txBody>
             </p:sp>
           </mc:Choice>
-          <mc:Fallback xmlns="">
+          <mc:Fallback>
             <p:sp>
               <p:nvSpPr>
                 <p:cNvPr id="43" name="TextBox 42">
@@ -8503,8 +8504,8 @@
             </p:sp>
           </mc:Fallback>
         </mc:AlternateContent>
-        <mc:AlternateContent xmlns:mc="http://schemas.openxmlformats.org/markup-compatibility/2006" xmlns:a14="http://schemas.microsoft.com/office/drawing/2010/main">
-          <mc:Choice Requires="a14">
+        <mc:AlternateContent xmlns:mc="http://schemas.openxmlformats.org/markup-compatibility/2006">
+          <mc:Choice xmlns:a14="http://schemas.microsoft.com/office/drawing/2010/main" Requires="a14">
             <p:sp>
               <p:nvSpPr>
                 <p:cNvPr id="46" name="TextBox 45">
@@ -8543,14 +8544,14 @@
                         <m:sSub>
                           <m:sSubPr>
                             <m:ctrlPr>
-                              <a:rPr lang="en-US" i="1" smtClean="0">
+                              <a:rPr lang="en-US" i="1">
                                 <a:latin typeface="Cambria Math" panose="02040503050406030204" pitchFamily="18" charset="0"/>
                               </a:rPr>
                             </m:ctrlPr>
                           </m:sSubPr>
                           <m:e>
                             <m:r>
-                              <a:rPr lang="en-US" b="0" i="1" smtClean="0">
+                              <a:rPr lang="en-US" i="1">
                                 <a:latin typeface="Cambria Math" panose="02040503050406030204" pitchFamily="18" charset="0"/>
                               </a:rPr>
                               <m:t>𝑋</m:t>
@@ -8558,7 +8559,7 @@
                           </m:e>
                           <m:sub>
                             <m:r>
-                              <a:rPr lang="en-US" b="0" i="1" smtClean="0">
+                              <a:rPr lang="en-US" i="1">
                                 <a:latin typeface="Cambria Math" panose="02040503050406030204" pitchFamily="18" charset="0"/>
                               </a:rPr>
                               <m:t>2</m:t>
@@ -8579,7 +8580,7 @@
               </p:txBody>
             </p:sp>
           </mc:Choice>
-          <mc:Fallback xmlns="">
+          <mc:Fallback>
             <p:sp>
               <p:nvSpPr>
                 <p:cNvPr id="46" name="TextBox 45">
@@ -8785,8 +8786,8 @@
             </a:fontRef>
           </p:style>
         </p:cxnSp>
-        <mc:AlternateContent xmlns:mc="http://schemas.openxmlformats.org/markup-compatibility/2006" xmlns:a14="http://schemas.microsoft.com/office/drawing/2010/main">
-          <mc:Choice Requires="a14">
+        <mc:AlternateContent xmlns:mc="http://schemas.openxmlformats.org/markup-compatibility/2006">
+          <mc:Choice xmlns:a14="http://schemas.microsoft.com/office/drawing/2010/main" Requires="a14">
             <p:sp>
               <p:nvSpPr>
                 <p:cNvPr id="54" name="TextBox 53">
@@ -8867,7 +8868,7 @@
               </p:txBody>
             </p:sp>
           </mc:Choice>
-          <mc:Fallback xmlns="">
+          <mc:Fallback>
             <p:sp>
               <p:nvSpPr>
                 <p:cNvPr id="54" name="TextBox 53">
@@ -8912,8 +8913,8 @@
             </p:sp>
           </mc:Fallback>
         </mc:AlternateContent>
-        <mc:AlternateContent xmlns:mc="http://schemas.openxmlformats.org/markup-compatibility/2006" xmlns:a14="http://schemas.microsoft.com/office/drawing/2010/main">
-          <mc:Choice Requires="a14">
+        <mc:AlternateContent xmlns:mc="http://schemas.openxmlformats.org/markup-compatibility/2006">
+          <mc:Choice xmlns:a14="http://schemas.microsoft.com/office/drawing/2010/main" Requires="a14">
             <p:sp>
               <p:nvSpPr>
                 <p:cNvPr id="55" name="TextBox 54">
@@ -8994,7 +8995,7 @@
               </p:txBody>
             </p:sp>
           </mc:Choice>
-          <mc:Fallback xmlns="">
+          <mc:Fallback>
             <p:sp>
               <p:nvSpPr>
                 <p:cNvPr id="55" name="TextBox 54">
@@ -9039,8 +9040,8 @@
             </p:sp>
           </mc:Fallback>
         </mc:AlternateContent>
-        <mc:AlternateContent xmlns:mc="http://schemas.openxmlformats.org/markup-compatibility/2006" xmlns:a14="http://schemas.microsoft.com/office/drawing/2010/main">
-          <mc:Choice Requires="a14">
+        <mc:AlternateContent xmlns:mc="http://schemas.openxmlformats.org/markup-compatibility/2006">
+          <mc:Choice xmlns:a14="http://schemas.microsoft.com/office/drawing/2010/main" Requires="a14">
             <p:sp>
               <p:nvSpPr>
                 <p:cNvPr id="56" name="TextBox 55">
@@ -9121,7 +9122,7 @@
               </p:txBody>
             </p:sp>
           </mc:Choice>
-          <mc:Fallback xmlns="">
+          <mc:Fallback>
             <p:sp>
               <p:nvSpPr>
                 <p:cNvPr id="56" name="TextBox 55">
@@ -9145,7 +9146,7 @@
                   <a:avLst/>
                 </a:prstGeom>
                 <a:blipFill>
-                  <a:blip r:embed="rId10"/>
+                  <a:blip r:embed="rId8"/>
                   <a:stretch>
                     <a:fillRect/>
                   </a:stretch>
@@ -9166,8 +9167,8 @@
             </p:sp>
           </mc:Fallback>
         </mc:AlternateContent>
-        <mc:AlternateContent xmlns:mc="http://schemas.openxmlformats.org/markup-compatibility/2006" xmlns:a14="http://schemas.microsoft.com/office/drawing/2010/main">
-          <mc:Choice Requires="a14">
+        <mc:AlternateContent xmlns:mc="http://schemas.openxmlformats.org/markup-compatibility/2006">
+          <mc:Choice xmlns:a14="http://schemas.microsoft.com/office/drawing/2010/main" Requires="a14">
             <p:sp>
               <p:nvSpPr>
                 <p:cNvPr id="57" name="TextBox 56">
@@ -9248,7 +9249,7 @@
               </p:txBody>
             </p:sp>
           </mc:Choice>
-          <mc:Fallback xmlns="">
+          <mc:Fallback>
             <p:sp>
               <p:nvSpPr>
                 <p:cNvPr id="57" name="TextBox 56">
@@ -9272,7 +9273,7 @@
                   <a:avLst/>
                 </a:prstGeom>
                 <a:blipFill>
-                  <a:blip r:embed="rId11"/>
+                  <a:blip r:embed="rId10"/>
                   <a:stretch>
                     <a:fillRect b="-2000"/>
                   </a:stretch>
@@ -9293,8 +9294,8 @@
             </p:sp>
           </mc:Fallback>
         </mc:AlternateContent>
-        <mc:AlternateContent xmlns:mc="http://schemas.openxmlformats.org/markup-compatibility/2006" xmlns:a14="http://schemas.microsoft.com/office/drawing/2010/main">
-          <mc:Choice Requires="a14">
+        <mc:AlternateContent xmlns:mc="http://schemas.openxmlformats.org/markup-compatibility/2006">
+          <mc:Choice xmlns:a14="http://schemas.microsoft.com/office/drawing/2010/main" Requires="a14">
             <p:sp>
               <p:nvSpPr>
                 <p:cNvPr id="58" name="TextBox 57">
@@ -9375,7 +9376,7 @@
               </p:txBody>
             </p:sp>
           </mc:Choice>
-          <mc:Fallback xmlns="">
+          <mc:Fallback>
             <p:sp>
               <p:nvSpPr>
                 <p:cNvPr id="58" name="TextBox 57">
@@ -9399,7 +9400,7 @@
                   <a:avLst/>
                 </a:prstGeom>
                 <a:blipFill>
-                  <a:blip r:embed="rId12"/>
+                  <a:blip r:embed="rId11"/>
                   <a:stretch>
                     <a:fillRect b="-2000"/>
                   </a:stretch>
@@ -9420,8 +9421,8 @@
             </p:sp>
           </mc:Fallback>
         </mc:AlternateContent>
-        <mc:AlternateContent xmlns:mc="http://schemas.openxmlformats.org/markup-compatibility/2006" xmlns:a14="http://schemas.microsoft.com/office/drawing/2010/main">
-          <mc:Choice Requires="a14">
+        <mc:AlternateContent xmlns:mc="http://schemas.openxmlformats.org/markup-compatibility/2006">
+          <mc:Choice xmlns:a14="http://schemas.microsoft.com/office/drawing/2010/main" Requires="a14">
             <p:sp>
               <p:nvSpPr>
                 <p:cNvPr id="59" name="TextBox 58">
@@ -9460,14 +9461,14 @@
                         <m:sSub>
                           <m:sSubPr>
                             <m:ctrlPr>
-                              <a:rPr lang="en-US" i="1" smtClean="0">
+                              <a:rPr lang="en-US" i="1">
                                 <a:latin typeface="Cambria Math" panose="02040503050406030204" pitchFamily="18" charset="0"/>
                               </a:rPr>
                             </m:ctrlPr>
                           </m:sSubPr>
                           <m:e>
                             <m:r>
-                              <a:rPr lang="en-US" b="0" i="1" smtClean="0">
+                              <a:rPr lang="en-US" i="1">
                                 <a:latin typeface="Cambria Math" panose="02040503050406030204" pitchFamily="18" charset="0"/>
                               </a:rPr>
                               <m:t>𝑋</m:t>
@@ -9475,7 +9476,7 @@
                           </m:e>
                           <m:sub>
                             <m:r>
-                              <a:rPr lang="en-US" b="0" i="1" smtClean="0">
+                              <a:rPr lang="en-US" i="1">
                                 <a:latin typeface="Cambria Math" panose="02040503050406030204" pitchFamily="18" charset="0"/>
                               </a:rPr>
                               <m:t>3</m:t>
@@ -9496,7 +9497,7 @@
               </p:txBody>
             </p:sp>
           </mc:Choice>
-          <mc:Fallback xmlns="">
+          <mc:Fallback>
             <p:sp>
               <p:nvSpPr>
                 <p:cNvPr id="59" name="TextBox 58">
@@ -9520,7 +9521,7 @@
                   <a:avLst/>
                 </a:prstGeom>
                 <a:blipFill>
-                  <a:blip r:embed="rId13"/>
+                  <a:blip r:embed="rId12"/>
                   <a:stretch>
                     <a:fillRect/>
                   </a:stretch>
@@ -9541,8 +9542,8 @@
             </p:sp>
           </mc:Fallback>
         </mc:AlternateContent>
-        <mc:AlternateContent xmlns:mc="http://schemas.openxmlformats.org/markup-compatibility/2006" xmlns:a14="http://schemas.microsoft.com/office/drawing/2010/main">
-          <mc:Choice Requires="a14">
+        <mc:AlternateContent xmlns:mc="http://schemas.openxmlformats.org/markup-compatibility/2006">
+          <mc:Choice xmlns:a14="http://schemas.microsoft.com/office/drawing/2010/main" Requires="a14">
             <p:sp>
               <p:nvSpPr>
                 <p:cNvPr id="60" name="TextBox 59">
@@ -9581,14 +9582,14 @@
                         <m:sSub>
                           <m:sSubPr>
                             <m:ctrlPr>
-                              <a:rPr lang="en-US" i="1" smtClean="0">
+                              <a:rPr lang="en-US" i="1">
                                 <a:latin typeface="Cambria Math" panose="02040503050406030204" pitchFamily="18" charset="0"/>
                               </a:rPr>
                             </m:ctrlPr>
                           </m:sSubPr>
                           <m:e>
                             <m:r>
-                              <a:rPr lang="en-US" b="0" i="1" smtClean="0">
+                              <a:rPr lang="en-US" i="1">
                                 <a:latin typeface="Cambria Math" panose="02040503050406030204" pitchFamily="18" charset="0"/>
                               </a:rPr>
                               <m:t>𝑋</m:t>
@@ -9596,7 +9597,7 @@
                           </m:e>
                           <m:sub>
                             <m:r>
-                              <a:rPr lang="en-US" b="0" i="1" smtClean="0">
+                              <a:rPr lang="en-US" i="1">
                                 <a:latin typeface="Cambria Math" panose="02040503050406030204" pitchFamily="18" charset="0"/>
                               </a:rPr>
                               <m:t>4</m:t>
@@ -9617,7 +9618,7 @@
               </p:txBody>
             </p:sp>
           </mc:Choice>
-          <mc:Fallback xmlns="">
+          <mc:Fallback>
             <p:sp>
               <p:nvSpPr>
                 <p:cNvPr id="60" name="TextBox 59">
@@ -9641,7 +9642,7 @@
                   <a:avLst/>
                 </a:prstGeom>
                 <a:blipFill>
-                  <a:blip r:embed="rId14"/>
+                  <a:blip r:embed="rId13"/>
                   <a:stretch>
                     <a:fillRect/>
                   </a:stretch>
@@ -9662,8 +9663,8 @@
             </p:sp>
           </mc:Fallback>
         </mc:AlternateContent>
-        <mc:AlternateContent xmlns:mc="http://schemas.openxmlformats.org/markup-compatibility/2006" xmlns:a14="http://schemas.microsoft.com/office/drawing/2010/main">
-          <mc:Choice Requires="a14">
+        <mc:AlternateContent xmlns:mc="http://schemas.openxmlformats.org/markup-compatibility/2006">
+          <mc:Choice xmlns:a14="http://schemas.microsoft.com/office/drawing/2010/main" Requires="a14">
             <p:sp>
               <p:nvSpPr>
                 <p:cNvPr id="61" name="TextBox 60">
@@ -9744,7 +9745,7 @@
               </p:txBody>
             </p:sp>
           </mc:Choice>
-          <mc:Fallback xmlns="">
+          <mc:Fallback>
             <p:sp>
               <p:nvSpPr>
                 <p:cNvPr id="61" name="TextBox 60">
@@ -9768,7 +9769,7 @@
                   <a:avLst/>
                 </a:prstGeom>
                 <a:blipFill>
-                  <a:blip r:embed="rId15"/>
+                  <a:blip r:embed="rId14"/>
                   <a:stretch>
                     <a:fillRect/>
                   </a:stretch>
@@ -9789,8 +9790,8 @@
             </p:sp>
           </mc:Fallback>
         </mc:AlternateContent>
-        <mc:AlternateContent xmlns:mc="http://schemas.openxmlformats.org/markup-compatibility/2006" xmlns:a14="http://schemas.microsoft.com/office/drawing/2010/main">
-          <mc:Choice Requires="a14">
+        <mc:AlternateContent xmlns:mc="http://schemas.openxmlformats.org/markup-compatibility/2006">
+          <mc:Choice xmlns:a14="http://schemas.microsoft.com/office/drawing/2010/main" Requires="a14">
             <p:sp>
               <p:nvSpPr>
                 <p:cNvPr id="62" name="TextBox 61">
@@ -9871,7 +9872,7 @@
               </p:txBody>
             </p:sp>
           </mc:Choice>
-          <mc:Fallback xmlns="">
+          <mc:Fallback>
             <p:sp>
               <p:nvSpPr>
                 <p:cNvPr id="62" name="TextBox 61">
@@ -9895,7 +9896,7 @@
                   <a:avLst/>
                 </a:prstGeom>
                 <a:blipFill>
-                  <a:blip r:embed="rId16"/>
+                  <a:blip r:embed="rId15"/>
                   <a:stretch>
                     <a:fillRect/>
                   </a:stretch>
@@ -9916,8 +9917,8 @@
             </p:sp>
           </mc:Fallback>
         </mc:AlternateContent>
-        <mc:AlternateContent xmlns:mc="http://schemas.openxmlformats.org/markup-compatibility/2006" xmlns:a14="http://schemas.microsoft.com/office/drawing/2010/main">
-          <mc:Choice Requires="a14">
+        <mc:AlternateContent xmlns:mc="http://schemas.openxmlformats.org/markup-compatibility/2006">
+          <mc:Choice xmlns:a14="http://schemas.microsoft.com/office/drawing/2010/main" Requires="a14">
             <p:sp>
               <p:nvSpPr>
                 <p:cNvPr id="63" name="TextBox 62">
@@ -9998,7 +9999,7 @@
               </p:txBody>
             </p:sp>
           </mc:Choice>
-          <mc:Fallback xmlns="">
+          <mc:Fallback>
             <p:sp>
               <p:nvSpPr>
                 <p:cNvPr id="63" name="TextBox 62">
@@ -10022,7 +10023,7 @@
                   <a:avLst/>
                 </a:prstGeom>
                 <a:blipFill>
-                  <a:blip r:embed="rId17"/>
+                  <a:blip r:embed="rId16"/>
                   <a:stretch>
                     <a:fillRect b="-2000"/>
                   </a:stretch>
@@ -10043,8 +10044,8 @@
             </p:sp>
           </mc:Fallback>
         </mc:AlternateContent>
-        <mc:AlternateContent xmlns:mc="http://schemas.openxmlformats.org/markup-compatibility/2006" xmlns:a14="http://schemas.microsoft.com/office/drawing/2010/main">
-          <mc:Choice Requires="a14">
+        <mc:AlternateContent xmlns:mc="http://schemas.openxmlformats.org/markup-compatibility/2006">
+          <mc:Choice xmlns:a14="http://schemas.microsoft.com/office/drawing/2010/main" Requires="a14">
             <p:sp>
               <p:nvSpPr>
                 <p:cNvPr id="64" name="TextBox 63">
@@ -10125,7 +10126,7 @@
               </p:txBody>
             </p:sp>
           </mc:Choice>
-          <mc:Fallback xmlns="">
+          <mc:Fallback>
             <p:sp>
               <p:nvSpPr>
                 <p:cNvPr id="64" name="TextBox 63">
@@ -10149,7 +10150,7 @@
                   <a:avLst/>
                 </a:prstGeom>
                 <a:blipFill>
-                  <a:blip r:embed="rId18"/>
+                  <a:blip r:embed="rId17"/>
                   <a:stretch>
                     <a:fillRect b="-2000"/>
                   </a:stretch>
@@ -10192,6 +10193,3520 @@
         <p:cNvPr id="1" name="">
           <a:extLst>
             <a:ext uri="{FF2B5EF4-FFF2-40B4-BE49-F238E27FC236}">
+              <a16:creationId xmlns:a16="http://schemas.microsoft.com/office/drawing/2014/main" id="{E307922A-415E-56DF-A627-72EE207D8668}"/>
+            </a:ext>
+          </a:extLst>
+        </p:cNvPr>
+        <p:cNvGrpSpPr/>
+        <p:nvPr/>
+      </p:nvGrpSpPr>
+      <p:grpSpPr>
+        <a:xfrm>
+          <a:off x="0" y="0"/>
+          <a:ext cx="0" cy="0"/>
+          <a:chOff x="0" y="0"/>
+          <a:chExt cx="0" cy="0"/>
+        </a:xfrm>
+      </p:grpSpPr>
+      <p:grpSp>
+        <p:nvGrpSpPr>
+          <p:cNvPr id="25" name="Group 24">
+            <a:extLst>
+              <a:ext uri="{FF2B5EF4-FFF2-40B4-BE49-F238E27FC236}">
+                <a16:creationId xmlns:a16="http://schemas.microsoft.com/office/drawing/2014/main" id="{485C1D2D-8A85-1F97-968F-4574421417C4}"/>
+              </a:ext>
+            </a:extLst>
+          </p:cNvPr>
+          <p:cNvGrpSpPr/>
+          <p:nvPr/>
+        </p:nvGrpSpPr>
+        <p:grpSpPr>
+          <a:xfrm>
+            <a:off x="1683994" y="3495144"/>
+            <a:ext cx="12720009" cy="3314528"/>
+            <a:chOff x="1683994" y="3495144"/>
+            <a:chExt cx="12720009" cy="3314528"/>
+          </a:xfrm>
+        </p:grpSpPr>
+        <p:grpSp>
+          <p:nvGrpSpPr>
+            <p:cNvPr id="3" name="Group 2">
+              <a:extLst>
+                <a:ext uri="{FF2B5EF4-FFF2-40B4-BE49-F238E27FC236}">
+                  <a16:creationId xmlns:a16="http://schemas.microsoft.com/office/drawing/2014/main" id="{A7EBA020-F881-0A4D-4E88-27F15E966C33}"/>
+                </a:ext>
+              </a:extLst>
+            </p:cNvPr>
+            <p:cNvGrpSpPr/>
+            <p:nvPr/>
+          </p:nvGrpSpPr>
+          <p:grpSpPr>
+            <a:xfrm>
+              <a:off x="1683994" y="3495144"/>
+              <a:ext cx="772327" cy="1085155"/>
+              <a:chOff x="656020" y="3487274"/>
+              <a:chExt cx="772326" cy="1085155"/>
+            </a:xfrm>
+          </p:grpSpPr>
+          <mc:AlternateContent xmlns:mc="http://schemas.openxmlformats.org/markup-compatibility/2006">
+            <mc:Choice xmlns:a14="http://schemas.microsoft.com/office/drawing/2010/main" Requires="a14">
+              <p:sp>
+                <p:nvSpPr>
+                  <p:cNvPr id="2" name="TextBox 1">
+                    <a:extLst>
+                      <a:ext uri="{FF2B5EF4-FFF2-40B4-BE49-F238E27FC236}">
+                        <a16:creationId xmlns:a16="http://schemas.microsoft.com/office/drawing/2014/main" id="{3A6DE2DF-FE11-331C-D96B-3825BE041C9B}"/>
+                      </a:ext>
+                    </a:extLst>
+                  </p:cNvPr>
+                  <p:cNvSpPr txBox="1"/>
+                  <p:nvPr/>
+                </p:nvSpPr>
+                <p:spPr>
+                  <a:xfrm>
+                    <a:off x="771724" y="3487274"/>
+                    <a:ext cx="648318" cy="584775"/>
+                  </a:xfrm>
+                  <a:prstGeom prst="rect">
+                    <a:avLst/>
+                  </a:prstGeom>
+                  <a:noFill/>
+                </p:spPr>
+                <p:txBody>
+                  <a:bodyPr wrap="none" rtlCol="0">
+                    <a:spAutoFit/>
+                  </a:bodyPr>
+                  <a:lstStyle/>
+                  <a:p>
+                    <a:pPr/>
+                    <a14:m>
+                      <m:oMathPara xmlns:m="http://schemas.openxmlformats.org/officeDocument/2006/math">
+                        <m:oMathParaPr>
+                          <m:jc m:val="centerGroup"/>
+                        </m:oMathParaPr>
+                        <m:oMath xmlns:m="http://schemas.openxmlformats.org/officeDocument/2006/math">
+                          <m:sSub>
+                            <m:sSubPr>
+                              <m:ctrlPr>
+                                <a:rPr lang="en-US" sz="3200" i="1" smtClean="0">
+                                  <a:latin typeface="Cambria Math" panose="02040503050406030204" pitchFamily="18" charset="0"/>
+                                </a:rPr>
+                              </m:ctrlPr>
+                            </m:sSubPr>
+                            <m:e>
+                              <m:r>
+                                <a:rPr lang="en-US" sz="3200" i="1">
+                                  <a:latin typeface="Cambria Math" panose="02040503050406030204" pitchFamily="18" charset="0"/>
+                                </a:rPr>
+                                <m:t>𝑇</m:t>
+                              </m:r>
+                            </m:e>
+                            <m:sub>
+                              <m:r>
+                                <a:rPr lang="en-US" sz="3200" i="1">
+                                  <a:latin typeface="Cambria Math" panose="02040503050406030204" pitchFamily="18" charset="0"/>
+                                </a:rPr>
+                                <m:t>1</m:t>
+                              </m:r>
+                            </m:sub>
+                          </m:sSub>
+                        </m:oMath>
+                      </m:oMathPara>
+                    </a14:m>
+                    <a:endParaRPr lang="en-US" sz="3200" dirty="0"/>
+                  </a:p>
+                </p:txBody>
+              </p:sp>
+            </mc:Choice>
+            <mc:Fallback>
+              <p:sp>
+                <p:nvSpPr>
+                  <p:cNvPr id="2" name="TextBox 1">
+                    <a:extLst>
+                      <a:ext uri="{FF2B5EF4-FFF2-40B4-BE49-F238E27FC236}">
+                        <a16:creationId xmlns:a16="http://schemas.microsoft.com/office/drawing/2014/main" id="{3A6DE2DF-FE11-331C-D96B-3825BE041C9B}"/>
+                      </a:ext>
+                    </a:extLst>
+                  </p:cNvPr>
+                  <p:cNvSpPr txBox="1">
+                    <a:spLocks noRot="1" noChangeAspect="1" noMove="1" noResize="1" noEditPoints="1" noAdjustHandles="1" noChangeArrowheads="1" noChangeShapeType="1" noTextEdit="1"/>
+                  </p:cNvSpPr>
+                  <p:nvPr/>
+                </p:nvSpPr>
+                <p:spPr>
+                  <a:xfrm>
+                    <a:off x="771724" y="3487274"/>
+                    <a:ext cx="648318" cy="584775"/>
+                  </a:xfrm>
+                  <a:prstGeom prst="rect">
+                    <a:avLst/>
+                  </a:prstGeom>
+                  <a:blipFill>
+                    <a:blip r:embed="rId2"/>
+                    <a:stretch>
+                      <a:fillRect/>
+                    </a:stretch>
+                  </a:blipFill>
+                </p:spPr>
+                <p:txBody>
+                  <a:bodyPr/>
+                  <a:lstStyle/>
+                  <a:p>
+                    <a:r>
+                      <a:rPr lang="en-US">
+                        <a:noFill/>
+                      </a:rPr>
+                      <a:t> </a:t>
+                    </a:r>
+                  </a:p>
+                </p:txBody>
+              </p:sp>
+            </mc:Fallback>
+          </mc:AlternateContent>
+          <p:sp>
+            <p:nvSpPr>
+              <p:cNvPr id="7" name="Oval 6">
+                <a:extLst>
+                  <a:ext uri="{FF2B5EF4-FFF2-40B4-BE49-F238E27FC236}">
+                    <a16:creationId xmlns:a16="http://schemas.microsoft.com/office/drawing/2014/main" id="{576F1AA3-7973-3EA2-0037-1ABED2DCCDF7}"/>
+                  </a:ext>
+                </a:extLst>
+              </p:cNvPr>
+              <p:cNvSpPr/>
+              <p:nvPr/>
+            </p:nvSpPr>
+            <p:spPr>
+              <a:xfrm>
+                <a:off x="1005792" y="4061941"/>
+                <a:ext cx="182880" cy="182880"/>
+              </a:xfrm>
+              <a:prstGeom prst="ellipse">
+                <a:avLst/>
+              </a:prstGeom>
+            </p:spPr>
+            <p:style>
+              <a:lnRef idx="2">
+                <a:schemeClr val="accent6">
+                  <a:shade val="15000"/>
+                </a:schemeClr>
+              </a:lnRef>
+              <a:fillRef idx="1">
+                <a:schemeClr val="accent6"/>
+              </a:fillRef>
+              <a:effectRef idx="0">
+                <a:schemeClr val="accent6"/>
+              </a:effectRef>
+              <a:fontRef idx="minor">
+                <a:schemeClr val="lt1"/>
+              </a:fontRef>
+            </p:style>
+            <p:txBody>
+              <a:bodyPr rtlCol="0" anchor="ctr"/>
+              <a:lstStyle/>
+              <a:p>
+                <a:pPr algn="ctr"/>
+                <a:endParaRPr lang="en-US" dirty="0"/>
+              </a:p>
+            </p:txBody>
+          </p:sp>
+          <mc:AlternateContent xmlns:mc="http://schemas.openxmlformats.org/markup-compatibility/2006">
+            <mc:Choice xmlns:a14="http://schemas.microsoft.com/office/drawing/2010/main" Requires="a14">
+              <p:sp>
+                <p:nvSpPr>
+                  <p:cNvPr id="43" name="TextBox 42">
+                    <a:extLst>
+                      <a:ext uri="{FF2B5EF4-FFF2-40B4-BE49-F238E27FC236}">
+                        <a16:creationId xmlns:a16="http://schemas.microsoft.com/office/drawing/2014/main" id="{E5FD6670-F3A6-2439-FF2A-6B606D2F17E3}"/>
+                      </a:ext>
+                    </a:extLst>
+                  </p:cNvPr>
+                  <p:cNvSpPr txBox="1"/>
+                  <p:nvPr/>
+                </p:nvSpPr>
+                <p:spPr>
+                  <a:xfrm>
+                    <a:off x="656020" y="4264652"/>
+                    <a:ext cx="772326" cy="307777"/>
+                  </a:xfrm>
+                  <a:prstGeom prst="rect">
+                    <a:avLst/>
+                  </a:prstGeom>
+                  <a:noFill/>
+                </p:spPr>
+                <p:txBody>
+                  <a:bodyPr wrap="none" rtlCol="0">
+                    <a:spAutoFit/>
+                  </a:bodyPr>
+                  <a:lstStyle/>
+                  <a:p>
+                    <a:pPr/>
+                    <a14:m>
+                      <m:oMathPara xmlns:m="http://schemas.openxmlformats.org/officeDocument/2006/math">
+                        <m:oMathParaPr>
+                          <m:jc m:val="centerGroup"/>
+                        </m:oMathParaPr>
+                        <m:oMath xmlns:m="http://schemas.openxmlformats.org/officeDocument/2006/math">
+                          <m:r>
+                            <a:rPr lang="en-US" sz="1400" i="1" smtClean="0">
+                              <a:latin typeface="Cambria Math" panose="02040503050406030204" pitchFamily="18" charset="0"/>
+                            </a:rPr>
+                            <m:t> </m:t>
+                          </m:r>
+                          <m:sSub>
+                            <m:sSubPr>
+                              <m:ctrlPr>
+                                <a:rPr lang="en-US" sz="1400" i="1">
+                                  <a:latin typeface="Cambria Math" panose="02040503050406030204" pitchFamily="18" charset="0"/>
+                                </a:rPr>
+                              </m:ctrlPr>
+                            </m:sSubPr>
+                            <m:e>
+                              <m:r>
+                                <a:rPr lang="en-US" sz="1400" i="1">
+                                  <a:latin typeface="Cambria Math" panose="02040503050406030204" pitchFamily="18" charset="0"/>
+                                </a:rPr>
+                                <m:t>𝑝</m:t>
+                              </m:r>
+                            </m:e>
+                            <m:sub>
+                              <m:r>
+                                <a:rPr lang="en-US" sz="1400" i="1">
+                                  <a:latin typeface="Cambria Math" panose="02040503050406030204" pitchFamily="18" charset="0"/>
+                                </a:rPr>
+                                <m:t>𝑣</m:t>
+                              </m:r>
+                            </m:sub>
+                          </m:sSub>
+                          <m:r>
+                            <a:rPr lang="en-US" sz="1400" i="1">
+                              <a:latin typeface="Cambria Math" panose="02040503050406030204" pitchFamily="18" charset="0"/>
+                            </a:rPr>
+                            <m:t>=1</m:t>
+                          </m:r>
+                        </m:oMath>
+                      </m:oMathPara>
+                    </a14:m>
+                    <a:endParaRPr lang="en-US" dirty="0"/>
+                  </a:p>
+                </p:txBody>
+              </p:sp>
+            </mc:Choice>
+            <mc:Fallback>
+              <p:sp>
+                <p:nvSpPr>
+                  <p:cNvPr id="43" name="TextBox 42">
+                    <a:extLst>
+                      <a:ext uri="{FF2B5EF4-FFF2-40B4-BE49-F238E27FC236}">
+                        <a16:creationId xmlns:a16="http://schemas.microsoft.com/office/drawing/2014/main" id="{E5FD6670-F3A6-2439-FF2A-6B606D2F17E3}"/>
+                      </a:ext>
+                    </a:extLst>
+                  </p:cNvPr>
+                  <p:cNvSpPr txBox="1">
+                    <a:spLocks noRot="1" noChangeAspect="1" noMove="1" noResize="1" noEditPoints="1" noAdjustHandles="1" noChangeArrowheads="1" noChangeShapeType="1" noTextEdit="1"/>
+                  </p:cNvSpPr>
+                  <p:nvPr/>
+                </p:nvSpPr>
+                <p:spPr>
+                  <a:xfrm>
+                    <a:off x="656020" y="4264652"/>
+                    <a:ext cx="772326" cy="307777"/>
+                  </a:xfrm>
+                  <a:prstGeom prst="rect">
+                    <a:avLst/>
+                  </a:prstGeom>
+                  <a:blipFill>
+                    <a:blip r:embed="rId3"/>
+                    <a:stretch>
+                      <a:fillRect b="-2000"/>
+                    </a:stretch>
+                  </a:blipFill>
+                </p:spPr>
+                <p:txBody>
+                  <a:bodyPr/>
+                  <a:lstStyle/>
+                  <a:p>
+                    <a:r>
+                      <a:rPr lang="en-US">
+                        <a:noFill/>
+                      </a:rPr>
+                      <a:t> </a:t>
+                    </a:r>
+                  </a:p>
+                </p:txBody>
+              </p:sp>
+            </mc:Fallback>
+          </mc:AlternateContent>
+        </p:grpSp>
+        <p:grpSp>
+          <p:nvGrpSpPr>
+            <p:cNvPr id="13" name="Group 12">
+              <a:extLst>
+                <a:ext uri="{FF2B5EF4-FFF2-40B4-BE49-F238E27FC236}">
+                  <a16:creationId xmlns:a16="http://schemas.microsoft.com/office/drawing/2014/main" id="{3D259F8A-099A-2906-C181-F82A6A7A93CB}"/>
+                </a:ext>
+              </a:extLst>
+            </p:cNvPr>
+            <p:cNvGrpSpPr/>
+            <p:nvPr/>
+          </p:nvGrpSpPr>
+          <p:grpSpPr>
+            <a:xfrm>
+              <a:off x="3137096" y="3495144"/>
+              <a:ext cx="2318849" cy="3308899"/>
+              <a:chOff x="1792170" y="3487274"/>
+              <a:chExt cx="2318849" cy="3308897"/>
+            </a:xfrm>
+          </p:grpSpPr>
+          <p:grpSp>
+            <p:nvGrpSpPr>
+              <p:cNvPr id="15" name="Group 14">
+                <a:extLst>
+                  <a:ext uri="{FF2B5EF4-FFF2-40B4-BE49-F238E27FC236}">
+                    <a16:creationId xmlns:a16="http://schemas.microsoft.com/office/drawing/2014/main" id="{0F769FCC-A313-C14B-FEB4-D91A88F2098F}"/>
+                  </a:ext>
+                </a:extLst>
+              </p:cNvPr>
+              <p:cNvGrpSpPr/>
+              <p:nvPr/>
+            </p:nvGrpSpPr>
+            <p:grpSpPr>
+              <a:xfrm>
+                <a:off x="2139497" y="4072049"/>
+                <a:ext cx="1614871" cy="770646"/>
+                <a:chOff x="2822398" y="2103601"/>
+                <a:chExt cx="1614871" cy="770646"/>
+              </a:xfrm>
+            </p:grpSpPr>
+            <p:cxnSp>
+              <p:nvCxnSpPr>
+                <p:cNvPr id="4" name="Straight Connector 3">
+                  <a:extLst>
+                    <a:ext uri="{FF2B5EF4-FFF2-40B4-BE49-F238E27FC236}">
+                      <a16:creationId xmlns:a16="http://schemas.microsoft.com/office/drawing/2014/main" id="{20029E5B-23CC-1A25-8BF8-172F85964C07}"/>
+                    </a:ext>
+                  </a:extLst>
+                </p:cNvPr>
+                <p:cNvCxnSpPr>
+                  <a:cxnSpLocks/>
+                </p:cNvCxnSpPr>
+                <p:nvPr/>
+              </p:nvCxnSpPr>
+              <p:spPr>
+                <a:xfrm rot="2400000">
+                  <a:off x="3522869" y="2488924"/>
+                  <a:ext cx="914400" cy="0"/>
+                </a:xfrm>
+                <a:prstGeom prst="line">
+                  <a:avLst/>
+                </a:prstGeom>
+              </p:spPr>
+              <p:style>
+                <a:lnRef idx="2">
+                  <a:schemeClr val="dk1"/>
+                </a:lnRef>
+                <a:fillRef idx="0">
+                  <a:schemeClr val="dk1"/>
+                </a:fillRef>
+                <a:effectRef idx="1">
+                  <a:schemeClr val="dk1"/>
+                </a:effectRef>
+                <a:fontRef idx="minor">
+                  <a:schemeClr val="tx1"/>
+                </a:fontRef>
+              </p:style>
+            </p:cxnSp>
+            <p:cxnSp>
+              <p:nvCxnSpPr>
+                <p:cNvPr id="5" name="Straight Connector 4">
+                  <a:extLst>
+                    <a:ext uri="{FF2B5EF4-FFF2-40B4-BE49-F238E27FC236}">
+                      <a16:creationId xmlns:a16="http://schemas.microsoft.com/office/drawing/2014/main" id="{4C0EC84A-A9EA-9D37-6DA4-590E184A837A}"/>
+                    </a:ext>
+                  </a:extLst>
+                </p:cNvPr>
+                <p:cNvCxnSpPr>
+                  <a:cxnSpLocks/>
+                </p:cNvCxnSpPr>
+                <p:nvPr/>
+              </p:nvCxnSpPr>
+              <p:spPr>
+                <a:xfrm rot="-2400000">
+                  <a:off x="2822398" y="2488924"/>
+                  <a:ext cx="914400" cy="0"/>
+                </a:xfrm>
+                <a:prstGeom prst="line">
+                  <a:avLst/>
+                </a:prstGeom>
+              </p:spPr>
+              <p:style>
+                <a:lnRef idx="2">
+                  <a:schemeClr val="dk1"/>
+                </a:lnRef>
+                <a:fillRef idx="0">
+                  <a:schemeClr val="dk1"/>
+                </a:fillRef>
+                <a:effectRef idx="1">
+                  <a:schemeClr val="dk1"/>
+                </a:effectRef>
+                <a:fontRef idx="minor">
+                  <a:schemeClr val="tx1"/>
+                </a:fontRef>
+              </p:style>
+            </p:cxnSp>
+            <p:sp>
+              <p:nvSpPr>
+                <p:cNvPr id="6" name="Oval 5">
+                  <a:extLst>
+                    <a:ext uri="{FF2B5EF4-FFF2-40B4-BE49-F238E27FC236}">
+                      <a16:creationId xmlns:a16="http://schemas.microsoft.com/office/drawing/2014/main" id="{CB49A3FD-99A2-913C-8DDA-2E98749C23AC}"/>
+                    </a:ext>
+                  </a:extLst>
+                </p:cNvPr>
+                <p:cNvSpPr/>
+                <p:nvPr/>
+              </p:nvSpPr>
+              <p:spPr>
+                <a:xfrm>
+                  <a:off x="2837922" y="2691367"/>
+                  <a:ext cx="182880" cy="182880"/>
+                </a:xfrm>
+                <a:prstGeom prst="ellipse">
+                  <a:avLst/>
+                </a:prstGeom>
+              </p:spPr>
+              <p:style>
+                <a:lnRef idx="2">
+                  <a:schemeClr val="accent6">
+                    <a:shade val="15000"/>
+                  </a:schemeClr>
+                </a:lnRef>
+                <a:fillRef idx="1">
+                  <a:schemeClr val="accent6"/>
+                </a:fillRef>
+                <a:effectRef idx="0">
+                  <a:schemeClr val="accent6"/>
+                </a:effectRef>
+                <a:fontRef idx="minor">
+                  <a:schemeClr val="lt1"/>
+                </a:fontRef>
+              </p:style>
+              <p:txBody>
+                <a:bodyPr rtlCol="0" anchor="ctr"/>
+                <a:lstStyle/>
+                <a:p>
+                  <a:pPr algn="ctr"/>
+                  <a:endParaRPr lang="en-US"/>
+                </a:p>
+              </p:txBody>
+            </p:sp>
+            <p:sp>
+              <p:nvSpPr>
+                <p:cNvPr id="8" name="Oval 7">
+                  <a:extLst>
+                    <a:ext uri="{FF2B5EF4-FFF2-40B4-BE49-F238E27FC236}">
+                      <a16:creationId xmlns:a16="http://schemas.microsoft.com/office/drawing/2014/main" id="{6F4C470F-C536-653E-61E4-E53BFFF9F810}"/>
+                    </a:ext>
+                  </a:extLst>
+                </p:cNvPr>
+                <p:cNvSpPr/>
+                <p:nvPr/>
+              </p:nvSpPr>
+              <p:spPr>
+                <a:xfrm>
+                  <a:off x="4238866" y="2691367"/>
+                  <a:ext cx="182880" cy="182880"/>
+                </a:xfrm>
+                <a:prstGeom prst="ellipse">
+                  <a:avLst/>
+                </a:prstGeom>
+              </p:spPr>
+              <p:style>
+                <a:lnRef idx="2">
+                  <a:schemeClr val="accent6">
+                    <a:shade val="15000"/>
+                  </a:schemeClr>
+                </a:lnRef>
+                <a:fillRef idx="1">
+                  <a:schemeClr val="accent6"/>
+                </a:fillRef>
+                <a:effectRef idx="0">
+                  <a:schemeClr val="accent6"/>
+                </a:effectRef>
+                <a:fontRef idx="minor">
+                  <a:schemeClr val="lt1"/>
+                </a:fontRef>
+              </p:style>
+              <p:txBody>
+                <a:bodyPr rtlCol="0" anchor="ctr"/>
+                <a:lstStyle/>
+                <a:p>
+                  <a:pPr algn="ctr"/>
+                  <a:endParaRPr lang="en-US" dirty="0"/>
+                </a:p>
+              </p:txBody>
+            </p:sp>
+            <p:sp>
+              <p:nvSpPr>
+                <p:cNvPr id="9" name="Oval 8">
+                  <a:extLst>
+                    <a:ext uri="{FF2B5EF4-FFF2-40B4-BE49-F238E27FC236}">
+                      <a16:creationId xmlns:a16="http://schemas.microsoft.com/office/drawing/2014/main" id="{236FFBE8-304C-B4B8-932C-5301FA7408E6}"/>
+                    </a:ext>
+                  </a:extLst>
+                </p:cNvPr>
+                <p:cNvSpPr/>
+                <p:nvPr/>
+              </p:nvSpPr>
+              <p:spPr>
+                <a:xfrm>
+                  <a:off x="3538392" y="2103601"/>
+                  <a:ext cx="182880" cy="182880"/>
+                </a:xfrm>
+                <a:prstGeom prst="ellipse">
+                  <a:avLst/>
+                </a:prstGeom>
+                <a:solidFill>
+                  <a:srgbClr val="FF0000"/>
+                </a:solidFill>
+                <a:ln>
+                  <a:solidFill>
+                    <a:schemeClr val="tx1"/>
+                  </a:solidFill>
+                </a:ln>
+              </p:spPr>
+              <p:style>
+                <a:lnRef idx="2">
+                  <a:schemeClr val="accent2">
+                    <a:shade val="15000"/>
+                  </a:schemeClr>
+                </a:lnRef>
+                <a:fillRef idx="1">
+                  <a:schemeClr val="accent2"/>
+                </a:fillRef>
+                <a:effectRef idx="0">
+                  <a:schemeClr val="accent2"/>
+                </a:effectRef>
+                <a:fontRef idx="minor">
+                  <a:schemeClr val="lt1"/>
+                </a:fontRef>
+              </p:style>
+              <p:txBody>
+                <a:bodyPr rtlCol="0" anchor="ctr"/>
+                <a:lstStyle/>
+                <a:p>
+                  <a:pPr algn="ctr"/>
+                  <a:endParaRPr lang="en-US" dirty="0"/>
+                </a:p>
+              </p:txBody>
+            </p:sp>
+          </p:grpSp>
+          <mc:AlternateContent xmlns:mc="http://schemas.openxmlformats.org/markup-compatibility/2006">
+            <mc:Choice xmlns:a14="http://schemas.microsoft.com/office/drawing/2010/main" Requires="a14">
+              <p:sp>
+                <p:nvSpPr>
+                  <p:cNvPr id="40" name="TextBox 39">
+                    <a:extLst>
+                      <a:ext uri="{FF2B5EF4-FFF2-40B4-BE49-F238E27FC236}">
+                        <a16:creationId xmlns:a16="http://schemas.microsoft.com/office/drawing/2014/main" id="{3784EAD7-52D0-0476-E0F7-B4161869C9BC}"/>
+                      </a:ext>
+                    </a:extLst>
+                  </p:cNvPr>
+                  <p:cNvSpPr txBox="1"/>
+                  <p:nvPr/>
+                </p:nvSpPr>
+                <p:spPr>
+                  <a:xfrm>
+                    <a:off x="2617187" y="3487274"/>
+                    <a:ext cx="657809" cy="584775"/>
+                  </a:xfrm>
+                  <a:prstGeom prst="rect">
+                    <a:avLst/>
+                  </a:prstGeom>
+                  <a:noFill/>
+                </p:spPr>
+                <p:txBody>
+                  <a:bodyPr wrap="none" rtlCol="0">
+                    <a:spAutoFit/>
+                  </a:bodyPr>
+                  <a:lstStyle/>
+                  <a:p>
+                    <a:pPr/>
+                    <a14:m>
+                      <m:oMathPara xmlns:m="http://schemas.openxmlformats.org/officeDocument/2006/math">
+                        <m:oMathParaPr>
+                          <m:jc m:val="centerGroup"/>
+                        </m:oMathParaPr>
+                        <m:oMath xmlns:m="http://schemas.openxmlformats.org/officeDocument/2006/math">
+                          <m:sSub>
+                            <m:sSubPr>
+                              <m:ctrlPr>
+                                <a:rPr lang="en-US" sz="3200" i="1" smtClean="0">
+                                  <a:latin typeface="Cambria Math" panose="02040503050406030204" pitchFamily="18" charset="0"/>
+                                </a:rPr>
+                              </m:ctrlPr>
+                            </m:sSubPr>
+                            <m:e>
+                              <m:r>
+                                <a:rPr lang="en-US" sz="3200" i="1">
+                                  <a:latin typeface="Cambria Math" panose="02040503050406030204" pitchFamily="18" charset="0"/>
+                                </a:rPr>
+                                <m:t>𝑇</m:t>
+                              </m:r>
+                            </m:e>
+                            <m:sub>
+                              <m:r>
+                                <a:rPr lang="en-US" sz="3200" i="1">
+                                  <a:latin typeface="Cambria Math" panose="02040503050406030204" pitchFamily="18" charset="0"/>
+                                </a:rPr>
+                                <m:t>2</m:t>
+                              </m:r>
+                            </m:sub>
+                          </m:sSub>
+                        </m:oMath>
+                      </m:oMathPara>
+                    </a14:m>
+                    <a:endParaRPr lang="en-US" dirty="0"/>
+                  </a:p>
+                </p:txBody>
+              </p:sp>
+            </mc:Choice>
+            <mc:Fallback>
+              <p:sp>
+                <p:nvSpPr>
+                  <p:cNvPr id="40" name="TextBox 39">
+                    <a:extLst>
+                      <a:ext uri="{FF2B5EF4-FFF2-40B4-BE49-F238E27FC236}">
+                        <a16:creationId xmlns:a16="http://schemas.microsoft.com/office/drawing/2014/main" id="{3784EAD7-52D0-0476-E0F7-B4161869C9BC}"/>
+                      </a:ext>
+                    </a:extLst>
+                  </p:cNvPr>
+                  <p:cNvSpPr txBox="1">
+                    <a:spLocks noRot="1" noChangeAspect="1" noMove="1" noResize="1" noEditPoints="1" noAdjustHandles="1" noChangeArrowheads="1" noChangeShapeType="1" noTextEdit="1"/>
+                  </p:cNvSpPr>
+                  <p:nvPr/>
+                </p:nvSpPr>
+                <p:spPr>
+                  <a:xfrm>
+                    <a:off x="2617187" y="3487274"/>
+                    <a:ext cx="657809" cy="584775"/>
+                  </a:xfrm>
+                  <a:prstGeom prst="rect">
+                    <a:avLst/>
+                  </a:prstGeom>
+                  <a:blipFill>
+                    <a:blip r:embed="rId4"/>
+                    <a:stretch>
+                      <a:fillRect/>
+                    </a:stretch>
+                  </a:blipFill>
+                </p:spPr>
+                <p:txBody>
+                  <a:bodyPr/>
+                  <a:lstStyle/>
+                  <a:p>
+                    <a:r>
+                      <a:rPr lang="en-US">
+                        <a:noFill/>
+                      </a:rPr>
+                      <a:t> </a:t>
+                    </a:r>
+                  </a:p>
+                </p:txBody>
+              </p:sp>
+            </mc:Fallback>
+          </mc:AlternateContent>
+          <mc:AlternateContent xmlns:mc="http://schemas.openxmlformats.org/markup-compatibility/2006">
+            <mc:Choice xmlns:a14="http://schemas.microsoft.com/office/drawing/2010/main" Requires="a14">
+              <p:sp>
+                <p:nvSpPr>
+                  <p:cNvPr id="46" name="TextBox 45">
+                    <a:extLst>
+                      <a:ext uri="{FF2B5EF4-FFF2-40B4-BE49-F238E27FC236}">
+                        <a16:creationId xmlns:a16="http://schemas.microsoft.com/office/drawing/2014/main" id="{41E629F3-19F4-67D5-1714-C2A358791B28}"/>
+                      </a:ext>
+                    </a:extLst>
+                  </p:cNvPr>
+                  <p:cNvSpPr txBox="1"/>
+                  <p:nvPr/>
+                </p:nvSpPr>
+                <p:spPr>
+                  <a:xfrm>
+                    <a:off x="2403787" y="6426839"/>
+                    <a:ext cx="1083374" cy="369332"/>
+                  </a:xfrm>
+                  <a:prstGeom prst="rect">
+                    <a:avLst/>
+                  </a:prstGeom>
+                  <a:noFill/>
+                </p:spPr>
+                <p:txBody>
+                  <a:bodyPr wrap="none" rtlCol="0">
+                    <a:spAutoFit/>
+                  </a:bodyPr>
+                  <a:lstStyle/>
+                  <a:p>
+                    <a:pPr/>
+                    <a14:m>
+                      <m:oMathPara xmlns:m="http://schemas.openxmlformats.org/officeDocument/2006/math">
+                        <m:oMathParaPr>
+                          <m:jc m:val="centerGroup"/>
+                        </m:oMathParaPr>
+                        <m:oMath xmlns:m="http://schemas.openxmlformats.org/officeDocument/2006/math">
+                          <m:sSub>
+                            <m:sSubPr>
+                              <m:ctrlPr>
+                                <a:rPr lang="en-US" i="1" smtClean="0">
+                                  <a:latin typeface="Cambria Math" panose="02040503050406030204" pitchFamily="18" charset="0"/>
+                                </a:rPr>
+                              </m:ctrlPr>
+                            </m:sSubPr>
+                            <m:e>
+                              <m:r>
+                                <a:rPr lang="en-US" i="1">
+                                  <a:latin typeface="Cambria Math" panose="02040503050406030204" pitchFamily="18" charset="0"/>
+                                </a:rPr>
+                                <m:t>𝑋</m:t>
+                              </m:r>
+                            </m:e>
+                            <m:sub>
+                              <m:r>
+                                <a:rPr lang="en-US" i="1">
+                                  <a:latin typeface="Cambria Math" panose="02040503050406030204" pitchFamily="18" charset="0"/>
+                                </a:rPr>
+                                <m:t>2</m:t>
+                              </m:r>
+                            </m:sub>
+                          </m:sSub>
+                          <m:r>
+                            <a:rPr lang="en-US" i="1">
+                              <a:latin typeface="Cambria Math" panose="02040503050406030204" pitchFamily="18" charset="0"/>
+                            </a:rPr>
+                            <m:t>=0.2</m:t>
+                          </m:r>
+                        </m:oMath>
+                      </m:oMathPara>
+                    </a14:m>
+                    <a:endParaRPr lang="en-US" dirty="0"/>
+                  </a:p>
+                </p:txBody>
+              </p:sp>
+            </mc:Choice>
+            <mc:Fallback>
+              <p:sp>
+                <p:nvSpPr>
+                  <p:cNvPr id="46" name="TextBox 45">
+                    <a:extLst>
+                      <a:ext uri="{FF2B5EF4-FFF2-40B4-BE49-F238E27FC236}">
+                        <a16:creationId xmlns:a16="http://schemas.microsoft.com/office/drawing/2014/main" id="{41E629F3-19F4-67D5-1714-C2A358791B28}"/>
+                      </a:ext>
+                    </a:extLst>
+                  </p:cNvPr>
+                  <p:cNvSpPr txBox="1">
+                    <a:spLocks noRot="1" noChangeAspect="1" noMove="1" noResize="1" noEditPoints="1" noAdjustHandles="1" noChangeArrowheads="1" noChangeShapeType="1" noTextEdit="1"/>
+                  </p:cNvSpPr>
+                  <p:nvPr/>
+                </p:nvSpPr>
+                <p:spPr>
+                  <a:xfrm>
+                    <a:off x="2403787" y="6426839"/>
+                    <a:ext cx="1083374" cy="369332"/>
+                  </a:xfrm>
+                  <a:prstGeom prst="rect">
+                    <a:avLst/>
+                  </a:prstGeom>
+                  <a:blipFill>
+                    <a:blip r:embed="rId5"/>
+                    <a:stretch>
+                      <a:fillRect/>
+                    </a:stretch>
+                  </a:blipFill>
+                </p:spPr>
+                <p:txBody>
+                  <a:bodyPr/>
+                  <a:lstStyle/>
+                  <a:p>
+                    <a:r>
+                      <a:rPr lang="en-US">
+                        <a:noFill/>
+                      </a:rPr>
+                      <a:t> </a:t>
+                    </a:r>
+                  </a:p>
+                </p:txBody>
+              </p:sp>
+            </mc:Fallback>
+          </mc:AlternateContent>
+          <mc:AlternateContent xmlns:mc="http://schemas.openxmlformats.org/markup-compatibility/2006">
+            <mc:Choice xmlns:a14="http://schemas.microsoft.com/office/drawing/2010/main" Requires="a14">
+              <p:sp>
+                <p:nvSpPr>
+                  <p:cNvPr id="54" name="TextBox 53">
+                    <a:extLst>
+                      <a:ext uri="{FF2B5EF4-FFF2-40B4-BE49-F238E27FC236}">
+                        <a16:creationId xmlns:a16="http://schemas.microsoft.com/office/drawing/2014/main" id="{F52AAC01-C02F-B4E2-CD8A-92B05BBB9720}"/>
+                      </a:ext>
+                    </a:extLst>
+                  </p:cNvPr>
+                  <p:cNvSpPr txBox="1"/>
+                  <p:nvPr/>
+                </p:nvSpPr>
+                <p:spPr>
+                  <a:xfrm>
+                    <a:off x="1792170" y="4841603"/>
+                    <a:ext cx="908582" cy="307777"/>
+                  </a:xfrm>
+                  <a:prstGeom prst="rect">
+                    <a:avLst/>
+                  </a:prstGeom>
+                  <a:noFill/>
+                </p:spPr>
+                <p:txBody>
+                  <a:bodyPr wrap="none" rtlCol="0">
+                    <a:spAutoFit/>
+                  </a:bodyPr>
+                  <a:lstStyle/>
+                  <a:p>
+                    <a:pPr/>
+                    <a14:m>
+                      <m:oMathPara xmlns:m="http://schemas.openxmlformats.org/officeDocument/2006/math">
+                        <m:oMathParaPr>
+                          <m:jc m:val="centerGroup"/>
+                        </m:oMathParaPr>
+                        <m:oMath xmlns:m="http://schemas.openxmlformats.org/officeDocument/2006/math">
+                          <m:r>
+                            <a:rPr lang="en-US" sz="1400" i="1" smtClean="0">
+                              <a:latin typeface="Cambria Math" panose="02040503050406030204" pitchFamily="18" charset="0"/>
+                            </a:rPr>
+                            <m:t> </m:t>
+                          </m:r>
+                          <m:sSub>
+                            <m:sSubPr>
+                              <m:ctrlPr>
+                                <a:rPr lang="en-US" sz="1400" i="1">
+                                  <a:latin typeface="Cambria Math" panose="02040503050406030204" pitchFamily="18" charset="0"/>
+                                </a:rPr>
+                              </m:ctrlPr>
+                            </m:sSubPr>
+                            <m:e>
+                              <m:r>
+                                <a:rPr lang="en-US" sz="1400" i="1">
+                                  <a:latin typeface="Cambria Math" panose="02040503050406030204" pitchFamily="18" charset="0"/>
+                                </a:rPr>
+                                <m:t>𝑝</m:t>
+                              </m:r>
+                            </m:e>
+                            <m:sub>
+                              <m:r>
+                                <a:rPr lang="en-US" sz="1400" i="1">
+                                  <a:latin typeface="Cambria Math" panose="02040503050406030204" pitchFamily="18" charset="0"/>
+                                </a:rPr>
+                                <m:t>𝑣</m:t>
+                              </m:r>
+                            </m:sub>
+                          </m:sSub>
+                          <m:r>
+                            <a:rPr lang="en-US" sz="1400" i="1">
+                              <a:latin typeface="Cambria Math" panose="02040503050406030204" pitchFamily="18" charset="0"/>
+                            </a:rPr>
+                            <m:t>=0.2</m:t>
+                          </m:r>
+                        </m:oMath>
+                      </m:oMathPara>
+                    </a14:m>
+                    <a:endParaRPr lang="en-US" dirty="0"/>
+                  </a:p>
+                </p:txBody>
+              </p:sp>
+            </mc:Choice>
+            <mc:Fallback>
+              <p:sp>
+                <p:nvSpPr>
+                  <p:cNvPr id="54" name="TextBox 53">
+                    <a:extLst>
+                      <a:ext uri="{FF2B5EF4-FFF2-40B4-BE49-F238E27FC236}">
+                        <a16:creationId xmlns:a16="http://schemas.microsoft.com/office/drawing/2014/main" id="{F52AAC01-C02F-B4E2-CD8A-92B05BBB9720}"/>
+                      </a:ext>
+                    </a:extLst>
+                  </p:cNvPr>
+                  <p:cNvSpPr txBox="1">
+                    <a:spLocks noRot="1" noChangeAspect="1" noMove="1" noResize="1" noEditPoints="1" noAdjustHandles="1" noChangeArrowheads="1" noChangeShapeType="1" noTextEdit="1"/>
+                  </p:cNvSpPr>
+                  <p:nvPr/>
+                </p:nvSpPr>
+                <p:spPr>
+                  <a:xfrm>
+                    <a:off x="1792170" y="4841603"/>
+                    <a:ext cx="908582" cy="307777"/>
+                  </a:xfrm>
+                  <a:prstGeom prst="rect">
+                    <a:avLst/>
+                  </a:prstGeom>
+                  <a:blipFill>
+                    <a:blip r:embed="rId6"/>
+                    <a:stretch>
+                      <a:fillRect b="-2000"/>
+                    </a:stretch>
+                  </a:blipFill>
+                </p:spPr>
+                <p:txBody>
+                  <a:bodyPr/>
+                  <a:lstStyle/>
+                  <a:p>
+                    <a:r>
+                      <a:rPr lang="en-US">
+                        <a:noFill/>
+                      </a:rPr>
+                      <a:t> </a:t>
+                    </a:r>
+                  </a:p>
+                </p:txBody>
+              </p:sp>
+            </mc:Fallback>
+          </mc:AlternateContent>
+          <mc:AlternateContent xmlns:mc="http://schemas.openxmlformats.org/markup-compatibility/2006">
+            <mc:Choice xmlns:a14="http://schemas.microsoft.com/office/drawing/2010/main" Requires="a14">
+              <p:sp>
+                <p:nvSpPr>
+                  <p:cNvPr id="55" name="TextBox 54">
+                    <a:extLst>
+                      <a:ext uri="{FF2B5EF4-FFF2-40B4-BE49-F238E27FC236}">
+                        <a16:creationId xmlns:a16="http://schemas.microsoft.com/office/drawing/2014/main" id="{9F4991D3-75C5-C89E-F7E9-A93A82DA1B2A}"/>
+                      </a:ext>
+                    </a:extLst>
+                  </p:cNvPr>
+                  <p:cNvSpPr txBox="1"/>
+                  <p:nvPr/>
+                </p:nvSpPr>
+                <p:spPr>
+                  <a:xfrm>
+                    <a:off x="3202437" y="4848197"/>
+                    <a:ext cx="908582" cy="307777"/>
+                  </a:xfrm>
+                  <a:prstGeom prst="rect">
+                    <a:avLst/>
+                  </a:prstGeom>
+                  <a:noFill/>
+                </p:spPr>
+                <p:txBody>
+                  <a:bodyPr wrap="none" rtlCol="0">
+                    <a:spAutoFit/>
+                  </a:bodyPr>
+                  <a:lstStyle/>
+                  <a:p>
+                    <a:pPr/>
+                    <a14:m>
+                      <m:oMathPara xmlns:m="http://schemas.openxmlformats.org/officeDocument/2006/math">
+                        <m:oMathParaPr>
+                          <m:jc m:val="centerGroup"/>
+                        </m:oMathParaPr>
+                        <m:oMath xmlns:m="http://schemas.openxmlformats.org/officeDocument/2006/math">
+                          <m:r>
+                            <a:rPr lang="en-US" sz="1400" i="1" smtClean="0">
+                              <a:latin typeface="Cambria Math" panose="02040503050406030204" pitchFamily="18" charset="0"/>
+                            </a:rPr>
+                            <m:t> </m:t>
+                          </m:r>
+                          <m:sSub>
+                            <m:sSubPr>
+                              <m:ctrlPr>
+                                <a:rPr lang="en-US" sz="1400" i="1">
+                                  <a:latin typeface="Cambria Math" panose="02040503050406030204" pitchFamily="18" charset="0"/>
+                                </a:rPr>
+                              </m:ctrlPr>
+                            </m:sSubPr>
+                            <m:e>
+                              <m:r>
+                                <a:rPr lang="en-US" sz="1400" i="1">
+                                  <a:latin typeface="Cambria Math" panose="02040503050406030204" pitchFamily="18" charset="0"/>
+                                </a:rPr>
+                                <m:t>𝑝</m:t>
+                              </m:r>
+                            </m:e>
+                            <m:sub>
+                              <m:r>
+                                <a:rPr lang="en-US" sz="1400" i="1">
+                                  <a:latin typeface="Cambria Math" panose="02040503050406030204" pitchFamily="18" charset="0"/>
+                                </a:rPr>
+                                <m:t>𝑣</m:t>
+                              </m:r>
+                            </m:sub>
+                          </m:sSub>
+                          <m:r>
+                            <a:rPr lang="en-US" sz="1400" i="1">
+                              <a:latin typeface="Cambria Math" panose="02040503050406030204" pitchFamily="18" charset="0"/>
+                            </a:rPr>
+                            <m:t>=0.8</m:t>
+                          </m:r>
+                        </m:oMath>
+                      </m:oMathPara>
+                    </a14:m>
+                    <a:endParaRPr lang="en-US" dirty="0"/>
+                  </a:p>
+                </p:txBody>
+              </p:sp>
+            </mc:Choice>
+            <mc:Fallback>
+              <p:sp>
+                <p:nvSpPr>
+                  <p:cNvPr id="55" name="TextBox 54">
+                    <a:extLst>
+                      <a:ext uri="{FF2B5EF4-FFF2-40B4-BE49-F238E27FC236}">
+                        <a16:creationId xmlns:a16="http://schemas.microsoft.com/office/drawing/2014/main" id="{9F4991D3-75C5-C89E-F7E9-A93A82DA1B2A}"/>
+                      </a:ext>
+                    </a:extLst>
+                  </p:cNvPr>
+                  <p:cNvSpPr txBox="1">
+                    <a:spLocks noRot="1" noChangeAspect="1" noMove="1" noResize="1" noEditPoints="1" noAdjustHandles="1" noChangeArrowheads="1" noChangeShapeType="1" noTextEdit="1"/>
+                  </p:cNvSpPr>
+                  <p:nvPr/>
+                </p:nvSpPr>
+                <p:spPr>
+                  <a:xfrm>
+                    <a:off x="3202437" y="4848197"/>
+                    <a:ext cx="908582" cy="307777"/>
+                  </a:xfrm>
+                  <a:prstGeom prst="rect">
+                    <a:avLst/>
+                  </a:prstGeom>
+                  <a:blipFill>
+                    <a:blip r:embed="rId7"/>
+                    <a:stretch>
+                      <a:fillRect b="-2000"/>
+                    </a:stretch>
+                  </a:blipFill>
+                </p:spPr>
+                <p:txBody>
+                  <a:bodyPr/>
+                  <a:lstStyle/>
+                  <a:p>
+                    <a:r>
+                      <a:rPr lang="en-US">
+                        <a:noFill/>
+                      </a:rPr>
+                      <a:t> </a:t>
+                    </a:r>
+                  </a:p>
+                </p:txBody>
+              </p:sp>
+            </mc:Fallback>
+          </mc:AlternateContent>
+        </p:grpSp>
+        <p:grpSp>
+          <p:nvGrpSpPr>
+            <p:cNvPr id="21" name="Group 20">
+              <a:extLst>
+                <a:ext uri="{FF2B5EF4-FFF2-40B4-BE49-F238E27FC236}">
+                  <a16:creationId xmlns:a16="http://schemas.microsoft.com/office/drawing/2014/main" id="{5F36754D-B2E5-CC2E-652C-777BC90BB90E}"/>
+                </a:ext>
+              </a:extLst>
+            </p:cNvPr>
+            <p:cNvGrpSpPr/>
+            <p:nvPr/>
+          </p:nvGrpSpPr>
+          <p:grpSpPr>
+            <a:xfrm>
+              <a:off x="6220138" y="3495144"/>
+              <a:ext cx="3105419" cy="3308899"/>
+              <a:chOff x="4221370" y="3522650"/>
+              <a:chExt cx="3105418" cy="3308898"/>
+            </a:xfrm>
+          </p:grpSpPr>
+          <p:grpSp>
+            <p:nvGrpSpPr>
+              <p:cNvPr id="38" name="Group 37">
+                <a:extLst>
+                  <a:ext uri="{FF2B5EF4-FFF2-40B4-BE49-F238E27FC236}">
+                    <a16:creationId xmlns:a16="http://schemas.microsoft.com/office/drawing/2014/main" id="{033645A8-89F6-6ED5-48D8-BE91788B4555}"/>
+                  </a:ext>
+                </a:extLst>
+              </p:cNvPr>
+              <p:cNvGrpSpPr/>
+              <p:nvPr/>
+            </p:nvGrpSpPr>
+            <p:grpSpPr>
+              <a:xfrm>
+                <a:off x="4568280" y="4077551"/>
+                <a:ext cx="2294764" cy="1358413"/>
+                <a:chOff x="4971143" y="667304"/>
+                <a:chExt cx="2294764" cy="1358413"/>
+              </a:xfrm>
+            </p:grpSpPr>
+            <p:cxnSp>
+              <p:nvCxnSpPr>
+                <p:cNvPr id="10" name="Straight Connector 9">
+                  <a:extLst>
+                    <a:ext uri="{FF2B5EF4-FFF2-40B4-BE49-F238E27FC236}">
+                      <a16:creationId xmlns:a16="http://schemas.microsoft.com/office/drawing/2014/main" id="{93846DC9-7C58-1281-AE4F-5CF1065B6BF5}"/>
+                    </a:ext>
+                  </a:extLst>
+                </p:cNvPr>
+                <p:cNvCxnSpPr>
+                  <a:cxnSpLocks/>
+                </p:cNvCxnSpPr>
+                <p:nvPr/>
+              </p:nvCxnSpPr>
+              <p:spPr>
+                <a:xfrm rot="2400000">
+                  <a:off x="5651038" y="1052627"/>
+                  <a:ext cx="914400" cy="0"/>
+                </a:xfrm>
+                <a:prstGeom prst="line">
+                  <a:avLst/>
+                </a:prstGeom>
+              </p:spPr>
+              <p:style>
+                <a:lnRef idx="2">
+                  <a:schemeClr val="dk1"/>
+                </a:lnRef>
+                <a:fillRef idx="0">
+                  <a:schemeClr val="dk1"/>
+                </a:fillRef>
+                <a:effectRef idx="1">
+                  <a:schemeClr val="dk1"/>
+                </a:effectRef>
+                <a:fontRef idx="minor">
+                  <a:schemeClr val="tx1"/>
+                </a:fontRef>
+              </p:style>
+            </p:cxnSp>
+            <p:cxnSp>
+              <p:nvCxnSpPr>
+                <p:cNvPr id="11" name="Straight Connector 10">
+                  <a:extLst>
+                    <a:ext uri="{FF2B5EF4-FFF2-40B4-BE49-F238E27FC236}">
+                      <a16:creationId xmlns:a16="http://schemas.microsoft.com/office/drawing/2014/main" id="{DEFEAA0D-A625-FA49-5FBD-81A3CAB11E3F}"/>
+                    </a:ext>
+                  </a:extLst>
+                </p:cNvPr>
+                <p:cNvCxnSpPr>
+                  <a:cxnSpLocks/>
+                </p:cNvCxnSpPr>
+                <p:nvPr/>
+              </p:nvCxnSpPr>
+              <p:spPr>
+                <a:xfrm rot="19200000">
+                  <a:off x="4971143" y="1052628"/>
+                  <a:ext cx="914400" cy="0"/>
+                </a:xfrm>
+                <a:prstGeom prst="line">
+                  <a:avLst/>
+                </a:prstGeom>
+              </p:spPr>
+              <p:style>
+                <a:lnRef idx="2">
+                  <a:schemeClr val="dk1"/>
+                </a:lnRef>
+                <a:fillRef idx="0">
+                  <a:schemeClr val="dk1"/>
+                </a:fillRef>
+                <a:effectRef idx="1">
+                  <a:schemeClr val="dk1"/>
+                </a:effectRef>
+                <a:fontRef idx="minor">
+                  <a:schemeClr val="tx1"/>
+                </a:fontRef>
+              </p:style>
+            </p:cxnSp>
+            <p:sp>
+              <p:nvSpPr>
+                <p:cNvPr id="12" name="Oval 11">
+                  <a:extLst>
+                    <a:ext uri="{FF2B5EF4-FFF2-40B4-BE49-F238E27FC236}">
+                      <a16:creationId xmlns:a16="http://schemas.microsoft.com/office/drawing/2014/main" id="{011B7070-0385-DAEE-0AA4-459BB34268AD}"/>
+                    </a:ext>
+                  </a:extLst>
+                </p:cNvPr>
+                <p:cNvSpPr/>
+                <p:nvPr/>
+              </p:nvSpPr>
+              <p:spPr>
+                <a:xfrm>
+                  <a:off x="4983056" y="1255070"/>
+                  <a:ext cx="182880" cy="182880"/>
+                </a:xfrm>
+                <a:prstGeom prst="ellipse">
+                  <a:avLst/>
+                </a:prstGeom>
+              </p:spPr>
+              <p:style>
+                <a:lnRef idx="2">
+                  <a:schemeClr val="accent6">
+                    <a:shade val="15000"/>
+                  </a:schemeClr>
+                </a:lnRef>
+                <a:fillRef idx="1">
+                  <a:schemeClr val="accent6"/>
+                </a:fillRef>
+                <a:effectRef idx="0">
+                  <a:schemeClr val="accent6"/>
+                </a:effectRef>
+                <a:fontRef idx="minor">
+                  <a:schemeClr val="lt1"/>
+                </a:fontRef>
+              </p:style>
+              <p:txBody>
+                <a:bodyPr rtlCol="0" anchor="ctr"/>
+                <a:lstStyle/>
+                <a:p>
+                  <a:pPr algn="ctr"/>
+                  <a:endParaRPr lang="en-US" dirty="0"/>
+                </a:p>
+              </p:txBody>
+            </p:sp>
+            <p:sp>
+              <p:nvSpPr>
+                <p:cNvPr id="14" name="Oval 13">
+                  <a:extLst>
+                    <a:ext uri="{FF2B5EF4-FFF2-40B4-BE49-F238E27FC236}">
+                      <a16:creationId xmlns:a16="http://schemas.microsoft.com/office/drawing/2014/main" id="{0EE52CC6-62E8-CBC8-481B-18346A301F4B}"/>
+                    </a:ext>
+                  </a:extLst>
+                </p:cNvPr>
+                <p:cNvSpPr/>
+                <p:nvPr/>
+              </p:nvSpPr>
+              <p:spPr>
+                <a:xfrm>
+                  <a:off x="5666561" y="667304"/>
+                  <a:ext cx="182880" cy="182880"/>
+                </a:xfrm>
+                <a:prstGeom prst="ellipse">
+                  <a:avLst/>
+                </a:prstGeom>
+              </p:spPr>
+              <p:style>
+                <a:lnRef idx="1">
+                  <a:schemeClr val="dk1"/>
+                </a:lnRef>
+                <a:fillRef idx="3">
+                  <a:schemeClr val="dk1"/>
+                </a:fillRef>
+                <a:effectRef idx="2">
+                  <a:schemeClr val="dk1"/>
+                </a:effectRef>
+                <a:fontRef idx="minor">
+                  <a:schemeClr val="lt1"/>
+                </a:fontRef>
+              </p:style>
+              <p:txBody>
+                <a:bodyPr rtlCol="0" anchor="ctr"/>
+                <a:lstStyle/>
+                <a:p>
+                  <a:pPr algn="ctr"/>
+                  <a:endParaRPr lang="en-US"/>
+                </a:p>
+              </p:txBody>
+            </p:sp>
+            <p:cxnSp>
+              <p:nvCxnSpPr>
+                <p:cNvPr id="16" name="Straight Connector 15">
+                  <a:extLst>
+                    <a:ext uri="{FF2B5EF4-FFF2-40B4-BE49-F238E27FC236}">
+                      <a16:creationId xmlns:a16="http://schemas.microsoft.com/office/drawing/2014/main" id="{C9623BDF-C453-6EF8-391B-052455549D44}"/>
+                    </a:ext>
+                  </a:extLst>
+                </p:cNvPr>
+                <p:cNvCxnSpPr>
+                  <a:cxnSpLocks/>
+                </p:cNvCxnSpPr>
+                <p:nvPr/>
+              </p:nvCxnSpPr>
+              <p:spPr>
+                <a:xfrm rot="2400000">
+                  <a:off x="6351507" y="1640394"/>
+                  <a:ext cx="914400" cy="0"/>
+                </a:xfrm>
+                <a:prstGeom prst="line">
+                  <a:avLst/>
+                </a:prstGeom>
+              </p:spPr>
+              <p:style>
+                <a:lnRef idx="2">
+                  <a:schemeClr val="dk1"/>
+                </a:lnRef>
+                <a:fillRef idx="0">
+                  <a:schemeClr val="dk1"/>
+                </a:fillRef>
+                <a:effectRef idx="1">
+                  <a:schemeClr val="dk1"/>
+                </a:effectRef>
+                <a:fontRef idx="minor">
+                  <a:schemeClr val="tx1"/>
+                </a:fontRef>
+              </p:style>
+            </p:cxnSp>
+            <p:cxnSp>
+              <p:nvCxnSpPr>
+                <p:cNvPr id="17" name="Straight Connector 16">
+                  <a:extLst>
+                    <a:ext uri="{FF2B5EF4-FFF2-40B4-BE49-F238E27FC236}">
+                      <a16:creationId xmlns:a16="http://schemas.microsoft.com/office/drawing/2014/main" id="{5CE822A6-A806-34A2-0F9A-6AC099F7C8CE}"/>
+                    </a:ext>
+                  </a:extLst>
+                </p:cNvPr>
+                <p:cNvCxnSpPr>
+                  <a:cxnSpLocks/>
+                </p:cNvCxnSpPr>
+                <p:nvPr/>
+              </p:nvCxnSpPr>
+              <p:spPr>
+                <a:xfrm rot="19200000">
+                  <a:off x="5651036" y="1640394"/>
+                  <a:ext cx="914400" cy="0"/>
+                </a:xfrm>
+                <a:prstGeom prst="line">
+                  <a:avLst/>
+                </a:prstGeom>
+              </p:spPr>
+              <p:style>
+                <a:lnRef idx="2">
+                  <a:schemeClr val="dk1"/>
+                </a:lnRef>
+                <a:fillRef idx="0">
+                  <a:schemeClr val="dk1"/>
+                </a:fillRef>
+                <a:effectRef idx="1">
+                  <a:schemeClr val="dk1"/>
+                </a:effectRef>
+                <a:fontRef idx="minor">
+                  <a:schemeClr val="tx1"/>
+                </a:fontRef>
+              </p:style>
+            </p:cxnSp>
+            <p:sp>
+              <p:nvSpPr>
+                <p:cNvPr id="18" name="Oval 17">
+                  <a:extLst>
+                    <a:ext uri="{FF2B5EF4-FFF2-40B4-BE49-F238E27FC236}">
+                      <a16:creationId xmlns:a16="http://schemas.microsoft.com/office/drawing/2014/main" id="{F3842499-32B0-7F64-326F-D0B86B39DBF8}"/>
+                    </a:ext>
+                  </a:extLst>
+                </p:cNvPr>
+                <p:cNvSpPr/>
+                <p:nvPr/>
+              </p:nvSpPr>
+              <p:spPr>
+                <a:xfrm>
+                  <a:off x="5666560" y="1842837"/>
+                  <a:ext cx="182880" cy="182880"/>
+                </a:xfrm>
+                <a:prstGeom prst="ellipse">
+                  <a:avLst/>
+                </a:prstGeom>
+              </p:spPr>
+              <p:style>
+                <a:lnRef idx="2">
+                  <a:schemeClr val="accent6">
+                    <a:shade val="15000"/>
+                  </a:schemeClr>
+                </a:lnRef>
+                <a:fillRef idx="1">
+                  <a:schemeClr val="accent6"/>
+                </a:fillRef>
+                <a:effectRef idx="0">
+                  <a:schemeClr val="accent6"/>
+                </a:effectRef>
+                <a:fontRef idx="minor">
+                  <a:schemeClr val="lt1"/>
+                </a:fontRef>
+              </p:style>
+              <p:txBody>
+                <a:bodyPr rtlCol="0" anchor="ctr"/>
+                <a:lstStyle/>
+                <a:p>
+                  <a:pPr algn="ctr"/>
+                  <a:endParaRPr lang="en-US"/>
+                </a:p>
+              </p:txBody>
+            </p:sp>
+            <p:sp>
+              <p:nvSpPr>
+                <p:cNvPr id="19" name="Oval 18">
+                  <a:extLst>
+                    <a:ext uri="{FF2B5EF4-FFF2-40B4-BE49-F238E27FC236}">
+                      <a16:creationId xmlns:a16="http://schemas.microsoft.com/office/drawing/2014/main" id="{F7607263-9399-97C5-72AC-D11FF01756FA}"/>
+                    </a:ext>
+                  </a:extLst>
+                </p:cNvPr>
+                <p:cNvSpPr/>
+                <p:nvPr/>
+              </p:nvSpPr>
+              <p:spPr>
+                <a:xfrm>
+                  <a:off x="7067504" y="1842837"/>
+                  <a:ext cx="182880" cy="182880"/>
+                </a:xfrm>
+                <a:prstGeom prst="ellipse">
+                  <a:avLst/>
+                </a:prstGeom>
+              </p:spPr>
+              <p:style>
+                <a:lnRef idx="2">
+                  <a:schemeClr val="accent6">
+                    <a:shade val="15000"/>
+                  </a:schemeClr>
+                </a:lnRef>
+                <a:fillRef idx="1">
+                  <a:schemeClr val="accent6"/>
+                </a:fillRef>
+                <a:effectRef idx="0">
+                  <a:schemeClr val="accent6"/>
+                </a:effectRef>
+                <a:fontRef idx="minor">
+                  <a:schemeClr val="lt1"/>
+                </a:fontRef>
+              </p:style>
+              <p:txBody>
+                <a:bodyPr rtlCol="0" anchor="ctr"/>
+                <a:lstStyle/>
+                <a:p>
+                  <a:pPr algn="ctr"/>
+                  <a:endParaRPr lang="en-US"/>
+                </a:p>
+              </p:txBody>
+            </p:sp>
+            <p:sp>
+              <p:nvSpPr>
+                <p:cNvPr id="20" name="Oval 19">
+                  <a:extLst>
+                    <a:ext uri="{FF2B5EF4-FFF2-40B4-BE49-F238E27FC236}">
+                      <a16:creationId xmlns:a16="http://schemas.microsoft.com/office/drawing/2014/main" id="{809CE249-0439-5A70-C424-33F144F3F4A8}"/>
+                    </a:ext>
+                  </a:extLst>
+                </p:cNvPr>
+                <p:cNvSpPr/>
+                <p:nvPr/>
+              </p:nvSpPr>
+              <p:spPr>
+                <a:xfrm>
+                  <a:off x="6367030" y="1255071"/>
+                  <a:ext cx="182880" cy="182880"/>
+                </a:xfrm>
+                <a:prstGeom prst="ellipse">
+                  <a:avLst/>
+                </a:prstGeom>
+                <a:solidFill>
+                  <a:srgbClr val="FF0000"/>
+                </a:solidFill>
+              </p:spPr>
+              <p:style>
+                <a:lnRef idx="1">
+                  <a:schemeClr val="dk1"/>
+                </a:lnRef>
+                <a:fillRef idx="3">
+                  <a:schemeClr val="dk1"/>
+                </a:fillRef>
+                <a:effectRef idx="2">
+                  <a:schemeClr val="dk1"/>
+                </a:effectRef>
+                <a:fontRef idx="minor">
+                  <a:schemeClr val="lt1"/>
+                </a:fontRef>
+              </p:style>
+              <p:txBody>
+                <a:bodyPr rtlCol="0" anchor="ctr"/>
+                <a:lstStyle/>
+                <a:p>
+                  <a:pPr algn="ctr"/>
+                  <a:endParaRPr lang="en-US" dirty="0"/>
+                </a:p>
+              </p:txBody>
+            </p:sp>
+          </p:grpSp>
+          <mc:AlternateContent xmlns:mc="http://schemas.openxmlformats.org/markup-compatibility/2006">
+            <mc:Choice xmlns:a14="http://schemas.microsoft.com/office/drawing/2010/main" Requires="a14">
+              <p:sp>
+                <p:nvSpPr>
+                  <p:cNvPr id="41" name="TextBox 40">
+                    <a:extLst>
+                      <a:ext uri="{FF2B5EF4-FFF2-40B4-BE49-F238E27FC236}">
+                        <a16:creationId xmlns:a16="http://schemas.microsoft.com/office/drawing/2014/main" id="{C11D3AF3-77ED-E4A2-AB09-67785C450618}"/>
+                      </a:ext>
+                    </a:extLst>
+                  </p:cNvPr>
+                  <p:cNvSpPr txBox="1"/>
+                  <p:nvPr/>
+                </p:nvSpPr>
+                <p:spPr>
+                  <a:xfrm>
+                    <a:off x="5076509" y="3522650"/>
+                    <a:ext cx="657809" cy="584775"/>
+                  </a:xfrm>
+                  <a:prstGeom prst="rect">
+                    <a:avLst/>
+                  </a:prstGeom>
+                  <a:noFill/>
+                </p:spPr>
+                <p:txBody>
+                  <a:bodyPr wrap="none" rtlCol="0">
+                    <a:spAutoFit/>
+                  </a:bodyPr>
+                  <a:lstStyle/>
+                  <a:p>
+                    <a:pPr/>
+                    <a14:m>
+                      <m:oMathPara xmlns:m="http://schemas.openxmlformats.org/officeDocument/2006/math">
+                        <m:oMathParaPr>
+                          <m:jc m:val="centerGroup"/>
+                        </m:oMathParaPr>
+                        <m:oMath xmlns:m="http://schemas.openxmlformats.org/officeDocument/2006/math">
+                          <m:sSub>
+                            <m:sSubPr>
+                              <m:ctrlPr>
+                                <a:rPr lang="en-US" sz="3200" i="1" smtClean="0">
+                                  <a:latin typeface="Cambria Math" panose="02040503050406030204" pitchFamily="18" charset="0"/>
+                                </a:rPr>
+                              </m:ctrlPr>
+                            </m:sSubPr>
+                            <m:e>
+                              <m:r>
+                                <a:rPr lang="en-US" sz="3200" i="1">
+                                  <a:latin typeface="Cambria Math" panose="02040503050406030204" pitchFamily="18" charset="0"/>
+                                </a:rPr>
+                                <m:t>𝑇</m:t>
+                              </m:r>
+                            </m:e>
+                            <m:sub>
+                              <m:r>
+                                <a:rPr lang="en-US" sz="3200" i="1">
+                                  <a:latin typeface="Cambria Math" panose="02040503050406030204" pitchFamily="18" charset="0"/>
+                                </a:rPr>
+                                <m:t>3</m:t>
+                              </m:r>
+                            </m:sub>
+                          </m:sSub>
+                        </m:oMath>
+                      </m:oMathPara>
+                    </a14:m>
+                    <a:endParaRPr lang="en-US" dirty="0"/>
+                  </a:p>
+                </p:txBody>
+              </p:sp>
+            </mc:Choice>
+            <mc:Fallback>
+              <p:sp>
+                <p:nvSpPr>
+                  <p:cNvPr id="41" name="TextBox 40">
+                    <a:extLst>
+                      <a:ext uri="{FF2B5EF4-FFF2-40B4-BE49-F238E27FC236}">
+                        <a16:creationId xmlns:a16="http://schemas.microsoft.com/office/drawing/2014/main" id="{C11D3AF3-77ED-E4A2-AB09-67785C450618}"/>
+                      </a:ext>
+                    </a:extLst>
+                  </p:cNvPr>
+                  <p:cNvSpPr txBox="1">
+                    <a:spLocks noRot="1" noChangeAspect="1" noMove="1" noResize="1" noEditPoints="1" noAdjustHandles="1" noChangeArrowheads="1" noChangeShapeType="1" noTextEdit="1"/>
+                  </p:cNvSpPr>
+                  <p:nvPr/>
+                </p:nvSpPr>
+                <p:spPr>
+                  <a:xfrm>
+                    <a:off x="5076509" y="3522650"/>
+                    <a:ext cx="657809" cy="584775"/>
+                  </a:xfrm>
+                  <a:prstGeom prst="rect">
+                    <a:avLst/>
+                  </a:prstGeom>
+                  <a:blipFill>
+                    <a:blip r:embed="rId8"/>
+                    <a:stretch>
+                      <a:fillRect/>
+                    </a:stretch>
+                  </a:blipFill>
+                </p:spPr>
+                <p:txBody>
+                  <a:bodyPr/>
+                  <a:lstStyle/>
+                  <a:p>
+                    <a:r>
+                      <a:rPr lang="en-US">
+                        <a:noFill/>
+                      </a:rPr>
+                      <a:t> </a:t>
+                    </a:r>
+                  </a:p>
+                </p:txBody>
+              </p:sp>
+            </mc:Fallback>
+          </mc:AlternateContent>
+          <mc:AlternateContent xmlns:mc="http://schemas.openxmlformats.org/markup-compatibility/2006">
+            <mc:Choice xmlns:a14="http://schemas.microsoft.com/office/drawing/2010/main" Requires="a14">
+              <p:sp>
+                <p:nvSpPr>
+                  <p:cNvPr id="56" name="TextBox 55">
+                    <a:extLst>
+                      <a:ext uri="{FF2B5EF4-FFF2-40B4-BE49-F238E27FC236}">
+                        <a16:creationId xmlns:a16="http://schemas.microsoft.com/office/drawing/2014/main" id="{07F96083-0ACC-3CA8-C15A-FCA987D03C06}"/>
+                      </a:ext>
+                    </a:extLst>
+                  </p:cNvPr>
+                  <p:cNvSpPr txBox="1"/>
+                  <p:nvPr/>
+                </p:nvSpPr>
+                <p:spPr>
+                  <a:xfrm>
+                    <a:off x="4221370" y="4841603"/>
+                    <a:ext cx="908582" cy="307777"/>
+                  </a:xfrm>
+                  <a:prstGeom prst="rect">
+                    <a:avLst/>
+                  </a:prstGeom>
+                  <a:noFill/>
+                </p:spPr>
+                <p:txBody>
+                  <a:bodyPr wrap="none" rtlCol="0">
+                    <a:spAutoFit/>
+                  </a:bodyPr>
+                  <a:lstStyle/>
+                  <a:p>
+                    <a:pPr/>
+                    <a14:m>
+                      <m:oMathPara xmlns:m="http://schemas.openxmlformats.org/officeDocument/2006/math">
+                        <m:oMathParaPr>
+                          <m:jc m:val="centerGroup"/>
+                        </m:oMathParaPr>
+                        <m:oMath xmlns:m="http://schemas.openxmlformats.org/officeDocument/2006/math">
+                          <m:r>
+                            <a:rPr lang="en-US" sz="1400" i="1" smtClean="0">
+                              <a:latin typeface="Cambria Math" panose="02040503050406030204" pitchFamily="18" charset="0"/>
+                            </a:rPr>
+                            <m:t> </m:t>
+                          </m:r>
+                          <m:sSub>
+                            <m:sSubPr>
+                              <m:ctrlPr>
+                                <a:rPr lang="en-US" sz="1400" i="1">
+                                  <a:latin typeface="Cambria Math" panose="02040503050406030204" pitchFamily="18" charset="0"/>
+                                </a:rPr>
+                              </m:ctrlPr>
+                            </m:sSubPr>
+                            <m:e>
+                              <m:r>
+                                <a:rPr lang="en-US" sz="1400" i="1">
+                                  <a:latin typeface="Cambria Math" panose="02040503050406030204" pitchFamily="18" charset="0"/>
+                                </a:rPr>
+                                <m:t>𝑝</m:t>
+                              </m:r>
+                            </m:e>
+                            <m:sub>
+                              <m:r>
+                                <a:rPr lang="en-US" sz="1400" i="1">
+                                  <a:latin typeface="Cambria Math" panose="02040503050406030204" pitchFamily="18" charset="0"/>
+                                </a:rPr>
+                                <m:t>𝑣</m:t>
+                              </m:r>
+                            </m:sub>
+                          </m:sSub>
+                          <m:r>
+                            <a:rPr lang="en-US" sz="1400" i="1">
+                              <a:latin typeface="Cambria Math" panose="02040503050406030204" pitchFamily="18" charset="0"/>
+                            </a:rPr>
+                            <m:t>=0.2</m:t>
+                          </m:r>
+                        </m:oMath>
+                      </m:oMathPara>
+                    </a14:m>
+                    <a:endParaRPr lang="en-US" dirty="0"/>
+                  </a:p>
+                </p:txBody>
+              </p:sp>
+            </mc:Choice>
+            <mc:Fallback>
+              <p:sp>
+                <p:nvSpPr>
+                  <p:cNvPr id="56" name="TextBox 55">
+                    <a:extLst>
+                      <a:ext uri="{FF2B5EF4-FFF2-40B4-BE49-F238E27FC236}">
+                        <a16:creationId xmlns:a16="http://schemas.microsoft.com/office/drawing/2014/main" id="{07F96083-0ACC-3CA8-C15A-FCA987D03C06}"/>
+                      </a:ext>
+                    </a:extLst>
+                  </p:cNvPr>
+                  <p:cNvSpPr txBox="1">
+                    <a:spLocks noRot="1" noChangeAspect="1" noMove="1" noResize="1" noEditPoints="1" noAdjustHandles="1" noChangeArrowheads="1" noChangeShapeType="1" noTextEdit="1"/>
+                  </p:cNvSpPr>
+                  <p:nvPr/>
+                </p:nvSpPr>
+                <p:spPr>
+                  <a:xfrm>
+                    <a:off x="4221370" y="4841603"/>
+                    <a:ext cx="908582" cy="307777"/>
+                  </a:xfrm>
+                  <a:prstGeom prst="rect">
+                    <a:avLst/>
+                  </a:prstGeom>
+                  <a:blipFill>
+                    <a:blip r:embed="rId6"/>
+                    <a:stretch>
+                      <a:fillRect b="-2000"/>
+                    </a:stretch>
+                  </a:blipFill>
+                </p:spPr>
+                <p:txBody>
+                  <a:bodyPr/>
+                  <a:lstStyle/>
+                  <a:p>
+                    <a:r>
+                      <a:rPr lang="en-US">
+                        <a:noFill/>
+                      </a:rPr>
+                      <a:t> </a:t>
+                    </a:r>
+                  </a:p>
+                </p:txBody>
+              </p:sp>
+            </mc:Fallback>
+          </mc:AlternateContent>
+          <mc:AlternateContent xmlns:mc="http://schemas.openxmlformats.org/markup-compatibility/2006">
+            <mc:Choice xmlns:a14="http://schemas.microsoft.com/office/drawing/2010/main" Requires="a14">
+              <p:sp>
+                <p:nvSpPr>
+                  <p:cNvPr id="57" name="TextBox 56">
+                    <a:extLst>
+                      <a:ext uri="{FF2B5EF4-FFF2-40B4-BE49-F238E27FC236}">
+                        <a16:creationId xmlns:a16="http://schemas.microsoft.com/office/drawing/2014/main" id="{A3F464E2-17FE-1D74-D8F3-F8708E312CA1}"/>
+                      </a:ext>
+                    </a:extLst>
+                  </p:cNvPr>
+                  <p:cNvSpPr txBox="1"/>
+                  <p:nvPr/>
+                </p:nvSpPr>
+                <p:spPr>
+                  <a:xfrm>
+                    <a:off x="4898498" y="5477903"/>
+                    <a:ext cx="1007968" cy="307777"/>
+                  </a:xfrm>
+                  <a:prstGeom prst="rect">
+                    <a:avLst/>
+                  </a:prstGeom>
+                  <a:noFill/>
+                </p:spPr>
+                <p:txBody>
+                  <a:bodyPr wrap="none" rtlCol="0">
+                    <a:spAutoFit/>
+                  </a:bodyPr>
+                  <a:lstStyle/>
+                  <a:p>
+                    <a:pPr/>
+                    <a14:m>
+                      <m:oMathPara xmlns:m="http://schemas.openxmlformats.org/officeDocument/2006/math">
+                        <m:oMathParaPr>
+                          <m:jc m:val="centerGroup"/>
+                        </m:oMathParaPr>
+                        <m:oMath xmlns:m="http://schemas.openxmlformats.org/officeDocument/2006/math">
+                          <m:r>
+                            <a:rPr lang="en-US" sz="1400" i="1" smtClean="0">
+                              <a:latin typeface="Cambria Math" panose="02040503050406030204" pitchFamily="18" charset="0"/>
+                            </a:rPr>
+                            <m:t> </m:t>
+                          </m:r>
+                          <m:sSub>
+                            <m:sSubPr>
+                              <m:ctrlPr>
+                                <a:rPr lang="en-US" sz="1400" i="1">
+                                  <a:latin typeface="Cambria Math" panose="02040503050406030204" pitchFamily="18" charset="0"/>
+                                </a:rPr>
+                              </m:ctrlPr>
+                            </m:sSubPr>
+                            <m:e>
+                              <m:r>
+                                <a:rPr lang="en-US" sz="1400" i="1">
+                                  <a:latin typeface="Cambria Math" panose="02040503050406030204" pitchFamily="18" charset="0"/>
+                                </a:rPr>
+                                <m:t>𝑝</m:t>
+                              </m:r>
+                            </m:e>
+                            <m:sub>
+                              <m:r>
+                                <a:rPr lang="en-US" sz="1400" i="1">
+                                  <a:latin typeface="Cambria Math" panose="02040503050406030204" pitchFamily="18" charset="0"/>
+                                </a:rPr>
+                                <m:t>𝑣</m:t>
+                              </m:r>
+                            </m:sub>
+                          </m:sSub>
+                          <m:r>
+                            <a:rPr lang="en-US" sz="1400" i="1">
+                              <a:latin typeface="Cambria Math" panose="02040503050406030204" pitchFamily="18" charset="0"/>
+                            </a:rPr>
+                            <m:t>=0.24</m:t>
+                          </m:r>
+                        </m:oMath>
+                      </m:oMathPara>
+                    </a14:m>
+                    <a:endParaRPr lang="en-US" dirty="0"/>
+                  </a:p>
+                </p:txBody>
+              </p:sp>
+            </mc:Choice>
+            <mc:Fallback>
+              <p:sp>
+                <p:nvSpPr>
+                  <p:cNvPr id="57" name="TextBox 56">
+                    <a:extLst>
+                      <a:ext uri="{FF2B5EF4-FFF2-40B4-BE49-F238E27FC236}">
+                        <a16:creationId xmlns:a16="http://schemas.microsoft.com/office/drawing/2014/main" id="{A3F464E2-17FE-1D74-D8F3-F8708E312CA1}"/>
+                      </a:ext>
+                    </a:extLst>
+                  </p:cNvPr>
+                  <p:cNvSpPr txBox="1">
+                    <a:spLocks noRot="1" noChangeAspect="1" noMove="1" noResize="1" noEditPoints="1" noAdjustHandles="1" noChangeArrowheads="1" noChangeShapeType="1" noTextEdit="1"/>
+                  </p:cNvSpPr>
+                  <p:nvPr/>
+                </p:nvSpPr>
+                <p:spPr>
+                  <a:xfrm>
+                    <a:off x="4898498" y="5477903"/>
+                    <a:ext cx="1007968" cy="307777"/>
+                  </a:xfrm>
+                  <a:prstGeom prst="rect">
+                    <a:avLst/>
+                  </a:prstGeom>
+                  <a:blipFill>
+                    <a:blip r:embed="rId9"/>
+                    <a:stretch>
+                      <a:fillRect/>
+                    </a:stretch>
+                  </a:blipFill>
+                </p:spPr>
+                <p:txBody>
+                  <a:bodyPr/>
+                  <a:lstStyle/>
+                  <a:p>
+                    <a:r>
+                      <a:rPr lang="en-US">
+                        <a:noFill/>
+                      </a:rPr>
+                      <a:t> </a:t>
+                    </a:r>
+                  </a:p>
+                </p:txBody>
+              </p:sp>
+            </mc:Fallback>
+          </mc:AlternateContent>
+          <mc:AlternateContent xmlns:mc="http://schemas.openxmlformats.org/markup-compatibility/2006">
+            <mc:Choice xmlns:a14="http://schemas.microsoft.com/office/drawing/2010/main" Requires="a14">
+              <p:sp>
+                <p:nvSpPr>
+                  <p:cNvPr id="58" name="TextBox 57">
+                    <a:extLst>
+                      <a:ext uri="{FF2B5EF4-FFF2-40B4-BE49-F238E27FC236}">
+                        <a16:creationId xmlns:a16="http://schemas.microsoft.com/office/drawing/2014/main" id="{67E929E4-6A2C-3FA4-7704-1438A4F65EA9}"/>
+                      </a:ext>
+                    </a:extLst>
+                  </p:cNvPr>
+                  <p:cNvSpPr txBox="1"/>
+                  <p:nvPr/>
+                </p:nvSpPr>
+                <p:spPr>
+                  <a:xfrm>
+                    <a:off x="6318820" y="5477903"/>
+                    <a:ext cx="1007968" cy="307777"/>
+                  </a:xfrm>
+                  <a:prstGeom prst="rect">
+                    <a:avLst/>
+                  </a:prstGeom>
+                  <a:noFill/>
+                </p:spPr>
+                <p:txBody>
+                  <a:bodyPr wrap="none" rtlCol="0">
+                    <a:spAutoFit/>
+                  </a:bodyPr>
+                  <a:lstStyle/>
+                  <a:p>
+                    <a:pPr/>
+                    <a14:m>
+                      <m:oMathPara xmlns:m="http://schemas.openxmlformats.org/officeDocument/2006/math">
+                        <m:oMathParaPr>
+                          <m:jc m:val="centerGroup"/>
+                        </m:oMathParaPr>
+                        <m:oMath xmlns:m="http://schemas.openxmlformats.org/officeDocument/2006/math">
+                          <m:r>
+                            <a:rPr lang="en-US" sz="1400" i="1" smtClean="0">
+                              <a:latin typeface="Cambria Math" panose="02040503050406030204" pitchFamily="18" charset="0"/>
+                            </a:rPr>
+                            <m:t> </m:t>
+                          </m:r>
+                          <m:sSub>
+                            <m:sSubPr>
+                              <m:ctrlPr>
+                                <a:rPr lang="en-US" sz="1400" i="1">
+                                  <a:latin typeface="Cambria Math" panose="02040503050406030204" pitchFamily="18" charset="0"/>
+                                </a:rPr>
+                              </m:ctrlPr>
+                            </m:sSubPr>
+                            <m:e>
+                              <m:r>
+                                <a:rPr lang="en-US" sz="1400" i="1">
+                                  <a:latin typeface="Cambria Math" panose="02040503050406030204" pitchFamily="18" charset="0"/>
+                                </a:rPr>
+                                <m:t>𝑝</m:t>
+                              </m:r>
+                            </m:e>
+                            <m:sub>
+                              <m:r>
+                                <a:rPr lang="en-US" sz="1400" i="1">
+                                  <a:latin typeface="Cambria Math" panose="02040503050406030204" pitchFamily="18" charset="0"/>
+                                </a:rPr>
+                                <m:t>𝑣</m:t>
+                              </m:r>
+                            </m:sub>
+                          </m:sSub>
+                          <m:r>
+                            <a:rPr lang="en-US" sz="1400" i="1">
+                              <a:latin typeface="Cambria Math" panose="02040503050406030204" pitchFamily="18" charset="0"/>
+                            </a:rPr>
+                            <m:t>=0.56</m:t>
+                          </m:r>
+                        </m:oMath>
+                      </m:oMathPara>
+                    </a14:m>
+                    <a:endParaRPr lang="en-US" dirty="0"/>
+                  </a:p>
+                </p:txBody>
+              </p:sp>
+            </mc:Choice>
+            <mc:Fallback>
+              <p:sp>
+                <p:nvSpPr>
+                  <p:cNvPr id="58" name="TextBox 57">
+                    <a:extLst>
+                      <a:ext uri="{FF2B5EF4-FFF2-40B4-BE49-F238E27FC236}">
+                        <a16:creationId xmlns:a16="http://schemas.microsoft.com/office/drawing/2014/main" id="{67E929E4-6A2C-3FA4-7704-1438A4F65EA9}"/>
+                      </a:ext>
+                    </a:extLst>
+                  </p:cNvPr>
+                  <p:cNvSpPr txBox="1">
+                    <a:spLocks noRot="1" noChangeAspect="1" noMove="1" noResize="1" noEditPoints="1" noAdjustHandles="1" noChangeArrowheads="1" noChangeShapeType="1" noTextEdit="1"/>
+                  </p:cNvSpPr>
+                  <p:nvPr/>
+                </p:nvSpPr>
+                <p:spPr>
+                  <a:xfrm>
+                    <a:off x="6318820" y="5477903"/>
+                    <a:ext cx="1007968" cy="307777"/>
+                  </a:xfrm>
+                  <a:prstGeom prst="rect">
+                    <a:avLst/>
+                  </a:prstGeom>
+                  <a:blipFill>
+                    <a:blip r:embed="rId10"/>
+                    <a:stretch>
+                      <a:fillRect/>
+                    </a:stretch>
+                  </a:blipFill>
+                </p:spPr>
+                <p:txBody>
+                  <a:bodyPr/>
+                  <a:lstStyle/>
+                  <a:p>
+                    <a:r>
+                      <a:rPr lang="en-US">
+                        <a:noFill/>
+                      </a:rPr>
+                      <a:t> </a:t>
+                    </a:r>
+                  </a:p>
+                </p:txBody>
+              </p:sp>
+            </mc:Fallback>
+          </mc:AlternateContent>
+          <mc:AlternateContent xmlns:mc="http://schemas.openxmlformats.org/markup-compatibility/2006">
+            <mc:Choice xmlns:a14="http://schemas.microsoft.com/office/drawing/2010/main" Requires="a14">
+              <p:sp>
+                <p:nvSpPr>
+                  <p:cNvPr id="59" name="TextBox 58">
+                    <a:extLst>
+                      <a:ext uri="{FF2B5EF4-FFF2-40B4-BE49-F238E27FC236}">
+                        <a16:creationId xmlns:a16="http://schemas.microsoft.com/office/drawing/2014/main" id="{267F7DFF-E6E4-DFD4-F8FB-94D79822E1EA}"/>
+                      </a:ext>
+                    </a:extLst>
+                  </p:cNvPr>
+                  <p:cNvSpPr txBox="1"/>
+                  <p:nvPr/>
+                </p:nvSpPr>
+                <p:spPr>
+                  <a:xfrm>
+                    <a:off x="4813450" y="6462216"/>
+                    <a:ext cx="1083374" cy="369332"/>
+                  </a:xfrm>
+                  <a:prstGeom prst="rect">
+                    <a:avLst/>
+                  </a:prstGeom>
+                  <a:noFill/>
+                </p:spPr>
+                <p:txBody>
+                  <a:bodyPr wrap="none" rtlCol="0">
+                    <a:spAutoFit/>
+                  </a:bodyPr>
+                  <a:lstStyle/>
+                  <a:p>
+                    <a:pPr/>
+                    <a14:m>
+                      <m:oMathPara xmlns:m="http://schemas.openxmlformats.org/officeDocument/2006/math">
+                        <m:oMathParaPr>
+                          <m:jc m:val="centerGroup"/>
+                        </m:oMathParaPr>
+                        <m:oMath xmlns:m="http://schemas.openxmlformats.org/officeDocument/2006/math">
+                          <m:sSub>
+                            <m:sSubPr>
+                              <m:ctrlPr>
+                                <a:rPr lang="en-US" i="1" smtClean="0">
+                                  <a:latin typeface="Cambria Math" panose="02040503050406030204" pitchFamily="18" charset="0"/>
+                                </a:rPr>
+                              </m:ctrlPr>
+                            </m:sSubPr>
+                            <m:e>
+                              <m:r>
+                                <a:rPr lang="en-US" i="1">
+                                  <a:latin typeface="Cambria Math" panose="02040503050406030204" pitchFamily="18" charset="0"/>
+                                </a:rPr>
+                                <m:t>𝑋</m:t>
+                              </m:r>
+                            </m:e>
+                            <m:sub>
+                              <m:r>
+                                <a:rPr lang="en-US" i="1">
+                                  <a:latin typeface="Cambria Math" panose="02040503050406030204" pitchFamily="18" charset="0"/>
+                                </a:rPr>
+                                <m:t>3</m:t>
+                              </m:r>
+                            </m:sub>
+                          </m:sSub>
+                          <m:r>
+                            <a:rPr lang="en-US" i="1">
+                              <a:latin typeface="Cambria Math" panose="02040503050406030204" pitchFamily="18" charset="0"/>
+                            </a:rPr>
+                            <m:t>=0.3</m:t>
+                          </m:r>
+                        </m:oMath>
+                      </m:oMathPara>
+                    </a14:m>
+                    <a:endParaRPr lang="en-US" dirty="0"/>
+                  </a:p>
+                </p:txBody>
+              </p:sp>
+            </mc:Choice>
+            <mc:Fallback>
+              <p:sp>
+                <p:nvSpPr>
+                  <p:cNvPr id="59" name="TextBox 58">
+                    <a:extLst>
+                      <a:ext uri="{FF2B5EF4-FFF2-40B4-BE49-F238E27FC236}">
+                        <a16:creationId xmlns:a16="http://schemas.microsoft.com/office/drawing/2014/main" id="{267F7DFF-E6E4-DFD4-F8FB-94D79822E1EA}"/>
+                      </a:ext>
+                    </a:extLst>
+                  </p:cNvPr>
+                  <p:cNvSpPr txBox="1">
+                    <a:spLocks noRot="1" noChangeAspect="1" noMove="1" noResize="1" noEditPoints="1" noAdjustHandles="1" noChangeArrowheads="1" noChangeShapeType="1" noTextEdit="1"/>
+                  </p:cNvSpPr>
+                  <p:nvPr/>
+                </p:nvSpPr>
+                <p:spPr>
+                  <a:xfrm>
+                    <a:off x="4813450" y="6462216"/>
+                    <a:ext cx="1083374" cy="369332"/>
+                  </a:xfrm>
+                  <a:prstGeom prst="rect">
+                    <a:avLst/>
+                  </a:prstGeom>
+                  <a:blipFill>
+                    <a:blip r:embed="rId11"/>
+                    <a:stretch>
+                      <a:fillRect/>
+                    </a:stretch>
+                  </a:blipFill>
+                </p:spPr>
+                <p:txBody>
+                  <a:bodyPr/>
+                  <a:lstStyle/>
+                  <a:p>
+                    <a:r>
+                      <a:rPr lang="en-US">
+                        <a:noFill/>
+                      </a:rPr>
+                      <a:t> </a:t>
+                    </a:r>
+                  </a:p>
+                </p:txBody>
+              </p:sp>
+            </mc:Fallback>
+          </mc:AlternateContent>
+        </p:grpSp>
+        <p:grpSp>
+          <p:nvGrpSpPr>
+            <p:cNvPr id="22" name="Group 21">
+              <a:extLst>
+                <a:ext uri="{FF2B5EF4-FFF2-40B4-BE49-F238E27FC236}">
+                  <a16:creationId xmlns:a16="http://schemas.microsoft.com/office/drawing/2014/main" id="{D7AC82C0-5BF2-CE5F-0711-716D2050C38C}"/>
+                </a:ext>
+              </a:extLst>
+            </p:cNvPr>
+            <p:cNvGrpSpPr/>
+            <p:nvPr/>
+          </p:nvGrpSpPr>
+          <p:grpSpPr>
+            <a:xfrm>
+              <a:off x="9875723" y="3504829"/>
+              <a:ext cx="4528280" cy="3304843"/>
+              <a:chOff x="7293507" y="3491329"/>
+              <a:chExt cx="4528279" cy="3304843"/>
+            </a:xfrm>
+          </p:grpSpPr>
+          <p:grpSp>
+            <p:nvGrpSpPr>
+              <p:cNvPr id="39" name="Group 38">
+                <a:extLst>
+                  <a:ext uri="{FF2B5EF4-FFF2-40B4-BE49-F238E27FC236}">
+                    <a16:creationId xmlns:a16="http://schemas.microsoft.com/office/drawing/2014/main" id="{639FA642-53A1-160B-4262-0EBFA7402DD0}"/>
+                  </a:ext>
+                </a:extLst>
+              </p:cNvPr>
+              <p:cNvGrpSpPr/>
+              <p:nvPr/>
+            </p:nvGrpSpPr>
+            <p:grpSpPr>
+              <a:xfrm>
+                <a:off x="7625865" y="4077551"/>
+                <a:ext cx="3716287" cy="1946179"/>
+                <a:chOff x="5769913" y="4111470"/>
+                <a:chExt cx="3716287" cy="1946179"/>
+              </a:xfrm>
+            </p:grpSpPr>
+            <p:cxnSp>
+              <p:nvCxnSpPr>
+                <p:cNvPr id="23" name="Straight Connector 22">
+                  <a:extLst>
+                    <a:ext uri="{FF2B5EF4-FFF2-40B4-BE49-F238E27FC236}">
+                      <a16:creationId xmlns:a16="http://schemas.microsoft.com/office/drawing/2014/main" id="{3BCECC1E-2409-A6B3-DA40-0D18E0FBB81D}"/>
+                    </a:ext>
+                  </a:extLst>
+                </p:cNvPr>
+                <p:cNvCxnSpPr>
+                  <a:cxnSpLocks/>
+                </p:cNvCxnSpPr>
+                <p:nvPr/>
+              </p:nvCxnSpPr>
+              <p:spPr>
+                <a:xfrm rot="2400000">
+                  <a:off x="7871331" y="4496793"/>
+                  <a:ext cx="914400" cy="0"/>
+                </a:xfrm>
+                <a:prstGeom prst="line">
+                  <a:avLst/>
+                </a:prstGeom>
+              </p:spPr>
+              <p:style>
+                <a:lnRef idx="2">
+                  <a:schemeClr val="dk1"/>
+                </a:lnRef>
+                <a:fillRef idx="0">
+                  <a:schemeClr val="dk1"/>
+                </a:fillRef>
+                <a:effectRef idx="1">
+                  <a:schemeClr val="dk1"/>
+                </a:effectRef>
+                <a:fontRef idx="minor">
+                  <a:schemeClr val="tx1"/>
+                </a:fontRef>
+              </p:style>
+            </p:cxnSp>
+            <p:cxnSp>
+              <p:nvCxnSpPr>
+                <p:cNvPr id="24" name="Straight Connector 23">
+                  <a:extLst>
+                    <a:ext uri="{FF2B5EF4-FFF2-40B4-BE49-F238E27FC236}">
+                      <a16:creationId xmlns:a16="http://schemas.microsoft.com/office/drawing/2014/main" id="{22653C9C-3758-D112-CB63-95E231FAB75B}"/>
+                    </a:ext>
+                  </a:extLst>
+                </p:cNvPr>
+                <p:cNvCxnSpPr>
+                  <a:cxnSpLocks/>
+                </p:cNvCxnSpPr>
+                <p:nvPr/>
+              </p:nvCxnSpPr>
+              <p:spPr>
+                <a:xfrm rot="19200000">
+                  <a:off x="6363422" y="4790679"/>
+                  <a:ext cx="1828800" cy="0"/>
+                </a:xfrm>
+                <a:prstGeom prst="line">
+                  <a:avLst/>
+                </a:prstGeom>
+              </p:spPr>
+              <p:style>
+                <a:lnRef idx="2">
+                  <a:schemeClr val="dk1"/>
+                </a:lnRef>
+                <a:fillRef idx="0">
+                  <a:schemeClr val="dk1"/>
+                </a:fillRef>
+                <a:effectRef idx="1">
+                  <a:schemeClr val="dk1"/>
+                </a:effectRef>
+                <a:fontRef idx="minor">
+                  <a:schemeClr val="tx1"/>
+                </a:fontRef>
+              </p:style>
+            </p:cxnSp>
+            <p:sp>
+              <p:nvSpPr>
+                <p:cNvPr id="26" name="Oval 25">
+                  <a:extLst>
+                    <a:ext uri="{FF2B5EF4-FFF2-40B4-BE49-F238E27FC236}">
+                      <a16:creationId xmlns:a16="http://schemas.microsoft.com/office/drawing/2014/main" id="{5C2F1CA2-B6D7-2DDE-DB29-F1D10086C63E}"/>
+                    </a:ext>
+                  </a:extLst>
+                </p:cNvPr>
+                <p:cNvSpPr/>
+                <p:nvPr/>
+              </p:nvSpPr>
+              <p:spPr>
+                <a:xfrm>
+                  <a:off x="7886854" y="4111470"/>
+                  <a:ext cx="182880" cy="182880"/>
+                </a:xfrm>
+                <a:prstGeom prst="ellipse">
+                  <a:avLst/>
+                </a:prstGeom>
+              </p:spPr>
+              <p:style>
+                <a:lnRef idx="1">
+                  <a:schemeClr val="dk1"/>
+                </a:lnRef>
+                <a:fillRef idx="3">
+                  <a:schemeClr val="dk1"/>
+                </a:fillRef>
+                <a:effectRef idx="2">
+                  <a:schemeClr val="dk1"/>
+                </a:effectRef>
+                <a:fontRef idx="minor">
+                  <a:schemeClr val="lt1"/>
+                </a:fontRef>
+              </p:style>
+              <p:txBody>
+                <a:bodyPr rtlCol="0" anchor="ctr"/>
+                <a:lstStyle/>
+                <a:p>
+                  <a:pPr algn="ctr"/>
+                  <a:endParaRPr lang="en-US"/>
+                </a:p>
+              </p:txBody>
+            </p:sp>
+            <p:cxnSp>
+              <p:nvCxnSpPr>
+                <p:cNvPr id="27" name="Straight Connector 26">
+                  <a:extLst>
+                    <a:ext uri="{FF2B5EF4-FFF2-40B4-BE49-F238E27FC236}">
+                      <a16:creationId xmlns:a16="http://schemas.microsoft.com/office/drawing/2014/main" id="{4478899E-30B5-550E-E86D-E89642DA10C9}"/>
+                    </a:ext>
+                  </a:extLst>
+                </p:cNvPr>
+                <p:cNvCxnSpPr>
+                  <a:cxnSpLocks/>
+                </p:cNvCxnSpPr>
+                <p:nvPr/>
+              </p:nvCxnSpPr>
+              <p:spPr>
+                <a:xfrm rot="2400000">
+                  <a:off x="8571800" y="5084560"/>
+                  <a:ext cx="914400" cy="0"/>
+                </a:xfrm>
+                <a:prstGeom prst="line">
+                  <a:avLst/>
+                </a:prstGeom>
+              </p:spPr>
+              <p:style>
+                <a:lnRef idx="2">
+                  <a:schemeClr val="dk1"/>
+                </a:lnRef>
+                <a:fillRef idx="0">
+                  <a:schemeClr val="dk1"/>
+                </a:fillRef>
+                <a:effectRef idx="1">
+                  <a:schemeClr val="dk1"/>
+                </a:effectRef>
+                <a:fontRef idx="minor">
+                  <a:schemeClr val="tx1"/>
+                </a:fontRef>
+              </p:style>
+            </p:cxnSp>
+            <p:cxnSp>
+              <p:nvCxnSpPr>
+                <p:cNvPr id="28" name="Straight Connector 27">
+                  <a:extLst>
+                    <a:ext uri="{FF2B5EF4-FFF2-40B4-BE49-F238E27FC236}">
+                      <a16:creationId xmlns:a16="http://schemas.microsoft.com/office/drawing/2014/main" id="{48358010-2A1B-AD0D-9919-A40C7CA00A87}"/>
+                    </a:ext>
+                  </a:extLst>
+                </p:cNvPr>
+                <p:cNvCxnSpPr>
+                  <a:cxnSpLocks/>
+                </p:cNvCxnSpPr>
+                <p:nvPr/>
+              </p:nvCxnSpPr>
+              <p:spPr>
+                <a:xfrm rot="19200000">
+                  <a:off x="7871329" y="5084560"/>
+                  <a:ext cx="914400" cy="0"/>
+                </a:xfrm>
+                <a:prstGeom prst="line">
+                  <a:avLst/>
+                </a:prstGeom>
+              </p:spPr>
+              <p:style>
+                <a:lnRef idx="2">
+                  <a:schemeClr val="dk1"/>
+                </a:lnRef>
+                <a:fillRef idx="0">
+                  <a:schemeClr val="dk1"/>
+                </a:fillRef>
+                <a:effectRef idx="1">
+                  <a:schemeClr val="dk1"/>
+                </a:effectRef>
+                <a:fontRef idx="minor">
+                  <a:schemeClr val="tx1"/>
+                </a:fontRef>
+              </p:style>
+            </p:cxnSp>
+            <p:sp>
+              <p:nvSpPr>
+                <p:cNvPr id="29" name="Oval 28">
+                  <a:extLst>
+                    <a:ext uri="{FF2B5EF4-FFF2-40B4-BE49-F238E27FC236}">
+                      <a16:creationId xmlns:a16="http://schemas.microsoft.com/office/drawing/2014/main" id="{E4517BFC-661A-AFFA-9A94-B7081B63EB61}"/>
+                    </a:ext>
+                  </a:extLst>
+                </p:cNvPr>
+                <p:cNvSpPr/>
+                <p:nvPr/>
+              </p:nvSpPr>
+              <p:spPr>
+                <a:xfrm>
+                  <a:off x="7886853" y="5287003"/>
+                  <a:ext cx="182880" cy="182880"/>
+                </a:xfrm>
+                <a:prstGeom prst="ellipse">
+                  <a:avLst/>
+                </a:prstGeom>
+              </p:spPr>
+              <p:style>
+                <a:lnRef idx="2">
+                  <a:schemeClr val="accent6">
+                    <a:shade val="15000"/>
+                  </a:schemeClr>
+                </a:lnRef>
+                <a:fillRef idx="1">
+                  <a:schemeClr val="accent6"/>
+                </a:fillRef>
+                <a:effectRef idx="0">
+                  <a:schemeClr val="accent6"/>
+                </a:effectRef>
+                <a:fontRef idx="minor">
+                  <a:schemeClr val="lt1"/>
+                </a:fontRef>
+              </p:style>
+              <p:txBody>
+                <a:bodyPr rtlCol="0" anchor="ctr"/>
+                <a:lstStyle/>
+                <a:p>
+                  <a:pPr algn="ctr"/>
+                  <a:endParaRPr lang="en-US"/>
+                </a:p>
+              </p:txBody>
+            </p:sp>
+            <p:sp>
+              <p:nvSpPr>
+                <p:cNvPr id="30" name="Oval 29">
+                  <a:extLst>
+                    <a:ext uri="{FF2B5EF4-FFF2-40B4-BE49-F238E27FC236}">
+                      <a16:creationId xmlns:a16="http://schemas.microsoft.com/office/drawing/2014/main" id="{0D7ED737-25A5-93F0-B414-600EBC250B04}"/>
+                    </a:ext>
+                  </a:extLst>
+                </p:cNvPr>
+                <p:cNvSpPr/>
+                <p:nvPr/>
+              </p:nvSpPr>
+              <p:spPr>
+                <a:xfrm>
+                  <a:off x="9287797" y="5287003"/>
+                  <a:ext cx="182880" cy="182880"/>
+                </a:xfrm>
+                <a:prstGeom prst="ellipse">
+                  <a:avLst/>
+                </a:prstGeom>
+              </p:spPr>
+              <p:style>
+                <a:lnRef idx="2">
+                  <a:schemeClr val="accent6">
+                    <a:shade val="15000"/>
+                  </a:schemeClr>
+                </a:lnRef>
+                <a:fillRef idx="1">
+                  <a:schemeClr val="accent6"/>
+                </a:fillRef>
+                <a:effectRef idx="0">
+                  <a:schemeClr val="accent6"/>
+                </a:effectRef>
+                <a:fontRef idx="minor">
+                  <a:schemeClr val="lt1"/>
+                </a:fontRef>
+              </p:style>
+              <p:txBody>
+                <a:bodyPr rtlCol="0" anchor="ctr"/>
+                <a:lstStyle/>
+                <a:p>
+                  <a:pPr algn="ctr"/>
+                  <a:endParaRPr lang="en-US"/>
+                </a:p>
+              </p:txBody>
+            </p:sp>
+            <p:sp>
+              <p:nvSpPr>
+                <p:cNvPr id="31" name="Oval 30">
+                  <a:extLst>
+                    <a:ext uri="{FF2B5EF4-FFF2-40B4-BE49-F238E27FC236}">
+                      <a16:creationId xmlns:a16="http://schemas.microsoft.com/office/drawing/2014/main" id="{28AE2D6B-C6B5-D7AB-AD84-7B5FA8DAD3A2}"/>
+                    </a:ext>
+                  </a:extLst>
+                </p:cNvPr>
+                <p:cNvSpPr/>
+                <p:nvPr/>
+              </p:nvSpPr>
+              <p:spPr>
+                <a:xfrm>
+                  <a:off x="8587323" y="4699237"/>
+                  <a:ext cx="182880" cy="182880"/>
+                </a:xfrm>
+                <a:prstGeom prst="ellipse">
+                  <a:avLst/>
+                </a:prstGeom>
+              </p:spPr>
+              <p:style>
+                <a:lnRef idx="1">
+                  <a:schemeClr val="dk1"/>
+                </a:lnRef>
+                <a:fillRef idx="3">
+                  <a:schemeClr val="dk1"/>
+                </a:fillRef>
+                <a:effectRef idx="2">
+                  <a:schemeClr val="dk1"/>
+                </a:effectRef>
+                <a:fontRef idx="minor">
+                  <a:schemeClr val="lt1"/>
+                </a:fontRef>
+              </p:style>
+              <p:txBody>
+                <a:bodyPr rtlCol="0" anchor="ctr"/>
+                <a:lstStyle/>
+                <a:p>
+                  <a:pPr algn="ctr"/>
+                  <a:endParaRPr lang="en-US"/>
+                </a:p>
+              </p:txBody>
+            </p:sp>
+            <p:grpSp>
+              <p:nvGrpSpPr>
+                <p:cNvPr id="32" name="Group 31">
+                  <a:extLst>
+                    <a:ext uri="{FF2B5EF4-FFF2-40B4-BE49-F238E27FC236}">
+                      <a16:creationId xmlns:a16="http://schemas.microsoft.com/office/drawing/2014/main" id="{E48D03F3-2741-CBF1-3491-67B1EAF7F5D6}"/>
+                    </a:ext>
+                  </a:extLst>
+                </p:cNvPr>
+                <p:cNvGrpSpPr/>
+                <p:nvPr/>
+              </p:nvGrpSpPr>
+              <p:grpSpPr>
+                <a:xfrm>
+                  <a:off x="5769913" y="5287003"/>
+                  <a:ext cx="1614871" cy="770646"/>
+                  <a:chOff x="2822398" y="2103601"/>
+                  <a:chExt cx="1614871" cy="770646"/>
+                </a:xfrm>
+              </p:grpSpPr>
+              <p:cxnSp>
+                <p:nvCxnSpPr>
+                  <p:cNvPr id="33" name="Straight Connector 32">
+                    <a:extLst>
+                      <a:ext uri="{FF2B5EF4-FFF2-40B4-BE49-F238E27FC236}">
+                        <a16:creationId xmlns:a16="http://schemas.microsoft.com/office/drawing/2014/main" id="{E86CB0EA-B9D2-8549-A7DB-7DCE2D3D2CA0}"/>
+                      </a:ext>
+                    </a:extLst>
+                  </p:cNvPr>
+                  <p:cNvCxnSpPr>
+                    <a:cxnSpLocks/>
+                  </p:cNvCxnSpPr>
+                  <p:nvPr/>
+                </p:nvCxnSpPr>
+                <p:spPr>
+                  <a:xfrm rot="2400000">
+                    <a:off x="3522869" y="2488924"/>
+                    <a:ext cx="914400" cy="0"/>
+                  </a:xfrm>
+                  <a:prstGeom prst="line">
+                    <a:avLst/>
+                  </a:prstGeom>
+                </p:spPr>
+                <p:style>
+                  <a:lnRef idx="2">
+                    <a:schemeClr val="dk1"/>
+                  </a:lnRef>
+                  <a:fillRef idx="0">
+                    <a:schemeClr val="dk1"/>
+                  </a:fillRef>
+                  <a:effectRef idx="1">
+                    <a:schemeClr val="dk1"/>
+                  </a:effectRef>
+                  <a:fontRef idx="minor">
+                    <a:schemeClr val="tx1"/>
+                  </a:fontRef>
+                </p:style>
+              </p:cxnSp>
+              <p:cxnSp>
+                <p:nvCxnSpPr>
+                  <p:cNvPr id="34" name="Straight Connector 33">
+                    <a:extLst>
+                      <a:ext uri="{FF2B5EF4-FFF2-40B4-BE49-F238E27FC236}">
+                        <a16:creationId xmlns:a16="http://schemas.microsoft.com/office/drawing/2014/main" id="{FDA90818-C226-1DF2-CD13-5C6630FAA7C3}"/>
+                      </a:ext>
+                    </a:extLst>
+                  </p:cNvPr>
+                  <p:cNvCxnSpPr>
+                    <a:cxnSpLocks/>
+                  </p:cNvCxnSpPr>
+                  <p:nvPr/>
+                </p:nvCxnSpPr>
+                <p:spPr>
+                  <a:xfrm rot="-2400000">
+                    <a:off x="2822398" y="2488924"/>
+                    <a:ext cx="914400" cy="0"/>
+                  </a:xfrm>
+                  <a:prstGeom prst="line">
+                    <a:avLst/>
+                  </a:prstGeom>
+                </p:spPr>
+                <p:style>
+                  <a:lnRef idx="2">
+                    <a:schemeClr val="dk1"/>
+                  </a:lnRef>
+                  <a:fillRef idx="0">
+                    <a:schemeClr val="dk1"/>
+                  </a:fillRef>
+                  <a:effectRef idx="1">
+                    <a:schemeClr val="dk1"/>
+                  </a:effectRef>
+                  <a:fontRef idx="minor">
+                    <a:schemeClr val="tx1"/>
+                  </a:fontRef>
+                </p:style>
+              </p:cxnSp>
+              <p:sp>
+                <p:nvSpPr>
+                  <p:cNvPr id="35" name="Oval 34">
+                    <a:extLst>
+                      <a:ext uri="{FF2B5EF4-FFF2-40B4-BE49-F238E27FC236}">
+                        <a16:creationId xmlns:a16="http://schemas.microsoft.com/office/drawing/2014/main" id="{D6460631-92BE-0D38-4785-F5C3B76C53F1}"/>
+                      </a:ext>
+                    </a:extLst>
+                  </p:cNvPr>
+                  <p:cNvSpPr/>
+                  <p:nvPr/>
+                </p:nvSpPr>
+                <p:spPr>
+                  <a:xfrm>
+                    <a:off x="2837922" y="2691367"/>
+                    <a:ext cx="182880" cy="182880"/>
+                  </a:xfrm>
+                  <a:prstGeom prst="ellipse">
+                    <a:avLst/>
+                  </a:prstGeom>
+                </p:spPr>
+                <p:style>
+                  <a:lnRef idx="2">
+                    <a:schemeClr val="accent6">
+                      <a:shade val="15000"/>
+                    </a:schemeClr>
+                  </a:lnRef>
+                  <a:fillRef idx="1">
+                    <a:schemeClr val="accent6"/>
+                  </a:fillRef>
+                  <a:effectRef idx="0">
+                    <a:schemeClr val="accent6"/>
+                  </a:effectRef>
+                  <a:fontRef idx="minor">
+                    <a:schemeClr val="lt1"/>
+                  </a:fontRef>
+                </p:style>
+                <p:txBody>
+                  <a:bodyPr rtlCol="0" anchor="ctr"/>
+                  <a:lstStyle/>
+                  <a:p>
+                    <a:pPr algn="ctr"/>
+                    <a:endParaRPr lang="en-US"/>
+                  </a:p>
+                </p:txBody>
+              </p:sp>
+              <p:sp>
+                <p:nvSpPr>
+                  <p:cNvPr id="36" name="Oval 35">
+                    <a:extLst>
+                      <a:ext uri="{FF2B5EF4-FFF2-40B4-BE49-F238E27FC236}">
+                        <a16:creationId xmlns:a16="http://schemas.microsoft.com/office/drawing/2014/main" id="{D78989C4-CD3D-C950-4A76-72411E74D60F}"/>
+                      </a:ext>
+                    </a:extLst>
+                  </p:cNvPr>
+                  <p:cNvSpPr/>
+                  <p:nvPr/>
+                </p:nvSpPr>
+                <p:spPr>
+                  <a:xfrm>
+                    <a:off x="4238866" y="2691367"/>
+                    <a:ext cx="182880" cy="182880"/>
+                  </a:xfrm>
+                  <a:prstGeom prst="ellipse">
+                    <a:avLst/>
+                  </a:prstGeom>
+                </p:spPr>
+                <p:style>
+                  <a:lnRef idx="2">
+                    <a:schemeClr val="accent6">
+                      <a:shade val="15000"/>
+                    </a:schemeClr>
+                  </a:lnRef>
+                  <a:fillRef idx="1">
+                    <a:schemeClr val="accent6"/>
+                  </a:fillRef>
+                  <a:effectRef idx="0">
+                    <a:schemeClr val="accent6"/>
+                  </a:effectRef>
+                  <a:fontRef idx="minor">
+                    <a:schemeClr val="lt1"/>
+                  </a:fontRef>
+                </p:style>
+                <p:txBody>
+                  <a:bodyPr rtlCol="0" anchor="ctr"/>
+                  <a:lstStyle/>
+                  <a:p>
+                    <a:pPr algn="ctr"/>
+                    <a:endParaRPr lang="en-US"/>
+                  </a:p>
+                </p:txBody>
+              </p:sp>
+              <p:sp>
+                <p:nvSpPr>
+                  <p:cNvPr id="37" name="Oval 36">
+                    <a:extLst>
+                      <a:ext uri="{FF2B5EF4-FFF2-40B4-BE49-F238E27FC236}">
+                        <a16:creationId xmlns:a16="http://schemas.microsoft.com/office/drawing/2014/main" id="{CC647302-7EFA-44CD-B606-F134DD1A4E85}"/>
+                      </a:ext>
+                    </a:extLst>
+                  </p:cNvPr>
+                  <p:cNvSpPr/>
+                  <p:nvPr/>
+                </p:nvSpPr>
+                <p:spPr>
+                  <a:xfrm>
+                    <a:off x="3538392" y="2103601"/>
+                    <a:ext cx="182880" cy="182880"/>
+                  </a:xfrm>
+                  <a:prstGeom prst="ellipse">
+                    <a:avLst/>
+                  </a:prstGeom>
+                  <a:solidFill>
+                    <a:srgbClr val="FF0000"/>
+                  </a:solidFill>
+                </p:spPr>
+                <p:style>
+                  <a:lnRef idx="1">
+                    <a:schemeClr val="dk1"/>
+                  </a:lnRef>
+                  <a:fillRef idx="3">
+                    <a:schemeClr val="dk1"/>
+                  </a:fillRef>
+                  <a:effectRef idx="2">
+                    <a:schemeClr val="dk1"/>
+                  </a:effectRef>
+                  <a:fontRef idx="minor">
+                    <a:schemeClr val="lt1"/>
+                  </a:fontRef>
+                </p:style>
+                <p:txBody>
+                  <a:bodyPr rtlCol="0" anchor="ctr"/>
+                  <a:lstStyle/>
+                  <a:p>
+                    <a:pPr algn="ctr"/>
+                    <a:endParaRPr lang="en-US" dirty="0"/>
+                  </a:p>
+                </p:txBody>
+              </p:sp>
+            </p:grpSp>
+          </p:grpSp>
+          <mc:AlternateContent xmlns:mc="http://schemas.openxmlformats.org/markup-compatibility/2006">
+            <mc:Choice xmlns:a14="http://schemas.microsoft.com/office/drawing/2010/main" Requires="a14">
+              <p:sp>
+                <p:nvSpPr>
+                  <p:cNvPr id="42" name="TextBox 41">
+                    <a:extLst>
+                      <a:ext uri="{FF2B5EF4-FFF2-40B4-BE49-F238E27FC236}">
+                        <a16:creationId xmlns:a16="http://schemas.microsoft.com/office/drawing/2014/main" id="{8D5ABD3D-1288-DD66-DD54-F22DA5B554CF}"/>
+                      </a:ext>
+                    </a:extLst>
+                  </p:cNvPr>
+                  <p:cNvSpPr txBox="1"/>
+                  <p:nvPr/>
+                </p:nvSpPr>
+                <p:spPr>
+                  <a:xfrm>
+                    <a:off x="9538728" y="3491329"/>
+                    <a:ext cx="645754" cy="584775"/>
+                  </a:xfrm>
+                  <a:prstGeom prst="rect">
+                    <a:avLst/>
+                  </a:prstGeom>
+                  <a:noFill/>
+                </p:spPr>
+                <p:txBody>
+                  <a:bodyPr wrap="none" rtlCol="0">
+                    <a:spAutoFit/>
+                  </a:bodyPr>
+                  <a:lstStyle/>
+                  <a:p>
+                    <a:pPr/>
+                    <a14:m>
+                      <m:oMathPara xmlns:m="http://schemas.openxmlformats.org/officeDocument/2006/math">
+                        <m:oMathParaPr>
+                          <m:jc m:val="centerGroup"/>
+                        </m:oMathParaPr>
+                        <m:oMath xmlns:m="http://schemas.openxmlformats.org/officeDocument/2006/math">
+                          <m:sSub>
+                            <m:sSubPr>
+                              <m:ctrlPr>
+                                <a:rPr lang="en-US" sz="3200" i="1" smtClean="0">
+                                  <a:latin typeface="Cambria Math" panose="02040503050406030204" pitchFamily="18" charset="0"/>
+                                </a:rPr>
+                              </m:ctrlPr>
+                            </m:sSubPr>
+                            <m:e>
+                              <m:r>
+                                <a:rPr lang="en-US" sz="3200" i="1">
+                                  <a:latin typeface="Cambria Math" panose="02040503050406030204" pitchFamily="18" charset="0"/>
+                                </a:rPr>
+                                <m:t>𝑇</m:t>
+                              </m:r>
+                            </m:e>
+                            <m:sub>
+                              <m:r>
+                                <a:rPr lang="en-US" sz="3200" i="1">
+                                  <a:latin typeface="Cambria Math" panose="02040503050406030204" pitchFamily="18" charset="0"/>
+                                </a:rPr>
+                                <m:t>4</m:t>
+                              </m:r>
+                            </m:sub>
+                          </m:sSub>
+                        </m:oMath>
+                      </m:oMathPara>
+                    </a14:m>
+                    <a:endParaRPr lang="en-US" dirty="0"/>
+                  </a:p>
+                </p:txBody>
+              </p:sp>
+            </mc:Choice>
+            <mc:Fallback>
+              <p:sp>
+                <p:nvSpPr>
+                  <p:cNvPr id="42" name="TextBox 41">
+                    <a:extLst>
+                      <a:ext uri="{FF2B5EF4-FFF2-40B4-BE49-F238E27FC236}">
+                        <a16:creationId xmlns:a16="http://schemas.microsoft.com/office/drawing/2014/main" id="{8D5ABD3D-1288-DD66-DD54-F22DA5B554CF}"/>
+                      </a:ext>
+                    </a:extLst>
+                  </p:cNvPr>
+                  <p:cNvSpPr txBox="1">
+                    <a:spLocks noRot="1" noChangeAspect="1" noMove="1" noResize="1" noEditPoints="1" noAdjustHandles="1" noChangeArrowheads="1" noChangeShapeType="1" noTextEdit="1"/>
+                  </p:cNvSpPr>
+                  <p:nvPr/>
+                </p:nvSpPr>
+                <p:spPr>
+                  <a:xfrm>
+                    <a:off x="9538728" y="3491329"/>
+                    <a:ext cx="645754" cy="584775"/>
+                  </a:xfrm>
+                  <a:prstGeom prst="rect">
+                    <a:avLst/>
+                  </a:prstGeom>
+                  <a:blipFill>
+                    <a:blip r:embed="rId12"/>
+                    <a:stretch>
+                      <a:fillRect/>
+                    </a:stretch>
+                  </a:blipFill>
+                </p:spPr>
+                <p:txBody>
+                  <a:bodyPr/>
+                  <a:lstStyle/>
+                  <a:p>
+                    <a:r>
+                      <a:rPr lang="en-US">
+                        <a:noFill/>
+                      </a:rPr>
+                      <a:t> </a:t>
+                    </a:r>
+                  </a:p>
+                </p:txBody>
+              </p:sp>
+            </mc:Fallback>
+          </mc:AlternateContent>
+          <mc:AlternateContent xmlns:mc="http://schemas.openxmlformats.org/markup-compatibility/2006">
+            <mc:Choice xmlns:a14="http://schemas.microsoft.com/office/drawing/2010/main" Requires="a14">
+              <p:sp>
+                <p:nvSpPr>
+                  <p:cNvPr id="60" name="TextBox 59">
+                    <a:extLst>
+                      <a:ext uri="{FF2B5EF4-FFF2-40B4-BE49-F238E27FC236}">
+                        <a16:creationId xmlns:a16="http://schemas.microsoft.com/office/drawing/2014/main" id="{6ECA6091-DAF1-19C4-9668-D5630CBCD771}"/>
+                      </a:ext>
+                    </a:extLst>
+                  </p:cNvPr>
+                  <p:cNvSpPr txBox="1"/>
+                  <p:nvPr/>
+                </p:nvSpPr>
+                <p:spPr>
+                  <a:xfrm>
+                    <a:off x="9292559" y="6426840"/>
+                    <a:ext cx="1083374" cy="369332"/>
+                  </a:xfrm>
+                  <a:prstGeom prst="rect">
+                    <a:avLst/>
+                  </a:prstGeom>
+                  <a:noFill/>
+                </p:spPr>
+                <p:txBody>
+                  <a:bodyPr wrap="none" rtlCol="0">
+                    <a:spAutoFit/>
+                  </a:bodyPr>
+                  <a:lstStyle/>
+                  <a:p>
+                    <a:pPr/>
+                    <a14:m>
+                      <m:oMathPara xmlns:m="http://schemas.openxmlformats.org/officeDocument/2006/math">
+                        <m:oMathParaPr>
+                          <m:jc m:val="centerGroup"/>
+                        </m:oMathParaPr>
+                        <m:oMath xmlns:m="http://schemas.openxmlformats.org/officeDocument/2006/math">
+                          <m:sSub>
+                            <m:sSubPr>
+                              <m:ctrlPr>
+                                <a:rPr lang="en-US" i="1" smtClean="0">
+                                  <a:latin typeface="Cambria Math" panose="02040503050406030204" pitchFamily="18" charset="0"/>
+                                </a:rPr>
+                              </m:ctrlPr>
+                            </m:sSubPr>
+                            <m:e>
+                              <m:r>
+                                <a:rPr lang="en-US" i="1">
+                                  <a:latin typeface="Cambria Math" panose="02040503050406030204" pitchFamily="18" charset="0"/>
+                                </a:rPr>
+                                <m:t>𝑋</m:t>
+                              </m:r>
+                            </m:e>
+                            <m:sub>
+                              <m:r>
+                                <a:rPr lang="en-US" i="1">
+                                  <a:latin typeface="Cambria Math" panose="02040503050406030204" pitchFamily="18" charset="0"/>
+                                </a:rPr>
+                                <m:t>4</m:t>
+                              </m:r>
+                            </m:sub>
+                          </m:sSub>
+                          <m:r>
+                            <a:rPr lang="en-US" i="1">
+                              <a:latin typeface="Cambria Math" panose="02040503050406030204" pitchFamily="18" charset="0"/>
+                            </a:rPr>
+                            <m:t>=0.9</m:t>
+                          </m:r>
+                        </m:oMath>
+                      </m:oMathPara>
+                    </a14:m>
+                    <a:endParaRPr lang="en-US" dirty="0"/>
+                  </a:p>
+                </p:txBody>
+              </p:sp>
+            </mc:Choice>
+            <mc:Fallback>
+              <p:sp>
+                <p:nvSpPr>
+                  <p:cNvPr id="60" name="TextBox 59">
+                    <a:extLst>
+                      <a:ext uri="{FF2B5EF4-FFF2-40B4-BE49-F238E27FC236}">
+                        <a16:creationId xmlns:a16="http://schemas.microsoft.com/office/drawing/2014/main" id="{6ECA6091-DAF1-19C4-9668-D5630CBCD771}"/>
+                      </a:ext>
+                    </a:extLst>
+                  </p:cNvPr>
+                  <p:cNvSpPr txBox="1">
+                    <a:spLocks noRot="1" noChangeAspect="1" noMove="1" noResize="1" noEditPoints="1" noAdjustHandles="1" noChangeArrowheads="1" noChangeShapeType="1" noTextEdit="1"/>
+                  </p:cNvSpPr>
+                  <p:nvPr/>
+                </p:nvSpPr>
+                <p:spPr>
+                  <a:xfrm>
+                    <a:off x="9292559" y="6426840"/>
+                    <a:ext cx="1083374" cy="369332"/>
+                  </a:xfrm>
+                  <a:prstGeom prst="rect">
+                    <a:avLst/>
+                  </a:prstGeom>
+                  <a:blipFill>
+                    <a:blip r:embed="rId13"/>
+                    <a:stretch>
+                      <a:fillRect/>
+                    </a:stretch>
+                  </a:blipFill>
+                </p:spPr>
+                <p:txBody>
+                  <a:bodyPr/>
+                  <a:lstStyle/>
+                  <a:p>
+                    <a:r>
+                      <a:rPr lang="en-US">
+                        <a:noFill/>
+                      </a:rPr>
+                      <a:t> </a:t>
+                    </a:r>
+                  </a:p>
+                </p:txBody>
+              </p:sp>
+            </mc:Fallback>
+          </mc:AlternateContent>
+          <mc:AlternateContent xmlns:mc="http://schemas.openxmlformats.org/markup-compatibility/2006">
+            <mc:Choice xmlns:a14="http://schemas.microsoft.com/office/drawing/2010/main" Requires="a14">
+              <p:sp>
+                <p:nvSpPr>
+                  <p:cNvPr id="61" name="TextBox 60">
+                    <a:extLst>
+                      <a:ext uri="{FF2B5EF4-FFF2-40B4-BE49-F238E27FC236}">
+                        <a16:creationId xmlns:a16="http://schemas.microsoft.com/office/drawing/2014/main" id="{3EEDCFD4-BE4D-7F35-B4A4-7E401C4AC9A6}"/>
+                      </a:ext>
+                    </a:extLst>
+                  </p:cNvPr>
+                  <p:cNvSpPr txBox="1"/>
+                  <p:nvPr/>
+                </p:nvSpPr>
+                <p:spPr>
+                  <a:xfrm>
+                    <a:off x="9393496" y="5451579"/>
+                    <a:ext cx="1007968" cy="307777"/>
+                  </a:xfrm>
+                  <a:prstGeom prst="rect">
+                    <a:avLst/>
+                  </a:prstGeom>
+                  <a:noFill/>
+                </p:spPr>
+                <p:txBody>
+                  <a:bodyPr wrap="none" rtlCol="0">
+                    <a:spAutoFit/>
+                  </a:bodyPr>
+                  <a:lstStyle/>
+                  <a:p>
+                    <a:pPr/>
+                    <a14:m>
+                      <m:oMathPara xmlns:m="http://schemas.openxmlformats.org/officeDocument/2006/math">
+                        <m:oMathParaPr>
+                          <m:jc m:val="centerGroup"/>
+                        </m:oMathParaPr>
+                        <m:oMath xmlns:m="http://schemas.openxmlformats.org/officeDocument/2006/math">
+                          <m:r>
+                            <a:rPr lang="en-US" sz="1400" i="1" smtClean="0">
+                              <a:latin typeface="Cambria Math" panose="02040503050406030204" pitchFamily="18" charset="0"/>
+                            </a:rPr>
+                            <m:t> </m:t>
+                          </m:r>
+                          <m:sSub>
+                            <m:sSubPr>
+                              <m:ctrlPr>
+                                <a:rPr lang="en-US" sz="1400" i="1">
+                                  <a:latin typeface="Cambria Math" panose="02040503050406030204" pitchFamily="18" charset="0"/>
+                                </a:rPr>
+                              </m:ctrlPr>
+                            </m:sSubPr>
+                            <m:e>
+                              <m:r>
+                                <a:rPr lang="en-US" sz="1400" i="1">
+                                  <a:latin typeface="Cambria Math" panose="02040503050406030204" pitchFamily="18" charset="0"/>
+                                </a:rPr>
+                                <m:t>𝑝</m:t>
+                              </m:r>
+                            </m:e>
+                            <m:sub>
+                              <m:r>
+                                <a:rPr lang="en-US" sz="1400" i="1">
+                                  <a:latin typeface="Cambria Math" panose="02040503050406030204" pitchFamily="18" charset="0"/>
+                                </a:rPr>
+                                <m:t>𝑣</m:t>
+                              </m:r>
+                            </m:sub>
+                          </m:sSub>
+                          <m:r>
+                            <a:rPr lang="en-US" sz="1400" i="1">
+                              <a:latin typeface="Cambria Math" panose="02040503050406030204" pitchFamily="18" charset="0"/>
+                            </a:rPr>
+                            <m:t>=0.24</m:t>
+                          </m:r>
+                        </m:oMath>
+                      </m:oMathPara>
+                    </a14:m>
+                    <a:endParaRPr lang="en-US" dirty="0"/>
+                  </a:p>
+                </p:txBody>
+              </p:sp>
+            </mc:Choice>
+            <mc:Fallback>
+              <p:sp>
+                <p:nvSpPr>
+                  <p:cNvPr id="61" name="TextBox 60">
+                    <a:extLst>
+                      <a:ext uri="{FF2B5EF4-FFF2-40B4-BE49-F238E27FC236}">
+                        <a16:creationId xmlns:a16="http://schemas.microsoft.com/office/drawing/2014/main" id="{3EEDCFD4-BE4D-7F35-B4A4-7E401C4AC9A6}"/>
+                      </a:ext>
+                    </a:extLst>
+                  </p:cNvPr>
+                  <p:cNvSpPr txBox="1">
+                    <a:spLocks noRot="1" noChangeAspect="1" noMove="1" noResize="1" noEditPoints="1" noAdjustHandles="1" noChangeArrowheads="1" noChangeShapeType="1" noTextEdit="1"/>
+                  </p:cNvSpPr>
+                  <p:nvPr/>
+                </p:nvSpPr>
+                <p:spPr>
+                  <a:xfrm>
+                    <a:off x="9393496" y="5451579"/>
+                    <a:ext cx="1007968" cy="307777"/>
+                  </a:xfrm>
+                  <a:prstGeom prst="rect">
+                    <a:avLst/>
+                  </a:prstGeom>
+                  <a:blipFill>
+                    <a:blip r:embed="rId14"/>
+                    <a:stretch>
+                      <a:fillRect b="-2000"/>
+                    </a:stretch>
+                  </a:blipFill>
+                </p:spPr>
+                <p:txBody>
+                  <a:bodyPr/>
+                  <a:lstStyle/>
+                  <a:p>
+                    <a:r>
+                      <a:rPr lang="en-US">
+                        <a:noFill/>
+                      </a:rPr>
+                      <a:t> </a:t>
+                    </a:r>
+                  </a:p>
+                </p:txBody>
+              </p:sp>
+            </mc:Fallback>
+          </mc:AlternateContent>
+          <mc:AlternateContent xmlns:mc="http://schemas.openxmlformats.org/markup-compatibility/2006">
+            <mc:Choice xmlns:a14="http://schemas.microsoft.com/office/drawing/2010/main" Requires="a14">
+              <p:sp>
+                <p:nvSpPr>
+                  <p:cNvPr id="62" name="TextBox 61">
+                    <a:extLst>
+                      <a:ext uri="{FF2B5EF4-FFF2-40B4-BE49-F238E27FC236}">
+                        <a16:creationId xmlns:a16="http://schemas.microsoft.com/office/drawing/2014/main" id="{E1CC4E4E-4C89-568C-90D8-DD887CF6FAF5}"/>
+                      </a:ext>
+                    </a:extLst>
+                  </p:cNvPr>
+                  <p:cNvSpPr txBox="1"/>
+                  <p:nvPr/>
+                </p:nvSpPr>
+                <p:spPr>
+                  <a:xfrm>
+                    <a:off x="10813818" y="5451579"/>
+                    <a:ext cx="1007968" cy="307777"/>
+                  </a:xfrm>
+                  <a:prstGeom prst="rect">
+                    <a:avLst/>
+                  </a:prstGeom>
+                  <a:noFill/>
+                </p:spPr>
+                <p:txBody>
+                  <a:bodyPr wrap="none" rtlCol="0">
+                    <a:spAutoFit/>
+                  </a:bodyPr>
+                  <a:lstStyle/>
+                  <a:p>
+                    <a:pPr/>
+                    <a14:m>
+                      <m:oMathPara xmlns:m="http://schemas.openxmlformats.org/officeDocument/2006/math">
+                        <m:oMathParaPr>
+                          <m:jc m:val="centerGroup"/>
+                        </m:oMathParaPr>
+                        <m:oMath xmlns:m="http://schemas.openxmlformats.org/officeDocument/2006/math">
+                          <m:r>
+                            <a:rPr lang="en-US" sz="1400" i="1" smtClean="0">
+                              <a:latin typeface="Cambria Math" panose="02040503050406030204" pitchFamily="18" charset="0"/>
+                            </a:rPr>
+                            <m:t> </m:t>
+                          </m:r>
+                          <m:sSub>
+                            <m:sSubPr>
+                              <m:ctrlPr>
+                                <a:rPr lang="en-US" sz="1400" i="1">
+                                  <a:latin typeface="Cambria Math" panose="02040503050406030204" pitchFamily="18" charset="0"/>
+                                </a:rPr>
+                              </m:ctrlPr>
+                            </m:sSubPr>
+                            <m:e>
+                              <m:r>
+                                <a:rPr lang="en-US" sz="1400" i="1">
+                                  <a:latin typeface="Cambria Math" panose="02040503050406030204" pitchFamily="18" charset="0"/>
+                                </a:rPr>
+                                <m:t>𝑝</m:t>
+                              </m:r>
+                            </m:e>
+                            <m:sub>
+                              <m:r>
+                                <a:rPr lang="en-US" sz="1400" i="1">
+                                  <a:latin typeface="Cambria Math" panose="02040503050406030204" pitchFamily="18" charset="0"/>
+                                </a:rPr>
+                                <m:t>𝑣</m:t>
+                              </m:r>
+                            </m:sub>
+                          </m:sSub>
+                          <m:r>
+                            <a:rPr lang="en-US" sz="1400" i="1">
+                              <a:latin typeface="Cambria Math" panose="02040503050406030204" pitchFamily="18" charset="0"/>
+                            </a:rPr>
+                            <m:t>=0.56</m:t>
+                          </m:r>
+                        </m:oMath>
+                      </m:oMathPara>
+                    </a14:m>
+                    <a:endParaRPr lang="en-US" dirty="0"/>
+                  </a:p>
+                </p:txBody>
+              </p:sp>
+            </mc:Choice>
+            <mc:Fallback>
+              <p:sp>
+                <p:nvSpPr>
+                  <p:cNvPr id="62" name="TextBox 61">
+                    <a:extLst>
+                      <a:ext uri="{FF2B5EF4-FFF2-40B4-BE49-F238E27FC236}">
+                        <a16:creationId xmlns:a16="http://schemas.microsoft.com/office/drawing/2014/main" id="{E1CC4E4E-4C89-568C-90D8-DD887CF6FAF5}"/>
+                      </a:ext>
+                    </a:extLst>
+                  </p:cNvPr>
+                  <p:cNvSpPr txBox="1">
+                    <a:spLocks noRot="1" noChangeAspect="1" noMove="1" noResize="1" noEditPoints="1" noAdjustHandles="1" noChangeArrowheads="1" noChangeShapeType="1" noTextEdit="1"/>
+                  </p:cNvSpPr>
+                  <p:nvPr/>
+                </p:nvSpPr>
+                <p:spPr>
+                  <a:xfrm>
+                    <a:off x="10813818" y="5451579"/>
+                    <a:ext cx="1007968" cy="307777"/>
+                  </a:xfrm>
+                  <a:prstGeom prst="rect">
+                    <a:avLst/>
+                  </a:prstGeom>
+                  <a:blipFill>
+                    <a:blip r:embed="rId15"/>
+                    <a:stretch>
+                      <a:fillRect b="-2000"/>
+                    </a:stretch>
+                  </a:blipFill>
+                </p:spPr>
+                <p:txBody>
+                  <a:bodyPr/>
+                  <a:lstStyle/>
+                  <a:p>
+                    <a:r>
+                      <a:rPr lang="en-US">
+                        <a:noFill/>
+                      </a:rPr>
+                      <a:t> </a:t>
+                    </a:r>
+                  </a:p>
+                </p:txBody>
+              </p:sp>
+            </mc:Fallback>
+          </mc:AlternateContent>
+          <mc:AlternateContent xmlns:mc="http://schemas.openxmlformats.org/markup-compatibility/2006">
+            <mc:Choice xmlns:a14="http://schemas.microsoft.com/office/drawing/2010/main" Requires="a14">
+              <p:sp>
+                <p:nvSpPr>
+                  <p:cNvPr id="63" name="TextBox 62">
+                    <a:extLst>
+                      <a:ext uri="{FF2B5EF4-FFF2-40B4-BE49-F238E27FC236}">
+                        <a16:creationId xmlns:a16="http://schemas.microsoft.com/office/drawing/2014/main" id="{2F9A0199-27BE-67A4-14AF-BAA714671FD1}"/>
+                      </a:ext>
+                    </a:extLst>
+                  </p:cNvPr>
+                  <p:cNvSpPr txBox="1"/>
+                  <p:nvPr/>
+                </p:nvSpPr>
+                <p:spPr>
+                  <a:xfrm>
+                    <a:off x="7293507" y="6053190"/>
+                    <a:ext cx="1007968" cy="307777"/>
+                  </a:xfrm>
+                  <a:prstGeom prst="rect">
+                    <a:avLst/>
+                  </a:prstGeom>
+                  <a:noFill/>
+                </p:spPr>
+                <p:txBody>
+                  <a:bodyPr wrap="none" rtlCol="0">
+                    <a:spAutoFit/>
+                  </a:bodyPr>
+                  <a:lstStyle/>
+                  <a:p>
+                    <a:pPr/>
+                    <a14:m>
+                      <m:oMathPara xmlns:m="http://schemas.openxmlformats.org/officeDocument/2006/math">
+                        <m:oMathParaPr>
+                          <m:jc m:val="centerGroup"/>
+                        </m:oMathParaPr>
+                        <m:oMath xmlns:m="http://schemas.openxmlformats.org/officeDocument/2006/math">
+                          <m:r>
+                            <a:rPr lang="en-US" sz="1400" i="1" smtClean="0">
+                              <a:latin typeface="Cambria Math" panose="02040503050406030204" pitchFamily="18" charset="0"/>
+                            </a:rPr>
+                            <m:t> </m:t>
+                          </m:r>
+                          <m:sSub>
+                            <m:sSubPr>
+                              <m:ctrlPr>
+                                <a:rPr lang="en-US" sz="1400" i="1">
+                                  <a:latin typeface="Cambria Math" panose="02040503050406030204" pitchFamily="18" charset="0"/>
+                                </a:rPr>
+                              </m:ctrlPr>
+                            </m:sSubPr>
+                            <m:e>
+                              <m:r>
+                                <a:rPr lang="en-US" sz="1400" i="1">
+                                  <a:latin typeface="Cambria Math" panose="02040503050406030204" pitchFamily="18" charset="0"/>
+                                </a:rPr>
+                                <m:t>𝑝</m:t>
+                              </m:r>
+                            </m:e>
+                            <m:sub>
+                              <m:r>
+                                <a:rPr lang="en-US" sz="1400" i="1">
+                                  <a:latin typeface="Cambria Math" panose="02040503050406030204" pitchFamily="18" charset="0"/>
+                                </a:rPr>
+                                <m:t>𝑣</m:t>
+                              </m:r>
+                            </m:sub>
+                          </m:sSub>
+                          <m:r>
+                            <a:rPr lang="en-US" sz="1400" i="1">
+                              <a:latin typeface="Cambria Math" panose="02040503050406030204" pitchFamily="18" charset="0"/>
+                            </a:rPr>
+                            <m:t>=0.18</m:t>
+                          </m:r>
+                        </m:oMath>
+                      </m:oMathPara>
+                    </a14:m>
+                    <a:endParaRPr lang="en-US" dirty="0"/>
+                  </a:p>
+                </p:txBody>
+              </p:sp>
+            </mc:Choice>
+            <mc:Fallback>
+              <p:sp>
+                <p:nvSpPr>
+                  <p:cNvPr id="63" name="TextBox 62">
+                    <a:extLst>
+                      <a:ext uri="{FF2B5EF4-FFF2-40B4-BE49-F238E27FC236}">
+                        <a16:creationId xmlns:a16="http://schemas.microsoft.com/office/drawing/2014/main" id="{2F9A0199-27BE-67A4-14AF-BAA714671FD1}"/>
+                      </a:ext>
+                    </a:extLst>
+                  </p:cNvPr>
+                  <p:cNvSpPr txBox="1">
+                    <a:spLocks noRot="1" noChangeAspect="1" noMove="1" noResize="1" noEditPoints="1" noAdjustHandles="1" noChangeArrowheads="1" noChangeShapeType="1" noTextEdit="1"/>
+                  </p:cNvSpPr>
+                  <p:nvPr/>
+                </p:nvSpPr>
+                <p:spPr>
+                  <a:xfrm>
+                    <a:off x="7293507" y="6053190"/>
+                    <a:ext cx="1007968" cy="307777"/>
+                  </a:xfrm>
+                  <a:prstGeom prst="rect">
+                    <a:avLst/>
+                  </a:prstGeom>
+                  <a:blipFill>
+                    <a:blip r:embed="rId16"/>
+                    <a:stretch>
+                      <a:fillRect/>
+                    </a:stretch>
+                  </a:blipFill>
+                </p:spPr>
+                <p:txBody>
+                  <a:bodyPr/>
+                  <a:lstStyle/>
+                  <a:p>
+                    <a:r>
+                      <a:rPr lang="en-US">
+                        <a:noFill/>
+                      </a:rPr>
+                      <a:t> </a:t>
+                    </a:r>
+                  </a:p>
+                </p:txBody>
+              </p:sp>
+            </mc:Fallback>
+          </mc:AlternateContent>
+          <mc:AlternateContent xmlns:mc="http://schemas.openxmlformats.org/markup-compatibility/2006">
+            <mc:Choice xmlns:a14="http://schemas.microsoft.com/office/drawing/2010/main" Requires="a14">
+              <p:sp>
+                <p:nvSpPr>
+                  <p:cNvPr id="64" name="TextBox 63">
+                    <a:extLst>
+                      <a:ext uri="{FF2B5EF4-FFF2-40B4-BE49-F238E27FC236}">
+                        <a16:creationId xmlns:a16="http://schemas.microsoft.com/office/drawing/2014/main" id="{4D8B1EEE-D0D1-B2A4-D774-758C66992E47}"/>
+                      </a:ext>
+                    </a:extLst>
+                  </p:cNvPr>
+                  <p:cNvSpPr txBox="1"/>
+                  <p:nvPr/>
+                </p:nvSpPr>
+                <p:spPr>
+                  <a:xfrm>
+                    <a:off x="8713829" y="6053190"/>
+                    <a:ext cx="1007968" cy="307777"/>
+                  </a:xfrm>
+                  <a:prstGeom prst="rect">
+                    <a:avLst/>
+                  </a:prstGeom>
+                  <a:noFill/>
+                </p:spPr>
+                <p:txBody>
+                  <a:bodyPr wrap="none" rtlCol="0">
+                    <a:spAutoFit/>
+                  </a:bodyPr>
+                  <a:lstStyle/>
+                  <a:p>
+                    <a:pPr/>
+                    <a14:m>
+                      <m:oMathPara xmlns:m="http://schemas.openxmlformats.org/officeDocument/2006/math">
+                        <m:oMathParaPr>
+                          <m:jc m:val="centerGroup"/>
+                        </m:oMathParaPr>
+                        <m:oMath xmlns:m="http://schemas.openxmlformats.org/officeDocument/2006/math">
+                          <m:r>
+                            <a:rPr lang="en-US" sz="1400" i="1" smtClean="0">
+                              <a:latin typeface="Cambria Math" panose="02040503050406030204" pitchFamily="18" charset="0"/>
+                            </a:rPr>
+                            <m:t> </m:t>
+                          </m:r>
+                          <m:sSub>
+                            <m:sSubPr>
+                              <m:ctrlPr>
+                                <a:rPr lang="en-US" sz="1400" i="1">
+                                  <a:latin typeface="Cambria Math" panose="02040503050406030204" pitchFamily="18" charset="0"/>
+                                </a:rPr>
+                              </m:ctrlPr>
+                            </m:sSubPr>
+                            <m:e>
+                              <m:r>
+                                <a:rPr lang="en-US" sz="1400" i="1">
+                                  <a:latin typeface="Cambria Math" panose="02040503050406030204" pitchFamily="18" charset="0"/>
+                                </a:rPr>
+                                <m:t>𝑝</m:t>
+                              </m:r>
+                            </m:e>
+                            <m:sub>
+                              <m:r>
+                                <a:rPr lang="en-US" sz="1400" i="1">
+                                  <a:latin typeface="Cambria Math" panose="02040503050406030204" pitchFamily="18" charset="0"/>
+                                </a:rPr>
+                                <m:t>𝑣</m:t>
+                              </m:r>
+                            </m:sub>
+                          </m:sSub>
+                          <m:r>
+                            <a:rPr lang="en-US" sz="1400" i="1">
+                              <a:latin typeface="Cambria Math" panose="02040503050406030204" pitchFamily="18" charset="0"/>
+                            </a:rPr>
+                            <m:t>=0.02</m:t>
+                          </m:r>
+                        </m:oMath>
+                      </m:oMathPara>
+                    </a14:m>
+                    <a:endParaRPr lang="en-US" dirty="0"/>
+                  </a:p>
+                </p:txBody>
+              </p:sp>
+            </mc:Choice>
+            <mc:Fallback>
+              <p:sp>
+                <p:nvSpPr>
+                  <p:cNvPr id="64" name="TextBox 63">
+                    <a:extLst>
+                      <a:ext uri="{FF2B5EF4-FFF2-40B4-BE49-F238E27FC236}">
+                        <a16:creationId xmlns:a16="http://schemas.microsoft.com/office/drawing/2014/main" id="{4D8B1EEE-D0D1-B2A4-D774-758C66992E47}"/>
+                      </a:ext>
+                    </a:extLst>
+                  </p:cNvPr>
+                  <p:cNvSpPr txBox="1">
+                    <a:spLocks noRot="1" noChangeAspect="1" noMove="1" noResize="1" noEditPoints="1" noAdjustHandles="1" noChangeArrowheads="1" noChangeShapeType="1" noTextEdit="1"/>
+                  </p:cNvSpPr>
+                  <p:nvPr/>
+                </p:nvSpPr>
+                <p:spPr>
+                  <a:xfrm>
+                    <a:off x="8713829" y="6053190"/>
+                    <a:ext cx="1007968" cy="307777"/>
+                  </a:xfrm>
+                  <a:prstGeom prst="rect">
+                    <a:avLst/>
+                  </a:prstGeom>
+                  <a:blipFill>
+                    <a:blip r:embed="rId17"/>
+                    <a:stretch>
+                      <a:fillRect/>
+                    </a:stretch>
+                  </a:blipFill>
+                </p:spPr>
+                <p:txBody>
+                  <a:bodyPr/>
+                  <a:lstStyle/>
+                  <a:p>
+                    <a:r>
+                      <a:rPr lang="en-US">
+                        <a:noFill/>
+                      </a:rPr>
+                      <a:t> </a:t>
+                    </a:r>
+                  </a:p>
+                </p:txBody>
+              </p:sp>
+            </mc:Fallback>
+          </mc:AlternateContent>
+        </p:grpSp>
+      </p:grpSp>
+    </p:spTree>
+    <p:extLst>
+      <p:ext uri="{BB962C8B-B14F-4D97-AF65-F5344CB8AC3E}">
+        <p14:creationId xmlns:p14="http://schemas.microsoft.com/office/powerpoint/2010/main" val="1739435600"/>
+      </p:ext>
+    </p:extLst>
+  </p:cSld>
+  <p:clrMapOvr>
+    <a:masterClrMapping/>
+  </p:clrMapOvr>
+</p:sld>
+</file>
+
+<file path=ppt/slides/slide4.xml><?xml version="1.0" encoding="utf-8"?>
+<p:sld xmlns:a="http://schemas.openxmlformats.org/drawingml/2006/main" xmlns:r="http://schemas.openxmlformats.org/officeDocument/2006/relationships" xmlns:p="http://schemas.openxmlformats.org/presentationml/2006/main">
+  <p:cSld>
+    <p:spTree>
+      <p:nvGrpSpPr>
+        <p:cNvPr id="1" name="">
+          <a:extLst>
+            <a:ext uri="{FF2B5EF4-FFF2-40B4-BE49-F238E27FC236}">
               <a16:creationId xmlns:a16="http://schemas.microsoft.com/office/drawing/2014/main" id="{D77553BD-4DF5-F5A7-AF99-4F6D51C15764}"/>
             </a:ext>
           </a:extLst>
@@ -10207,8 +13722,8 @@
           <a:chExt cx="0" cy="0"/>
         </a:xfrm>
       </p:grpSpPr>
-      <mc:AlternateContent xmlns:mc="http://schemas.openxmlformats.org/markup-compatibility/2006" xmlns:a14="http://schemas.microsoft.com/office/drawing/2010/main">
-        <mc:Choice Requires="a14">
+      <mc:AlternateContent xmlns:mc="http://schemas.openxmlformats.org/markup-compatibility/2006">
+        <mc:Choice xmlns:a14="http://schemas.microsoft.com/office/drawing/2010/main" Requires="a14">
           <p:sp>
             <p:nvSpPr>
               <p:cNvPr id="2" name="TextBox 1">
@@ -10223,8 +13738,8 @@
             </p:nvSpPr>
             <p:spPr>
               <a:xfrm>
-                <a:off x="469907" y="792626"/>
-                <a:ext cx="648319" cy="584775"/>
+                <a:off x="2501907" y="792627"/>
+                <a:ext cx="648318" cy="584775"/>
               </a:xfrm>
               <a:prstGeom prst="rect">
                 <a:avLst/>
@@ -10277,7 +13792,7 @@
             </p:txBody>
           </p:sp>
         </mc:Choice>
-        <mc:Fallback xmlns="">
+        <mc:Fallback>
           <p:sp>
             <p:nvSpPr>
               <p:cNvPr id="2" name="TextBox 1">
@@ -10294,8 +13809,8 @@
             </p:nvSpPr>
             <p:spPr>
               <a:xfrm>
-                <a:off x="469907" y="792626"/>
-                <a:ext cx="648319" cy="584775"/>
+                <a:off x="2501907" y="792627"/>
+                <a:ext cx="648318" cy="584775"/>
               </a:xfrm>
               <a:prstGeom prst="rect">
                 <a:avLst/>
@@ -10336,7 +13851,7 @@
         </p:nvSpPr>
         <p:spPr>
           <a:xfrm>
-            <a:off x="702626" y="1989608"/>
+            <a:off x="2734626" y="1989608"/>
             <a:ext cx="182880" cy="182880"/>
           </a:xfrm>
           <a:prstGeom prst="ellipse">
@@ -10385,7 +13900,7 @@
         </p:nvGrpSpPr>
         <p:grpSpPr>
           <a:xfrm>
-            <a:off x="1118226" y="1895513"/>
+            <a:off x="3150228" y="1895513"/>
             <a:ext cx="1614871" cy="770646"/>
             <a:chOff x="2822398" y="2103601"/>
             <a:chExt cx="1614871" cy="770646"/>
@@ -10621,7 +14136,7 @@
         </p:nvGrpSpPr>
         <p:grpSpPr>
           <a:xfrm>
-            <a:off x="3325061" y="1798827"/>
+            <a:off x="5357062" y="1798829"/>
             <a:ext cx="2294764" cy="1358413"/>
             <a:chOff x="4971143" y="667304"/>
             <a:chExt cx="2294764" cy="1358413"/>
@@ -11025,7 +14540,7 @@
         </p:nvCxnSpPr>
         <p:spPr>
           <a:xfrm rot="2400000">
-            <a:off x="8169867" y="1744964"/>
+            <a:off x="10201867" y="1744964"/>
             <a:ext cx="914400" cy="0"/>
           </a:xfrm>
           <a:prstGeom prst="line">
@@ -11063,7 +14578,7 @@
         </p:nvCxnSpPr>
         <p:spPr>
           <a:xfrm rot="19200000">
-            <a:off x="6661958" y="2038850"/>
+            <a:off x="8693958" y="2038850"/>
             <a:ext cx="1828800" cy="0"/>
           </a:xfrm>
           <a:prstGeom prst="line">
@@ -11099,7 +14614,7 @@
         </p:nvSpPr>
         <p:spPr>
           <a:xfrm>
-            <a:off x="8185390" y="1359641"/>
+            <a:off x="10217390" y="1359641"/>
             <a:ext cx="182880" cy="182880"/>
           </a:xfrm>
           <a:prstGeom prst="ellipse">
@@ -11145,7 +14660,7 @@
         </p:nvCxnSpPr>
         <p:spPr>
           <a:xfrm rot="2400000">
-            <a:off x="9424652" y="2915756"/>
+            <a:off x="11456652" y="2915756"/>
             <a:ext cx="914400" cy="0"/>
           </a:xfrm>
           <a:prstGeom prst="line">
@@ -11183,7 +14698,7 @@
         </p:nvCxnSpPr>
         <p:spPr>
           <a:xfrm rot="19200000">
-            <a:off x="8169865" y="2332731"/>
+            <a:off x="10201865" y="2332731"/>
             <a:ext cx="914400" cy="0"/>
           </a:xfrm>
           <a:prstGeom prst="line">
@@ -11219,7 +14734,7 @@
         </p:nvSpPr>
         <p:spPr>
           <a:xfrm>
-            <a:off x="10049208" y="1194519"/>
+            <a:off x="12081208" y="1194519"/>
             <a:ext cx="182880" cy="182880"/>
           </a:xfrm>
           <a:prstGeom prst="ellipse">
@@ -11265,7 +14780,7 @@
         </p:nvSpPr>
         <p:spPr>
           <a:xfrm>
-            <a:off x="10140648" y="3122940"/>
+            <a:off x="12172648" y="3122940"/>
             <a:ext cx="182880" cy="182880"/>
           </a:xfrm>
           <a:prstGeom prst="ellipse">
@@ -11311,7 +14826,7 @@
         </p:nvSpPr>
         <p:spPr>
           <a:xfrm>
-            <a:off x="8885859" y="1947408"/>
+            <a:off x="10917859" y="1947408"/>
             <a:ext cx="182880" cy="182880"/>
           </a:xfrm>
           <a:prstGeom prst="ellipse">
@@ -11357,7 +14872,7 @@
         </p:nvCxnSpPr>
         <p:spPr>
           <a:xfrm rot="2400000">
-            <a:off x="6768920" y="2920497"/>
+            <a:off x="8800920" y="2920497"/>
             <a:ext cx="914400" cy="0"/>
           </a:xfrm>
           <a:prstGeom prst="line">
@@ -11395,7 +14910,7 @@
         </p:nvCxnSpPr>
         <p:spPr>
           <a:xfrm rot="19200000">
-            <a:off x="6068449" y="2920497"/>
+            <a:off x="8100449" y="2920497"/>
             <a:ext cx="914400" cy="0"/>
           </a:xfrm>
           <a:prstGeom prst="line">
@@ -11431,7 +14946,7 @@
         </p:nvSpPr>
         <p:spPr>
           <a:xfrm>
-            <a:off x="6083973" y="3122940"/>
+            <a:off x="8115973" y="3122940"/>
             <a:ext cx="182880" cy="182880"/>
           </a:xfrm>
           <a:prstGeom prst="ellipse">
@@ -11477,7 +14992,7 @@
         </p:nvSpPr>
         <p:spPr>
           <a:xfrm>
-            <a:off x="7484917" y="3122940"/>
+            <a:off x="9516917" y="3122940"/>
             <a:ext cx="182880" cy="182880"/>
           </a:xfrm>
           <a:prstGeom prst="ellipse">
@@ -11523,7 +15038,7 @@
         </p:nvSpPr>
         <p:spPr>
           <a:xfrm>
-            <a:off x="6784443" y="2535174"/>
+            <a:off x="8816443" y="2535174"/>
             <a:ext cx="182880" cy="182880"/>
           </a:xfrm>
           <a:prstGeom prst="ellipse">
@@ -11553,8 +15068,8 @@
           </a:p>
         </p:txBody>
       </p:sp>
-      <mc:AlternateContent xmlns:mc="http://schemas.openxmlformats.org/markup-compatibility/2006" xmlns:a14="http://schemas.microsoft.com/office/drawing/2010/main">
-        <mc:Choice Requires="a14">
+      <mc:AlternateContent xmlns:mc="http://schemas.openxmlformats.org/markup-compatibility/2006">
+        <mc:Choice xmlns:a14="http://schemas.microsoft.com/office/drawing/2010/main" Requires="a14">
           <p:sp>
             <p:nvSpPr>
               <p:cNvPr id="40" name="TextBox 39">
@@ -11569,8 +15084,8 @@
             </p:nvSpPr>
             <p:spPr>
               <a:xfrm>
-                <a:off x="1497212" y="792626"/>
-                <a:ext cx="657809" cy="584775"/>
+                <a:off x="3529212" y="792627"/>
+                <a:ext cx="657808" cy="584775"/>
               </a:xfrm>
               <a:prstGeom prst="rect">
                 <a:avLst/>
@@ -11623,7 +15138,7 @@
             </p:txBody>
           </p:sp>
         </mc:Choice>
-        <mc:Fallback xmlns="">
+        <mc:Fallback>
           <p:sp>
             <p:nvSpPr>
               <p:cNvPr id="40" name="TextBox 39">
@@ -11640,8 +15155,8 @@
             </p:nvSpPr>
             <p:spPr>
               <a:xfrm>
-                <a:off x="1497212" y="792626"/>
-                <a:ext cx="657809" cy="584775"/>
+                <a:off x="3529212" y="792627"/>
+                <a:ext cx="657808" cy="584775"/>
               </a:xfrm>
               <a:prstGeom prst="rect">
                 <a:avLst/>
@@ -11668,8 +15183,8 @@
           </p:sp>
         </mc:Fallback>
       </mc:AlternateContent>
-      <mc:AlternateContent xmlns:mc="http://schemas.openxmlformats.org/markup-compatibility/2006" xmlns:a14="http://schemas.microsoft.com/office/drawing/2010/main">
-        <mc:Choice Requires="a14">
+      <mc:AlternateContent xmlns:mc="http://schemas.openxmlformats.org/markup-compatibility/2006">
+        <mc:Choice xmlns:a14="http://schemas.microsoft.com/office/drawing/2010/main" Requires="a14">
           <p:sp>
             <p:nvSpPr>
               <p:cNvPr id="41" name="TextBox 40">
@@ -11684,8 +15199,8 @@
             </p:nvSpPr>
             <p:spPr>
               <a:xfrm>
-                <a:off x="2596697" y="792626"/>
-                <a:ext cx="657809" cy="584775"/>
+                <a:off x="4628697" y="792627"/>
+                <a:ext cx="657808" cy="584775"/>
               </a:xfrm>
               <a:prstGeom prst="rect">
                 <a:avLst/>
@@ -11738,7 +15253,7 @@
             </p:txBody>
           </p:sp>
         </mc:Choice>
-        <mc:Fallback xmlns="">
+        <mc:Fallback>
           <p:sp>
             <p:nvSpPr>
               <p:cNvPr id="41" name="TextBox 40">
@@ -11755,8 +15270,8 @@
             </p:nvSpPr>
             <p:spPr>
               <a:xfrm>
-                <a:off x="2596697" y="792626"/>
-                <a:ext cx="657809" cy="584775"/>
+                <a:off x="4628697" y="792627"/>
+                <a:ext cx="657808" cy="584775"/>
               </a:xfrm>
               <a:prstGeom prst="rect">
                 <a:avLst/>
@@ -11783,8 +15298,8 @@
           </p:sp>
         </mc:Fallback>
       </mc:AlternateContent>
-      <mc:AlternateContent xmlns:mc="http://schemas.openxmlformats.org/markup-compatibility/2006" xmlns:a14="http://schemas.microsoft.com/office/drawing/2010/main">
-        <mc:Choice Requires="a14">
+      <mc:AlternateContent xmlns:mc="http://schemas.openxmlformats.org/markup-compatibility/2006">
+        <mc:Choice xmlns:a14="http://schemas.microsoft.com/office/drawing/2010/main" Requires="a14">
           <p:sp>
             <p:nvSpPr>
               <p:cNvPr id="42" name="TextBox 41">
@@ -11799,7 +15314,7 @@
             </p:nvSpPr>
             <p:spPr>
               <a:xfrm>
-                <a:off x="3555965" y="792625"/>
+                <a:off x="5587965" y="792626"/>
                 <a:ext cx="645754" cy="584775"/>
               </a:xfrm>
               <a:prstGeom prst="rect">
@@ -11853,7 +15368,7 @@
             </p:txBody>
           </p:sp>
         </mc:Choice>
-        <mc:Fallback xmlns="">
+        <mc:Fallback>
           <p:sp>
             <p:nvSpPr>
               <p:cNvPr id="42" name="TextBox 41">
@@ -11870,7 +15385,7 @@
             </p:nvSpPr>
             <p:spPr>
               <a:xfrm>
-                <a:off x="3555965" y="792625"/>
+                <a:off x="5587965" y="792626"/>
                 <a:ext cx="645754" cy="584775"/>
               </a:xfrm>
               <a:prstGeom prst="rect">
@@ -11898,8 +15413,8 @@
           </p:sp>
         </mc:Fallback>
       </mc:AlternateContent>
-      <mc:AlternateContent xmlns:mc="http://schemas.openxmlformats.org/markup-compatibility/2006" xmlns:a14="http://schemas.microsoft.com/office/drawing/2010/main">
-        <mc:Choice Requires="a14">
+      <mc:AlternateContent xmlns:mc="http://schemas.openxmlformats.org/markup-compatibility/2006">
+        <mc:Choice xmlns:a14="http://schemas.microsoft.com/office/drawing/2010/main" Requires="a14">
           <p:sp>
             <p:nvSpPr>
               <p:cNvPr id="43" name="TextBox 42">
@@ -11914,7 +15429,7 @@
             </p:nvSpPr>
             <p:spPr>
               <a:xfrm>
-                <a:off x="656020" y="4264652"/>
+                <a:off x="2688022" y="4264654"/>
                 <a:ext cx="772327" cy="307777"/>
               </a:xfrm>
               <a:prstGeom prst="rect">
@@ -11980,7 +15495,7 @@
             </p:txBody>
           </p:sp>
         </mc:Choice>
-        <mc:Fallback xmlns="">
+        <mc:Fallback>
           <p:sp>
             <p:nvSpPr>
               <p:cNvPr id="43" name="TextBox 42">
@@ -11997,7 +15512,7 @@
             </p:nvSpPr>
             <p:spPr>
               <a:xfrm>
-                <a:off x="656020" y="4264652"/>
+                <a:off x="2688022" y="4264654"/>
                 <a:ext cx="772327" cy="307777"/>
               </a:xfrm>
               <a:prstGeom prst="rect">
@@ -12025,8 +15540,8 @@
           </p:sp>
         </mc:Fallback>
       </mc:AlternateContent>
-      <mc:AlternateContent xmlns:mc="http://schemas.openxmlformats.org/markup-compatibility/2006" xmlns:a14="http://schemas.microsoft.com/office/drawing/2010/main">
-        <mc:Choice Requires="a14">
+      <mc:AlternateContent xmlns:mc="http://schemas.openxmlformats.org/markup-compatibility/2006">
+        <mc:Choice xmlns:a14="http://schemas.microsoft.com/office/drawing/2010/main" Requires="a14">
           <p:sp>
             <p:nvSpPr>
               <p:cNvPr id="46" name="TextBox 45">
@@ -12041,7 +15556,7 @@
             </p:nvSpPr>
             <p:spPr>
               <a:xfrm>
-                <a:off x="542011" y="6018228"/>
+                <a:off x="2574012" y="6018229"/>
                 <a:ext cx="1059329" cy="369332"/>
               </a:xfrm>
               <a:prstGeom prst="rect">
@@ -12101,7 +15616,7 @@
             </p:txBody>
           </p:sp>
         </mc:Choice>
-        <mc:Fallback xmlns="">
+        <mc:Fallback>
           <p:sp>
             <p:nvSpPr>
               <p:cNvPr id="46" name="TextBox 45">
@@ -12118,7 +15633,7 @@
             </p:nvSpPr>
             <p:spPr>
               <a:xfrm>
-                <a:off x="542011" y="6018228"/>
+                <a:off x="2574012" y="6018229"/>
                 <a:ext cx="1059329" cy="369332"/>
               </a:xfrm>
               <a:prstGeom prst="rect">
@@ -12160,7 +15675,7 @@
         </p:nvSpPr>
         <p:spPr>
           <a:xfrm>
-            <a:off x="469907" y="5388662"/>
+            <a:off x="2501907" y="5388662"/>
             <a:ext cx="11302920" cy="3200400"/>
           </a:xfrm>
           <a:prstGeom prst="rect">
@@ -12209,7 +15724,7 @@
         </p:nvCxnSpPr>
         <p:spPr>
           <a:xfrm flipH="1">
-            <a:off x="1724557" y="3456607"/>
+            <a:off x="3756557" y="3456607"/>
             <a:ext cx="0" cy="3200400"/>
           </a:xfrm>
           <a:prstGeom prst="line">
@@ -12247,7 +15762,7 @@
         </p:nvCxnSpPr>
         <p:spPr>
           <a:xfrm flipH="1">
-            <a:off x="4169307" y="3454401"/>
+            <a:off x="6201307" y="3454401"/>
             <a:ext cx="0" cy="3200400"/>
           </a:xfrm>
           <a:prstGeom prst="line">
@@ -12285,7 +15800,7 @@
         </p:nvCxnSpPr>
         <p:spPr>
           <a:xfrm flipH="1">
-            <a:off x="7293507" y="3454401"/>
+            <a:off x="9325507" y="3454401"/>
             <a:ext cx="0" cy="3200400"/>
           </a:xfrm>
           <a:prstGeom prst="line">
@@ -12307,8 +15822,8 @@
           </a:fontRef>
         </p:style>
       </p:cxnSp>
-      <mc:AlternateContent xmlns:mc="http://schemas.openxmlformats.org/markup-compatibility/2006" xmlns:a14="http://schemas.microsoft.com/office/drawing/2010/main">
-        <mc:Choice Requires="a14">
+      <mc:AlternateContent xmlns:mc="http://schemas.openxmlformats.org/markup-compatibility/2006">
+        <mc:Choice xmlns:a14="http://schemas.microsoft.com/office/drawing/2010/main" Requires="a14">
           <p:sp>
             <p:nvSpPr>
               <p:cNvPr id="54" name="TextBox 53">
@@ -12323,7 +15838,7 @@
             </p:nvSpPr>
             <p:spPr>
               <a:xfrm>
-                <a:off x="1792170" y="4841603"/>
+                <a:off x="3824171" y="4841605"/>
                 <a:ext cx="908582" cy="307777"/>
               </a:xfrm>
               <a:prstGeom prst="rect">
@@ -12389,7 +15904,7 @@
             </p:txBody>
           </p:sp>
         </mc:Choice>
-        <mc:Fallback xmlns="">
+        <mc:Fallback>
           <p:sp>
             <p:nvSpPr>
               <p:cNvPr id="54" name="TextBox 53">
@@ -12406,7 +15921,7 @@
             </p:nvSpPr>
             <p:spPr>
               <a:xfrm>
-                <a:off x="1792170" y="4841603"/>
+                <a:off x="3824171" y="4841605"/>
                 <a:ext cx="908582" cy="307777"/>
               </a:xfrm>
               <a:prstGeom prst="rect">
@@ -12434,8 +15949,8 @@
           </p:sp>
         </mc:Fallback>
       </mc:AlternateContent>
-      <mc:AlternateContent xmlns:mc="http://schemas.openxmlformats.org/markup-compatibility/2006" xmlns:a14="http://schemas.microsoft.com/office/drawing/2010/main">
-        <mc:Choice Requires="a14">
+      <mc:AlternateContent xmlns:mc="http://schemas.openxmlformats.org/markup-compatibility/2006">
+        <mc:Choice xmlns:a14="http://schemas.microsoft.com/office/drawing/2010/main" Requires="a14">
           <p:sp>
             <p:nvSpPr>
               <p:cNvPr id="55" name="TextBox 54">
@@ -12450,7 +15965,7 @@
             </p:nvSpPr>
             <p:spPr>
               <a:xfrm>
-                <a:off x="3202437" y="4848197"/>
+                <a:off x="5234438" y="4848199"/>
                 <a:ext cx="908582" cy="307777"/>
               </a:xfrm>
               <a:prstGeom prst="rect">
@@ -12516,7 +16031,7 @@
             </p:txBody>
           </p:sp>
         </mc:Choice>
-        <mc:Fallback xmlns="">
+        <mc:Fallback>
           <p:sp>
             <p:nvSpPr>
               <p:cNvPr id="55" name="TextBox 54">
@@ -12533,7 +16048,7 @@
             </p:nvSpPr>
             <p:spPr>
               <a:xfrm>
-                <a:off x="3202437" y="4848197"/>
+                <a:off x="5234438" y="4848199"/>
                 <a:ext cx="908582" cy="307777"/>
               </a:xfrm>
               <a:prstGeom prst="rect">
@@ -12561,8 +16076,8 @@
           </p:sp>
         </mc:Fallback>
       </mc:AlternateContent>
-      <mc:AlternateContent xmlns:mc="http://schemas.openxmlformats.org/markup-compatibility/2006" xmlns:a14="http://schemas.microsoft.com/office/drawing/2010/main">
-        <mc:Choice Requires="a14">
+      <mc:AlternateContent xmlns:mc="http://schemas.openxmlformats.org/markup-compatibility/2006">
+        <mc:Choice xmlns:a14="http://schemas.microsoft.com/office/drawing/2010/main" Requires="a14">
           <p:sp>
             <p:nvSpPr>
               <p:cNvPr id="56" name="TextBox 55">
@@ -12577,7 +16092,7 @@
             </p:nvSpPr>
             <p:spPr>
               <a:xfrm>
-                <a:off x="4221370" y="4841603"/>
+                <a:off x="6253370" y="4841605"/>
                 <a:ext cx="908582" cy="307777"/>
               </a:xfrm>
               <a:prstGeom prst="rect">
@@ -12643,7 +16158,7 @@
             </p:txBody>
           </p:sp>
         </mc:Choice>
-        <mc:Fallback xmlns="">
+        <mc:Fallback>
           <p:sp>
             <p:nvSpPr>
               <p:cNvPr id="56" name="TextBox 55">
@@ -12660,14 +16175,14 @@
             </p:nvSpPr>
             <p:spPr>
               <a:xfrm>
-                <a:off x="4221370" y="4841603"/>
+                <a:off x="6253370" y="4841605"/>
                 <a:ext cx="908582" cy="307777"/>
               </a:xfrm>
               <a:prstGeom prst="rect">
                 <a:avLst/>
               </a:prstGeom>
               <a:blipFill>
-                <a:blip r:embed="rId10"/>
+                <a:blip r:embed="rId8"/>
                 <a:stretch>
                   <a:fillRect/>
                 </a:stretch>
@@ -12688,8 +16203,8 @@
           </p:sp>
         </mc:Fallback>
       </mc:AlternateContent>
-      <mc:AlternateContent xmlns:mc="http://schemas.openxmlformats.org/markup-compatibility/2006" xmlns:a14="http://schemas.microsoft.com/office/drawing/2010/main">
-        <mc:Choice Requires="a14">
+      <mc:AlternateContent xmlns:mc="http://schemas.openxmlformats.org/markup-compatibility/2006">
+        <mc:Choice xmlns:a14="http://schemas.microsoft.com/office/drawing/2010/main" Requires="a14">
           <p:sp>
             <p:nvSpPr>
               <p:cNvPr id="57" name="TextBox 56">
@@ -12704,7 +16219,7 @@
             </p:nvSpPr>
             <p:spPr>
               <a:xfrm>
-                <a:off x="4898498" y="5477903"/>
+                <a:off x="6930498" y="5477905"/>
                 <a:ext cx="1007968" cy="307777"/>
               </a:xfrm>
               <a:prstGeom prst="rect">
@@ -12770,7 +16285,7 @@
             </p:txBody>
           </p:sp>
         </mc:Choice>
-        <mc:Fallback xmlns="">
+        <mc:Fallback>
           <p:sp>
             <p:nvSpPr>
               <p:cNvPr id="57" name="TextBox 56">
@@ -12787,14 +16302,14 @@
             </p:nvSpPr>
             <p:spPr>
               <a:xfrm>
-                <a:off x="4898498" y="5477903"/>
+                <a:off x="6930498" y="5477905"/>
                 <a:ext cx="1007968" cy="307777"/>
               </a:xfrm>
               <a:prstGeom prst="rect">
                 <a:avLst/>
               </a:prstGeom>
               <a:blipFill>
-                <a:blip r:embed="rId11"/>
+                <a:blip r:embed="rId10"/>
                 <a:stretch>
                   <a:fillRect b="-2000"/>
                 </a:stretch>
@@ -12815,8 +16330,8 @@
           </p:sp>
         </mc:Fallback>
       </mc:AlternateContent>
-      <mc:AlternateContent xmlns:mc="http://schemas.openxmlformats.org/markup-compatibility/2006" xmlns:a14="http://schemas.microsoft.com/office/drawing/2010/main">
-        <mc:Choice Requires="a14">
+      <mc:AlternateContent xmlns:mc="http://schemas.openxmlformats.org/markup-compatibility/2006">
+        <mc:Choice xmlns:a14="http://schemas.microsoft.com/office/drawing/2010/main" Requires="a14">
           <p:sp>
             <p:nvSpPr>
               <p:cNvPr id="58" name="TextBox 57">
@@ -12831,7 +16346,7 @@
             </p:nvSpPr>
             <p:spPr>
               <a:xfrm>
-                <a:off x="6318820" y="5477903"/>
+                <a:off x="8350820" y="5477905"/>
                 <a:ext cx="1007968" cy="307777"/>
               </a:xfrm>
               <a:prstGeom prst="rect">
@@ -12897,7 +16412,7 @@
             </p:txBody>
           </p:sp>
         </mc:Choice>
-        <mc:Fallback xmlns="">
+        <mc:Fallback>
           <p:sp>
             <p:nvSpPr>
               <p:cNvPr id="58" name="TextBox 57">
@@ -12914,14 +16429,14 @@
             </p:nvSpPr>
             <p:spPr>
               <a:xfrm>
-                <a:off x="6318820" y="5477903"/>
+                <a:off x="8350820" y="5477905"/>
                 <a:ext cx="1007968" cy="307777"/>
               </a:xfrm>
               <a:prstGeom prst="rect">
                 <a:avLst/>
               </a:prstGeom>
               <a:blipFill>
-                <a:blip r:embed="rId12"/>
+                <a:blip r:embed="rId11"/>
                 <a:stretch>
                   <a:fillRect b="-2000"/>
                 </a:stretch>
@@ -12942,8 +16457,8 @@
           </p:sp>
         </mc:Fallback>
       </mc:AlternateContent>
-      <mc:AlternateContent xmlns:mc="http://schemas.openxmlformats.org/markup-compatibility/2006" xmlns:a14="http://schemas.microsoft.com/office/drawing/2010/main">
-        <mc:Choice Requires="a14">
+      <mc:AlternateContent xmlns:mc="http://schemas.openxmlformats.org/markup-compatibility/2006">
+        <mc:Choice xmlns:a14="http://schemas.microsoft.com/office/drawing/2010/main" Requires="a14">
           <p:sp>
             <p:nvSpPr>
               <p:cNvPr id="59" name="TextBox 58">
@@ -12958,7 +16473,7 @@
             </p:nvSpPr>
             <p:spPr>
               <a:xfrm>
-                <a:off x="2383993" y="6018228"/>
+                <a:off x="4415993" y="6018229"/>
                 <a:ext cx="1064650" cy="369332"/>
               </a:xfrm>
               <a:prstGeom prst="rect">
@@ -13018,7 +16533,7 @@
             </p:txBody>
           </p:sp>
         </mc:Choice>
-        <mc:Fallback xmlns="">
+        <mc:Fallback>
           <p:sp>
             <p:nvSpPr>
               <p:cNvPr id="59" name="TextBox 58">
@@ -13035,14 +16550,14 @@
             </p:nvSpPr>
             <p:spPr>
               <a:xfrm>
-                <a:off x="2383993" y="6018228"/>
+                <a:off x="4415993" y="6018229"/>
                 <a:ext cx="1064650" cy="369332"/>
               </a:xfrm>
               <a:prstGeom prst="rect">
                 <a:avLst/>
               </a:prstGeom>
               <a:blipFill>
-                <a:blip r:embed="rId13"/>
+                <a:blip r:embed="rId12"/>
                 <a:stretch>
                   <a:fillRect/>
                 </a:stretch>
@@ -13063,8 +16578,8 @@
           </p:sp>
         </mc:Fallback>
       </mc:AlternateContent>
-      <mc:AlternateContent xmlns:mc="http://schemas.openxmlformats.org/markup-compatibility/2006" xmlns:a14="http://schemas.microsoft.com/office/drawing/2010/main">
-        <mc:Choice Requires="a14">
+      <mc:AlternateContent xmlns:mc="http://schemas.openxmlformats.org/markup-compatibility/2006">
+        <mc:Choice xmlns:a14="http://schemas.microsoft.com/office/drawing/2010/main" Requires="a14">
           <p:sp>
             <p:nvSpPr>
               <p:cNvPr id="60" name="TextBox 59">
@@ -13079,7 +16594,7 @@
             </p:nvSpPr>
             <p:spPr>
               <a:xfrm>
-                <a:off x="5087500" y="6018228"/>
+                <a:off x="7119500" y="6018229"/>
                 <a:ext cx="1064650" cy="369332"/>
               </a:xfrm>
               <a:prstGeom prst="rect">
@@ -13139,7 +16654,7 @@
             </p:txBody>
           </p:sp>
         </mc:Choice>
-        <mc:Fallback xmlns="">
+        <mc:Fallback>
           <p:sp>
             <p:nvSpPr>
               <p:cNvPr id="60" name="TextBox 59">
@@ -13156,14 +16671,14 @@
             </p:nvSpPr>
             <p:spPr>
               <a:xfrm>
-                <a:off x="5087500" y="6018228"/>
+                <a:off x="7119500" y="6018229"/>
                 <a:ext cx="1064650" cy="369332"/>
               </a:xfrm>
               <a:prstGeom prst="rect">
                 <a:avLst/>
               </a:prstGeom>
               <a:blipFill>
-                <a:blip r:embed="rId14"/>
+                <a:blip r:embed="rId13"/>
                 <a:stretch>
                   <a:fillRect/>
                 </a:stretch>
@@ -13184,8 +16699,8 @@
           </p:sp>
         </mc:Fallback>
       </mc:AlternateContent>
-      <mc:AlternateContent xmlns:mc="http://schemas.openxmlformats.org/markup-compatibility/2006" xmlns:a14="http://schemas.microsoft.com/office/drawing/2010/main">
-        <mc:Choice Requires="a14">
+      <mc:AlternateContent xmlns:mc="http://schemas.openxmlformats.org/markup-compatibility/2006">
+        <mc:Choice xmlns:a14="http://schemas.microsoft.com/office/drawing/2010/main" Requires="a14">
           <p:sp>
             <p:nvSpPr>
               <p:cNvPr id="61" name="TextBox 60">
@@ -13200,7 +16715,7 @@
             </p:nvSpPr>
             <p:spPr>
               <a:xfrm>
-                <a:off x="9393496" y="5451579"/>
+                <a:off x="11425496" y="5451580"/>
                 <a:ext cx="1007968" cy="307777"/>
               </a:xfrm>
               <a:prstGeom prst="rect">
@@ -13266,7 +16781,7 @@
             </p:txBody>
           </p:sp>
         </mc:Choice>
-        <mc:Fallback xmlns="">
+        <mc:Fallback>
           <p:sp>
             <p:nvSpPr>
               <p:cNvPr id="61" name="TextBox 60">
@@ -13283,14 +16798,14 @@
             </p:nvSpPr>
             <p:spPr>
               <a:xfrm>
-                <a:off x="9393496" y="5451579"/>
+                <a:off x="11425496" y="5451580"/>
                 <a:ext cx="1007968" cy="307777"/>
               </a:xfrm>
               <a:prstGeom prst="rect">
                 <a:avLst/>
               </a:prstGeom>
               <a:blipFill>
-                <a:blip r:embed="rId15"/>
+                <a:blip r:embed="rId14"/>
                 <a:stretch>
                   <a:fillRect/>
                 </a:stretch>
@@ -13311,8 +16826,8 @@
           </p:sp>
         </mc:Fallback>
       </mc:AlternateContent>
-      <mc:AlternateContent xmlns:mc="http://schemas.openxmlformats.org/markup-compatibility/2006" xmlns:a14="http://schemas.microsoft.com/office/drawing/2010/main">
-        <mc:Choice Requires="a14">
+      <mc:AlternateContent xmlns:mc="http://schemas.openxmlformats.org/markup-compatibility/2006">
+        <mc:Choice xmlns:a14="http://schemas.microsoft.com/office/drawing/2010/main" Requires="a14">
           <p:sp>
             <p:nvSpPr>
               <p:cNvPr id="62" name="TextBox 61">
@@ -13327,7 +16842,7 @@
             </p:nvSpPr>
             <p:spPr>
               <a:xfrm>
-                <a:off x="10813818" y="5451579"/>
+                <a:off x="12845818" y="5451580"/>
                 <a:ext cx="1007968" cy="307777"/>
               </a:xfrm>
               <a:prstGeom prst="rect">
@@ -13393,7 +16908,7 @@
             </p:txBody>
           </p:sp>
         </mc:Choice>
-        <mc:Fallback xmlns="">
+        <mc:Fallback>
           <p:sp>
             <p:nvSpPr>
               <p:cNvPr id="62" name="TextBox 61">
@@ -13410,14 +16925,14 @@
             </p:nvSpPr>
             <p:spPr>
               <a:xfrm>
-                <a:off x="10813818" y="5451579"/>
+                <a:off x="12845818" y="5451580"/>
                 <a:ext cx="1007968" cy="307777"/>
               </a:xfrm>
               <a:prstGeom prst="rect">
                 <a:avLst/>
               </a:prstGeom>
               <a:blipFill>
-                <a:blip r:embed="rId16"/>
+                <a:blip r:embed="rId15"/>
                 <a:stretch>
                   <a:fillRect/>
                 </a:stretch>
@@ -13438,8 +16953,8 @@
           </p:sp>
         </mc:Fallback>
       </mc:AlternateContent>
-      <mc:AlternateContent xmlns:mc="http://schemas.openxmlformats.org/markup-compatibility/2006" xmlns:a14="http://schemas.microsoft.com/office/drawing/2010/main">
-        <mc:Choice Requires="a14">
+      <mc:AlternateContent xmlns:mc="http://schemas.openxmlformats.org/markup-compatibility/2006">
+        <mc:Choice xmlns:a14="http://schemas.microsoft.com/office/drawing/2010/main" Requires="a14">
           <p:sp>
             <p:nvSpPr>
               <p:cNvPr id="63" name="TextBox 62">
@@ -13454,7 +16969,7 @@
             </p:nvSpPr>
             <p:spPr>
               <a:xfrm>
-                <a:off x="7293507" y="6053190"/>
+                <a:off x="9325507" y="6053191"/>
                 <a:ext cx="1007968" cy="307777"/>
               </a:xfrm>
               <a:prstGeom prst="rect">
@@ -13520,7 +17035,7 @@
             </p:txBody>
           </p:sp>
         </mc:Choice>
-        <mc:Fallback xmlns="">
+        <mc:Fallback>
           <p:sp>
             <p:nvSpPr>
               <p:cNvPr id="63" name="TextBox 62">
@@ -13537,14 +17052,14 @@
             </p:nvSpPr>
             <p:spPr>
               <a:xfrm>
-                <a:off x="7293507" y="6053190"/>
+                <a:off x="9325507" y="6053191"/>
                 <a:ext cx="1007968" cy="307777"/>
               </a:xfrm>
               <a:prstGeom prst="rect">
                 <a:avLst/>
               </a:prstGeom>
               <a:blipFill>
-                <a:blip r:embed="rId17"/>
+                <a:blip r:embed="rId16"/>
                 <a:stretch>
                   <a:fillRect b="-2000"/>
                 </a:stretch>
@@ -13565,8 +17080,8 @@
           </p:sp>
         </mc:Fallback>
       </mc:AlternateContent>
-      <mc:AlternateContent xmlns:mc="http://schemas.openxmlformats.org/markup-compatibility/2006" xmlns:a14="http://schemas.microsoft.com/office/drawing/2010/main">
-        <mc:Choice Requires="a14">
+      <mc:AlternateContent xmlns:mc="http://schemas.openxmlformats.org/markup-compatibility/2006">
+        <mc:Choice xmlns:a14="http://schemas.microsoft.com/office/drawing/2010/main" Requires="a14">
           <p:sp>
             <p:nvSpPr>
               <p:cNvPr id="64" name="TextBox 63">
@@ -13581,7 +17096,7 @@
             </p:nvSpPr>
             <p:spPr>
               <a:xfrm>
-                <a:off x="8713829" y="6053190"/>
+                <a:off x="10745829" y="6053191"/>
                 <a:ext cx="1007968" cy="307777"/>
               </a:xfrm>
               <a:prstGeom prst="rect">
@@ -13647,7 +17162,7 @@
             </p:txBody>
           </p:sp>
         </mc:Choice>
-        <mc:Fallback xmlns="">
+        <mc:Fallback>
           <p:sp>
             <p:nvSpPr>
               <p:cNvPr id="64" name="TextBox 63">
@@ -13664,14 +17179,14 @@
             </p:nvSpPr>
             <p:spPr>
               <a:xfrm>
-                <a:off x="8713829" y="6053190"/>
+                <a:off x="10745829" y="6053191"/>
                 <a:ext cx="1007968" cy="307777"/>
               </a:xfrm>
               <a:prstGeom prst="rect">
                 <a:avLst/>
               </a:prstGeom>
               <a:blipFill>
-                <a:blip r:embed="rId18"/>
+                <a:blip r:embed="rId17"/>
                 <a:stretch>
                   <a:fillRect b="-2000"/>
                 </a:stretch>
@@ -13692,8 +17207,8 @@
           </p:sp>
         </mc:Fallback>
       </mc:AlternateContent>
-      <mc:AlternateContent xmlns:mc="http://schemas.openxmlformats.org/markup-compatibility/2006" xmlns:a14="http://schemas.microsoft.com/office/drawing/2010/main">
-        <mc:Choice Requires="a14">
+      <mc:AlternateContent xmlns:mc="http://schemas.openxmlformats.org/markup-compatibility/2006">
+        <mc:Choice xmlns:a14="http://schemas.microsoft.com/office/drawing/2010/main" Requires="a14">
           <p:sp>
             <p:nvSpPr>
               <p:cNvPr id="3" name="TextBox 2">
@@ -13708,8 +17223,8 @@
             </p:nvSpPr>
             <p:spPr>
               <a:xfrm>
-                <a:off x="4332573" y="792624"/>
-                <a:ext cx="657809" cy="584775"/>
+                <a:off x="6364573" y="792625"/>
+                <a:ext cx="657808" cy="584775"/>
               </a:xfrm>
               <a:prstGeom prst="rect">
                 <a:avLst/>
@@ -13732,7 +17247,7 @@
                       <m:sSub>
                         <m:sSubPr>
                           <m:ctrlPr>
-                            <a:rPr lang="en-US" sz="3200" i="1" smtClean="0">
+                            <a:rPr lang="en-US" sz="3200" i="1">
                               <a:latin typeface="Cambria Math" panose="02040503050406030204" pitchFamily="18" charset="0"/>
                             </a:rPr>
                           </m:ctrlPr>
@@ -13747,7 +17262,7 @@
                         </m:e>
                         <m:sub>
                           <m:r>
-                            <a:rPr lang="en-US" sz="3200" b="0" i="1" smtClean="0">
+                            <a:rPr lang="en-US" sz="3200" i="1">
                               <a:latin typeface="Cambria Math" panose="02040503050406030204" pitchFamily="18" charset="0"/>
                             </a:rPr>
                             <m:t>5</m:t>
@@ -13762,7 +17277,7 @@
             </p:txBody>
           </p:sp>
         </mc:Choice>
-        <mc:Fallback xmlns="">
+        <mc:Fallback>
           <p:sp>
             <p:nvSpPr>
               <p:cNvPr id="3" name="TextBox 2">
@@ -13779,14 +17294,14 @@
             </p:nvSpPr>
             <p:spPr>
               <a:xfrm>
-                <a:off x="4332573" y="792624"/>
-                <a:ext cx="657809" cy="584775"/>
+                <a:off x="6364573" y="792625"/>
+                <a:ext cx="657808" cy="584775"/>
               </a:xfrm>
               <a:prstGeom prst="rect">
                 <a:avLst/>
               </a:prstGeom>
               <a:blipFill>
-                <a:blip r:embed="rId19"/>
+                <a:blip r:embed="rId18"/>
                 <a:stretch>
                   <a:fillRect/>
                 </a:stretch>
@@ -13821,7 +17336,7 @@
         </p:nvSpPr>
         <p:spPr>
           <a:xfrm>
-            <a:off x="8301475" y="3100417"/>
+            <a:off x="10333475" y="3100417"/>
             <a:ext cx="182880" cy="182880"/>
           </a:xfrm>
           <a:prstGeom prst="ellipse">
@@ -13866,7 +17381,7 @@
 </p:sld>
 </file>
 
-<file path=ppt/slides/slide4.xml><?xml version="1.0" encoding="utf-8"?>
+<file path=ppt/slides/slide5.xml><?xml version="1.0" encoding="utf-8"?>
 <p:sld xmlns:a="http://schemas.openxmlformats.org/drawingml/2006/main" xmlns:r="http://schemas.openxmlformats.org/officeDocument/2006/relationships" xmlns:p="http://schemas.openxmlformats.org/presentationml/2006/main">
   <p:cSld>
     <p:spTree>
@@ -13897,7 +17412,7 @@
         </p:nvGrpSpPr>
         <p:grpSpPr>
           <a:xfrm>
-            <a:off x="7483264" y="2800599"/>
+            <a:off x="9515264" y="2800601"/>
             <a:ext cx="2754410" cy="2028343"/>
             <a:chOff x="8571203" y="4473040"/>
             <a:chExt cx="2754410" cy="2028343"/>
@@ -14590,7 +18105,7 @@
         </p:nvGrpSpPr>
         <p:grpSpPr>
           <a:xfrm>
-            <a:off x="4731659" y="2796570"/>
+            <a:off x="6763661" y="2796571"/>
             <a:ext cx="2066659" cy="1526738"/>
             <a:chOff x="6119432" y="5020363"/>
             <a:chExt cx="2066659" cy="1526738"/>
@@ -15117,7 +18632,7 @@
         </p:nvGrpSpPr>
         <p:grpSpPr>
           <a:xfrm>
-            <a:off x="2625292" y="2795382"/>
+            <a:off x="4657294" y="2795384"/>
             <a:ext cx="1462145" cy="1083527"/>
             <a:chOff x="4247125" y="4440860"/>
             <a:chExt cx="1462145" cy="1083527"/>
@@ -15478,7 +18993,7 @@
         </p:nvGrpSpPr>
         <p:grpSpPr>
           <a:xfrm>
-            <a:off x="1189756" y="2795382"/>
+            <a:off x="3221756" y="2795382"/>
             <a:ext cx="900648" cy="694944"/>
             <a:chOff x="1189756" y="2795382"/>
             <a:chExt cx="900648" cy="694944"/>
@@ -15711,7 +19226,7 @@
         </p:nvSpPr>
         <p:spPr>
           <a:xfrm>
-            <a:off x="455906" y="2795382"/>
+            <a:off x="2487906" y="2795382"/>
             <a:ext cx="182880" cy="182880"/>
           </a:xfrm>
           <a:prstGeom prst="ellipse">
@@ -15743,8 +19258,8 @@
           </a:p>
         </p:txBody>
       </p:sp>
-      <mc:AlternateContent xmlns:mc="http://schemas.openxmlformats.org/markup-compatibility/2006" xmlns:a14="http://schemas.microsoft.com/office/drawing/2010/main">
-        <mc:Choice Requires="a14">
+      <mc:AlternateContent xmlns:mc="http://schemas.openxmlformats.org/markup-compatibility/2006">
+        <mc:Choice xmlns:a14="http://schemas.microsoft.com/office/drawing/2010/main" Requires="a14">
           <p:sp>
             <p:nvSpPr>
               <p:cNvPr id="84" name="TextBox 83">
@@ -15759,7 +19274,7 @@
             </p:nvSpPr>
             <p:spPr>
               <a:xfrm>
-                <a:off x="104335" y="2996079"/>
+                <a:off x="2136337" y="2996080"/>
                 <a:ext cx="772327" cy="307777"/>
               </a:xfrm>
               <a:prstGeom prst="rect">
@@ -15825,7 +19340,7 @@
             </p:txBody>
           </p:sp>
         </mc:Choice>
-        <mc:Fallback xmlns="">
+        <mc:Fallback>
           <p:sp>
             <p:nvSpPr>
               <p:cNvPr id="84" name="TextBox 83">
@@ -15842,7 +19357,7 @@
             </p:nvSpPr>
             <p:spPr>
               <a:xfrm>
-                <a:off x="104335" y="2996079"/>
+                <a:off x="2136337" y="2996080"/>
                 <a:ext cx="772327" cy="307777"/>
               </a:xfrm>
               <a:prstGeom prst="rect">
@@ -15870,8 +19385,8 @@
           </p:sp>
         </mc:Fallback>
       </mc:AlternateContent>
-      <mc:AlternateContent xmlns:mc="http://schemas.openxmlformats.org/markup-compatibility/2006" xmlns:a14="http://schemas.microsoft.com/office/drawing/2010/main">
-        <mc:Choice Requires="a14">
+      <mc:AlternateContent xmlns:mc="http://schemas.openxmlformats.org/markup-compatibility/2006">
+        <mc:Choice xmlns:a14="http://schemas.microsoft.com/office/drawing/2010/main" Requires="a14">
           <p:sp>
             <p:nvSpPr>
               <p:cNvPr id="85" name="TextBox 84">
@@ -15886,7 +19401,7 @@
             </p:nvSpPr>
             <p:spPr>
               <a:xfrm>
-                <a:off x="542011" y="6018228"/>
+                <a:off x="2574012" y="6018229"/>
                 <a:ext cx="1059329" cy="369332"/>
               </a:xfrm>
               <a:prstGeom prst="rect">
@@ -15946,7 +19461,7 @@
             </p:txBody>
           </p:sp>
         </mc:Choice>
-        <mc:Fallback xmlns="">
+        <mc:Fallback>
           <p:sp>
             <p:nvSpPr>
               <p:cNvPr id="85" name="TextBox 84">
@@ -15963,7 +19478,7 @@
             </p:nvSpPr>
             <p:spPr>
               <a:xfrm>
-                <a:off x="542011" y="6018228"/>
+                <a:off x="2574012" y="6018229"/>
                 <a:ext cx="1059329" cy="369332"/>
               </a:xfrm>
               <a:prstGeom prst="rect">
@@ -15991,8 +19506,8 @@
           </p:sp>
         </mc:Fallback>
       </mc:AlternateContent>
-      <mc:AlternateContent xmlns:mc="http://schemas.openxmlformats.org/markup-compatibility/2006" xmlns:a14="http://schemas.microsoft.com/office/drawing/2010/main">
-        <mc:Choice Requires="a14">
+      <mc:AlternateContent xmlns:mc="http://schemas.openxmlformats.org/markup-compatibility/2006">
+        <mc:Choice xmlns:a14="http://schemas.microsoft.com/office/drawing/2010/main" Requires="a14">
           <p:sp>
             <p:nvSpPr>
               <p:cNvPr id="86" name="TextBox 85">
@@ -16007,7 +19522,7 @@
             </p:nvSpPr>
             <p:spPr>
               <a:xfrm>
-                <a:off x="826905" y="3503467"/>
+                <a:off x="2858906" y="3503468"/>
                 <a:ext cx="908582" cy="307777"/>
               </a:xfrm>
               <a:prstGeom prst="rect">
@@ -16073,7 +19588,7 @@
             </p:txBody>
           </p:sp>
         </mc:Choice>
-        <mc:Fallback xmlns="">
+        <mc:Fallback>
           <p:sp>
             <p:nvSpPr>
               <p:cNvPr id="86" name="TextBox 85">
@@ -16090,7 +19605,7 @@
             </p:nvSpPr>
             <p:spPr>
               <a:xfrm>
-                <a:off x="826905" y="3503467"/>
+                <a:off x="2858906" y="3503468"/>
                 <a:ext cx="908582" cy="307777"/>
               </a:xfrm>
               <a:prstGeom prst="rect">
@@ -16118,8 +19633,8 @@
           </p:sp>
         </mc:Fallback>
       </mc:AlternateContent>
-      <mc:AlternateContent xmlns:mc="http://schemas.openxmlformats.org/markup-compatibility/2006" xmlns:a14="http://schemas.microsoft.com/office/drawing/2010/main">
-        <mc:Choice Requires="a14">
+      <mc:AlternateContent xmlns:mc="http://schemas.openxmlformats.org/markup-compatibility/2006">
+        <mc:Choice xmlns:a14="http://schemas.microsoft.com/office/drawing/2010/main" Requires="a14">
           <p:sp>
             <p:nvSpPr>
               <p:cNvPr id="87" name="TextBox 86">
@@ -16134,7 +19649,7 @@
             </p:nvSpPr>
             <p:spPr>
               <a:xfrm>
-                <a:off x="1716710" y="4646062"/>
+                <a:off x="3748710" y="4646063"/>
                 <a:ext cx="908582" cy="307777"/>
               </a:xfrm>
               <a:prstGeom prst="rect">
@@ -16200,7 +19715,7 @@
             </p:txBody>
           </p:sp>
         </mc:Choice>
-        <mc:Fallback xmlns="">
+        <mc:Fallback>
           <p:sp>
             <p:nvSpPr>
               <p:cNvPr id="87" name="TextBox 86">
@@ -16217,7 +19732,7 @@
             </p:nvSpPr>
             <p:spPr>
               <a:xfrm>
-                <a:off x="1716710" y="4646062"/>
+                <a:off x="3748710" y="4646063"/>
                 <a:ext cx="908582" cy="307777"/>
               </a:xfrm>
               <a:prstGeom prst="rect">
@@ -16245,8 +19760,8 @@
           </p:sp>
         </mc:Fallback>
       </mc:AlternateContent>
-      <mc:AlternateContent xmlns:mc="http://schemas.openxmlformats.org/markup-compatibility/2006" xmlns:a14="http://schemas.microsoft.com/office/drawing/2010/main">
-        <mc:Choice Requires="a14">
+      <mc:AlternateContent xmlns:mc="http://schemas.openxmlformats.org/markup-compatibility/2006">
+        <mc:Choice xmlns:a14="http://schemas.microsoft.com/office/drawing/2010/main" Requires="a14">
           <p:sp>
             <p:nvSpPr>
               <p:cNvPr id="88" name="TextBox 87">
@@ -16261,7 +19776,7 @@
             </p:nvSpPr>
             <p:spPr>
               <a:xfrm>
-                <a:off x="4221370" y="4841603"/>
+                <a:off x="6253370" y="4841605"/>
                 <a:ext cx="908582" cy="307777"/>
               </a:xfrm>
               <a:prstGeom prst="rect">
@@ -16327,7 +19842,7 @@
             </p:txBody>
           </p:sp>
         </mc:Choice>
-        <mc:Fallback xmlns="">
+        <mc:Fallback>
           <p:sp>
             <p:nvSpPr>
               <p:cNvPr id="88" name="TextBox 87">
@@ -16344,7 +19859,7 @@
             </p:nvSpPr>
             <p:spPr>
               <a:xfrm>
-                <a:off x="4221370" y="4841603"/>
+                <a:off x="6253370" y="4841605"/>
                 <a:ext cx="908582" cy="307777"/>
               </a:xfrm>
               <a:prstGeom prst="rect">
@@ -16372,8 +19887,8 @@
           </p:sp>
         </mc:Fallback>
       </mc:AlternateContent>
-      <mc:AlternateContent xmlns:mc="http://schemas.openxmlformats.org/markup-compatibility/2006" xmlns:a14="http://schemas.microsoft.com/office/drawing/2010/main">
-        <mc:Choice Requires="a14">
+      <mc:AlternateContent xmlns:mc="http://schemas.openxmlformats.org/markup-compatibility/2006">
+        <mc:Choice xmlns:a14="http://schemas.microsoft.com/office/drawing/2010/main" Requires="a14">
           <p:sp>
             <p:nvSpPr>
               <p:cNvPr id="89" name="TextBox 88">
@@ -16388,7 +19903,7 @@
             </p:nvSpPr>
             <p:spPr>
               <a:xfrm>
-                <a:off x="4898498" y="5477903"/>
+                <a:off x="6930498" y="5477905"/>
                 <a:ext cx="1007968" cy="307777"/>
               </a:xfrm>
               <a:prstGeom prst="rect">
@@ -16454,7 +19969,7 @@
             </p:txBody>
           </p:sp>
         </mc:Choice>
-        <mc:Fallback xmlns="">
+        <mc:Fallback>
           <p:sp>
             <p:nvSpPr>
               <p:cNvPr id="89" name="TextBox 88">
@@ -16471,7 +19986,7 @@
             </p:nvSpPr>
             <p:spPr>
               <a:xfrm>
-                <a:off x="4898498" y="5477903"/>
+                <a:off x="6930498" y="5477905"/>
                 <a:ext cx="1007968" cy="307777"/>
               </a:xfrm>
               <a:prstGeom prst="rect">
@@ -16499,8 +20014,8 @@
           </p:sp>
         </mc:Fallback>
       </mc:AlternateContent>
-      <mc:AlternateContent xmlns:mc="http://schemas.openxmlformats.org/markup-compatibility/2006" xmlns:a14="http://schemas.microsoft.com/office/drawing/2010/main">
-        <mc:Choice Requires="a14">
+      <mc:AlternateContent xmlns:mc="http://schemas.openxmlformats.org/markup-compatibility/2006">
+        <mc:Choice xmlns:a14="http://schemas.microsoft.com/office/drawing/2010/main" Requires="a14">
           <p:sp>
             <p:nvSpPr>
               <p:cNvPr id="90" name="TextBox 89">
@@ -16515,7 +20030,7 @@
             </p:nvSpPr>
             <p:spPr>
               <a:xfrm>
-                <a:off x="6318820" y="5477903"/>
+                <a:off x="8350820" y="5477905"/>
                 <a:ext cx="1007968" cy="307777"/>
               </a:xfrm>
               <a:prstGeom prst="rect">
@@ -16581,7 +20096,7 @@
             </p:txBody>
           </p:sp>
         </mc:Choice>
-        <mc:Fallback xmlns="">
+        <mc:Fallback>
           <p:sp>
             <p:nvSpPr>
               <p:cNvPr id="90" name="TextBox 89">
@@ -16598,7 +20113,7 @@
             </p:nvSpPr>
             <p:spPr>
               <a:xfrm>
-                <a:off x="6318820" y="5477903"/>
+                <a:off x="8350820" y="5477905"/>
                 <a:ext cx="1007968" cy="307777"/>
               </a:xfrm>
               <a:prstGeom prst="rect">
@@ -16626,8 +20141,8 @@
           </p:sp>
         </mc:Fallback>
       </mc:AlternateContent>
-      <mc:AlternateContent xmlns:mc="http://schemas.openxmlformats.org/markup-compatibility/2006" xmlns:a14="http://schemas.microsoft.com/office/drawing/2010/main">
-        <mc:Choice Requires="a14">
+      <mc:AlternateContent xmlns:mc="http://schemas.openxmlformats.org/markup-compatibility/2006">
+        <mc:Choice xmlns:a14="http://schemas.microsoft.com/office/drawing/2010/main" Requires="a14">
           <p:sp>
             <p:nvSpPr>
               <p:cNvPr id="91" name="TextBox 90">
@@ -16642,7 +20157,7 @@
             </p:nvSpPr>
             <p:spPr>
               <a:xfrm>
-                <a:off x="2383993" y="6018228"/>
+                <a:off x="4415993" y="6018229"/>
                 <a:ext cx="1064650" cy="369332"/>
               </a:xfrm>
               <a:prstGeom prst="rect">
@@ -16702,7 +20217,7 @@
             </p:txBody>
           </p:sp>
         </mc:Choice>
-        <mc:Fallback xmlns="">
+        <mc:Fallback>
           <p:sp>
             <p:nvSpPr>
               <p:cNvPr id="91" name="TextBox 90">
@@ -16719,7 +20234,7 @@
             </p:nvSpPr>
             <p:spPr>
               <a:xfrm>
-                <a:off x="2383993" y="6018228"/>
+                <a:off x="4415993" y="6018229"/>
                 <a:ext cx="1064650" cy="369332"/>
               </a:xfrm>
               <a:prstGeom prst="rect">
@@ -16747,8 +20262,8 @@
           </p:sp>
         </mc:Fallback>
       </mc:AlternateContent>
-      <mc:AlternateContent xmlns:mc="http://schemas.openxmlformats.org/markup-compatibility/2006" xmlns:a14="http://schemas.microsoft.com/office/drawing/2010/main">
-        <mc:Choice Requires="a14">
+      <mc:AlternateContent xmlns:mc="http://schemas.openxmlformats.org/markup-compatibility/2006">
+        <mc:Choice xmlns:a14="http://schemas.microsoft.com/office/drawing/2010/main" Requires="a14">
           <p:sp>
             <p:nvSpPr>
               <p:cNvPr id="92" name="TextBox 91">
@@ -16763,7 +20278,7 @@
             </p:nvSpPr>
             <p:spPr>
               <a:xfrm>
-                <a:off x="5087500" y="6018228"/>
+                <a:off x="7119500" y="6018229"/>
                 <a:ext cx="1064650" cy="369332"/>
               </a:xfrm>
               <a:prstGeom prst="rect">
@@ -16823,7 +20338,7 @@
             </p:txBody>
           </p:sp>
         </mc:Choice>
-        <mc:Fallback xmlns="">
+        <mc:Fallback>
           <p:sp>
             <p:nvSpPr>
               <p:cNvPr id="92" name="TextBox 91">
@@ -16840,7 +20355,7 @@
             </p:nvSpPr>
             <p:spPr>
               <a:xfrm>
-                <a:off x="5087500" y="6018228"/>
+                <a:off x="7119500" y="6018229"/>
                 <a:ext cx="1064650" cy="369332"/>
               </a:xfrm>
               <a:prstGeom prst="rect">
@@ -16868,8 +20383,8 @@
           </p:sp>
         </mc:Fallback>
       </mc:AlternateContent>
-      <mc:AlternateContent xmlns:mc="http://schemas.openxmlformats.org/markup-compatibility/2006" xmlns:a14="http://schemas.microsoft.com/office/drawing/2010/main">
-        <mc:Choice Requires="a14">
+      <mc:AlternateContent xmlns:mc="http://schemas.openxmlformats.org/markup-compatibility/2006">
+        <mc:Choice xmlns:a14="http://schemas.microsoft.com/office/drawing/2010/main" Requires="a14">
           <p:sp>
             <p:nvSpPr>
               <p:cNvPr id="93" name="TextBox 92">
@@ -16884,7 +20399,7 @@
             </p:nvSpPr>
             <p:spPr>
               <a:xfrm>
-                <a:off x="9393496" y="5451579"/>
+                <a:off x="11425496" y="5451580"/>
                 <a:ext cx="1007968" cy="307777"/>
               </a:xfrm>
               <a:prstGeom prst="rect">
@@ -16950,7 +20465,7 @@
             </p:txBody>
           </p:sp>
         </mc:Choice>
-        <mc:Fallback xmlns="">
+        <mc:Fallback>
           <p:sp>
             <p:nvSpPr>
               <p:cNvPr id="93" name="TextBox 92">
@@ -16967,7 +20482,7 @@
             </p:nvSpPr>
             <p:spPr>
               <a:xfrm>
-                <a:off x="9393496" y="5451579"/>
+                <a:off x="11425496" y="5451580"/>
                 <a:ext cx="1007968" cy="307777"/>
               </a:xfrm>
               <a:prstGeom prst="rect">
@@ -16995,8 +20510,8 @@
           </p:sp>
         </mc:Fallback>
       </mc:AlternateContent>
-      <mc:AlternateContent xmlns:mc="http://schemas.openxmlformats.org/markup-compatibility/2006" xmlns:a14="http://schemas.microsoft.com/office/drawing/2010/main">
-        <mc:Choice Requires="a14">
+      <mc:AlternateContent xmlns:mc="http://schemas.openxmlformats.org/markup-compatibility/2006">
+        <mc:Choice xmlns:a14="http://schemas.microsoft.com/office/drawing/2010/main" Requires="a14">
           <p:sp>
             <p:nvSpPr>
               <p:cNvPr id="94" name="TextBox 93">
@@ -17011,7 +20526,7 @@
             </p:nvSpPr>
             <p:spPr>
               <a:xfrm>
-                <a:off x="10813818" y="5451579"/>
+                <a:off x="12845818" y="5451580"/>
                 <a:ext cx="1007968" cy="307777"/>
               </a:xfrm>
               <a:prstGeom prst="rect">
@@ -17077,7 +20592,7 @@
             </p:txBody>
           </p:sp>
         </mc:Choice>
-        <mc:Fallback xmlns="">
+        <mc:Fallback>
           <p:sp>
             <p:nvSpPr>
               <p:cNvPr id="94" name="TextBox 93">
@@ -17094,7 +20609,7 @@
             </p:nvSpPr>
             <p:spPr>
               <a:xfrm>
-                <a:off x="10813818" y="5451579"/>
+                <a:off x="12845818" y="5451580"/>
                 <a:ext cx="1007968" cy="307777"/>
               </a:xfrm>
               <a:prstGeom prst="rect">
@@ -17122,8 +20637,8 @@
           </p:sp>
         </mc:Fallback>
       </mc:AlternateContent>
-      <mc:AlternateContent xmlns:mc="http://schemas.openxmlformats.org/markup-compatibility/2006" xmlns:a14="http://schemas.microsoft.com/office/drawing/2010/main">
-        <mc:Choice Requires="a14">
+      <mc:AlternateContent xmlns:mc="http://schemas.openxmlformats.org/markup-compatibility/2006">
+        <mc:Choice xmlns:a14="http://schemas.microsoft.com/office/drawing/2010/main" Requires="a14">
           <p:sp>
             <p:nvSpPr>
               <p:cNvPr id="95" name="TextBox 94">
@@ -17138,7 +20653,7 @@
             </p:nvSpPr>
             <p:spPr>
               <a:xfrm>
-                <a:off x="7293507" y="6053190"/>
+                <a:off x="9325507" y="6053191"/>
                 <a:ext cx="1007968" cy="307777"/>
               </a:xfrm>
               <a:prstGeom prst="rect">
@@ -17204,7 +20719,7 @@
             </p:txBody>
           </p:sp>
         </mc:Choice>
-        <mc:Fallback xmlns="">
+        <mc:Fallback>
           <p:sp>
             <p:nvSpPr>
               <p:cNvPr id="95" name="TextBox 94">
@@ -17221,7 +20736,7 @@
             </p:nvSpPr>
             <p:spPr>
               <a:xfrm>
-                <a:off x="7293507" y="6053190"/>
+                <a:off x="9325507" y="6053191"/>
                 <a:ext cx="1007968" cy="307777"/>
               </a:xfrm>
               <a:prstGeom prst="rect">
@@ -17249,8 +20764,8 @@
           </p:sp>
         </mc:Fallback>
       </mc:AlternateContent>
-      <mc:AlternateContent xmlns:mc="http://schemas.openxmlformats.org/markup-compatibility/2006" xmlns:a14="http://schemas.microsoft.com/office/drawing/2010/main">
-        <mc:Choice Requires="a14">
+      <mc:AlternateContent xmlns:mc="http://schemas.openxmlformats.org/markup-compatibility/2006">
+        <mc:Choice xmlns:a14="http://schemas.microsoft.com/office/drawing/2010/main" Requires="a14">
           <p:sp>
             <p:nvSpPr>
               <p:cNvPr id="96" name="TextBox 95">
@@ -17265,7 +20780,7 @@
             </p:nvSpPr>
             <p:spPr>
               <a:xfrm>
-                <a:off x="8713829" y="6053190"/>
+                <a:off x="10745829" y="6053191"/>
                 <a:ext cx="1007968" cy="307777"/>
               </a:xfrm>
               <a:prstGeom prst="rect">
@@ -17331,7 +20846,7 @@
             </p:txBody>
           </p:sp>
         </mc:Choice>
-        <mc:Fallback xmlns="">
+        <mc:Fallback>
           <p:sp>
             <p:nvSpPr>
               <p:cNvPr id="96" name="TextBox 95">
@@ -17348,7 +20863,7 @@
             </p:nvSpPr>
             <p:spPr>
               <a:xfrm>
-                <a:off x="8713829" y="6053190"/>
+                <a:off x="10745829" y="6053191"/>
                 <a:ext cx="1007968" cy="307777"/>
               </a:xfrm>
               <a:prstGeom prst="rect">
@@ -17389,7 +20904,7 @@
 </p:sld>
 </file>
 
-<file path=ppt/slides/slide5.xml><?xml version="1.0" encoding="utf-8"?>
+<file path=ppt/slides/slide6.xml><?xml version="1.0" encoding="utf-8"?>
 <p:sld xmlns:a="http://schemas.openxmlformats.org/drawingml/2006/main" xmlns:r="http://schemas.openxmlformats.org/officeDocument/2006/relationships" xmlns:p="http://schemas.openxmlformats.org/presentationml/2006/main">
   <p:cSld>
     <p:spTree>
@@ -17420,7 +20935,7 @@
         </p:nvSpPr>
         <p:spPr>
           <a:xfrm>
-            <a:off x="3315661" y="976385"/>
+            <a:off x="5347661" y="976385"/>
             <a:ext cx="1828800" cy="1828800"/>
           </a:xfrm>
           <a:prstGeom prst="rect">
@@ -17479,7 +20994,7 @@
         </p:nvSpPr>
         <p:spPr>
           <a:xfrm>
-            <a:off x="3315661" y="3678576"/>
+            <a:off x="5347661" y="3678576"/>
             <a:ext cx="1828800" cy="1828800"/>
           </a:xfrm>
           <a:prstGeom prst="rect">
@@ -17534,7 +21049,7 @@
         </p:nvSpPr>
         <p:spPr>
           <a:xfrm>
-            <a:off x="3315661" y="6401150"/>
+            <a:off x="5347661" y="6401150"/>
             <a:ext cx="1828800" cy="1828800"/>
           </a:xfrm>
           <a:prstGeom prst="rect">
@@ -17579,8 +21094,8 @@
           </a:p>
         </p:txBody>
       </p:sp>
-      <mc:AlternateContent xmlns:mc="http://schemas.openxmlformats.org/markup-compatibility/2006" xmlns:a14="http://schemas.microsoft.com/office/drawing/2010/main">
-        <mc:Choice Requires="a14">
+      <mc:AlternateContent xmlns:mc="http://schemas.openxmlformats.org/markup-compatibility/2006">
+        <mc:Choice xmlns:a14="http://schemas.microsoft.com/office/drawing/2010/main" Requires="a14">
           <p:sp>
             <p:nvSpPr>
               <p:cNvPr id="6" name="Rectangle 5">
@@ -17595,7 +21110,7 @@
             </p:nvSpPr>
             <p:spPr>
               <a:xfrm>
-                <a:off x="110047" y="3678576"/>
+                <a:off x="2142047" y="3678576"/>
                 <a:ext cx="1828800" cy="1828800"/>
               </a:xfrm>
               <a:prstGeom prst="rect">
@@ -17657,13 +21172,13 @@
                     </m:oMathParaPr>
                     <m:oMath xmlns:m="http://schemas.openxmlformats.org/officeDocument/2006/math">
                       <m:r>
-                        <a:rPr lang="en-US" sz="1600" b="0" i="1" smtClean="0">
+                        <a:rPr lang="en-US" sz="1600" i="1">
                           <a:latin typeface="Cambria Math" panose="02040503050406030204" pitchFamily="18" charset="0"/>
                         </a:rPr>
                         <m:t>𝛽</m:t>
                       </m:r>
                       <m:r>
-                        <a:rPr lang="en-US" sz="1600" b="0" i="1" smtClean="0">
+                        <a:rPr lang="en-US" sz="1600" i="1">
                           <a:latin typeface="Cambria Math" panose="02040503050406030204" pitchFamily="18" charset="0"/>
                         </a:rPr>
                         <m:t>∈(−2, ∞)</m:t>
@@ -17676,7 +21191,7 @@
             </p:txBody>
           </p:sp>
         </mc:Choice>
-        <mc:Fallback xmlns="">
+        <mc:Fallback>
           <p:sp>
             <p:nvSpPr>
               <p:cNvPr id="6" name="Rectangle 5">
@@ -17693,7 +21208,7 @@
             </p:nvSpPr>
             <p:spPr>
               <a:xfrm>
-                <a:off x="110047" y="3678576"/>
+                <a:off x="2142047" y="3678576"/>
                 <a:ext cx="1828800" cy="1828800"/>
               </a:xfrm>
               <a:prstGeom prst="rect">
@@ -17722,8 +21237,8 @@
           </p:sp>
         </mc:Fallback>
       </mc:AlternateContent>
-      <mc:AlternateContent xmlns:mc="http://schemas.openxmlformats.org/markup-compatibility/2006" xmlns:a14="http://schemas.microsoft.com/office/drawing/2010/main">
-        <mc:Choice Requires="a14">
+      <mc:AlternateContent xmlns:mc="http://schemas.openxmlformats.org/markup-compatibility/2006">
+        <mc:Choice xmlns:a14="http://schemas.microsoft.com/office/drawing/2010/main" Requires="a14">
           <p:sp>
             <p:nvSpPr>
               <p:cNvPr id="7" name="Rectangle 6">
@@ -17738,7 +21253,7 @@
             </p:nvSpPr>
             <p:spPr>
               <a:xfrm>
-                <a:off x="10136638" y="3680204"/>
+                <a:off x="12168638" y="3680204"/>
                 <a:ext cx="1828800" cy="1828800"/>
               </a:xfrm>
               <a:prstGeom prst="rect">
@@ -17784,19 +21299,19 @@
               <a:p>
                 <a:pPr algn="ctr"/>
                 <a:r>
-                  <a:rPr lang="en-US" sz="1600" b="0" dirty="0"/>
+                  <a:rPr lang="en-US" sz="1600" dirty="0"/>
                   <a:t>Split distribution </a:t>
                 </a:r>
                 <a14:m>
                   <m:oMath xmlns:m="http://schemas.openxmlformats.org/officeDocument/2006/math">
                     <m:r>
-                      <a:rPr lang="en-US" sz="1600" b="0" i="1" smtClean="0">
+                      <a:rPr lang="en-US" sz="1600" i="1">
                         <a:latin typeface="Cambria Math" panose="02040503050406030204" pitchFamily="18" charset="0"/>
                       </a:rPr>
                       <m:t>𝜆</m:t>
                     </m:r>
                     <m:r>
-                      <a:rPr lang="en-US" sz="1600" b="0" i="1" smtClean="0">
+                      <a:rPr lang="en-US" sz="1600" i="1">
                         <a:latin typeface="Cambria Math" panose="02040503050406030204" pitchFamily="18" charset="0"/>
                       </a:rPr>
                       <m:t>∈[0,1]</m:t>
@@ -17808,7 +21323,7 @@
             </p:txBody>
           </p:sp>
         </mc:Choice>
-        <mc:Fallback xmlns="">
+        <mc:Fallback>
           <p:sp>
             <p:nvSpPr>
               <p:cNvPr id="7" name="Rectangle 6">
@@ -17825,7 +21340,7 @@
             </p:nvSpPr>
             <p:spPr>
               <a:xfrm>
-                <a:off x="10136638" y="3680204"/>
+                <a:off x="12168638" y="3680204"/>
                 <a:ext cx="1828800" cy="1828800"/>
               </a:xfrm>
               <a:prstGeom prst="rect">
@@ -17834,7 +21349,7 @@
               <a:blipFill>
                 <a:blip r:embed="rId3"/>
                 <a:stretch>
-                  <a:fillRect l="-324" r="-2265"/>
+                  <a:fillRect r="-2589"/>
                 </a:stretch>
               </a:blipFill>
               <a:ln w="57150">
@@ -17858,8 +21373,8 @@
           </p:sp>
         </mc:Fallback>
       </mc:AlternateContent>
-      <mc:AlternateContent xmlns:mc="http://schemas.openxmlformats.org/markup-compatibility/2006" xmlns:a14="http://schemas.microsoft.com/office/drawing/2010/main">
-        <mc:Choice Requires="a14">
+      <mc:AlternateContent xmlns:mc="http://schemas.openxmlformats.org/markup-compatibility/2006">
+        <mc:Choice xmlns:a14="http://schemas.microsoft.com/office/drawing/2010/main" Requires="a14">
           <p:sp>
             <p:nvSpPr>
               <p:cNvPr id="8" name="Rectangle 7">
@@ -17874,7 +21389,7 @@
             </p:nvSpPr>
             <p:spPr>
               <a:xfrm>
-                <a:off x="6588858" y="6401150"/>
+                <a:off x="8620858" y="6401150"/>
                 <a:ext cx="1828800" cy="1828800"/>
               </a:xfrm>
               <a:prstGeom prst="rect">
@@ -17912,7 +21427,7 @@
                 <a14:m>
                   <m:oMath xmlns:m="http://schemas.openxmlformats.org/officeDocument/2006/math">
                     <m:r>
-                      <a:rPr lang="en-US" sz="1600" b="1" i="1" smtClean="0">
+                      <a:rPr lang="en-US" sz="1600" b="1" i="1">
                         <a:latin typeface="Cambria Math" panose="02040503050406030204" pitchFamily="18" charset="0"/>
                       </a:rPr>
                       <m:t>𝝀</m:t>
@@ -17937,13 +21452,13 @@
                     </m:oMathParaPr>
                     <m:oMath xmlns:m="http://schemas.openxmlformats.org/officeDocument/2006/math">
                       <m:r>
-                        <a:rPr lang="en-US" sz="1600" b="0" i="1" smtClean="0">
+                        <a:rPr lang="en-US" sz="1600" i="1">
                           <a:latin typeface="Cambria Math" panose="02040503050406030204" pitchFamily="18" charset="0"/>
                         </a:rPr>
                         <m:t>𝑝</m:t>
                       </m:r>
                       <m:r>
-                        <a:rPr lang="en-US" sz="1600" b="0" i="1" smtClean="0">
+                        <a:rPr lang="en-US" sz="1600" i="1">
                           <a:latin typeface="Cambria Math" panose="02040503050406030204" pitchFamily="18" charset="0"/>
                         </a:rPr>
                         <m:t>∈[0, 1]</m:t>
@@ -17956,7 +21471,7 @@
             </p:txBody>
           </p:sp>
         </mc:Choice>
-        <mc:Fallback xmlns="">
+        <mc:Fallback>
           <p:sp>
             <p:nvSpPr>
               <p:cNvPr id="8" name="Rectangle 7">
@@ -17973,7 +21488,7 @@
             </p:nvSpPr>
             <p:spPr>
               <a:xfrm>
-                <a:off x="6588858" y="6401150"/>
+                <a:off x="8620858" y="6401150"/>
                 <a:ext cx="1828800" cy="1828800"/>
               </a:xfrm>
               <a:prstGeom prst="rect">
@@ -18006,8 +21521,8 @@
           </p:sp>
         </mc:Fallback>
       </mc:AlternateContent>
-      <mc:AlternateContent xmlns:mc="http://schemas.openxmlformats.org/markup-compatibility/2006" xmlns:a14="http://schemas.microsoft.com/office/drawing/2010/main">
-        <mc:Choice Requires="a14">
+      <mc:AlternateContent xmlns:mc="http://schemas.openxmlformats.org/markup-compatibility/2006">
+        <mc:Choice xmlns:a14="http://schemas.microsoft.com/office/drawing/2010/main" Requires="a14">
           <p:sp>
             <p:nvSpPr>
               <p:cNvPr id="9" name="Rectangle 8">
@@ -18022,7 +21537,7 @@
             </p:nvSpPr>
             <p:spPr>
               <a:xfrm>
-                <a:off x="6581920" y="3687893"/>
+                <a:off x="8613920" y="3687893"/>
                 <a:ext cx="1828800" cy="1828800"/>
               </a:xfrm>
               <a:prstGeom prst="rect">
@@ -18074,13 +21589,13 @@
                     </m:oMathParaPr>
                     <m:oMath xmlns:m="http://schemas.openxmlformats.org/officeDocument/2006/math">
                       <m:r>
-                        <a:rPr lang="en-US" sz="1600" b="0" i="1" smtClean="0">
+                        <a:rPr lang="en-US" sz="1600" i="1">
                           <a:latin typeface="Cambria Math" panose="02040503050406030204" pitchFamily="18" charset="0"/>
                         </a:rPr>
                         <m:t>𝛼</m:t>
                       </m:r>
                       <m:r>
-                        <a:rPr lang="en-US" sz="1600" b="0" i="1" smtClean="0">
+                        <a:rPr lang="en-US" sz="1600" i="1">
                           <a:latin typeface="Cambria Math" panose="02040503050406030204" pitchFamily="18" charset="0"/>
                         </a:rPr>
                         <m:t>∈(−1, ∞)</m:t>
@@ -18093,7 +21608,7 @@
             </p:txBody>
           </p:sp>
         </mc:Choice>
-        <mc:Fallback xmlns="">
+        <mc:Fallback>
           <p:sp>
             <p:nvSpPr>
               <p:cNvPr id="9" name="Rectangle 8">
@@ -18110,7 +21625,7 @@
             </p:nvSpPr>
             <p:spPr>
               <a:xfrm>
-                <a:off x="6581920" y="3687893"/>
+                <a:off x="8613920" y="3687893"/>
                 <a:ext cx="1828800" cy="1828800"/>
               </a:xfrm>
               <a:prstGeom prst="rect">
@@ -18143,8 +21658,8 @@
           </p:sp>
         </mc:Fallback>
       </mc:AlternateContent>
-      <mc:AlternateContent xmlns:mc="http://schemas.openxmlformats.org/markup-compatibility/2006" xmlns:a14="http://schemas.microsoft.com/office/drawing/2010/main">
-        <mc:Choice Requires="a14">
+      <mc:AlternateContent xmlns:mc="http://schemas.openxmlformats.org/markup-compatibility/2006">
+        <mc:Choice xmlns:a14="http://schemas.microsoft.com/office/drawing/2010/main" Requires="a14">
           <p:sp>
             <p:nvSpPr>
               <p:cNvPr id="10" name="Rectangle 9">
@@ -18159,7 +21674,7 @@
             </p:nvSpPr>
             <p:spPr>
               <a:xfrm>
-                <a:off x="6586871" y="976385"/>
+                <a:off x="8618871" y="976385"/>
                 <a:ext cx="1828800" cy="1828800"/>
               </a:xfrm>
               <a:prstGeom prst="rect">
@@ -18219,25 +21734,25 @@
                     </m:oMathParaPr>
                     <m:oMath xmlns:m="http://schemas.openxmlformats.org/officeDocument/2006/math">
                       <m:r>
-                        <a:rPr lang="en-US" sz="1600" b="0" i="1" smtClean="0">
+                        <a:rPr lang="en-US" sz="1600" i="1">
                           <a:latin typeface="Cambria Math" panose="02040503050406030204" pitchFamily="18" charset="0"/>
                         </a:rPr>
                         <m:t>𝛼</m:t>
                       </m:r>
                       <m:r>
-                        <a:rPr lang="en-US" sz="1600" b="0" i="1" smtClean="0">
+                        <a:rPr lang="en-US" sz="1600" i="1">
                           <a:latin typeface="Cambria Math" panose="02040503050406030204" pitchFamily="18" charset="0"/>
                         </a:rPr>
                         <m:t>,</m:t>
                       </m:r>
                       <m:r>
-                        <a:rPr lang="en-US" sz="1600" b="0" i="1" smtClean="0">
+                        <a:rPr lang="en-US" sz="1600" i="1">
                           <a:latin typeface="Cambria Math" panose="02040503050406030204" pitchFamily="18" charset="0"/>
                         </a:rPr>
                         <m:t>𝛽</m:t>
                       </m:r>
                       <m:r>
-                        <a:rPr lang="en-US" sz="1600" b="0" i="1" smtClean="0">
+                        <a:rPr lang="en-US" sz="1600" i="1">
                           <a:latin typeface="Cambria Math" panose="02040503050406030204" pitchFamily="18" charset="0"/>
                         </a:rPr>
                         <m:t>∈(−1, ∞)</m:t>
@@ -18250,7 +21765,7 @@
             </p:txBody>
           </p:sp>
         </mc:Choice>
-        <mc:Fallback xmlns="">
+        <mc:Fallback>
           <p:sp>
             <p:nvSpPr>
               <p:cNvPr id="10" name="Rectangle 9">
@@ -18267,7 +21782,7 @@
             </p:nvSpPr>
             <p:spPr>
               <a:xfrm>
-                <a:off x="6586871" y="976385"/>
+                <a:off x="8618871" y="976385"/>
                 <a:ext cx="1828800" cy="1828800"/>
               </a:xfrm>
               <a:prstGeom prst="rect">
@@ -18318,7 +21833,7 @@
         </p:nvCxnSpPr>
         <p:spPr>
           <a:xfrm flipH="1">
-            <a:off x="8410720" y="4594604"/>
+            <a:off x="10442720" y="4594605"/>
             <a:ext cx="1725918" cy="7689"/>
           </a:xfrm>
           <a:prstGeom prst="straightConnector1">
@@ -18360,7 +21875,7 @@
         </p:nvCxnSpPr>
         <p:spPr>
           <a:xfrm flipH="1">
-            <a:off x="5144461" y="1888222"/>
+            <a:off x="7176463" y="1888224"/>
             <a:ext cx="1444397" cy="2563"/>
           </a:xfrm>
           <a:prstGeom prst="straightConnector1">
@@ -18403,7 +21918,7 @@
         </p:nvCxnSpPr>
         <p:spPr>
           <a:xfrm flipH="1">
-            <a:off x="5144461" y="7315550"/>
+            <a:off x="7176463" y="7315550"/>
             <a:ext cx="1444397" cy="0"/>
           </a:xfrm>
           <a:prstGeom prst="straightConnector1">
@@ -18446,7 +21961,7 @@
         </p:nvCxnSpPr>
         <p:spPr>
           <a:xfrm>
-            <a:off x="1938847" y="4592976"/>
+            <a:off x="3970847" y="4592976"/>
             <a:ext cx="1376814" cy="0"/>
           </a:xfrm>
           <a:prstGeom prst="straightConnector1">
@@ -18489,7 +22004,7 @@
         </p:nvCxnSpPr>
         <p:spPr>
           <a:xfrm flipV="1">
-            <a:off x="1024447" y="1890785"/>
+            <a:off x="3056447" y="1890787"/>
             <a:ext cx="2291214" cy="1787791"/>
           </a:xfrm>
           <a:prstGeom prst="straightConnector1">
@@ -18532,7 +22047,7 @@
         </p:nvCxnSpPr>
         <p:spPr>
           <a:xfrm>
-            <a:off x="1024447" y="5507376"/>
+            <a:off x="3056447" y="5507377"/>
             <a:ext cx="2291214" cy="1808174"/>
           </a:xfrm>
           <a:prstGeom prst="straightConnector1">
@@ -18576,7 +22091,7 @@
         </p:nvCxnSpPr>
         <p:spPr>
           <a:xfrm flipH="1">
-            <a:off x="8417658" y="5509004"/>
+            <a:off x="10449658" y="5509004"/>
             <a:ext cx="2633380" cy="1806546"/>
           </a:xfrm>
           <a:prstGeom prst="straightConnector1">
@@ -18619,7 +22134,7 @@
         </p:nvCxnSpPr>
         <p:spPr>
           <a:xfrm flipH="1" flipV="1">
-            <a:off x="8415671" y="1890785"/>
+            <a:off x="10447673" y="1890786"/>
             <a:ext cx="2635367" cy="1789419"/>
           </a:xfrm>
           <a:prstGeom prst="straightConnector1">
@@ -18662,7 +22177,7 @@
         </p:nvCxnSpPr>
         <p:spPr>
           <a:xfrm flipH="1">
-            <a:off x="7496320" y="2805185"/>
+            <a:off x="9528322" y="2805185"/>
             <a:ext cx="4951" cy="882708"/>
           </a:xfrm>
           <a:prstGeom prst="straightConnector1">
@@ -18704,7 +22219,7 @@
         </p:nvCxnSpPr>
         <p:spPr>
           <a:xfrm flipH="1">
-            <a:off x="5151399" y="5516693"/>
+            <a:off x="7183401" y="5516694"/>
             <a:ext cx="2344921" cy="1397188"/>
           </a:xfrm>
           <a:prstGeom prst="straightConnector1">
@@ -18746,7 +22261,7 @@
         </p:nvCxnSpPr>
         <p:spPr>
           <a:xfrm flipH="1">
-            <a:off x="5107587" y="2775242"/>
+            <a:off x="7139589" y="2775242"/>
             <a:ext cx="1474333" cy="3625908"/>
           </a:xfrm>
           <a:prstGeom prst="straightConnector1">
@@ -18790,7 +22305,7 @@
         </p:nvCxnSpPr>
         <p:spPr>
           <a:xfrm flipH="1" flipV="1">
-            <a:off x="4230061" y="2805185"/>
+            <a:off x="6262063" y="2805185"/>
             <a:ext cx="2351859" cy="1797108"/>
           </a:xfrm>
           <a:prstGeom prst="straightConnector1">
@@ -18815,8 +22330,8 @@
           </a:fontRef>
         </p:style>
       </p:cxnSp>
-      <mc:AlternateContent xmlns:mc="http://schemas.openxmlformats.org/markup-compatibility/2006" xmlns:a14="http://schemas.microsoft.com/office/drawing/2010/main">
-        <mc:Choice Requires="a14">
+      <mc:AlternateContent xmlns:mc="http://schemas.openxmlformats.org/markup-compatibility/2006">
+        <mc:Choice xmlns:a14="http://schemas.microsoft.com/office/drawing/2010/main" Requires="a14">
           <p:sp>
             <p:nvSpPr>
               <p:cNvPr id="36" name="TextBox 35">
@@ -18831,7 +22346,7 @@
             </p:nvSpPr>
             <p:spPr>
               <a:xfrm>
-                <a:off x="9372310" y="2333073"/>
+                <a:off x="11404311" y="2333075"/>
                 <a:ext cx="1740348" cy="276999"/>
               </a:xfrm>
               <a:prstGeom prst="rect">
@@ -18853,49 +22368,49 @@
                     </m:oMathParaPr>
                     <m:oMath xmlns:m="http://schemas.openxmlformats.org/officeDocument/2006/math">
                       <m:r>
-                        <a:rPr lang="en-US" sz="1200" b="0" i="1" smtClean="0">
+                        <a:rPr lang="en-US" sz="1200" i="1">
                           <a:latin typeface="Cambria Math" panose="02040503050406030204" pitchFamily="18" charset="0"/>
                         </a:rPr>
                         <m:t>𝜆</m:t>
                       </m:r>
                       <m:r>
-                        <a:rPr lang="en-US" sz="1200" b="0" i="1" smtClean="0">
+                        <a:rPr lang="en-US" sz="1200" i="1">
                           <a:latin typeface="Cambria Math" panose="02040503050406030204" pitchFamily="18" charset="0"/>
                         </a:rPr>
                         <m:t>∼</m:t>
                       </m:r>
                       <m:r>
-                        <a:rPr lang="en-US" sz="1200" b="0" i="1" smtClean="0">
+                        <a:rPr lang="en-US" sz="1200" i="1">
                           <a:latin typeface="Cambria Math" panose="02040503050406030204" pitchFamily="18" charset="0"/>
                         </a:rPr>
                         <m:t>𝐵𝑒𝑡𝑎</m:t>
                       </m:r>
                       <m:r>
-                        <a:rPr lang="en-US" sz="1200" b="0" i="1" smtClean="0">
+                        <a:rPr lang="en-US" sz="1200" i="1">
                           <a:latin typeface="Cambria Math" panose="02040503050406030204" pitchFamily="18" charset="0"/>
                         </a:rPr>
                         <m:t>(</m:t>
                       </m:r>
                       <m:r>
-                        <a:rPr lang="en-US" sz="1200" b="0" i="1" smtClean="0">
+                        <a:rPr lang="en-US" sz="1200" i="1">
                           <a:latin typeface="Cambria Math" panose="02040503050406030204" pitchFamily="18" charset="0"/>
                         </a:rPr>
                         <m:t>𝛼</m:t>
                       </m:r>
                       <m:r>
-                        <a:rPr lang="en-US" sz="1200" b="0" i="1" smtClean="0">
+                        <a:rPr lang="en-US" sz="1200" i="1">
                           <a:latin typeface="Cambria Math" panose="02040503050406030204" pitchFamily="18" charset="0"/>
                         </a:rPr>
                         <m:t>+1, </m:t>
                       </m:r>
                       <m:r>
-                        <a:rPr lang="en-US" sz="1200" b="0" i="1" smtClean="0">
+                        <a:rPr lang="en-US" sz="1200" i="1">
                           <a:latin typeface="Cambria Math" panose="02040503050406030204" pitchFamily="18" charset="0"/>
                         </a:rPr>
                         <m:t>𝛽</m:t>
                       </m:r>
                       <m:r>
-                        <a:rPr lang="en-US" sz="1200" b="0" i="1" smtClean="0">
+                        <a:rPr lang="en-US" sz="1200" i="1">
                           <a:latin typeface="Cambria Math" panose="02040503050406030204" pitchFamily="18" charset="0"/>
                         </a:rPr>
                         <m:t>+1)</m:t>
@@ -18908,7 +22423,7 @@
             </p:txBody>
           </p:sp>
         </mc:Choice>
-        <mc:Fallback xmlns="">
+        <mc:Fallback>
           <p:sp>
             <p:nvSpPr>
               <p:cNvPr id="36" name="TextBox 35">
@@ -18925,7 +22440,7 @@
             </p:nvSpPr>
             <p:spPr>
               <a:xfrm>
-                <a:off x="9372310" y="2333073"/>
+                <a:off x="11404311" y="2333075"/>
                 <a:ext cx="1740348" cy="276999"/>
               </a:xfrm>
               <a:prstGeom prst="rect">
@@ -18953,8 +22468,8 @@
           </p:sp>
         </mc:Fallback>
       </mc:AlternateContent>
-      <mc:AlternateContent xmlns:mc="http://schemas.openxmlformats.org/markup-compatibility/2006" xmlns:a14="http://schemas.microsoft.com/office/drawing/2010/main">
-        <mc:Choice Requires="a14">
+      <mc:AlternateContent xmlns:mc="http://schemas.openxmlformats.org/markup-compatibility/2006">
+        <mc:Choice xmlns:a14="http://schemas.microsoft.com/office/drawing/2010/main" Requires="a14">
           <p:sp>
             <p:nvSpPr>
               <p:cNvPr id="39" name="TextBox 38">
@@ -18969,7 +22484,7 @@
             </p:nvSpPr>
             <p:spPr>
               <a:xfrm>
-                <a:off x="9720147" y="6391596"/>
+                <a:off x="11752149" y="6391598"/>
                 <a:ext cx="588879" cy="276999"/>
               </a:xfrm>
               <a:prstGeom prst="rect">
@@ -18991,19 +22506,19 @@
                     </m:oMathParaPr>
                     <m:oMath xmlns:m="http://schemas.openxmlformats.org/officeDocument/2006/math">
                       <m:r>
-                        <a:rPr lang="en-US" sz="1200" b="0" i="1" smtClean="0">
+                        <a:rPr lang="en-US" sz="1200" i="1">
                           <a:latin typeface="Cambria Math" panose="02040503050406030204" pitchFamily="18" charset="0"/>
                         </a:rPr>
                         <m:t>𝜆</m:t>
                       </m:r>
                       <m:r>
-                        <a:rPr lang="en-US" sz="1200" b="0" i="1" smtClean="0">
+                        <a:rPr lang="en-US" sz="1200" i="1">
                           <a:latin typeface="Cambria Math" panose="02040503050406030204" pitchFamily="18" charset="0"/>
                         </a:rPr>
                         <m:t>=</m:t>
                       </m:r>
                       <m:r>
-                        <a:rPr lang="en-US" sz="1200" b="0" i="1" smtClean="0">
+                        <a:rPr lang="en-US" sz="1200" i="1">
                           <a:latin typeface="Cambria Math" panose="02040503050406030204" pitchFamily="18" charset="0"/>
                         </a:rPr>
                         <m:t>𝑝</m:t>
@@ -19016,7 +22531,7 @@
             </p:txBody>
           </p:sp>
         </mc:Choice>
-        <mc:Fallback xmlns="">
+        <mc:Fallback>
           <p:sp>
             <p:nvSpPr>
               <p:cNvPr id="39" name="TextBox 38">
@@ -19033,7 +22548,7 @@
             </p:nvSpPr>
             <p:spPr>
               <a:xfrm>
-                <a:off x="9720147" y="6391596"/>
+                <a:off x="11752149" y="6391598"/>
                 <a:ext cx="588879" cy="276999"/>
               </a:xfrm>
               <a:prstGeom prst="rect">
@@ -19061,8 +22576,8 @@
           </p:sp>
         </mc:Fallback>
       </mc:AlternateContent>
-      <mc:AlternateContent xmlns:mc="http://schemas.openxmlformats.org/markup-compatibility/2006" xmlns:a14="http://schemas.microsoft.com/office/drawing/2010/main">
-        <mc:Choice Requires="a14">
+      <mc:AlternateContent xmlns:mc="http://schemas.openxmlformats.org/markup-compatibility/2006">
+        <mc:Choice xmlns:a14="http://schemas.microsoft.com/office/drawing/2010/main" Requires="a14">
           <p:sp>
             <p:nvSpPr>
               <p:cNvPr id="40" name="TextBox 39">
@@ -19077,7 +22592,7 @@
             </p:nvSpPr>
             <p:spPr>
               <a:xfrm>
-                <a:off x="8423655" y="4272883"/>
+                <a:off x="10455656" y="4272885"/>
                 <a:ext cx="1740348" cy="276999"/>
               </a:xfrm>
               <a:prstGeom prst="rect">
@@ -19099,49 +22614,49 @@
                     </m:oMathParaPr>
                     <m:oMath xmlns:m="http://schemas.openxmlformats.org/officeDocument/2006/math">
                       <m:r>
-                        <a:rPr lang="en-US" sz="1200" b="0" i="1" smtClean="0">
+                        <a:rPr lang="en-US" sz="1200" i="1">
                           <a:latin typeface="Cambria Math" panose="02040503050406030204" pitchFamily="18" charset="0"/>
                         </a:rPr>
                         <m:t>𝜆</m:t>
                       </m:r>
                       <m:r>
-                        <a:rPr lang="en-US" sz="1200" b="0" i="1" smtClean="0">
+                        <a:rPr lang="en-US" sz="1200" i="1">
                           <a:latin typeface="Cambria Math" panose="02040503050406030204" pitchFamily="18" charset="0"/>
                         </a:rPr>
                         <m:t>∼</m:t>
                       </m:r>
                       <m:r>
-                        <a:rPr lang="en-US" sz="1200" b="0" i="1" smtClean="0">
+                        <a:rPr lang="en-US" sz="1200" i="1">
                           <a:latin typeface="Cambria Math" panose="02040503050406030204" pitchFamily="18" charset="0"/>
                         </a:rPr>
                         <m:t>𝐵𝑒𝑡𝑎</m:t>
                       </m:r>
                       <m:r>
-                        <a:rPr lang="en-US" sz="1200" b="0" i="1" smtClean="0">
+                        <a:rPr lang="en-US" sz="1200" i="1">
                           <a:latin typeface="Cambria Math" panose="02040503050406030204" pitchFamily="18" charset="0"/>
                         </a:rPr>
                         <m:t>(</m:t>
                       </m:r>
                       <m:r>
-                        <a:rPr lang="en-US" sz="1200" b="0" i="1" smtClean="0">
+                        <a:rPr lang="en-US" sz="1200" i="1">
                           <a:latin typeface="Cambria Math" panose="02040503050406030204" pitchFamily="18" charset="0"/>
                         </a:rPr>
                         <m:t>𝛼</m:t>
                       </m:r>
                       <m:r>
-                        <a:rPr lang="en-US" sz="1200" b="0" i="1" smtClean="0">
+                        <a:rPr lang="en-US" sz="1200" i="1">
                           <a:latin typeface="Cambria Math" panose="02040503050406030204" pitchFamily="18" charset="0"/>
                         </a:rPr>
                         <m:t>+1, </m:t>
                       </m:r>
                       <m:r>
-                        <a:rPr lang="en-US" sz="1200" b="0" i="1" smtClean="0">
+                        <a:rPr lang="en-US" sz="1200" i="1">
                           <a:latin typeface="Cambria Math" panose="02040503050406030204" pitchFamily="18" charset="0"/>
                         </a:rPr>
                         <m:t>𝛼</m:t>
                       </m:r>
                       <m:r>
-                        <a:rPr lang="en-US" sz="1200" b="0" i="1" smtClean="0">
+                        <a:rPr lang="en-US" sz="1200" i="1">
                           <a:latin typeface="Cambria Math" panose="02040503050406030204" pitchFamily="18" charset="0"/>
                         </a:rPr>
                         <m:t>+1)</m:t>
@@ -19154,7 +22669,7 @@
             </p:txBody>
           </p:sp>
         </mc:Choice>
-        <mc:Fallback xmlns="">
+        <mc:Fallback>
           <p:sp>
             <p:nvSpPr>
               <p:cNvPr id="40" name="TextBox 39">
@@ -19171,7 +22686,7 @@
             </p:nvSpPr>
             <p:spPr>
               <a:xfrm>
-                <a:off x="8423655" y="4272883"/>
+                <a:off x="10455656" y="4272885"/>
                 <a:ext cx="1740348" cy="276999"/>
               </a:xfrm>
               <a:prstGeom prst="rect">
@@ -19199,8 +22714,8 @@
           </p:sp>
         </mc:Fallback>
       </mc:AlternateContent>
-      <mc:AlternateContent xmlns:mc="http://schemas.openxmlformats.org/markup-compatibility/2006" xmlns:a14="http://schemas.microsoft.com/office/drawing/2010/main">
-        <mc:Choice Requires="a14">
+      <mc:AlternateContent xmlns:mc="http://schemas.openxmlformats.org/markup-compatibility/2006">
+        <mc:Choice xmlns:a14="http://schemas.microsoft.com/office/drawing/2010/main" Requires="a14">
           <p:sp>
             <p:nvSpPr>
               <p:cNvPr id="44" name="TextBox 43">
@@ -19215,7 +22730,7 @@
             </p:nvSpPr>
             <p:spPr>
               <a:xfrm>
-                <a:off x="7552283" y="3104195"/>
+                <a:off x="9584284" y="3104197"/>
                 <a:ext cx="612988" cy="276999"/>
               </a:xfrm>
               <a:prstGeom prst="rect">
@@ -19237,19 +22752,19 @@
                     </m:oMathParaPr>
                     <m:oMath xmlns:m="http://schemas.openxmlformats.org/officeDocument/2006/math">
                       <m:r>
-                        <a:rPr lang="en-US" sz="1200" b="0" i="1" smtClean="0">
+                        <a:rPr lang="en-US" sz="1200" i="1">
                           <a:latin typeface="Cambria Math" panose="02040503050406030204" pitchFamily="18" charset="0"/>
                         </a:rPr>
                         <m:t>𝛼</m:t>
                       </m:r>
                       <m:r>
-                        <a:rPr lang="en-US" sz="1200" b="0" i="1" smtClean="0">
+                        <a:rPr lang="en-US" sz="1200" i="1">
                           <a:latin typeface="Cambria Math" panose="02040503050406030204" pitchFamily="18" charset="0"/>
                         </a:rPr>
                         <m:t>=</m:t>
                       </m:r>
                       <m:r>
-                        <a:rPr lang="en-US" sz="1200" b="0" i="1" smtClean="0">
+                        <a:rPr lang="en-US" sz="1200" i="1">
                           <a:latin typeface="Cambria Math" panose="02040503050406030204" pitchFamily="18" charset="0"/>
                         </a:rPr>
                         <m:t>𝛽</m:t>
@@ -19262,7 +22777,7 @@
             </p:txBody>
           </p:sp>
         </mc:Choice>
-        <mc:Fallback xmlns="">
+        <mc:Fallback>
           <p:sp>
             <p:nvSpPr>
               <p:cNvPr id="44" name="TextBox 43">
@@ -19279,7 +22794,7 @@
             </p:nvSpPr>
             <p:spPr>
               <a:xfrm>
-                <a:off x="7552283" y="3104195"/>
+                <a:off x="9584284" y="3104197"/>
                 <a:ext cx="612988" cy="276999"/>
               </a:xfrm>
               <a:prstGeom prst="rect">
@@ -19307,8 +22822,8 @@
           </p:sp>
         </mc:Fallback>
       </mc:AlternateContent>
-      <mc:AlternateContent xmlns:mc="http://schemas.openxmlformats.org/markup-compatibility/2006" xmlns:a14="http://schemas.microsoft.com/office/drawing/2010/main">
-        <mc:Choice Requires="a14">
+      <mc:AlternateContent xmlns:mc="http://schemas.openxmlformats.org/markup-compatibility/2006">
+        <mc:Choice xmlns:a14="http://schemas.microsoft.com/office/drawing/2010/main" Requires="a14">
           <p:sp>
             <p:nvSpPr>
               <p:cNvPr id="72" name="TextBox 71">
@@ -19323,7 +22838,7 @@
             </p:nvSpPr>
             <p:spPr>
               <a:xfrm>
-                <a:off x="5380893" y="7023579"/>
+                <a:off x="7412895" y="7023581"/>
                 <a:ext cx="1023101" cy="276999"/>
               </a:xfrm>
               <a:prstGeom prst="rect">
@@ -19345,25 +22860,25 @@
                     </m:oMathParaPr>
                     <m:oMath xmlns:m="http://schemas.openxmlformats.org/officeDocument/2006/math">
                       <m:r>
-                        <a:rPr lang="en-US" sz="1200" b="0" i="1" smtClean="0">
+                        <a:rPr lang="en-US" sz="1200" i="1">
                           <a:latin typeface="Cambria Math" panose="02040503050406030204" pitchFamily="18" charset="0"/>
                         </a:rPr>
                         <m:t>𝑝</m:t>
                       </m:r>
                       <m:r>
-                        <a:rPr lang="en-US" sz="1200" b="0" i="1" smtClean="0">
+                        <a:rPr lang="en-US" sz="1200" i="1">
                           <a:latin typeface="Cambria Math" panose="02040503050406030204" pitchFamily="18" charset="0"/>
                         </a:rPr>
                         <m:t>=0, </m:t>
                       </m:r>
                       <m:r>
-                        <a:rPr lang="en-US" sz="1200" b="0" i="1" smtClean="0">
+                        <a:rPr lang="en-US" sz="1200" i="1">
                           <a:latin typeface="Cambria Math" panose="02040503050406030204" pitchFamily="18" charset="0"/>
                         </a:rPr>
                         <m:t>𝑝</m:t>
                       </m:r>
                       <m:r>
-                        <a:rPr lang="en-US" sz="1200" b="0" i="1" smtClean="0">
+                        <a:rPr lang="en-US" sz="1200" i="1">
                           <a:latin typeface="Cambria Math" panose="02040503050406030204" pitchFamily="18" charset="0"/>
                         </a:rPr>
                         <m:t>=1</m:t>
@@ -19376,7 +22891,7 @@
             </p:txBody>
           </p:sp>
         </mc:Choice>
-        <mc:Fallback xmlns="">
+        <mc:Fallback>
           <p:sp>
             <p:nvSpPr>
               <p:cNvPr id="72" name="TextBox 71">
@@ -19393,7 +22908,7 @@
             </p:nvSpPr>
             <p:spPr>
               <a:xfrm>
-                <a:off x="5380893" y="7023579"/>
+                <a:off x="7412895" y="7023581"/>
                 <a:ext cx="1023101" cy="276999"/>
               </a:xfrm>
               <a:prstGeom prst="rect">
@@ -19421,8 +22936,8 @@
           </p:sp>
         </mc:Fallback>
       </mc:AlternateContent>
-      <mc:AlternateContent xmlns:mc="http://schemas.openxmlformats.org/markup-compatibility/2006" xmlns:a14="http://schemas.microsoft.com/office/drawing/2010/main">
-        <mc:Choice Requires="a14">
+      <mc:AlternateContent xmlns:mc="http://schemas.openxmlformats.org/markup-compatibility/2006">
+        <mc:Choice xmlns:a14="http://schemas.microsoft.com/office/drawing/2010/main" Requires="a14">
           <p:sp>
             <p:nvSpPr>
               <p:cNvPr id="74" name="TextBox 73">
@@ -19437,7 +22952,7 @@
             </p:nvSpPr>
             <p:spPr>
               <a:xfrm>
-                <a:off x="2132706" y="4133995"/>
+                <a:off x="4164707" y="4133997"/>
                 <a:ext cx="741357" cy="438005"/>
               </a:xfrm>
               <a:prstGeom prst="rect">
@@ -19459,13 +22974,13 @@
                     </m:oMathParaPr>
                     <m:oMath xmlns:m="http://schemas.openxmlformats.org/officeDocument/2006/math">
                       <m:r>
-                        <a:rPr lang="en-US" sz="1200" b="0" i="1" smtClean="0">
+                        <a:rPr lang="en-US" sz="1200" i="1">
                           <a:latin typeface="Cambria Math" panose="02040503050406030204" pitchFamily="18" charset="0"/>
                         </a:rPr>
                         <m:t>𝛽</m:t>
                       </m:r>
                       <m:r>
-                        <a:rPr lang="en-US" sz="1200" b="0" i="1" smtClean="0">
+                        <a:rPr lang="en-US" sz="1200" i="1">
                           <a:latin typeface="Cambria Math" panose="02040503050406030204" pitchFamily="18" charset="0"/>
                         </a:rPr>
                         <m:t>=−</m:t>
@@ -19473,14 +22988,14 @@
                       <m:f>
                         <m:fPr>
                           <m:ctrlPr>
-                            <a:rPr lang="en-US" sz="1200" b="0" i="1" smtClean="0">
+                            <a:rPr lang="en-US" sz="1200" i="1">
                               <a:latin typeface="Cambria Math" panose="02040503050406030204" pitchFamily="18" charset="0"/>
                             </a:rPr>
                           </m:ctrlPr>
                         </m:fPr>
                         <m:num>
                           <m:r>
-                            <a:rPr lang="en-US" sz="1200" b="0" i="1" smtClean="0">
+                            <a:rPr lang="en-US" sz="1200" i="1">
                               <a:latin typeface="Cambria Math" panose="02040503050406030204" pitchFamily="18" charset="0"/>
                             </a:rPr>
                             <m:t>3</m:t>
@@ -19488,7 +23003,7 @@
                         </m:num>
                         <m:den>
                           <m:r>
-                            <a:rPr lang="en-US" sz="1200" b="0" i="1" smtClean="0">
+                            <a:rPr lang="en-US" sz="1200" i="1">
                               <a:latin typeface="Cambria Math" panose="02040503050406030204" pitchFamily="18" charset="0"/>
                             </a:rPr>
                             <m:t>2</m:t>
@@ -19503,7 +23018,7 @@
             </p:txBody>
           </p:sp>
         </mc:Choice>
-        <mc:Fallback xmlns="">
+        <mc:Fallback>
           <p:sp>
             <p:nvSpPr>
               <p:cNvPr id="74" name="TextBox 73">
@@ -19520,7 +23035,7 @@
             </p:nvSpPr>
             <p:spPr>
               <a:xfrm>
-                <a:off x="2132706" y="4133995"/>
+                <a:off x="4164707" y="4133997"/>
                 <a:ext cx="741357" cy="438005"/>
               </a:xfrm>
               <a:prstGeom prst="rect">
@@ -19548,8 +23063,8 @@
           </p:sp>
         </mc:Fallback>
       </mc:AlternateContent>
-      <mc:AlternateContent xmlns:mc="http://schemas.openxmlformats.org/markup-compatibility/2006" xmlns:a14="http://schemas.microsoft.com/office/drawing/2010/main">
-        <mc:Choice Requires="a14">
+      <mc:AlternateContent xmlns:mc="http://schemas.openxmlformats.org/markup-compatibility/2006">
+        <mc:Choice xmlns:a14="http://schemas.microsoft.com/office/drawing/2010/main" Requires="a14">
           <p:sp>
             <p:nvSpPr>
               <p:cNvPr id="75" name="TextBox 74">
@@ -19564,7 +23079,7 @@
             </p:nvSpPr>
             <p:spPr>
               <a:xfrm>
-                <a:off x="2071991" y="5953259"/>
+                <a:off x="4103993" y="5953261"/>
                 <a:ext cx="728533" cy="276999"/>
               </a:xfrm>
               <a:prstGeom prst="rect">
@@ -19586,20 +23101,20 @@
                     </m:oMathParaPr>
                     <m:oMath xmlns:m="http://schemas.openxmlformats.org/officeDocument/2006/math">
                       <m:r>
-                        <a:rPr lang="en-US" sz="1200" b="0" i="1" smtClean="0">
+                        <a:rPr lang="en-US" sz="1200" i="1">
                           <a:latin typeface="Cambria Math" panose="02040503050406030204" pitchFamily="18" charset="0"/>
                         </a:rPr>
                         <m:t>𝛽</m:t>
                       </m:r>
                       <m:r>
-                        <a:rPr lang="en-US" sz="1200" b="0" i="1" smtClean="0">
+                        <a:rPr lang="en-US" sz="1200" i="1">
                           <a:latin typeface="Cambria Math" panose="02040503050406030204" pitchFamily="18" charset="0"/>
                           <a:ea typeface="Cambria Math" panose="02040503050406030204" pitchFamily="18" charset="0"/>
                         </a:rPr>
                         <m:t>→</m:t>
                       </m:r>
                       <m:r>
-                        <a:rPr lang="en-US" sz="1200" b="0" i="1" smtClean="0">
+                        <a:rPr lang="en-US" sz="1200" i="1">
                           <a:latin typeface="Cambria Math" panose="02040503050406030204" pitchFamily="18" charset="0"/>
                         </a:rPr>
                         <m:t>−2</m:t>
@@ -19612,7 +23127,7 @@
             </p:txBody>
           </p:sp>
         </mc:Choice>
-        <mc:Fallback xmlns="">
+        <mc:Fallback>
           <p:sp>
             <p:nvSpPr>
               <p:cNvPr id="75" name="TextBox 74">
@@ -19629,7 +23144,7 @@
             </p:nvSpPr>
             <p:spPr>
               <a:xfrm>
-                <a:off x="2071991" y="5953259"/>
+                <a:off x="4103993" y="5953261"/>
                 <a:ext cx="728533" cy="276999"/>
               </a:xfrm>
               <a:prstGeom prst="rect">
@@ -19657,8 +23172,8 @@
           </p:sp>
         </mc:Fallback>
       </mc:AlternateContent>
-      <mc:AlternateContent xmlns:mc="http://schemas.openxmlformats.org/markup-compatibility/2006" xmlns:a14="http://schemas.microsoft.com/office/drawing/2010/main">
-        <mc:Choice Requires="a14">
+      <mc:AlternateContent xmlns:mc="http://schemas.openxmlformats.org/markup-compatibility/2006">
+        <mc:Choice xmlns:a14="http://schemas.microsoft.com/office/drawing/2010/main" Requires="a14">
           <p:sp>
             <p:nvSpPr>
               <p:cNvPr id="76" name="TextBox 75">
@@ -19673,7 +23188,7 @@
             </p:nvSpPr>
             <p:spPr>
               <a:xfrm>
-                <a:off x="1835965" y="2471573"/>
+                <a:off x="3867967" y="2471575"/>
                 <a:ext cx="600293" cy="276999"/>
               </a:xfrm>
               <a:prstGeom prst="rect">
@@ -19695,13 +23210,13 @@
                     </m:oMathParaPr>
                     <m:oMath xmlns:m="http://schemas.openxmlformats.org/officeDocument/2006/math">
                       <m:r>
-                        <a:rPr lang="en-US" sz="1200" b="0" i="1" smtClean="0">
+                        <a:rPr lang="en-US" sz="1200" i="1">
                           <a:latin typeface="Cambria Math" panose="02040503050406030204" pitchFamily="18" charset="0"/>
                         </a:rPr>
                         <m:t>𝛽</m:t>
                       </m:r>
                       <m:r>
-                        <a:rPr lang="en-US" sz="1200" b="0" i="1" smtClean="0">
+                        <a:rPr lang="en-US" sz="1200" i="1">
                           <a:latin typeface="Cambria Math" panose="02040503050406030204" pitchFamily="18" charset="0"/>
                         </a:rPr>
                         <m:t>=0</m:t>
@@ -19714,7 +23229,7 @@
             </p:txBody>
           </p:sp>
         </mc:Choice>
-        <mc:Fallback xmlns="">
+        <mc:Fallback>
           <p:sp>
             <p:nvSpPr>
               <p:cNvPr id="76" name="TextBox 75">
@@ -19731,7 +23246,7 @@
             </p:nvSpPr>
             <p:spPr>
               <a:xfrm>
-                <a:off x="1835965" y="2471573"/>
+                <a:off x="3867967" y="2471575"/>
                 <a:ext cx="600293" cy="276999"/>
               </a:xfrm>
               <a:prstGeom prst="rect">
@@ -19759,8 +23274,8 @@
           </p:sp>
         </mc:Fallback>
       </mc:AlternateContent>
-      <mc:AlternateContent xmlns:mc="http://schemas.openxmlformats.org/markup-compatibility/2006" xmlns:a14="http://schemas.microsoft.com/office/drawing/2010/main">
-        <mc:Choice Requires="a14">
+      <mc:AlternateContent xmlns:mc="http://schemas.openxmlformats.org/markup-compatibility/2006">
+        <mc:Choice xmlns:a14="http://schemas.microsoft.com/office/drawing/2010/main" Requires="a14">
           <p:sp>
             <p:nvSpPr>
               <p:cNvPr id="77" name="TextBox 76">
@@ -19775,7 +23290,7 @@
             </p:nvSpPr>
             <p:spPr>
               <a:xfrm>
-                <a:off x="5605130" y="1548888"/>
+                <a:off x="7637130" y="1548890"/>
                 <a:ext cx="898900" cy="276999"/>
               </a:xfrm>
               <a:prstGeom prst="rect">
@@ -19797,25 +23312,25 @@
                     </m:oMathParaPr>
                     <m:oMath xmlns:m="http://schemas.openxmlformats.org/officeDocument/2006/math">
                       <m:r>
-                        <a:rPr lang="en-US" sz="1200" b="0" i="1" smtClean="0">
+                        <a:rPr lang="en-US" sz="1200" i="1">
                           <a:latin typeface="Cambria Math" panose="02040503050406030204" pitchFamily="18" charset="0"/>
                         </a:rPr>
                         <m:t>𝛼</m:t>
                       </m:r>
                       <m:r>
-                        <a:rPr lang="en-US" sz="1200" b="0" i="1" smtClean="0">
+                        <a:rPr lang="en-US" sz="1200" i="1">
                           <a:latin typeface="Cambria Math" panose="02040503050406030204" pitchFamily="18" charset="0"/>
                         </a:rPr>
                         <m:t>=</m:t>
                       </m:r>
                       <m:r>
-                        <a:rPr lang="en-US" sz="1200" b="0" i="1" smtClean="0">
+                        <a:rPr lang="en-US" sz="1200" i="1">
                           <a:latin typeface="Cambria Math" panose="02040503050406030204" pitchFamily="18" charset="0"/>
                         </a:rPr>
                         <m:t>𝛽</m:t>
                       </m:r>
                       <m:r>
-                        <a:rPr lang="en-US" sz="1200" b="0" i="1" smtClean="0">
+                        <a:rPr lang="en-US" sz="1200" i="1">
                           <a:latin typeface="Cambria Math" panose="02040503050406030204" pitchFamily="18" charset="0"/>
                         </a:rPr>
                         <m:t>=0</m:t>
@@ -19828,7 +23343,7 @@
             </p:txBody>
           </p:sp>
         </mc:Choice>
-        <mc:Fallback xmlns="">
+        <mc:Fallback>
           <p:sp>
             <p:nvSpPr>
               <p:cNvPr id="77" name="TextBox 76">
@@ -19845,7 +23360,7 @@
             </p:nvSpPr>
             <p:spPr>
               <a:xfrm>
-                <a:off x="5605130" y="1548888"/>
+                <a:off x="7637130" y="1548890"/>
                 <a:ext cx="898900" cy="276999"/>
               </a:xfrm>
               <a:prstGeom prst="rect">
@@ -19873,8 +23388,8 @@
           </p:sp>
         </mc:Fallback>
       </mc:AlternateContent>
-      <mc:AlternateContent xmlns:mc="http://schemas.openxmlformats.org/markup-compatibility/2006" xmlns:a14="http://schemas.microsoft.com/office/drawing/2010/main">
-        <mc:Choice Requires="a14">
+      <mc:AlternateContent xmlns:mc="http://schemas.openxmlformats.org/markup-compatibility/2006">
+        <mc:Choice xmlns:a14="http://schemas.microsoft.com/office/drawing/2010/main" Requires="a14">
           <p:sp>
             <p:nvSpPr>
               <p:cNvPr id="78" name="TextBox 77">
@@ -19889,7 +23404,7 @@
             </p:nvSpPr>
             <p:spPr>
               <a:xfrm>
-                <a:off x="6016926" y="4518643"/>
+                <a:off x="8048927" y="4518645"/>
                 <a:ext cx="600293" cy="276999"/>
               </a:xfrm>
               <a:prstGeom prst="rect">
@@ -19911,13 +23426,13 @@
                     </m:oMathParaPr>
                     <m:oMath xmlns:m="http://schemas.openxmlformats.org/officeDocument/2006/math">
                       <m:r>
-                        <a:rPr lang="en-US" sz="1200" b="0" i="1" smtClean="0">
+                        <a:rPr lang="en-US" sz="1200" i="1">
                           <a:latin typeface="Cambria Math" panose="02040503050406030204" pitchFamily="18" charset="0"/>
                         </a:rPr>
                         <m:t>𝛼</m:t>
                       </m:r>
                       <m:r>
-                        <a:rPr lang="en-US" sz="1200" b="0" i="1" smtClean="0">
+                        <a:rPr lang="en-US" sz="1200" i="1">
                           <a:latin typeface="Cambria Math" panose="02040503050406030204" pitchFamily="18" charset="0"/>
                         </a:rPr>
                         <m:t>=0</m:t>
@@ -19930,7 +23445,7 @@
             </p:txBody>
           </p:sp>
         </mc:Choice>
-        <mc:Fallback xmlns="">
+        <mc:Fallback>
           <p:sp>
             <p:nvSpPr>
               <p:cNvPr id="78" name="TextBox 77">
@@ -19947,7 +23462,7 @@
             </p:nvSpPr>
             <p:spPr>
               <a:xfrm>
-                <a:off x="6016926" y="4518643"/>
+                <a:off x="8048927" y="4518645"/>
                 <a:ext cx="600293" cy="276999"/>
               </a:xfrm>
               <a:prstGeom prst="rect">
@@ -19975,8 +23490,8 @@
           </p:sp>
         </mc:Fallback>
       </mc:AlternateContent>
-      <mc:AlternateContent xmlns:mc="http://schemas.openxmlformats.org/markup-compatibility/2006" xmlns:a14="http://schemas.microsoft.com/office/drawing/2010/main">
-        <mc:Choice Requires="a14">
+      <mc:AlternateContent xmlns:mc="http://schemas.openxmlformats.org/markup-compatibility/2006">
+        <mc:Choice xmlns:a14="http://schemas.microsoft.com/office/drawing/2010/main" Requires="a14">
           <p:sp>
             <p:nvSpPr>
               <p:cNvPr id="79" name="TextBox 78">
@@ -19991,7 +23506,7 @@
             </p:nvSpPr>
             <p:spPr>
               <a:xfrm>
-                <a:off x="6133611" y="5701929"/>
+                <a:off x="8165613" y="5701931"/>
                 <a:ext cx="728533" cy="276999"/>
               </a:xfrm>
               <a:prstGeom prst="rect">
@@ -20013,13 +23528,13 @@
                     </m:oMathParaPr>
                     <m:oMath xmlns:m="http://schemas.openxmlformats.org/officeDocument/2006/math">
                       <m:r>
-                        <a:rPr lang="en-US" sz="1200" b="0" i="1" smtClean="0">
+                        <a:rPr lang="en-US" sz="1200" i="1">
                           <a:latin typeface="Cambria Math" panose="02040503050406030204" pitchFamily="18" charset="0"/>
                         </a:rPr>
                         <m:t>𝛼</m:t>
                       </m:r>
                       <m:r>
-                        <a:rPr lang="en-US" sz="1200" b="0" i="1" smtClean="0">
+                        <a:rPr lang="en-US" sz="1200" i="1">
                           <a:latin typeface="Cambria Math" panose="02040503050406030204" pitchFamily="18" charset="0"/>
                         </a:rPr>
                         <m:t>→−1</m:t>
@@ -20032,7 +23547,7 @@
             </p:txBody>
           </p:sp>
         </mc:Choice>
-        <mc:Fallback xmlns="">
+        <mc:Fallback>
           <p:sp>
             <p:nvSpPr>
               <p:cNvPr id="79" name="TextBox 78">
@@ -20049,7 +23564,7 @@
             </p:nvSpPr>
             <p:spPr>
               <a:xfrm>
-                <a:off x="6133611" y="5701929"/>
+                <a:off x="8165613" y="5701931"/>
                 <a:ext cx="728533" cy="276999"/>
               </a:xfrm>
               <a:prstGeom prst="rect">
@@ -20077,8 +23592,8 @@
           </p:sp>
         </mc:Fallback>
       </mc:AlternateContent>
-      <mc:AlternateContent xmlns:mc="http://schemas.openxmlformats.org/markup-compatibility/2006" xmlns:a14="http://schemas.microsoft.com/office/drawing/2010/main">
-        <mc:Choice Requires="a14">
+      <mc:AlternateContent xmlns:mc="http://schemas.openxmlformats.org/markup-compatibility/2006">
+        <mc:Choice xmlns:a14="http://schemas.microsoft.com/office/drawing/2010/main" Requires="a14">
           <p:sp>
             <p:nvSpPr>
               <p:cNvPr id="80" name="TextBox 79">
@@ -20093,7 +23608,7 @@
             </p:nvSpPr>
             <p:spPr>
               <a:xfrm>
-                <a:off x="5470736" y="2827196"/>
+                <a:off x="7502738" y="2827198"/>
                 <a:ext cx="1027141" cy="276999"/>
               </a:xfrm>
               <a:prstGeom prst="rect">
@@ -20115,25 +23630,25 @@
                     </m:oMathParaPr>
                     <m:oMath xmlns:m="http://schemas.openxmlformats.org/officeDocument/2006/math">
                       <m:r>
-                        <a:rPr lang="en-US" sz="1200" b="0" i="1" smtClean="0">
+                        <a:rPr lang="en-US" sz="1200" i="1">
                           <a:latin typeface="Cambria Math" panose="02040503050406030204" pitchFamily="18" charset="0"/>
                         </a:rPr>
                         <m:t>𝛼</m:t>
                       </m:r>
                       <m:r>
-                        <a:rPr lang="en-US" sz="1200" b="0" i="1" smtClean="0">
+                        <a:rPr lang="en-US" sz="1200" i="1">
                           <a:latin typeface="Cambria Math" panose="02040503050406030204" pitchFamily="18" charset="0"/>
                         </a:rPr>
                         <m:t>=</m:t>
                       </m:r>
                       <m:r>
-                        <a:rPr lang="en-US" sz="1200" b="0" i="1" smtClean="0">
+                        <a:rPr lang="en-US" sz="1200" i="1">
                           <a:latin typeface="Cambria Math" panose="02040503050406030204" pitchFamily="18" charset="0"/>
                         </a:rPr>
                         <m:t>𝛽</m:t>
                       </m:r>
                       <m:r>
-                        <a:rPr lang="en-US" sz="1200" b="0" i="1" smtClean="0">
+                        <a:rPr lang="en-US" sz="1200" i="1">
                           <a:latin typeface="Cambria Math" panose="02040503050406030204" pitchFamily="18" charset="0"/>
                         </a:rPr>
                         <m:t>→−1</m:t>
@@ -20146,7 +23661,7 @@
             </p:txBody>
           </p:sp>
         </mc:Choice>
-        <mc:Fallback xmlns="">
+        <mc:Fallback>
           <p:sp>
             <p:nvSpPr>
               <p:cNvPr id="80" name="TextBox 79">
@@ -20163,7 +23678,7 @@
             </p:nvSpPr>
             <p:spPr>
               <a:xfrm>
-                <a:off x="5470736" y="2827196"/>
+                <a:off x="7502738" y="2827198"/>
                 <a:ext cx="1027141" cy="276999"/>
               </a:xfrm>
               <a:prstGeom prst="rect">
@@ -20204,7 +23719,7 @@
 </p:sld>
 </file>
 
-<file path=ppt/slides/slide6.xml><?xml version="1.0" encoding="utf-8"?>
+<file path=ppt/slides/slide7.xml><?xml version="1.0" encoding="utf-8"?>
 <p:sld xmlns:a="http://schemas.openxmlformats.org/drawingml/2006/main" xmlns:r="http://schemas.openxmlformats.org/officeDocument/2006/relationships" xmlns:p="http://schemas.openxmlformats.org/presentationml/2006/main">
   <p:cSld>
     <p:spTree>
@@ -20241,7 +23756,7 @@
         </p:nvGrpSpPr>
         <p:grpSpPr>
           <a:xfrm>
-            <a:off x="118859" y="155218"/>
+            <a:off x="2150860" y="155218"/>
             <a:ext cx="10579759" cy="8627116"/>
             <a:chOff x="118859" y="155218"/>
             <a:chExt cx="10579759" cy="8627116"/>
@@ -20470,13 +23985,13 @@
                       </m:oMathParaPr>
                       <m:oMath xmlns:m="http://schemas.openxmlformats.org/officeDocument/2006/math">
                         <m:r>
-                          <a:rPr lang="en-US" sz="1600" b="0" i="1" smtClean="0">
+                          <a:rPr lang="en-US" sz="1600" i="1">
                             <a:latin typeface="Cambria Math" panose="02040503050406030204" pitchFamily="18" charset="0"/>
                           </a:rPr>
                           <m:t>𝛽</m:t>
                         </m:r>
                         <m:r>
-                          <a:rPr lang="en-US" sz="1600" b="0" i="1" smtClean="0">
+                          <a:rPr lang="en-US" sz="1600" i="1">
                             <a:latin typeface="Cambria Math" panose="02040503050406030204" pitchFamily="18" charset="0"/>
                           </a:rPr>
                           <m:t>∈(−2, ∞)</m:t>
@@ -20597,17 +24112,13 @@
                 <a:p>
                   <a:pPr algn="ctr"/>
                   <a:r>
-                    <a:rPr lang="en-US" sz="1600" b="0" dirty="0"/>
-                    <a:t>Split </a:t>
-                  </a:r>
-                  <a:r>
                     <a:rPr lang="en-US" sz="1600" dirty="0"/>
-                    <a:t>fraction distribution </a:t>
+                    <a:t>Split fraction distribution </a:t>
                   </a:r>
                   <a14:m>
                     <m:oMath xmlns:m="http://schemas.openxmlformats.org/officeDocument/2006/math">
                       <m:r>
-                        <a:rPr lang="en-US" sz="1600" b="0" i="1" smtClean="0">
+                        <a:rPr lang="en-US" sz="1600" i="1">
                           <a:latin typeface="Cambria Math" panose="02040503050406030204" pitchFamily="18" charset="0"/>
                         </a:rPr>
                         <m:t>𝑋</m:t>
@@ -20737,13 +24248,13 @@
                       </m:oMathParaPr>
                       <m:oMath xmlns:m="http://schemas.openxmlformats.org/officeDocument/2006/math">
                         <m:r>
-                          <a:rPr lang="en-US" sz="1600" b="0" i="1" smtClean="0">
+                          <a:rPr lang="en-US" sz="1600" i="1">
                             <a:latin typeface="Cambria Math" panose="02040503050406030204" pitchFamily="18" charset="0"/>
                           </a:rPr>
                           <m:t>𝜆</m:t>
                         </m:r>
                         <m:r>
-                          <a:rPr lang="en-US" sz="1600" b="0" i="1" smtClean="0">
+                          <a:rPr lang="en-US" sz="1600" i="1">
                             <a:latin typeface="Cambria Math" panose="02040503050406030204" pitchFamily="18" charset="0"/>
                           </a:rPr>
                           <m:t>∈[0, 1]</m:t>
@@ -20874,13 +24385,13 @@
                       </m:oMathParaPr>
                       <m:oMath xmlns:m="http://schemas.openxmlformats.org/officeDocument/2006/math">
                         <m:r>
-                          <a:rPr lang="en-US" sz="1600" b="0" i="1" smtClean="0">
+                          <a:rPr lang="en-US" sz="1600" i="1">
                             <a:latin typeface="Cambria Math" panose="02040503050406030204" pitchFamily="18" charset="0"/>
                           </a:rPr>
                           <m:t>𝛼</m:t>
                         </m:r>
                         <m:r>
-                          <a:rPr lang="en-US" sz="1600" b="0" i="1" smtClean="0">
+                          <a:rPr lang="en-US" sz="1600" i="1">
                             <a:latin typeface="Cambria Math" panose="02040503050406030204" pitchFamily="18" charset="0"/>
                           </a:rPr>
                           <m:t>∈(−1, ∞)</m:t>
@@ -21023,25 +24534,25 @@
                       </m:oMathParaPr>
                       <m:oMath xmlns:m="http://schemas.openxmlformats.org/officeDocument/2006/math">
                         <m:r>
-                          <a:rPr lang="en-US" sz="1600" b="0" i="1" smtClean="0">
+                          <a:rPr lang="en-US" sz="1600" i="1">
                             <a:latin typeface="Cambria Math" panose="02040503050406030204" pitchFamily="18" charset="0"/>
                           </a:rPr>
                           <m:t>𝛼</m:t>
                         </m:r>
                         <m:r>
-                          <a:rPr lang="en-US" sz="1600" b="0" i="1" smtClean="0">
+                          <a:rPr lang="en-US" sz="1600" i="1">
                             <a:latin typeface="Cambria Math" panose="02040503050406030204" pitchFamily="18" charset="0"/>
                           </a:rPr>
                           <m:t>,</m:t>
                         </m:r>
                         <m:r>
-                          <a:rPr lang="en-US" sz="1600" b="0" i="1" smtClean="0">
+                          <a:rPr lang="en-US" sz="1600" i="1">
                             <a:latin typeface="Cambria Math" panose="02040503050406030204" pitchFamily="18" charset="0"/>
                           </a:rPr>
                           <m:t>𝛽</m:t>
                         </m:r>
                         <m:r>
-                          <a:rPr lang="en-US" sz="1600" b="0" i="1" smtClean="0">
+                          <a:rPr lang="en-US" sz="1600" i="1">
                             <a:latin typeface="Cambria Math" panose="02040503050406030204" pitchFamily="18" charset="0"/>
                           </a:rPr>
                           <m:t>∈(−1, ∞)</m:t>
@@ -21614,8 +25125,8 @@
             </a:fontRef>
           </p:style>
         </p:cxnSp>
-        <mc:AlternateContent xmlns:mc="http://schemas.openxmlformats.org/markup-compatibility/2006" xmlns:a14="http://schemas.microsoft.com/office/drawing/2010/main">
-          <mc:Choice Requires="a14">
+        <mc:AlternateContent xmlns:mc="http://schemas.openxmlformats.org/markup-compatibility/2006">
+          <mc:Choice xmlns:a14="http://schemas.microsoft.com/office/drawing/2010/main" Requires="a14">
             <p:sp>
               <p:nvSpPr>
                 <p:cNvPr id="36" name="TextBox 35">
@@ -21652,49 +25163,49 @@
                       </m:oMathParaPr>
                       <m:oMath xmlns:m="http://schemas.openxmlformats.org/officeDocument/2006/math">
                         <m:r>
-                          <a:rPr lang="en-US" sz="1400" b="0" i="1" smtClean="0">
+                          <a:rPr lang="en-US" sz="1400" i="1">
                             <a:latin typeface="Cambria Math" panose="02040503050406030204" pitchFamily="18" charset="0"/>
                           </a:rPr>
                           <m:t>𝑋</m:t>
                         </m:r>
                         <m:r>
-                          <a:rPr lang="en-US" sz="1400" b="0" i="1" smtClean="0">
+                          <a:rPr lang="en-US" sz="1400" i="1">
                             <a:latin typeface="Cambria Math" panose="02040503050406030204" pitchFamily="18" charset="0"/>
                           </a:rPr>
                           <m:t>∼</m:t>
                         </m:r>
                         <m:r>
-                          <a:rPr lang="en-US" sz="1400" b="0" i="1" smtClean="0">
+                          <a:rPr lang="en-US" sz="1400" i="1">
                             <a:latin typeface="Cambria Math" panose="02040503050406030204" pitchFamily="18" charset="0"/>
                           </a:rPr>
                           <m:t>𝐵𝑒𝑡𝑎</m:t>
                         </m:r>
                         <m:r>
-                          <a:rPr lang="en-US" sz="1400" b="0" i="1" smtClean="0">
+                          <a:rPr lang="en-US" sz="1400" i="1">
                             <a:latin typeface="Cambria Math" panose="02040503050406030204" pitchFamily="18" charset="0"/>
                           </a:rPr>
                           <m:t>(</m:t>
                         </m:r>
                         <m:r>
-                          <a:rPr lang="en-US" sz="1400" b="0" i="1" smtClean="0">
+                          <a:rPr lang="en-US" sz="1400" i="1">
                             <a:latin typeface="Cambria Math" panose="02040503050406030204" pitchFamily="18" charset="0"/>
                           </a:rPr>
                           <m:t>𝛼</m:t>
                         </m:r>
                         <m:r>
-                          <a:rPr lang="en-US" sz="1400" b="0" i="1" smtClean="0">
+                          <a:rPr lang="en-US" sz="1400" i="1">
                             <a:latin typeface="Cambria Math" panose="02040503050406030204" pitchFamily="18" charset="0"/>
                           </a:rPr>
                           <m:t>+1, </m:t>
                         </m:r>
                         <m:r>
-                          <a:rPr lang="en-US" sz="1400" b="0" i="1" smtClean="0">
+                          <a:rPr lang="en-US" sz="1400" i="1">
                             <a:latin typeface="Cambria Math" panose="02040503050406030204" pitchFamily="18" charset="0"/>
                           </a:rPr>
                           <m:t>𝛽</m:t>
                         </m:r>
                         <m:r>
-                          <a:rPr lang="en-US" sz="1400" b="0" i="1" smtClean="0">
+                          <a:rPr lang="en-US" sz="1400" i="1">
                             <a:latin typeface="Cambria Math" panose="02040503050406030204" pitchFamily="18" charset="0"/>
                           </a:rPr>
                           <m:t>+1)</m:t>
@@ -21707,7 +25218,7 @@
               </p:txBody>
             </p:sp>
           </mc:Choice>
-          <mc:Fallback xmlns="">
+          <mc:Fallback>
             <p:sp>
               <p:nvSpPr>
                 <p:cNvPr id="36" name="TextBox 35">
@@ -21752,8 +25263,8 @@
             </p:sp>
           </mc:Fallback>
         </mc:AlternateContent>
-        <mc:AlternateContent xmlns:mc="http://schemas.openxmlformats.org/markup-compatibility/2006" xmlns:a14="http://schemas.microsoft.com/office/drawing/2010/main">
-          <mc:Choice Requires="a14">
+        <mc:AlternateContent xmlns:mc="http://schemas.openxmlformats.org/markup-compatibility/2006">
+          <mc:Choice xmlns:a14="http://schemas.microsoft.com/office/drawing/2010/main" Requires="a14">
             <p:sp>
               <p:nvSpPr>
                 <p:cNvPr id="39" name="TextBox 38">
@@ -21790,19 +25301,19 @@
                       </m:oMathParaPr>
                       <m:oMath xmlns:m="http://schemas.openxmlformats.org/officeDocument/2006/math">
                         <m:r>
-                          <a:rPr lang="en-US" sz="1400" b="0" i="1" smtClean="0">
+                          <a:rPr lang="en-US" sz="1400" i="1">
                             <a:latin typeface="Cambria Math" panose="02040503050406030204" pitchFamily="18" charset="0"/>
                           </a:rPr>
                           <m:t>𝑋</m:t>
                         </m:r>
                         <m:r>
-                          <a:rPr lang="en-US" sz="1400" b="0" i="1" smtClean="0">
+                          <a:rPr lang="en-US" sz="1400" i="1">
                             <a:latin typeface="Cambria Math" panose="02040503050406030204" pitchFamily="18" charset="0"/>
                           </a:rPr>
                           <m:t>=</m:t>
                         </m:r>
                         <m:r>
-                          <a:rPr lang="en-US" sz="1400" b="0" i="1" smtClean="0">
+                          <a:rPr lang="en-US" sz="1400" i="1">
                             <a:latin typeface="Cambria Math" panose="02040503050406030204" pitchFamily="18" charset="0"/>
                           </a:rPr>
                           <m:t>𝜆</m:t>
@@ -21815,7 +25326,7 @@
               </p:txBody>
             </p:sp>
           </mc:Choice>
-          <mc:Fallback xmlns="">
+          <mc:Fallback>
             <p:sp>
               <p:nvSpPr>
                 <p:cNvPr id="39" name="TextBox 38">
@@ -21860,8 +25371,8 @@
             </p:sp>
           </mc:Fallback>
         </mc:AlternateContent>
-        <mc:AlternateContent xmlns:mc="http://schemas.openxmlformats.org/markup-compatibility/2006" xmlns:a14="http://schemas.microsoft.com/office/drawing/2010/main">
-          <mc:Choice Requires="a14">
+        <mc:AlternateContent xmlns:mc="http://schemas.openxmlformats.org/markup-compatibility/2006">
+          <mc:Choice xmlns:a14="http://schemas.microsoft.com/office/drawing/2010/main" Requires="a14">
             <p:sp>
               <p:nvSpPr>
                 <p:cNvPr id="40" name="TextBox 39">
@@ -21898,49 +25409,49 @@
                       </m:oMathParaPr>
                       <m:oMath xmlns:m="http://schemas.openxmlformats.org/officeDocument/2006/math">
                         <m:r>
-                          <a:rPr lang="en-US" sz="1400" b="0" i="1" smtClean="0">
+                          <a:rPr lang="en-US" sz="1400" i="1">
                             <a:latin typeface="Cambria Math" panose="02040503050406030204" pitchFamily="18" charset="0"/>
                           </a:rPr>
                           <m:t>𝑋</m:t>
                         </m:r>
                         <m:r>
-                          <a:rPr lang="en-US" sz="1400" b="0" i="1" smtClean="0">
+                          <a:rPr lang="en-US" sz="1400" i="1">
                             <a:latin typeface="Cambria Math" panose="02040503050406030204" pitchFamily="18" charset="0"/>
                           </a:rPr>
                           <m:t>∼</m:t>
                         </m:r>
                         <m:r>
-                          <a:rPr lang="en-US" sz="1400" b="0" i="1" smtClean="0">
+                          <a:rPr lang="en-US" sz="1400" i="1">
                             <a:latin typeface="Cambria Math" panose="02040503050406030204" pitchFamily="18" charset="0"/>
                           </a:rPr>
                           <m:t>𝐵𝑒𝑡𝑎</m:t>
                         </m:r>
                         <m:r>
-                          <a:rPr lang="en-US" sz="1400" b="0" i="1" smtClean="0">
+                          <a:rPr lang="en-US" sz="1400" i="1">
                             <a:latin typeface="Cambria Math" panose="02040503050406030204" pitchFamily="18" charset="0"/>
                           </a:rPr>
                           <m:t>(</m:t>
                         </m:r>
                         <m:r>
-                          <a:rPr lang="en-US" sz="1400" b="0" i="1" smtClean="0">
+                          <a:rPr lang="en-US" sz="1400" i="1">
                             <a:latin typeface="Cambria Math" panose="02040503050406030204" pitchFamily="18" charset="0"/>
                           </a:rPr>
                           <m:t>𝛼</m:t>
                         </m:r>
                         <m:r>
-                          <a:rPr lang="en-US" sz="1400" b="0" i="1" smtClean="0">
+                          <a:rPr lang="en-US" sz="1400" i="1">
                             <a:latin typeface="Cambria Math" panose="02040503050406030204" pitchFamily="18" charset="0"/>
                           </a:rPr>
                           <m:t>+1, </m:t>
                         </m:r>
                         <m:r>
-                          <a:rPr lang="en-US" sz="1400" b="0" i="1" smtClean="0">
+                          <a:rPr lang="en-US" sz="1400" i="1">
                             <a:latin typeface="Cambria Math" panose="02040503050406030204" pitchFamily="18" charset="0"/>
                           </a:rPr>
                           <m:t>𝛼</m:t>
                         </m:r>
                         <m:r>
-                          <a:rPr lang="en-US" sz="1400" b="0" i="1" smtClean="0">
+                          <a:rPr lang="en-US" sz="1400" i="1">
                             <a:latin typeface="Cambria Math" panose="02040503050406030204" pitchFamily="18" charset="0"/>
                           </a:rPr>
                           <m:t>+1)</m:t>
@@ -21953,7 +25464,7 @@
               </p:txBody>
             </p:sp>
           </mc:Choice>
-          <mc:Fallback xmlns="">
+          <mc:Fallback>
             <p:sp>
               <p:nvSpPr>
                 <p:cNvPr id="40" name="TextBox 39">
@@ -21998,8 +25509,8 @@
             </p:sp>
           </mc:Fallback>
         </mc:AlternateContent>
-        <mc:AlternateContent xmlns:mc="http://schemas.openxmlformats.org/markup-compatibility/2006" xmlns:a14="http://schemas.microsoft.com/office/drawing/2010/main">
-          <mc:Choice Requires="a14">
+        <mc:AlternateContent xmlns:mc="http://schemas.openxmlformats.org/markup-compatibility/2006">
+          <mc:Choice xmlns:a14="http://schemas.microsoft.com/office/drawing/2010/main" Requires="a14">
             <p:sp>
               <p:nvSpPr>
                 <p:cNvPr id="44" name="TextBox 43">
@@ -22036,19 +25547,19 @@
                       </m:oMathParaPr>
                       <m:oMath xmlns:m="http://schemas.openxmlformats.org/officeDocument/2006/math">
                         <m:r>
-                          <a:rPr lang="en-US" sz="1400" b="0" i="1" smtClean="0">
+                          <a:rPr lang="en-US" sz="1400" i="1">
                             <a:latin typeface="Cambria Math" panose="02040503050406030204" pitchFamily="18" charset="0"/>
                           </a:rPr>
                           <m:t>𝛼</m:t>
                         </m:r>
                         <m:r>
-                          <a:rPr lang="en-US" sz="1400" b="0" i="1" smtClean="0">
+                          <a:rPr lang="en-US" sz="1400" i="1">
                             <a:latin typeface="Cambria Math" panose="02040503050406030204" pitchFamily="18" charset="0"/>
                           </a:rPr>
                           <m:t>=</m:t>
                         </m:r>
                         <m:r>
-                          <a:rPr lang="en-US" sz="1400" b="0" i="1" smtClean="0">
+                          <a:rPr lang="en-US" sz="1400" i="1">
                             <a:latin typeface="Cambria Math" panose="02040503050406030204" pitchFamily="18" charset="0"/>
                           </a:rPr>
                           <m:t>𝛽</m:t>
@@ -22061,7 +25572,7 @@
               </p:txBody>
             </p:sp>
           </mc:Choice>
-          <mc:Fallback xmlns="">
+          <mc:Fallback>
             <p:sp>
               <p:nvSpPr>
                 <p:cNvPr id="44" name="TextBox 43">
@@ -22106,8 +25617,8 @@
             </p:sp>
           </mc:Fallback>
         </mc:AlternateContent>
-        <mc:AlternateContent xmlns:mc="http://schemas.openxmlformats.org/markup-compatibility/2006" xmlns:a14="http://schemas.microsoft.com/office/drawing/2010/main">
-          <mc:Choice Requires="a14">
+        <mc:AlternateContent xmlns:mc="http://schemas.openxmlformats.org/markup-compatibility/2006">
+          <mc:Choice xmlns:a14="http://schemas.microsoft.com/office/drawing/2010/main" Requires="a14">
             <p:sp>
               <p:nvSpPr>
                 <p:cNvPr id="72" name="TextBox 71">
@@ -22144,25 +25655,25 @@
                       </m:oMathParaPr>
                       <m:oMath xmlns:m="http://schemas.openxmlformats.org/officeDocument/2006/math">
                         <m:r>
-                          <a:rPr lang="en-US" sz="1400" b="0" i="1" smtClean="0">
+                          <a:rPr lang="en-US" sz="1400" i="1">
                             <a:latin typeface="Cambria Math" panose="02040503050406030204" pitchFamily="18" charset="0"/>
                           </a:rPr>
                           <m:t>𝜆</m:t>
                         </m:r>
                         <m:r>
-                          <a:rPr lang="en-US" sz="1400" b="0" i="1" smtClean="0">
+                          <a:rPr lang="en-US" sz="1400" i="1">
                             <a:latin typeface="Cambria Math" panose="02040503050406030204" pitchFamily="18" charset="0"/>
                           </a:rPr>
                           <m:t>=0, </m:t>
                         </m:r>
                         <m:r>
-                          <a:rPr lang="en-US" sz="1400" b="0" i="1" smtClean="0">
+                          <a:rPr lang="en-US" sz="1400" i="1">
                             <a:latin typeface="Cambria Math" panose="02040503050406030204" pitchFamily="18" charset="0"/>
                           </a:rPr>
                           <m:t>𝜆</m:t>
                         </m:r>
                         <m:r>
-                          <a:rPr lang="en-US" sz="1400" b="0" i="1" smtClean="0">
+                          <a:rPr lang="en-US" sz="1400" i="1">
                             <a:latin typeface="Cambria Math" panose="02040503050406030204" pitchFamily="18" charset="0"/>
                           </a:rPr>
                           <m:t>=1</m:t>
@@ -22175,7 +25686,7 @@
               </p:txBody>
             </p:sp>
           </mc:Choice>
-          <mc:Fallback xmlns="">
+          <mc:Fallback>
             <p:sp>
               <p:nvSpPr>
                 <p:cNvPr id="72" name="TextBox 71">
@@ -22220,8 +25731,8 @@
             </p:sp>
           </mc:Fallback>
         </mc:AlternateContent>
-        <mc:AlternateContent xmlns:mc="http://schemas.openxmlformats.org/markup-compatibility/2006" xmlns:a14="http://schemas.microsoft.com/office/drawing/2010/main">
-          <mc:Choice Requires="a14">
+        <mc:AlternateContent xmlns:mc="http://schemas.openxmlformats.org/markup-compatibility/2006">
+          <mc:Choice xmlns:a14="http://schemas.microsoft.com/office/drawing/2010/main" Requires="a14">
             <p:sp>
               <p:nvSpPr>
                 <p:cNvPr id="74" name="TextBox 73">
@@ -22258,13 +25769,13 @@
                       </m:oMathParaPr>
                       <m:oMath xmlns:m="http://schemas.openxmlformats.org/officeDocument/2006/math">
                         <m:r>
-                          <a:rPr lang="en-US" sz="1400" b="0" i="1" smtClean="0">
+                          <a:rPr lang="en-US" sz="1400" i="1">
                             <a:latin typeface="Cambria Math" panose="02040503050406030204" pitchFamily="18" charset="0"/>
                           </a:rPr>
                           <m:t>𝛽</m:t>
                         </m:r>
                         <m:r>
-                          <a:rPr lang="en-US" sz="1400" b="0" i="1" smtClean="0">
+                          <a:rPr lang="en-US" sz="1400" i="1">
                             <a:latin typeface="Cambria Math" panose="02040503050406030204" pitchFamily="18" charset="0"/>
                           </a:rPr>
                           <m:t>=−</m:t>
@@ -22272,14 +25783,14 @@
                         <m:f>
                           <m:fPr>
                             <m:ctrlPr>
-                              <a:rPr lang="en-US" sz="1400" b="0" i="1" smtClean="0">
+                              <a:rPr lang="en-US" sz="1400" i="1">
                                 <a:latin typeface="Cambria Math" panose="02040503050406030204" pitchFamily="18" charset="0"/>
                               </a:rPr>
                             </m:ctrlPr>
                           </m:fPr>
                           <m:num>
                             <m:r>
-                              <a:rPr lang="en-US" sz="1400" b="0" i="1" smtClean="0">
+                              <a:rPr lang="en-US" sz="1400" i="1">
                                 <a:latin typeface="Cambria Math" panose="02040503050406030204" pitchFamily="18" charset="0"/>
                               </a:rPr>
                               <m:t>3</m:t>
@@ -22287,7 +25798,7 @@
                           </m:num>
                           <m:den>
                             <m:r>
-                              <a:rPr lang="en-US" sz="1400" b="0" i="1" smtClean="0">
+                              <a:rPr lang="en-US" sz="1400" i="1">
                                 <a:latin typeface="Cambria Math" panose="02040503050406030204" pitchFamily="18" charset="0"/>
                               </a:rPr>
                               <m:t>2</m:t>
@@ -22302,7 +25813,7 @@
               </p:txBody>
             </p:sp>
           </mc:Choice>
-          <mc:Fallback xmlns="">
+          <mc:Fallback>
             <p:sp>
               <p:nvSpPr>
                 <p:cNvPr id="74" name="TextBox 73">
@@ -22347,8 +25858,8 @@
             </p:sp>
           </mc:Fallback>
         </mc:AlternateContent>
-        <mc:AlternateContent xmlns:mc="http://schemas.openxmlformats.org/markup-compatibility/2006" xmlns:a14="http://schemas.microsoft.com/office/drawing/2010/main">
-          <mc:Choice Requires="a14">
+        <mc:AlternateContent xmlns:mc="http://schemas.openxmlformats.org/markup-compatibility/2006">
+          <mc:Choice xmlns:a14="http://schemas.microsoft.com/office/drawing/2010/main" Requires="a14">
             <p:sp>
               <p:nvSpPr>
                 <p:cNvPr id="75" name="TextBox 74">
@@ -22385,20 +25896,20 @@
                       </m:oMathParaPr>
                       <m:oMath xmlns:m="http://schemas.openxmlformats.org/officeDocument/2006/math">
                         <m:r>
-                          <a:rPr lang="en-US" sz="1400" b="0" i="1" smtClean="0">
+                          <a:rPr lang="en-US" sz="1400" i="1">
                             <a:latin typeface="Cambria Math" panose="02040503050406030204" pitchFamily="18" charset="0"/>
                           </a:rPr>
                           <m:t>𝛽</m:t>
                         </m:r>
                         <m:r>
-                          <a:rPr lang="en-US" sz="1400" b="0" i="1" smtClean="0">
+                          <a:rPr lang="en-US" sz="1400" i="1">
                             <a:latin typeface="Cambria Math" panose="02040503050406030204" pitchFamily="18" charset="0"/>
                             <a:ea typeface="Cambria Math" panose="02040503050406030204" pitchFamily="18" charset="0"/>
                           </a:rPr>
                           <m:t>→</m:t>
                         </m:r>
                         <m:r>
-                          <a:rPr lang="en-US" sz="1400" b="0" i="1" smtClean="0">
+                          <a:rPr lang="en-US" sz="1400" i="1">
                             <a:latin typeface="Cambria Math" panose="02040503050406030204" pitchFamily="18" charset="0"/>
                           </a:rPr>
                           <m:t>−2</m:t>
@@ -22411,7 +25922,7 @@
               </p:txBody>
             </p:sp>
           </mc:Choice>
-          <mc:Fallback xmlns="">
+          <mc:Fallback>
             <p:sp>
               <p:nvSpPr>
                 <p:cNvPr id="75" name="TextBox 74">
@@ -22456,8 +25967,8 @@
             </p:sp>
           </mc:Fallback>
         </mc:AlternateContent>
-        <mc:AlternateContent xmlns:mc="http://schemas.openxmlformats.org/markup-compatibility/2006" xmlns:a14="http://schemas.microsoft.com/office/drawing/2010/main">
-          <mc:Choice Requires="a14">
+        <mc:AlternateContent xmlns:mc="http://schemas.openxmlformats.org/markup-compatibility/2006">
+          <mc:Choice xmlns:a14="http://schemas.microsoft.com/office/drawing/2010/main" Requires="a14">
             <p:sp>
               <p:nvSpPr>
                 <p:cNvPr id="76" name="TextBox 75">
@@ -22494,13 +26005,13 @@
                       </m:oMathParaPr>
                       <m:oMath xmlns:m="http://schemas.openxmlformats.org/officeDocument/2006/math">
                         <m:r>
-                          <a:rPr lang="en-US" sz="1400" b="0" i="1" smtClean="0">
+                          <a:rPr lang="en-US" sz="1400" i="1">
                             <a:latin typeface="Cambria Math" panose="02040503050406030204" pitchFamily="18" charset="0"/>
                           </a:rPr>
                           <m:t>𝛽</m:t>
                         </m:r>
                         <m:r>
-                          <a:rPr lang="en-US" sz="1400" b="0" i="1" smtClean="0">
+                          <a:rPr lang="en-US" sz="1400" i="1">
                             <a:latin typeface="Cambria Math" panose="02040503050406030204" pitchFamily="18" charset="0"/>
                           </a:rPr>
                           <m:t>=0</m:t>
@@ -22513,7 +26024,7 @@
               </p:txBody>
             </p:sp>
           </mc:Choice>
-          <mc:Fallback xmlns="">
+          <mc:Fallback>
             <p:sp>
               <p:nvSpPr>
                 <p:cNvPr id="76" name="TextBox 75">
@@ -22558,8 +26069,8 @@
             </p:sp>
           </mc:Fallback>
         </mc:AlternateContent>
-        <mc:AlternateContent xmlns:mc="http://schemas.openxmlformats.org/markup-compatibility/2006" xmlns:a14="http://schemas.microsoft.com/office/drawing/2010/main">
-          <mc:Choice Requires="a14">
+        <mc:AlternateContent xmlns:mc="http://schemas.openxmlformats.org/markup-compatibility/2006">
+          <mc:Choice xmlns:a14="http://schemas.microsoft.com/office/drawing/2010/main" Requires="a14">
             <p:sp>
               <p:nvSpPr>
                 <p:cNvPr id="77" name="TextBox 76">
@@ -22596,25 +26107,25 @@
                       </m:oMathParaPr>
                       <m:oMath xmlns:m="http://schemas.openxmlformats.org/officeDocument/2006/math">
                         <m:r>
-                          <a:rPr lang="en-US" sz="1400" b="0" i="1" smtClean="0">
+                          <a:rPr lang="en-US" sz="1400" i="1">
                             <a:latin typeface="Cambria Math" panose="02040503050406030204" pitchFamily="18" charset="0"/>
                           </a:rPr>
                           <m:t>𝛼</m:t>
                         </m:r>
                         <m:r>
-                          <a:rPr lang="en-US" sz="1400" b="0" i="1" smtClean="0">
+                          <a:rPr lang="en-US" sz="1400" i="1">
                             <a:latin typeface="Cambria Math" panose="02040503050406030204" pitchFamily="18" charset="0"/>
                           </a:rPr>
                           <m:t>=</m:t>
                         </m:r>
                         <m:r>
-                          <a:rPr lang="en-US" sz="1400" b="0" i="1" smtClean="0">
+                          <a:rPr lang="en-US" sz="1400" i="1">
                             <a:latin typeface="Cambria Math" panose="02040503050406030204" pitchFamily="18" charset="0"/>
                           </a:rPr>
                           <m:t>𝛽</m:t>
                         </m:r>
                         <m:r>
-                          <a:rPr lang="en-US" sz="1400" b="0" i="1" smtClean="0">
+                          <a:rPr lang="en-US" sz="1400" i="1">
                             <a:latin typeface="Cambria Math" panose="02040503050406030204" pitchFamily="18" charset="0"/>
                           </a:rPr>
                           <m:t>=0</m:t>
@@ -22627,7 +26138,7 @@
               </p:txBody>
             </p:sp>
           </mc:Choice>
-          <mc:Fallback xmlns="">
+          <mc:Fallback>
             <p:sp>
               <p:nvSpPr>
                 <p:cNvPr id="77" name="TextBox 76">
@@ -22672,8 +26183,8 @@
             </p:sp>
           </mc:Fallback>
         </mc:AlternateContent>
-        <mc:AlternateContent xmlns:mc="http://schemas.openxmlformats.org/markup-compatibility/2006" xmlns:a14="http://schemas.microsoft.com/office/drawing/2010/main">
-          <mc:Choice Requires="a14">
+        <mc:AlternateContent xmlns:mc="http://schemas.openxmlformats.org/markup-compatibility/2006">
+          <mc:Choice xmlns:a14="http://schemas.microsoft.com/office/drawing/2010/main" Requires="a14">
             <p:sp>
               <p:nvSpPr>
                 <p:cNvPr id="78" name="TextBox 77">
@@ -22710,13 +26221,13 @@
                       </m:oMathParaPr>
                       <m:oMath xmlns:m="http://schemas.openxmlformats.org/officeDocument/2006/math">
                         <m:r>
-                          <a:rPr lang="en-US" sz="1400" b="0" i="1" smtClean="0">
+                          <a:rPr lang="en-US" sz="1400" i="1">
                             <a:latin typeface="Cambria Math" panose="02040503050406030204" pitchFamily="18" charset="0"/>
                           </a:rPr>
                           <m:t>𝛼</m:t>
                         </m:r>
                         <m:r>
-                          <a:rPr lang="en-US" sz="1400" b="0" i="1" smtClean="0">
+                          <a:rPr lang="en-US" sz="1400" i="1">
                             <a:latin typeface="Cambria Math" panose="02040503050406030204" pitchFamily="18" charset="0"/>
                           </a:rPr>
                           <m:t>=0</m:t>
@@ -22729,7 +26240,7 @@
               </p:txBody>
             </p:sp>
           </mc:Choice>
-          <mc:Fallback xmlns="">
+          <mc:Fallback>
             <p:sp>
               <p:nvSpPr>
                 <p:cNvPr id="78" name="TextBox 77">
@@ -22774,8 +26285,8 @@
             </p:sp>
           </mc:Fallback>
         </mc:AlternateContent>
-        <mc:AlternateContent xmlns:mc="http://schemas.openxmlformats.org/markup-compatibility/2006" xmlns:a14="http://schemas.microsoft.com/office/drawing/2010/main">
-          <mc:Choice Requires="a14">
+        <mc:AlternateContent xmlns:mc="http://schemas.openxmlformats.org/markup-compatibility/2006">
+          <mc:Choice xmlns:a14="http://schemas.microsoft.com/office/drawing/2010/main" Requires="a14">
             <p:sp>
               <p:nvSpPr>
                 <p:cNvPr id="79" name="TextBox 78">
@@ -22812,13 +26323,13 @@
                       </m:oMathParaPr>
                       <m:oMath xmlns:m="http://schemas.openxmlformats.org/officeDocument/2006/math">
                         <m:r>
-                          <a:rPr lang="en-US" sz="1400" b="0" i="1" smtClean="0">
+                          <a:rPr lang="en-US" sz="1400" i="1">
                             <a:latin typeface="Cambria Math" panose="02040503050406030204" pitchFamily="18" charset="0"/>
                           </a:rPr>
                           <m:t>𝛼</m:t>
                         </m:r>
                         <m:r>
-                          <a:rPr lang="en-US" sz="1400" b="0" i="1" smtClean="0">
+                          <a:rPr lang="en-US" sz="1400" i="1">
                             <a:latin typeface="Cambria Math" panose="02040503050406030204" pitchFamily="18" charset="0"/>
                           </a:rPr>
                           <m:t>→−1</m:t>
@@ -22831,7 +26342,7 @@
               </p:txBody>
             </p:sp>
           </mc:Choice>
-          <mc:Fallback xmlns="">
+          <mc:Fallback>
             <p:sp>
               <p:nvSpPr>
                 <p:cNvPr id="79" name="TextBox 78">
@@ -22876,8 +26387,8 @@
             </p:sp>
           </mc:Fallback>
         </mc:AlternateContent>
-        <mc:AlternateContent xmlns:mc="http://schemas.openxmlformats.org/markup-compatibility/2006" xmlns:a14="http://schemas.microsoft.com/office/drawing/2010/main">
-          <mc:Choice Requires="a14">
+        <mc:AlternateContent xmlns:mc="http://schemas.openxmlformats.org/markup-compatibility/2006">
+          <mc:Choice xmlns:a14="http://schemas.microsoft.com/office/drawing/2010/main" Requires="a14">
             <p:sp>
               <p:nvSpPr>
                 <p:cNvPr id="80" name="TextBox 79">
@@ -22914,25 +26425,25 @@
                       </m:oMathParaPr>
                       <m:oMath xmlns:m="http://schemas.openxmlformats.org/officeDocument/2006/math">
                         <m:r>
-                          <a:rPr lang="en-US" sz="1400" b="0" i="1" smtClean="0">
+                          <a:rPr lang="en-US" sz="1400" i="1">
                             <a:latin typeface="Cambria Math" panose="02040503050406030204" pitchFamily="18" charset="0"/>
                           </a:rPr>
                           <m:t>𝛼</m:t>
                         </m:r>
                         <m:r>
-                          <a:rPr lang="en-US" sz="1400" b="0" i="1" smtClean="0">
+                          <a:rPr lang="en-US" sz="1400" i="1">
                             <a:latin typeface="Cambria Math" panose="02040503050406030204" pitchFamily="18" charset="0"/>
                           </a:rPr>
                           <m:t>=</m:t>
                         </m:r>
                         <m:r>
-                          <a:rPr lang="en-US" sz="1400" b="0" i="1" smtClean="0">
+                          <a:rPr lang="en-US" sz="1400" i="1">
                             <a:latin typeface="Cambria Math" panose="02040503050406030204" pitchFamily="18" charset="0"/>
                           </a:rPr>
                           <m:t>𝛽</m:t>
                         </m:r>
                         <m:r>
-                          <a:rPr lang="en-US" sz="1400" b="0" i="1" smtClean="0">
+                          <a:rPr lang="en-US" sz="1400" i="1">
                             <a:latin typeface="Cambria Math" panose="02040503050406030204" pitchFamily="18" charset="0"/>
                           </a:rPr>
                           <m:t>→−1</m:t>
@@ -22945,7 +26456,7 @@
               </p:txBody>
             </p:sp>
           </mc:Choice>
-          <mc:Fallback xmlns="">
+          <mc:Fallback>
             <p:sp>
               <p:nvSpPr>
                 <p:cNvPr id="80" name="TextBox 79">
@@ -23004,7 +26515,7 @@
 </p:sld>
 </file>
 
-<file path=ppt/slides/slide7.xml><?xml version="1.0" encoding="utf-8"?>
+<file path=ppt/slides/slide8.xml><?xml version="1.0" encoding="utf-8"?>
 <p:sld xmlns:a="http://schemas.openxmlformats.org/drawingml/2006/main" xmlns:r="http://schemas.openxmlformats.org/officeDocument/2006/relationships" xmlns:p="http://schemas.openxmlformats.org/presentationml/2006/main">
   <p:cSld>
     <p:spTree>

--- a/figures/Figures.pptx
+++ b/figures/Figures.pptx
@@ -303,7 +303,7 @@
           <a:p>
             <a:fld id="{3C4E944E-439C-4400-9867-B448A42A17A7}" type="datetimeFigureOut">
               <a:rPr lang="en-US" smtClean="0"/>
-              <a:t>3/19/2026</a:t>
+              <a:t>9/30/2026</a:t>
             </a:fld>
             <a:endParaRPr lang="en-US"/>
           </a:p>
@@ -473,7 +473,7 @@
           <a:p>
             <a:fld id="{3C4E944E-439C-4400-9867-B448A42A17A7}" type="datetimeFigureOut">
               <a:rPr lang="en-US" smtClean="0"/>
-              <a:t>3/19/2026</a:t>
+              <a:t>9/30/2026</a:t>
             </a:fld>
             <a:endParaRPr lang="en-US"/>
           </a:p>
@@ -653,7 +653,7 @@
           <a:p>
             <a:fld id="{3C4E944E-439C-4400-9867-B448A42A17A7}" type="datetimeFigureOut">
               <a:rPr lang="en-US" smtClean="0"/>
-              <a:t>3/19/2026</a:t>
+              <a:t>9/30/2026</a:t>
             </a:fld>
             <a:endParaRPr lang="en-US"/>
           </a:p>
@@ -823,7 +823,7 @@
           <a:p>
             <a:fld id="{3C4E944E-439C-4400-9867-B448A42A17A7}" type="datetimeFigureOut">
               <a:rPr lang="en-US" smtClean="0"/>
-              <a:t>3/19/2026</a:t>
+              <a:t>9/30/2026</a:t>
             </a:fld>
             <a:endParaRPr lang="en-US"/>
           </a:p>
@@ -1069,7 +1069,7 @@
           <a:p>
             <a:fld id="{3C4E944E-439C-4400-9867-B448A42A17A7}" type="datetimeFigureOut">
               <a:rPr lang="en-US" smtClean="0"/>
-              <a:t>3/19/2026</a:t>
+              <a:t>9/30/2026</a:t>
             </a:fld>
             <a:endParaRPr lang="en-US"/>
           </a:p>
@@ -1301,7 +1301,7 @@
           <a:p>
             <a:fld id="{3C4E944E-439C-4400-9867-B448A42A17A7}" type="datetimeFigureOut">
               <a:rPr lang="en-US" smtClean="0"/>
-              <a:t>3/19/2026</a:t>
+              <a:t>9/30/2026</a:t>
             </a:fld>
             <a:endParaRPr lang="en-US"/>
           </a:p>
@@ -1668,7 +1668,7 @@
           <a:p>
             <a:fld id="{3C4E944E-439C-4400-9867-B448A42A17A7}" type="datetimeFigureOut">
               <a:rPr lang="en-US" smtClean="0"/>
-              <a:t>3/19/2026</a:t>
+              <a:t>9/30/2026</a:t>
             </a:fld>
             <a:endParaRPr lang="en-US"/>
           </a:p>
@@ -1786,7 +1786,7 @@
           <a:p>
             <a:fld id="{3C4E944E-439C-4400-9867-B448A42A17A7}" type="datetimeFigureOut">
               <a:rPr lang="en-US" smtClean="0"/>
-              <a:t>3/19/2026</a:t>
+              <a:t>9/30/2026</a:t>
             </a:fld>
             <a:endParaRPr lang="en-US"/>
           </a:p>
@@ -1881,7 +1881,7 @@
           <a:p>
             <a:fld id="{3C4E944E-439C-4400-9867-B448A42A17A7}" type="datetimeFigureOut">
               <a:rPr lang="en-US" smtClean="0"/>
-              <a:t>3/19/2026</a:t>
+              <a:t>9/30/2026</a:t>
             </a:fld>
             <a:endParaRPr lang="en-US"/>
           </a:p>
@@ -2158,7 +2158,7 @@
           <a:p>
             <a:fld id="{3C4E944E-439C-4400-9867-B448A42A17A7}" type="datetimeFigureOut">
               <a:rPr lang="en-US" smtClean="0"/>
-              <a:t>3/19/2026</a:t>
+              <a:t>9/30/2026</a:t>
             </a:fld>
             <a:endParaRPr lang="en-US"/>
           </a:p>
@@ -2415,7 +2415,7 @@
           <a:p>
             <a:fld id="{3C4E944E-439C-4400-9867-B448A42A17A7}" type="datetimeFigureOut">
               <a:rPr lang="en-US" smtClean="0"/>
-              <a:t>3/19/2026</a:t>
+              <a:t>9/30/2026</a:t>
             </a:fld>
             <a:endParaRPr lang="en-US"/>
           </a:p>
@@ -2628,7 +2628,7 @@
           <a:p>
             <a:fld id="{3C4E944E-439C-4400-9867-B448A42A17A7}" type="datetimeFigureOut">
               <a:rPr lang="en-US" smtClean="0"/>
-              <a:t>3/19/2026</a:t>
+              <a:t>9/30/2026</a:t>
             </a:fld>
             <a:endParaRPr lang="en-US"/>
           </a:p>
@@ -3053,8 +3053,8 @@
             <a:chExt cx="11351879" cy="3202606"/>
           </a:xfrm>
         </p:grpSpPr>
-        <mc:AlternateContent xmlns:mc="http://schemas.openxmlformats.org/markup-compatibility/2006">
-          <mc:Choice xmlns:a14="http://schemas.microsoft.com/office/drawing/2010/main" Requires="a14">
+        <mc:AlternateContent xmlns:mc="http://schemas.openxmlformats.org/markup-compatibility/2006" xmlns:a14="http://schemas.microsoft.com/office/drawing/2010/main">
+          <mc:Choice Requires="a14">
             <p:sp>
               <p:nvSpPr>
                 <p:cNvPr id="2" name="TextBox 1">
@@ -3086,10 +3086,7 @@
                   <a:pPr/>
                   <a14:m>
                     <m:oMathPara xmlns:m="http://schemas.openxmlformats.org/officeDocument/2006/math">
-                      <m:oMathParaPr>
-                        <m:jc m:val="centerGroup"/>
-                      </m:oMathParaPr>
-                      <m:oMath xmlns:m="http://schemas.openxmlformats.org/officeDocument/2006/math">
+                      <m:oMath>
                         <m:sSub>
                           <m:sSubPr>
                             <m:ctrlPr>
@@ -3123,7 +3120,7 @@
               </p:txBody>
             </p:sp>
           </mc:Choice>
-          <mc:Fallback>
+          <mc:Fallback xmlns="">
             <p:sp>
               <p:nvSpPr>
                 <p:cNvPr id="2" name="TextBox 1">
@@ -4441,8 +4438,8 @@
             </p:sp>
           </p:grpSp>
         </p:grpSp>
-        <mc:AlternateContent xmlns:mc="http://schemas.openxmlformats.org/markup-compatibility/2006">
-          <mc:Choice xmlns:a14="http://schemas.microsoft.com/office/drawing/2010/main" Requires="a14">
+        <mc:AlternateContent xmlns:mc="http://schemas.openxmlformats.org/markup-compatibility/2006" xmlns:a14="http://schemas.microsoft.com/office/drawing/2010/main">
+          <mc:Choice Requires="a14">
             <p:sp>
               <p:nvSpPr>
                 <p:cNvPr id="40" name="TextBox 39">
@@ -4474,10 +4471,7 @@
                   <a:pPr/>
                   <a14:m>
                     <m:oMathPara xmlns:m="http://schemas.openxmlformats.org/officeDocument/2006/math">
-                      <m:oMathParaPr>
-                        <m:jc m:val="centerGroup"/>
-                      </m:oMathParaPr>
-                      <m:oMath xmlns:m="http://schemas.openxmlformats.org/officeDocument/2006/math">
+                      <m:oMath>
                         <m:sSub>
                           <m:sSubPr>
                             <m:ctrlPr>
@@ -4511,7 +4505,7 @@
               </p:txBody>
             </p:sp>
           </mc:Choice>
-          <mc:Fallback>
+          <mc:Fallback xmlns="">
             <p:sp>
               <p:nvSpPr>
                 <p:cNvPr id="40" name="TextBox 39">
@@ -4556,8 +4550,8 @@
             </p:sp>
           </mc:Fallback>
         </mc:AlternateContent>
-        <mc:AlternateContent xmlns:mc="http://schemas.openxmlformats.org/markup-compatibility/2006">
-          <mc:Choice xmlns:a14="http://schemas.microsoft.com/office/drawing/2010/main" Requires="a14">
+        <mc:AlternateContent xmlns:mc="http://schemas.openxmlformats.org/markup-compatibility/2006" xmlns:a14="http://schemas.microsoft.com/office/drawing/2010/main">
+          <mc:Choice Requires="a14">
             <p:sp>
               <p:nvSpPr>
                 <p:cNvPr id="41" name="TextBox 40">
@@ -4589,10 +4583,7 @@
                   <a:pPr/>
                   <a14:m>
                     <m:oMathPara xmlns:m="http://schemas.openxmlformats.org/officeDocument/2006/math">
-                      <m:oMathParaPr>
-                        <m:jc m:val="centerGroup"/>
-                      </m:oMathParaPr>
-                      <m:oMath xmlns:m="http://schemas.openxmlformats.org/officeDocument/2006/math">
+                      <m:oMath>
                         <m:sSub>
                           <m:sSubPr>
                             <m:ctrlPr>
@@ -4626,7 +4617,7 @@
               </p:txBody>
             </p:sp>
           </mc:Choice>
-          <mc:Fallback>
+          <mc:Fallback xmlns="">
             <p:sp>
               <p:nvSpPr>
                 <p:cNvPr id="41" name="TextBox 40">
@@ -4671,8 +4662,8 @@
             </p:sp>
           </mc:Fallback>
         </mc:AlternateContent>
-        <mc:AlternateContent xmlns:mc="http://schemas.openxmlformats.org/markup-compatibility/2006">
-          <mc:Choice xmlns:a14="http://schemas.microsoft.com/office/drawing/2010/main" Requires="a14">
+        <mc:AlternateContent xmlns:mc="http://schemas.openxmlformats.org/markup-compatibility/2006" xmlns:a14="http://schemas.microsoft.com/office/drawing/2010/main">
+          <mc:Choice Requires="a14">
             <p:sp>
               <p:nvSpPr>
                 <p:cNvPr id="42" name="TextBox 41">
@@ -4704,10 +4695,7 @@
                   <a:pPr/>
                   <a14:m>
                     <m:oMathPara xmlns:m="http://schemas.openxmlformats.org/officeDocument/2006/math">
-                      <m:oMathParaPr>
-                        <m:jc m:val="centerGroup"/>
-                      </m:oMathParaPr>
-                      <m:oMath xmlns:m="http://schemas.openxmlformats.org/officeDocument/2006/math">
+                      <m:oMath>
                         <m:sSub>
                           <m:sSubPr>
                             <m:ctrlPr>
@@ -4741,7 +4729,7 @@
               </p:txBody>
             </p:sp>
           </mc:Choice>
-          <mc:Fallback>
+          <mc:Fallback xmlns="">
             <p:sp>
               <p:nvSpPr>
                 <p:cNvPr id="42" name="TextBox 41">
@@ -4786,8 +4774,8 @@
             </p:sp>
           </mc:Fallback>
         </mc:AlternateContent>
-        <mc:AlternateContent xmlns:mc="http://schemas.openxmlformats.org/markup-compatibility/2006">
-          <mc:Choice xmlns:a14="http://schemas.microsoft.com/office/drawing/2010/main" Requires="a14">
+        <mc:AlternateContent xmlns:mc="http://schemas.openxmlformats.org/markup-compatibility/2006" xmlns:a14="http://schemas.microsoft.com/office/drawing/2010/main">
+          <mc:Choice Requires="a14">
             <p:sp>
               <p:nvSpPr>
                 <p:cNvPr id="43" name="TextBox 42">
@@ -4819,10 +4807,7 @@
                   <a:pPr/>
                   <a14:m>
                     <m:oMathPara xmlns:m="http://schemas.openxmlformats.org/officeDocument/2006/math">
-                      <m:oMathParaPr>
-                        <m:jc m:val="centerGroup"/>
-                      </m:oMathParaPr>
-                      <m:oMath xmlns:m="http://schemas.openxmlformats.org/officeDocument/2006/math">
+                      <m:oMath>
                         <m:r>
                           <a:rPr lang="en-US" sz="1400" i="1">
                             <a:latin typeface="Cambria Math" panose="02040503050406030204" pitchFamily="18" charset="0"/>
@@ -4868,7 +4853,7 @@
               </p:txBody>
             </p:sp>
           </mc:Choice>
-          <mc:Fallback>
+          <mc:Fallback xmlns="">
             <p:sp>
               <p:nvSpPr>
                 <p:cNvPr id="43" name="TextBox 42">
@@ -4913,8 +4898,8 @@
             </p:sp>
           </mc:Fallback>
         </mc:AlternateContent>
-        <mc:AlternateContent xmlns:mc="http://schemas.openxmlformats.org/markup-compatibility/2006">
-          <mc:Choice xmlns:a14="http://schemas.microsoft.com/office/drawing/2010/main" Requires="a14">
+        <mc:AlternateContent xmlns:mc="http://schemas.openxmlformats.org/markup-compatibility/2006" xmlns:a14="http://schemas.microsoft.com/office/drawing/2010/main">
+          <mc:Choice Requires="a14">
             <p:sp>
               <p:nvSpPr>
                 <p:cNvPr id="46" name="TextBox 45">
@@ -4946,10 +4931,7 @@
                   <a:pPr/>
                   <a14:m>
                     <m:oMathPara xmlns:m="http://schemas.openxmlformats.org/officeDocument/2006/math">
-                      <m:oMathParaPr>
-                        <m:jc m:val="centerGroup"/>
-                      </m:oMathParaPr>
-                      <m:oMath xmlns:m="http://schemas.openxmlformats.org/officeDocument/2006/math">
+                      <m:oMath>
                         <m:sSub>
                           <m:sSubPr>
                             <m:ctrlPr>
@@ -4989,7 +4971,7 @@
               </p:txBody>
             </p:sp>
           </mc:Choice>
-          <mc:Fallback>
+          <mc:Fallback xmlns="">
             <p:sp>
               <p:nvSpPr>
                 <p:cNvPr id="46" name="TextBox 45">
@@ -5195,8 +5177,8 @@
             </a:fontRef>
           </p:style>
         </p:cxnSp>
-        <mc:AlternateContent xmlns:mc="http://schemas.openxmlformats.org/markup-compatibility/2006">
-          <mc:Choice xmlns:a14="http://schemas.microsoft.com/office/drawing/2010/main" Requires="a14">
+        <mc:AlternateContent xmlns:mc="http://schemas.openxmlformats.org/markup-compatibility/2006" xmlns:a14="http://schemas.microsoft.com/office/drawing/2010/main">
+          <mc:Choice Requires="a14">
             <p:sp>
               <p:nvSpPr>
                 <p:cNvPr id="54" name="TextBox 53">
@@ -5228,10 +5210,7 @@
                   <a:pPr/>
                   <a14:m>
                     <m:oMathPara xmlns:m="http://schemas.openxmlformats.org/officeDocument/2006/math">
-                      <m:oMathParaPr>
-                        <m:jc m:val="centerGroup"/>
-                      </m:oMathParaPr>
-                      <m:oMath xmlns:m="http://schemas.openxmlformats.org/officeDocument/2006/math">
+                      <m:oMath>
                         <m:r>
                           <a:rPr lang="en-US" sz="1400" i="1">
                             <a:latin typeface="Cambria Math" panose="02040503050406030204" pitchFamily="18" charset="0"/>
@@ -5277,7 +5256,7 @@
               </p:txBody>
             </p:sp>
           </mc:Choice>
-          <mc:Fallback>
+          <mc:Fallback xmlns="">
             <p:sp>
               <p:nvSpPr>
                 <p:cNvPr id="54" name="TextBox 53">
@@ -5322,8 +5301,8 @@
             </p:sp>
           </mc:Fallback>
         </mc:AlternateContent>
-        <mc:AlternateContent xmlns:mc="http://schemas.openxmlformats.org/markup-compatibility/2006">
-          <mc:Choice xmlns:a14="http://schemas.microsoft.com/office/drawing/2010/main" Requires="a14">
+        <mc:AlternateContent xmlns:mc="http://schemas.openxmlformats.org/markup-compatibility/2006" xmlns:a14="http://schemas.microsoft.com/office/drawing/2010/main">
+          <mc:Choice Requires="a14">
             <p:sp>
               <p:nvSpPr>
                 <p:cNvPr id="55" name="TextBox 54">
@@ -5355,10 +5334,7 @@
                   <a:pPr/>
                   <a14:m>
                     <m:oMathPara xmlns:m="http://schemas.openxmlformats.org/officeDocument/2006/math">
-                      <m:oMathParaPr>
-                        <m:jc m:val="centerGroup"/>
-                      </m:oMathParaPr>
-                      <m:oMath xmlns:m="http://schemas.openxmlformats.org/officeDocument/2006/math">
+                      <m:oMath>
                         <m:r>
                           <a:rPr lang="en-US" sz="1400" i="1">
                             <a:latin typeface="Cambria Math" panose="02040503050406030204" pitchFamily="18" charset="0"/>
@@ -5404,7 +5380,7 @@
               </p:txBody>
             </p:sp>
           </mc:Choice>
-          <mc:Fallback>
+          <mc:Fallback xmlns="">
             <p:sp>
               <p:nvSpPr>
                 <p:cNvPr id="55" name="TextBox 54">
@@ -5449,8 +5425,8 @@
             </p:sp>
           </mc:Fallback>
         </mc:AlternateContent>
-        <mc:AlternateContent xmlns:mc="http://schemas.openxmlformats.org/markup-compatibility/2006">
-          <mc:Choice xmlns:a14="http://schemas.microsoft.com/office/drawing/2010/main" Requires="a14">
+        <mc:AlternateContent xmlns:mc="http://schemas.openxmlformats.org/markup-compatibility/2006" xmlns:a14="http://schemas.microsoft.com/office/drawing/2010/main">
+          <mc:Choice Requires="a14">
             <p:sp>
               <p:nvSpPr>
                 <p:cNvPr id="56" name="TextBox 55">
@@ -5482,10 +5458,7 @@
                   <a:pPr/>
                   <a14:m>
                     <m:oMathPara xmlns:m="http://schemas.openxmlformats.org/officeDocument/2006/math">
-                      <m:oMathParaPr>
-                        <m:jc m:val="centerGroup"/>
-                      </m:oMathParaPr>
-                      <m:oMath xmlns:m="http://schemas.openxmlformats.org/officeDocument/2006/math">
+                      <m:oMath>
                         <m:r>
                           <a:rPr lang="en-US" sz="1400" i="1">
                             <a:latin typeface="Cambria Math" panose="02040503050406030204" pitchFamily="18" charset="0"/>
@@ -5531,7 +5504,7 @@
               </p:txBody>
             </p:sp>
           </mc:Choice>
-          <mc:Fallback>
+          <mc:Fallback xmlns="">
             <p:sp>
               <p:nvSpPr>
                 <p:cNvPr id="56" name="TextBox 55">
@@ -5576,8 +5549,8 @@
             </p:sp>
           </mc:Fallback>
         </mc:AlternateContent>
-        <mc:AlternateContent xmlns:mc="http://schemas.openxmlformats.org/markup-compatibility/2006">
-          <mc:Choice xmlns:a14="http://schemas.microsoft.com/office/drawing/2010/main" Requires="a14">
+        <mc:AlternateContent xmlns:mc="http://schemas.openxmlformats.org/markup-compatibility/2006" xmlns:a14="http://schemas.microsoft.com/office/drawing/2010/main">
+          <mc:Choice Requires="a14">
             <p:sp>
               <p:nvSpPr>
                 <p:cNvPr id="57" name="TextBox 56">
@@ -5609,10 +5582,7 @@
                   <a:pPr/>
                   <a14:m>
                     <m:oMathPara xmlns:m="http://schemas.openxmlformats.org/officeDocument/2006/math">
-                      <m:oMathParaPr>
-                        <m:jc m:val="centerGroup"/>
-                      </m:oMathParaPr>
-                      <m:oMath xmlns:m="http://schemas.openxmlformats.org/officeDocument/2006/math">
+                      <m:oMath>
                         <m:r>
                           <a:rPr lang="en-US" sz="1400" i="1">
                             <a:latin typeface="Cambria Math" panose="02040503050406030204" pitchFamily="18" charset="0"/>
@@ -5658,7 +5628,7 @@
               </p:txBody>
             </p:sp>
           </mc:Choice>
-          <mc:Fallback>
+          <mc:Fallback xmlns="">
             <p:sp>
               <p:nvSpPr>
                 <p:cNvPr id="57" name="TextBox 56">
@@ -5703,8 +5673,8 @@
             </p:sp>
           </mc:Fallback>
         </mc:AlternateContent>
-        <mc:AlternateContent xmlns:mc="http://schemas.openxmlformats.org/markup-compatibility/2006">
-          <mc:Choice xmlns:a14="http://schemas.microsoft.com/office/drawing/2010/main" Requires="a14">
+        <mc:AlternateContent xmlns:mc="http://schemas.openxmlformats.org/markup-compatibility/2006" xmlns:a14="http://schemas.microsoft.com/office/drawing/2010/main">
+          <mc:Choice Requires="a14">
             <p:sp>
               <p:nvSpPr>
                 <p:cNvPr id="58" name="TextBox 57">
@@ -5736,10 +5706,7 @@
                   <a:pPr/>
                   <a14:m>
                     <m:oMathPara xmlns:m="http://schemas.openxmlformats.org/officeDocument/2006/math">
-                      <m:oMathParaPr>
-                        <m:jc m:val="centerGroup"/>
-                      </m:oMathParaPr>
-                      <m:oMath xmlns:m="http://schemas.openxmlformats.org/officeDocument/2006/math">
+                      <m:oMath>
                         <m:r>
                           <a:rPr lang="en-US" sz="1400" i="1">
                             <a:latin typeface="Cambria Math" panose="02040503050406030204" pitchFamily="18" charset="0"/>
@@ -5785,7 +5752,7 @@
               </p:txBody>
             </p:sp>
           </mc:Choice>
-          <mc:Fallback>
+          <mc:Fallback xmlns="">
             <p:sp>
               <p:nvSpPr>
                 <p:cNvPr id="58" name="TextBox 57">
@@ -5830,8 +5797,8 @@
             </p:sp>
           </mc:Fallback>
         </mc:AlternateContent>
-        <mc:AlternateContent xmlns:mc="http://schemas.openxmlformats.org/markup-compatibility/2006">
-          <mc:Choice xmlns:a14="http://schemas.microsoft.com/office/drawing/2010/main" Requires="a14">
+        <mc:AlternateContent xmlns:mc="http://schemas.openxmlformats.org/markup-compatibility/2006" xmlns:a14="http://schemas.microsoft.com/office/drawing/2010/main">
+          <mc:Choice Requires="a14">
             <p:sp>
               <p:nvSpPr>
                 <p:cNvPr id="59" name="TextBox 58">
@@ -5863,10 +5830,7 @@
                   <a:pPr/>
                   <a14:m>
                     <m:oMathPara xmlns:m="http://schemas.openxmlformats.org/officeDocument/2006/math">
-                      <m:oMathParaPr>
-                        <m:jc m:val="centerGroup"/>
-                      </m:oMathParaPr>
-                      <m:oMath xmlns:m="http://schemas.openxmlformats.org/officeDocument/2006/math">
+                      <m:oMath>
                         <m:sSub>
                           <m:sSubPr>
                             <m:ctrlPr>
@@ -5906,7 +5870,7 @@
               </p:txBody>
             </p:sp>
           </mc:Choice>
-          <mc:Fallback>
+          <mc:Fallback xmlns="">
             <p:sp>
               <p:nvSpPr>
                 <p:cNvPr id="59" name="TextBox 58">
@@ -5951,8 +5915,8 @@
             </p:sp>
           </mc:Fallback>
         </mc:AlternateContent>
-        <mc:AlternateContent xmlns:mc="http://schemas.openxmlformats.org/markup-compatibility/2006">
-          <mc:Choice xmlns:a14="http://schemas.microsoft.com/office/drawing/2010/main" Requires="a14">
+        <mc:AlternateContent xmlns:mc="http://schemas.openxmlformats.org/markup-compatibility/2006" xmlns:a14="http://schemas.microsoft.com/office/drawing/2010/main">
+          <mc:Choice Requires="a14">
             <p:sp>
               <p:nvSpPr>
                 <p:cNvPr id="60" name="TextBox 59">
@@ -5984,10 +5948,7 @@
                   <a:pPr/>
                   <a14:m>
                     <m:oMathPara xmlns:m="http://schemas.openxmlformats.org/officeDocument/2006/math">
-                      <m:oMathParaPr>
-                        <m:jc m:val="centerGroup"/>
-                      </m:oMathParaPr>
-                      <m:oMath xmlns:m="http://schemas.openxmlformats.org/officeDocument/2006/math">
+                      <m:oMath>
                         <m:sSub>
                           <m:sSubPr>
                             <m:ctrlPr>
@@ -6027,7 +5988,7 @@
               </p:txBody>
             </p:sp>
           </mc:Choice>
-          <mc:Fallback>
+          <mc:Fallback xmlns="">
             <p:sp>
               <p:nvSpPr>
                 <p:cNvPr id="60" name="TextBox 59">
@@ -6072,8 +6033,8 @@
             </p:sp>
           </mc:Fallback>
         </mc:AlternateContent>
-        <mc:AlternateContent xmlns:mc="http://schemas.openxmlformats.org/markup-compatibility/2006">
-          <mc:Choice xmlns:a14="http://schemas.microsoft.com/office/drawing/2010/main" Requires="a14">
+        <mc:AlternateContent xmlns:mc="http://schemas.openxmlformats.org/markup-compatibility/2006" xmlns:a14="http://schemas.microsoft.com/office/drawing/2010/main">
+          <mc:Choice Requires="a14">
             <p:sp>
               <p:nvSpPr>
                 <p:cNvPr id="61" name="TextBox 60">
@@ -6105,10 +6066,7 @@
                   <a:pPr/>
                   <a14:m>
                     <m:oMathPara xmlns:m="http://schemas.openxmlformats.org/officeDocument/2006/math">
-                      <m:oMathParaPr>
-                        <m:jc m:val="centerGroup"/>
-                      </m:oMathParaPr>
-                      <m:oMath xmlns:m="http://schemas.openxmlformats.org/officeDocument/2006/math">
+                      <m:oMath>
                         <m:r>
                           <a:rPr lang="en-US" sz="1400" i="1">
                             <a:latin typeface="Cambria Math" panose="02040503050406030204" pitchFamily="18" charset="0"/>
@@ -6154,7 +6112,7 @@
               </p:txBody>
             </p:sp>
           </mc:Choice>
-          <mc:Fallback>
+          <mc:Fallback xmlns="">
             <p:sp>
               <p:nvSpPr>
                 <p:cNvPr id="61" name="TextBox 60">
@@ -6199,8 +6157,8 @@
             </p:sp>
           </mc:Fallback>
         </mc:AlternateContent>
-        <mc:AlternateContent xmlns:mc="http://schemas.openxmlformats.org/markup-compatibility/2006">
-          <mc:Choice xmlns:a14="http://schemas.microsoft.com/office/drawing/2010/main" Requires="a14">
+        <mc:AlternateContent xmlns:mc="http://schemas.openxmlformats.org/markup-compatibility/2006" xmlns:a14="http://schemas.microsoft.com/office/drawing/2010/main">
+          <mc:Choice Requires="a14">
             <p:sp>
               <p:nvSpPr>
                 <p:cNvPr id="62" name="TextBox 61">
@@ -6232,10 +6190,7 @@
                   <a:pPr/>
                   <a14:m>
                     <m:oMathPara xmlns:m="http://schemas.openxmlformats.org/officeDocument/2006/math">
-                      <m:oMathParaPr>
-                        <m:jc m:val="centerGroup"/>
-                      </m:oMathParaPr>
-                      <m:oMath xmlns:m="http://schemas.openxmlformats.org/officeDocument/2006/math">
+                      <m:oMath>
                         <m:r>
                           <a:rPr lang="en-US" sz="1400" i="1">
                             <a:latin typeface="Cambria Math" panose="02040503050406030204" pitchFamily="18" charset="0"/>
@@ -6281,7 +6236,7 @@
               </p:txBody>
             </p:sp>
           </mc:Choice>
-          <mc:Fallback>
+          <mc:Fallback xmlns="">
             <p:sp>
               <p:nvSpPr>
                 <p:cNvPr id="62" name="TextBox 61">
@@ -6326,8 +6281,8 @@
             </p:sp>
           </mc:Fallback>
         </mc:AlternateContent>
-        <mc:AlternateContent xmlns:mc="http://schemas.openxmlformats.org/markup-compatibility/2006">
-          <mc:Choice xmlns:a14="http://schemas.microsoft.com/office/drawing/2010/main" Requires="a14">
+        <mc:AlternateContent xmlns:mc="http://schemas.openxmlformats.org/markup-compatibility/2006" xmlns:a14="http://schemas.microsoft.com/office/drawing/2010/main">
+          <mc:Choice Requires="a14">
             <p:sp>
               <p:nvSpPr>
                 <p:cNvPr id="63" name="TextBox 62">
@@ -6359,10 +6314,7 @@
                   <a:pPr/>
                   <a14:m>
                     <m:oMathPara xmlns:m="http://schemas.openxmlformats.org/officeDocument/2006/math">
-                      <m:oMathParaPr>
-                        <m:jc m:val="centerGroup"/>
-                      </m:oMathParaPr>
-                      <m:oMath xmlns:m="http://schemas.openxmlformats.org/officeDocument/2006/math">
+                      <m:oMath>
                         <m:r>
                           <a:rPr lang="en-US" sz="1400" i="1">
                             <a:latin typeface="Cambria Math" panose="02040503050406030204" pitchFamily="18" charset="0"/>
@@ -6408,7 +6360,7 @@
               </p:txBody>
             </p:sp>
           </mc:Choice>
-          <mc:Fallback>
+          <mc:Fallback xmlns="">
             <p:sp>
               <p:nvSpPr>
                 <p:cNvPr id="63" name="TextBox 62">
@@ -6453,8 +6405,8 @@
             </p:sp>
           </mc:Fallback>
         </mc:AlternateContent>
-        <mc:AlternateContent xmlns:mc="http://schemas.openxmlformats.org/markup-compatibility/2006">
-          <mc:Choice xmlns:a14="http://schemas.microsoft.com/office/drawing/2010/main" Requires="a14">
+        <mc:AlternateContent xmlns:mc="http://schemas.openxmlformats.org/markup-compatibility/2006" xmlns:a14="http://schemas.microsoft.com/office/drawing/2010/main">
+          <mc:Choice Requires="a14">
             <p:sp>
               <p:nvSpPr>
                 <p:cNvPr id="64" name="TextBox 63">
@@ -6486,10 +6438,7 @@
                   <a:pPr/>
                   <a14:m>
                     <m:oMathPara xmlns:m="http://schemas.openxmlformats.org/officeDocument/2006/math">
-                      <m:oMathParaPr>
-                        <m:jc m:val="centerGroup"/>
-                      </m:oMathParaPr>
-                      <m:oMath xmlns:m="http://schemas.openxmlformats.org/officeDocument/2006/math">
+                      <m:oMath>
                         <m:r>
                           <a:rPr lang="en-US" sz="1400" i="1">
                             <a:latin typeface="Cambria Math" panose="02040503050406030204" pitchFamily="18" charset="0"/>
@@ -6535,7 +6484,7 @@
               </p:txBody>
             </p:sp>
           </mc:Choice>
-          <mc:Fallback>
+          <mc:Fallback xmlns="">
             <p:sp>
               <p:nvSpPr>
                 <p:cNvPr id="64" name="TextBox 63">
@@ -6637,8 +6586,8 @@
             <a:chExt cx="11351879" cy="3407645"/>
           </a:xfrm>
         </p:grpSpPr>
-        <mc:AlternateContent xmlns:mc="http://schemas.openxmlformats.org/markup-compatibility/2006">
-          <mc:Choice xmlns:a14="http://schemas.microsoft.com/office/drawing/2010/main" Requires="a14">
+        <mc:AlternateContent xmlns:mc="http://schemas.openxmlformats.org/markup-compatibility/2006" xmlns:a14="http://schemas.microsoft.com/office/drawing/2010/main">
+          <mc:Choice Requires="a14">
             <p:sp>
               <p:nvSpPr>
                 <p:cNvPr id="2" name="TextBox 1">
@@ -6670,10 +6619,7 @@
                   <a:pPr/>
                   <a14:m>
                     <m:oMathPara xmlns:m="http://schemas.openxmlformats.org/officeDocument/2006/math">
-                      <m:oMathParaPr>
-                        <m:jc m:val="centerGroup"/>
-                      </m:oMathParaPr>
-                      <m:oMath xmlns:m="http://schemas.openxmlformats.org/officeDocument/2006/math">
+                      <m:oMath>
                         <m:sSub>
                           <m:sSubPr>
                             <m:ctrlPr>
@@ -6707,7 +6653,7 @@
               </p:txBody>
             </p:sp>
           </mc:Choice>
-          <mc:Fallback>
+          <mc:Fallback xmlns="">
             <p:sp>
               <p:nvSpPr>
                 <p:cNvPr id="2" name="TextBox 1">
@@ -8032,8 +7978,8 @@
             </p:sp>
           </p:grpSp>
         </p:grpSp>
-        <mc:AlternateContent xmlns:mc="http://schemas.openxmlformats.org/markup-compatibility/2006">
-          <mc:Choice xmlns:a14="http://schemas.microsoft.com/office/drawing/2010/main" Requires="a14">
+        <mc:AlternateContent xmlns:mc="http://schemas.openxmlformats.org/markup-compatibility/2006" xmlns:a14="http://schemas.microsoft.com/office/drawing/2010/main">
+          <mc:Choice Requires="a14">
             <p:sp>
               <p:nvSpPr>
                 <p:cNvPr id="40" name="TextBox 39">
@@ -8065,10 +8011,7 @@
                   <a:pPr/>
                   <a14:m>
                     <m:oMathPara xmlns:m="http://schemas.openxmlformats.org/officeDocument/2006/math">
-                      <m:oMathParaPr>
-                        <m:jc m:val="centerGroup"/>
-                      </m:oMathParaPr>
-                      <m:oMath xmlns:m="http://schemas.openxmlformats.org/officeDocument/2006/math">
+                      <m:oMath>
                         <m:sSub>
                           <m:sSubPr>
                             <m:ctrlPr>
@@ -8102,7 +8045,7 @@
               </p:txBody>
             </p:sp>
           </mc:Choice>
-          <mc:Fallback>
+          <mc:Fallback xmlns="">
             <p:sp>
               <p:nvSpPr>
                 <p:cNvPr id="40" name="TextBox 39">
@@ -8147,8 +8090,8 @@
             </p:sp>
           </mc:Fallback>
         </mc:AlternateContent>
-        <mc:AlternateContent xmlns:mc="http://schemas.openxmlformats.org/markup-compatibility/2006">
-          <mc:Choice xmlns:a14="http://schemas.microsoft.com/office/drawing/2010/main" Requires="a14">
+        <mc:AlternateContent xmlns:mc="http://schemas.openxmlformats.org/markup-compatibility/2006" xmlns:a14="http://schemas.microsoft.com/office/drawing/2010/main">
+          <mc:Choice Requires="a14">
             <p:sp>
               <p:nvSpPr>
                 <p:cNvPr id="41" name="TextBox 40">
@@ -8180,10 +8123,7 @@
                   <a:pPr/>
                   <a14:m>
                     <m:oMathPara xmlns:m="http://schemas.openxmlformats.org/officeDocument/2006/math">
-                      <m:oMathParaPr>
-                        <m:jc m:val="centerGroup"/>
-                      </m:oMathParaPr>
-                      <m:oMath xmlns:m="http://schemas.openxmlformats.org/officeDocument/2006/math">
+                      <m:oMath>
                         <m:sSub>
                           <m:sSubPr>
                             <m:ctrlPr>
@@ -8217,7 +8157,7 @@
               </p:txBody>
             </p:sp>
           </mc:Choice>
-          <mc:Fallback>
+          <mc:Fallback xmlns="">
             <p:sp>
               <p:nvSpPr>
                 <p:cNvPr id="41" name="TextBox 40">
@@ -8262,8 +8202,8 @@
             </p:sp>
           </mc:Fallback>
         </mc:AlternateContent>
-        <mc:AlternateContent xmlns:mc="http://schemas.openxmlformats.org/markup-compatibility/2006">
-          <mc:Choice xmlns:a14="http://schemas.microsoft.com/office/drawing/2010/main" Requires="a14">
+        <mc:AlternateContent xmlns:mc="http://schemas.openxmlformats.org/markup-compatibility/2006" xmlns:a14="http://schemas.microsoft.com/office/drawing/2010/main">
+          <mc:Choice Requires="a14">
             <p:sp>
               <p:nvSpPr>
                 <p:cNvPr id="42" name="TextBox 41">
@@ -8295,10 +8235,7 @@
                   <a:pPr/>
                   <a14:m>
                     <m:oMathPara xmlns:m="http://schemas.openxmlformats.org/officeDocument/2006/math">
-                      <m:oMathParaPr>
-                        <m:jc m:val="centerGroup"/>
-                      </m:oMathParaPr>
-                      <m:oMath xmlns:m="http://schemas.openxmlformats.org/officeDocument/2006/math">
+                      <m:oMath>
                         <m:sSub>
                           <m:sSubPr>
                             <m:ctrlPr>
@@ -8332,7 +8269,7 @@
               </p:txBody>
             </p:sp>
           </mc:Choice>
-          <mc:Fallback>
+          <mc:Fallback xmlns="">
             <p:sp>
               <p:nvSpPr>
                 <p:cNvPr id="42" name="TextBox 41">
@@ -8377,8 +8314,8 @@
             </p:sp>
           </mc:Fallback>
         </mc:AlternateContent>
-        <mc:AlternateContent xmlns:mc="http://schemas.openxmlformats.org/markup-compatibility/2006">
-          <mc:Choice xmlns:a14="http://schemas.microsoft.com/office/drawing/2010/main" Requires="a14">
+        <mc:AlternateContent xmlns:mc="http://schemas.openxmlformats.org/markup-compatibility/2006" xmlns:a14="http://schemas.microsoft.com/office/drawing/2010/main">
+          <mc:Choice Requires="a14">
             <p:sp>
               <p:nvSpPr>
                 <p:cNvPr id="43" name="TextBox 42">
@@ -8410,10 +8347,7 @@
                   <a:pPr/>
                   <a14:m>
                     <m:oMathPara xmlns:m="http://schemas.openxmlformats.org/officeDocument/2006/math">
-                      <m:oMathParaPr>
-                        <m:jc m:val="centerGroup"/>
-                      </m:oMathParaPr>
-                      <m:oMath xmlns:m="http://schemas.openxmlformats.org/officeDocument/2006/math">
+                      <m:oMath>
                         <m:r>
                           <a:rPr lang="en-US" sz="1400" i="1">
                             <a:latin typeface="Cambria Math" panose="02040503050406030204" pitchFamily="18" charset="0"/>
@@ -8459,7 +8393,7 @@
               </p:txBody>
             </p:sp>
           </mc:Choice>
-          <mc:Fallback>
+          <mc:Fallback xmlns="">
             <p:sp>
               <p:nvSpPr>
                 <p:cNvPr id="43" name="TextBox 42">
@@ -8504,8 +8438,8 @@
             </p:sp>
           </mc:Fallback>
         </mc:AlternateContent>
-        <mc:AlternateContent xmlns:mc="http://schemas.openxmlformats.org/markup-compatibility/2006">
-          <mc:Choice xmlns:a14="http://schemas.microsoft.com/office/drawing/2010/main" Requires="a14">
+        <mc:AlternateContent xmlns:mc="http://schemas.openxmlformats.org/markup-compatibility/2006" xmlns:a14="http://schemas.microsoft.com/office/drawing/2010/main">
+          <mc:Choice Requires="a14">
             <p:sp>
               <p:nvSpPr>
                 <p:cNvPr id="46" name="TextBox 45">
@@ -8537,10 +8471,7 @@
                   <a:pPr/>
                   <a14:m>
                     <m:oMathPara xmlns:m="http://schemas.openxmlformats.org/officeDocument/2006/math">
-                      <m:oMathParaPr>
-                        <m:jc m:val="centerGroup"/>
-                      </m:oMathParaPr>
-                      <m:oMath xmlns:m="http://schemas.openxmlformats.org/officeDocument/2006/math">
+                      <m:oMath>
                         <m:sSub>
                           <m:sSubPr>
                             <m:ctrlPr>
@@ -8580,7 +8511,7 @@
               </p:txBody>
             </p:sp>
           </mc:Choice>
-          <mc:Fallback>
+          <mc:Fallback xmlns="">
             <p:sp>
               <p:nvSpPr>
                 <p:cNvPr id="46" name="TextBox 45">
@@ -8786,8 +8717,8 @@
             </a:fontRef>
           </p:style>
         </p:cxnSp>
-        <mc:AlternateContent xmlns:mc="http://schemas.openxmlformats.org/markup-compatibility/2006">
-          <mc:Choice xmlns:a14="http://schemas.microsoft.com/office/drawing/2010/main" Requires="a14">
+        <mc:AlternateContent xmlns:mc="http://schemas.openxmlformats.org/markup-compatibility/2006" xmlns:a14="http://schemas.microsoft.com/office/drawing/2010/main">
+          <mc:Choice Requires="a14">
             <p:sp>
               <p:nvSpPr>
                 <p:cNvPr id="54" name="TextBox 53">
@@ -8819,10 +8750,7 @@
                   <a:pPr/>
                   <a14:m>
                     <m:oMathPara xmlns:m="http://schemas.openxmlformats.org/officeDocument/2006/math">
-                      <m:oMathParaPr>
-                        <m:jc m:val="centerGroup"/>
-                      </m:oMathParaPr>
-                      <m:oMath xmlns:m="http://schemas.openxmlformats.org/officeDocument/2006/math">
+                      <m:oMath>
                         <m:r>
                           <a:rPr lang="en-US" sz="1400" i="1">
                             <a:latin typeface="Cambria Math" panose="02040503050406030204" pitchFamily="18" charset="0"/>
@@ -8868,7 +8796,7 @@
               </p:txBody>
             </p:sp>
           </mc:Choice>
-          <mc:Fallback>
+          <mc:Fallback xmlns="">
             <p:sp>
               <p:nvSpPr>
                 <p:cNvPr id="54" name="TextBox 53">
@@ -8913,8 +8841,8 @@
             </p:sp>
           </mc:Fallback>
         </mc:AlternateContent>
-        <mc:AlternateContent xmlns:mc="http://schemas.openxmlformats.org/markup-compatibility/2006">
-          <mc:Choice xmlns:a14="http://schemas.microsoft.com/office/drawing/2010/main" Requires="a14">
+        <mc:AlternateContent xmlns:mc="http://schemas.openxmlformats.org/markup-compatibility/2006" xmlns:a14="http://schemas.microsoft.com/office/drawing/2010/main">
+          <mc:Choice Requires="a14">
             <p:sp>
               <p:nvSpPr>
                 <p:cNvPr id="55" name="TextBox 54">
@@ -8946,10 +8874,7 @@
                   <a:pPr/>
                   <a14:m>
                     <m:oMathPara xmlns:m="http://schemas.openxmlformats.org/officeDocument/2006/math">
-                      <m:oMathParaPr>
-                        <m:jc m:val="centerGroup"/>
-                      </m:oMathParaPr>
-                      <m:oMath xmlns:m="http://schemas.openxmlformats.org/officeDocument/2006/math">
+                      <m:oMath>
                         <m:r>
                           <a:rPr lang="en-US" sz="1400" i="1">
                             <a:latin typeface="Cambria Math" panose="02040503050406030204" pitchFamily="18" charset="0"/>
@@ -8995,7 +8920,7 @@
               </p:txBody>
             </p:sp>
           </mc:Choice>
-          <mc:Fallback>
+          <mc:Fallback xmlns="">
             <p:sp>
               <p:nvSpPr>
                 <p:cNvPr id="55" name="TextBox 54">
@@ -9040,8 +8965,8 @@
             </p:sp>
           </mc:Fallback>
         </mc:AlternateContent>
-        <mc:AlternateContent xmlns:mc="http://schemas.openxmlformats.org/markup-compatibility/2006">
-          <mc:Choice xmlns:a14="http://schemas.microsoft.com/office/drawing/2010/main" Requires="a14">
+        <mc:AlternateContent xmlns:mc="http://schemas.openxmlformats.org/markup-compatibility/2006" xmlns:a14="http://schemas.microsoft.com/office/drawing/2010/main">
+          <mc:Choice Requires="a14">
             <p:sp>
               <p:nvSpPr>
                 <p:cNvPr id="56" name="TextBox 55">
@@ -9073,10 +8998,7 @@
                   <a:pPr/>
                   <a14:m>
                     <m:oMathPara xmlns:m="http://schemas.openxmlformats.org/officeDocument/2006/math">
-                      <m:oMathParaPr>
-                        <m:jc m:val="centerGroup"/>
-                      </m:oMathParaPr>
-                      <m:oMath xmlns:m="http://schemas.openxmlformats.org/officeDocument/2006/math">
+                      <m:oMath>
                         <m:r>
                           <a:rPr lang="en-US" sz="1400" i="1">
                             <a:latin typeface="Cambria Math" panose="02040503050406030204" pitchFamily="18" charset="0"/>
@@ -9122,7 +9044,7 @@
               </p:txBody>
             </p:sp>
           </mc:Choice>
-          <mc:Fallback>
+          <mc:Fallback xmlns="">
             <p:sp>
               <p:nvSpPr>
                 <p:cNvPr id="56" name="TextBox 55">
@@ -9167,8 +9089,8 @@
             </p:sp>
           </mc:Fallback>
         </mc:AlternateContent>
-        <mc:AlternateContent xmlns:mc="http://schemas.openxmlformats.org/markup-compatibility/2006">
-          <mc:Choice xmlns:a14="http://schemas.microsoft.com/office/drawing/2010/main" Requires="a14">
+        <mc:AlternateContent xmlns:mc="http://schemas.openxmlformats.org/markup-compatibility/2006" xmlns:a14="http://schemas.microsoft.com/office/drawing/2010/main">
+          <mc:Choice Requires="a14">
             <p:sp>
               <p:nvSpPr>
                 <p:cNvPr id="57" name="TextBox 56">
@@ -9200,10 +9122,7 @@
                   <a:pPr/>
                   <a14:m>
                     <m:oMathPara xmlns:m="http://schemas.openxmlformats.org/officeDocument/2006/math">
-                      <m:oMathParaPr>
-                        <m:jc m:val="centerGroup"/>
-                      </m:oMathParaPr>
-                      <m:oMath xmlns:m="http://schemas.openxmlformats.org/officeDocument/2006/math">
+                      <m:oMath>
                         <m:r>
                           <a:rPr lang="en-US" sz="1400" i="1">
                             <a:latin typeface="Cambria Math" panose="02040503050406030204" pitchFamily="18" charset="0"/>
@@ -9249,7 +9168,7 @@
               </p:txBody>
             </p:sp>
           </mc:Choice>
-          <mc:Fallback>
+          <mc:Fallback xmlns="">
             <p:sp>
               <p:nvSpPr>
                 <p:cNvPr id="57" name="TextBox 56">
@@ -9294,8 +9213,8 @@
             </p:sp>
           </mc:Fallback>
         </mc:AlternateContent>
-        <mc:AlternateContent xmlns:mc="http://schemas.openxmlformats.org/markup-compatibility/2006">
-          <mc:Choice xmlns:a14="http://schemas.microsoft.com/office/drawing/2010/main" Requires="a14">
+        <mc:AlternateContent xmlns:mc="http://schemas.openxmlformats.org/markup-compatibility/2006" xmlns:a14="http://schemas.microsoft.com/office/drawing/2010/main">
+          <mc:Choice Requires="a14">
             <p:sp>
               <p:nvSpPr>
                 <p:cNvPr id="58" name="TextBox 57">
@@ -9327,10 +9246,7 @@
                   <a:pPr/>
                   <a14:m>
                     <m:oMathPara xmlns:m="http://schemas.openxmlformats.org/officeDocument/2006/math">
-                      <m:oMathParaPr>
-                        <m:jc m:val="centerGroup"/>
-                      </m:oMathParaPr>
-                      <m:oMath xmlns:m="http://schemas.openxmlformats.org/officeDocument/2006/math">
+                      <m:oMath>
                         <m:r>
                           <a:rPr lang="en-US" sz="1400" i="1">
                             <a:latin typeface="Cambria Math" panose="02040503050406030204" pitchFamily="18" charset="0"/>
@@ -9376,7 +9292,7 @@
               </p:txBody>
             </p:sp>
           </mc:Choice>
-          <mc:Fallback>
+          <mc:Fallback xmlns="">
             <p:sp>
               <p:nvSpPr>
                 <p:cNvPr id="58" name="TextBox 57">
@@ -9421,8 +9337,8 @@
             </p:sp>
           </mc:Fallback>
         </mc:AlternateContent>
-        <mc:AlternateContent xmlns:mc="http://schemas.openxmlformats.org/markup-compatibility/2006">
-          <mc:Choice xmlns:a14="http://schemas.microsoft.com/office/drawing/2010/main" Requires="a14">
+        <mc:AlternateContent xmlns:mc="http://schemas.openxmlformats.org/markup-compatibility/2006" xmlns:a14="http://schemas.microsoft.com/office/drawing/2010/main">
+          <mc:Choice Requires="a14">
             <p:sp>
               <p:nvSpPr>
                 <p:cNvPr id="59" name="TextBox 58">
@@ -9454,10 +9370,7 @@
                   <a:pPr/>
                   <a14:m>
                     <m:oMathPara xmlns:m="http://schemas.openxmlformats.org/officeDocument/2006/math">
-                      <m:oMathParaPr>
-                        <m:jc m:val="centerGroup"/>
-                      </m:oMathParaPr>
-                      <m:oMath xmlns:m="http://schemas.openxmlformats.org/officeDocument/2006/math">
+                      <m:oMath>
                         <m:sSub>
                           <m:sSubPr>
                             <m:ctrlPr>
@@ -9497,7 +9410,7 @@
               </p:txBody>
             </p:sp>
           </mc:Choice>
-          <mc:Fallback>
+          <mc:Fallback xmlns="">
             <p:sp>
               <p:nvSpPr>
                 <p:cNvPr id="59" name="TextBox 58">
@@ -9542,8 +9455,8 @@
             </p:sp>
           </mc:Fallback>
         </mc:AlternateContent>
-        <mc:AlternateContent xmlns:mc="http://schemas.openxmlformats.org/markup-compatibility/2006">
-          <mc:Choice xmlns:a14="http://schemas.microsoft.com/office/drawing/2010/main" Requires="a14">
+        <mc:AlternateContent xmlns:mc="http://schemas.openxmlformats.org/markup-compatibility/2006" xmlns:a14="http://schemas.microsoft.com/office/drawing/2010/main">
+          <mc:Choice Requires="a14">
             <p:sp>
               <p:nvSpPr>
                 <p:cNvPr id="60" name="TextBox 59">
@@ -9575,10 +9488,7 @@
                   <a:pPr/>
                   <a14:m>
                     <m:oMathPara xmlns:m="http://schemas.openxmlformats.org/officeDocument/2006/math">
-                      <m:oMathParaPr>
-                        <m:jc m:val="centerGroup"/>
-                      </m:oMathParaPr>
-                      <m:oMath xmlns:m="http://schemas.openxmlformats.org/officeDocument/2006/math">
+                      <m:oMath>
                         <m:sSub>
                           <m:sSubPr>
                             <m:ctrlPr>
@@ -9618,7 +9528,7 @@
               </p:txBody>
             </p:sp>
           </mc:Choice>
-          <mc:Fallback>
+          <mc:Fallback xmlns="">
             <p:sp>
               <p:nvSpPr>
                 <p:cNvPr id="60" name="TextBox 59">
@@ -9663,8 +9573,8 @@
             </p:sp>
           </mc:Fallback>
         </mc:AlternateContent>
-        <mc:AlternateContent xmlns:mc="http://schemas.openxmlformats.org/markup-compatibility/2006">
-          <mc:Choice xmlns:a14="http://schemas.microsoft.com/office/drawing/2010/main" Requires="a14">
+        <mc:AlternateContent xmlns:mc="http://schemas.openxmlformats.org/markup-compatibility/2006" xmlns:a14="http://schemas.microsoft.com/office/drawing/2010/main">
+          <mc:Choice Requires="a14">
             <p:sp>
               <p:nvSpPr>
                 <p:cNvPr id="61" name="TextBox 60">
@@ -9696,10 +9606,7 @@
                   <a:pPr/>
                   <a14:m>
                     <m:oMathPara xmlns:m="http://schemas.openxmlformats.org/officeDocument/2006/math">
-                      <m:oMathParaPr>
-                        <m:jc m:val="centerGroup"/>
-                      </m:oMathParaPr>
-                      <m:oMath xmlns:m="http://schemas.openxmlformats.org/officeDocument/2006/math">
+                      <m:oMath>
                         <m:r>
                           <a:rPr lang="en-US" sz="1400" i="1">
                             <a:latin typeface="Cambria Math" panose="02040503050406030204" pitchFamily="18" charset="0"/>
@@ -9745,7 +9652,7 @@
               </p:txBody>
             </p:sp>
           </mc:Choice>
-          <mc:Fallback>
+          <mc:Fallback xmlns="">
             <p:sp>
               <p:nvSpPr>
                 <p:cNvPr id="61" name="TextBox 60">
@@ -9790,8 +9697,8 @@
             </p:sp>
           </mc:Fallback>
         </mc:AlternateContent>
-        <mc:AlternateContent xmlns:mc="http://schemas.openxmlformats.org/markup-compatibility/2006">
-          <mc:Choice xmlns:a14="http://schemas.microsoft.com/office/drawing/2010/main" Requires="a14">
+        <mc:AlternateContent xmlns:mc="http://schemas.openxmlformats.org/markup-compatibility/2006" xmlns:a14="http://schemas.microsoft.com/office/drawing/2010/main">
+          <mc:Choice Requires="a14">
             <p:sp>
               <p:nvSpPr>
                 <p:cNvPr id="62" name="TextBox 61">
@@ -9823,10 +9730,7 @@
                   <a:pPr/>
                   <a14:m>
                     <m:oMathPara xmlns:m="http://schemas.openxmlformats.org/officeDocument/2006/math">
-                      <m:oMathParaPr>
-                        <m:jc m:val="centerGroup"/>
-                      </m:oMathParaPr>
-                      <m:oMath xmlns:m="http://schemas.openxmlformats.org/officeDocument/2006/math">
+                      <m:oMath>
                         <m:r>
                           <a:rPr lang="en-US" sz="1400" i="1">
                             <a:latin typeface="Cambria Math" panose="02040503050406030204" pitchFamily="18" charset="0"/>
@@ -9872,7 +9776,7 @@
               </p:txBody>
             </p:sp>
           </mc:Choice>
-          <mc:Fallback>
+          <mc:Fallback xmlns="">
             <p:sp>
               <p:nvSpPr>
                 <p:cNvPr id="62" name="TextBox 61">
@@ -9917,8 +9821,8 @@
             </p:sp>
           </mc:Fallback>
         </mc:AlternateContent>
-        <mc:AlternateContent xmlns:mc="http://schemas.openxmlformats.org/markup-compatibility/2006">
-          <mc:Choice xmlns:a14="http://schemas.microsoft.com/office/drawing/2010/main" Requires="a14">
+        <mc:AlternateContent xmlns:mc="http://schemas.openxmlformats.org/markup-compatibility/2006" xmlns:a14="http://schemas.microsoft.com/office/drawing/2010/main">
+          <mc:Choice Requires="a14">
             <p:sp>
               <p:nvSpPr>
                 <p:cNvPr id="63" name="TextBox 62">
@@ -9950,10 +9854,7 @@
                   <a:pPr/>
                   <a14:m>
                     <m:oMathPara xmlns:m="http://schemas.openxmlformats.org/officeDocument/2006/math">
-                      <m:oMathParaPr>
-                        <m:jc m:val="centerGroup"/>
-                      </m:oMathParaPr>
-                      <m:oMath xmlns:m="http://schemas.openxmlformats.org/officeDocument/2006/math">
+                      <m:oMath>
                         <m:r>
                           <a:rPr lang="en-US" sz="1400" i="1">
                             <a:latin typeface="Cambria Math" panose="02040503050406030204" pitchFamily="18" charset="0"/>
@@ -9999,7 +9900,7 @@
               </p:txBody>
             </p:sp>
           </mc:Choice>
-          <mc:Fallback>
+          <mc:Fallback xmlns="">
             <p:sp>
               <p:nvSpPr>
                 <p:cNvPr id="63" name="TextBox 62">
@@ -10044,8 +9945,8 @@
             </p:sp>
           </mc:Fallback>
         </mc:AlternateContent>
-        <mc:AlternateContent xmlns:mc="http://schemas.openxmlformats.org/markup-compatibility/2006">
-          <mc:Choice xmlns:a14="http://schemas.microsoft.com/office/drawing/2010/main" Requires="a14">
+        <mc:AlternateContent xmlns:mc="http://schemas.openxmlformats.org/markup-compatibility/2006" xmlns:a14="http://schemas.microsoft.com/office/drawing/2010/main">
+          <mc:Choice Requires="a14">
             <p:sp>
               <p:nvSpPr>
                 <p:cNvPr id="64" name="TextBox 63">
@@ -10077,10 +9978,7 @@
                   <a:pPr/>
                   <a14:m>
                     <m:oMathPara xmlns:m="http://schemas.openxmlformats.org/officeDocument/2006/math">
-                      <m:oMathParaPr>
-                        <m:jc m:val="centerGroup"/>
-                      </m:oMathParaPr>
-                      <m:oMath xmlns:m="http://schemas.openxmlformats.org/officeDocument/2006/math">
+                      <m:oMath>
                         <m:r>
                           <a:rPr lang="en-US" sz="1400" i="1">
                             <a:latin typeface="Cambria Math" panose="02040503050406030204" pitchFamily="18" charset="0"/>
@@ -10126,7 +10024,7 @@
               </p:txBody>
             </p:sp>
           </mc:Choice>
-          <mc:Fallback>
+          <mc:Fallback xmlns="">
             <p:sp>
               <p:nvSpPr>
                 <p:cNvPr id="64" name="TextBox 63">
@@ -10248,8 +10146,8 @@
               <a:chExt cx="772326" cy="1085155"/>
             </a:xfrm>
           </p:grpSpPr>
-          <mc:AlternateContent xmlns:mc="http://schemas.openxmlformats.org/markup-compatibility/2006">
-            <mc:Choice xmlns:a14="http://schemas.microsoft.com/office/drawing/2010/main" Requires="a14">
+          <mc:AlternateContent xmlns:mc="http://schemas.openxmlformats.org/markup-compatibility/2006" xmlns:a14="http://schemas.microsoft.com/office/drawing/2010/main">
+            <mc:Choice Requires="a14">
               <p:sp>
                 <p:nvSpPr>
                   <p:cNvPr id="2" name="TextBox 1">
@@ -10281,14 +10179,11 @@
                     <a:pPr/>
                     <a14:m>
                       <m:oMathPara xmlns:m="http://schemas.openxmlformats.org/officeDocument/2006/math">
-                        <m:oMathParaPr>
-                          <m:jc m:val="centerGroup"/>
-                        </m:oMathParaPr>
-                        <m:oMath xmlns:m="http://schemas.openxmlformats.org/officeDocument/2006/math">
+                        <m:oMath>
                           <m:sSub>
                             <m:sSubPr>
                               <m:ctrlPr>
-                                <a:rPr lang="en-US" sz="3200" i="1" smtClean="0">
+                                <a:rPr lang="en-US" sz="3200" i="1">
                                   <a:latin typeface="Cambria Math" panose="02040503050406030204" pitchFamily="18" charset="0"/>
                                 </a:rPr>
                               </m:ctrlPr>
@@ -10318,7 +10213,7 @@
                 </p:txBody>
               </p:sp>
             </mc:Choice>
-            <mc:Fallback>
+            <mc:Fallback xmlns="">
               <p:sp>
                 <p:nvSpPr>
                   <p:cNvPr id="2" name="TextBox 1">
@@ -10409,8 +10304,8 @@
               </a:p>
             </p:txBody>
           </p:sp>
-          <mc:AlternateContent xmlns:mc="http://schemas.openxmlformats.org/markup-compatibility/2006">
-            <mc:Choice xmlns:a14="http://schemas.microsoft.com/office/drawing/2010/main" Requires="a14">
+          <mc:AlternateContent xmlns:mc="http://schemas.openxmlformats.org/markup-compatibility/2006" xmlns:a14="http://schemas.microsoft.com/office/drawing/2010/main">
+            <mc:Choice Requires="a14">
               <p:sp>
                 <p:nvSpPr>
                   <p:cNvPr id="43" name="TextBox 42">
@@ -10442,10 +10337,7 @@
                     <a:pPr/>
                     <a14:m>
                       <m:oMathPara xmlns:m="http://schemas.openxmlformats.org/officeDocument/2006/math">
-                        <m:oMathParaPr>
-                          <m:jc m:val="centerGroup"/>
-                        </m:oMathParaPr>
-                        <m:oMath xmlns:m="http://schemas.openxmlformats.org/officeDocument/2006/math">
+                        <m:oMath>
                           <m:r>
                             <a:rPr lang="en-US" sz="1400" i="1" smtClean="0">
                               <a:latin typeface="Cambria Math" panose="02040503050406030204" pitchFamily="18" charset="0"/>
@@ -10491,7 +10383,7 @@
                 </p:txBody>
               </p:sp>
             </mc:Choice>
-            <mc:Fallback>
+            <mc:Fallback xmlns="">
               <p:sp>
                 <p:nvSpPr>
                   <p:cNvPr id="43" name="TextBox 42">
@@ -10800,8 +10692,8 @@
               </p:txBody>
             </p:sp>
           </p:grpSp>
-          <mc:AlternateContent xmlns:mc="http://schemas.openxmlformats.org/markup-compatibility/2006">
-            <mc:Choice xmlns:a14="http://schemas.microsoft.com/office/drawing/2010/main" Requires="a14">
+          <mc:AlternateContent xmlns:mc="http://schemas.openxmlformats.org/markup-compatibility/2006" xmlns:a14="http://schemas.microsoft.com/office/drawing/2010/main">
+            <mc:Choice Requires="a14">
               <p:sp>
                 <p:nvSpPr>
                   <p:cNvPr id="40" name="TextBox 39">
@@ -10833,14 +10725,11 @@
                     <a:pPr/>
                     <a14:m>
                       <m:oMathPara xmlns:m="http://schemas.openxmlformats.org/officeDocument/2006/math">
-                        <m:oMathParaPr>
-                          <m:jc m:val="centerGroup"/>
-                        </m:oMathParaPr>
-                        <m:oMath xmlns:m="http://schemas.openxmlformats.org/officeDocument/2006/math">
+                        <m:oMath>
                           <m:sSub>
                             <m:sSubPr>
                               <m:ctrlPr>
-                                <a:rPr lang="en-US" sz="3200" i="1" smtClean="0">
+                                <a:rPr lang="en-US" sz="3200" i="1">
                                   <a:latin typeface="Cambria Math" panose="02040503050406030204" pitchFamily="18" charset="0"/>
                                 </a:rPr>
                               </m:ctrlPr>
@@ -10870,7 +10759,7 @@
                 </p:txBody>
               </p:sp>
             </mc:Choice>
-            <mc:Fallback>
+            <mc:Fallback xmlns="">
               <p:sp>
                 <p:nvSpPr>
                   <p:cNvPr id="40" name="TextBox 39">
@@ -10915,8 +10804,8 @@
               </p:sp>
             </mc:Fallback>
           </mc:AlternateContent>
-          <mc:AlternateContent xmlns:mc="http://schemas.openxmlformats.org/markup-compatibility/2006">
-            <mc:Choice xmlns:a14="http://schemas.microsoft.com/office/drawing/2010/main" Requires="a14">
+          <mc:AlternateContent xmlns:mc="http://schemas.openxmlformats.org/markup-compatibility/2006" xmlns:a14="http://schemas.microsoft.com/office/drawing/2010/main">
+            <mc:Choice Requires="a14">
               <p:sp>
                 <p:nvSpPr>
                   <p:cNvPr id="46" name="TextBox 45">
@@ -10948,14 +10837,11 @@
                     <a:pPr/>
                     <a14:m>
                       <m:oMathPara xmlns:m="http://schemas.openxmlformats.org/officeDocument/2006/math">
-                        <m:oMathParaPr>
-                          <m:jc m:val="centerGroup"/>
-                        </m:oMathParaPr>
-                        <m:oMath xmlns:m="http://schemas.openxmlformats.org/officeDocument/2006/math">
+                        <m:oMath>
                           <m:sSub>
                             <m:sSubPr>
                               <m:ctrlPr>
-                                <a:rPr lang="en-US" i="1" smtClean="0">
+                                <a:rPr lang="en-US" i="1">
                                   <a:latin typeface="Cambria Math" panose="02040503050406030204" pitchFamily="18" charset="0"/>
                                 </a:rPr>
                               </m:ctrlPr>
@@ -10991,7 +10877,7 @@
                 </p:txBody>
               </p:sp>
             </mc:Choice>
-            <mc:Fallback>
+            <mc:Fallback xmlns="">
               <p:sp>
                 <p:nvSpPr>
                   <p:cNvPr id="46" name="TextBox 45">
@@ -11036,8 +10922,8 @@
               </p:sp>
             </mc:Fallback>
           </mc:AlternateContent>
-          <mc:AlternateContent xmlns:mc="http://schemas.openxmlformats.org/markup-compatibility/2006">
-            <mc:Choice xmlns:a14="http://schemas.microsoft.com/office/drawing/2010/main" Requires="a14">
+          <mc:AlternateContent xmlns:mc="http://schemas.openxmlformats.org/markup-compatibility/2006" xmlns:a14="http://schemas.microsoft.com/office/drawing/2010/main">
+            <mc:Choice Requires="a14">
               <p:sp>
                 <p:nvSpPr>
                   <p:cNvPr id="54" name="TextBox 53">
@@ -11069,10 +10955,7 @@
                     <a:pPr/>
                     <a14:m>
                       <m:oMathPara xmlns:m="http://schemas.openxmlformats.org/officeDocument/2006/math">
-                        <m:oMathParaPr>
-                          <m:jc m:val="centerGroup"/>
-                        </m:oMathParaPr>
-                        <m:oMath xmlns:m="http://schemas.openxmlformats.org/officeDocument/2006/math">
+                        <m:oMath>
                           <m:r>
                             <a:rPr lang="en-US" sz="1400" i="1" smtClean="0">
                               <a:latin typeface="Cambria Math" panose="02040503050406030204" pitchFamily="18" charset="0"/>
@@ -11118,7 +11001,7 @@
                 </p:txBody>
               </p:sp>
             </mc:Choice>
-            <mc:Fallback>
+            <mc:Fallback xmlns="">
               <p:sp>
                 <p:nvSpPr>
                   <p:cNvPr id="54" name="TextBox 53">
@@ -11163,8 +11046,8 @@
               </p:sp>
             </mc:Fallback>
           </mc:AlternateContent>
-          <mc:AlternateContent xmlns:mc="http://schemas.openxmlformats.org/markup-compatibility/2006">
-            <mc:Choice xmlns:a14="http://schemas.microsoft.com/office/drawing/2010/main" Requires="a14">
+          <mc:AlternateContent xmlns:mc="http://schemas.openxmlformats.org/markup-compatibility/2006" xmlns:a14="http://schemas.microsoft.com/office/drawing/2010/main">
+            <mc:Choice Requires="a14">
               <p:sp>
                 <p:nvSpPr>
                   <p:cNvPr id="55" name="TextBox 54">
@@ -11196,10 +11079,7 @@
                     <a:pPr/>
                     <a14:m>
                       <m:oMathPara xmlns:m="http://schemas.openxmlformats.org/officeDocument/2006/math">
-                        <m:oMathParaPr>
-                          <m:jc m:val="centerGroup"/>
-                        </m:oMathParaPr>
-                        <m:oMath xmlns:m="http://schemas.openxmlformats.org/officeDocument/2006/math">
+                        <m:oMath>
                           <m:r>
                             <a:rPr lang="en-US" sz="1400" i="1" smtClean="0">
                               <a:latin typeface="Cambria Math" panose="02040503050406030204" pitchFamily="18" charset="0"/>
@@ -11245,7 +11125,7 @@
                 </p:txBody>
               </p:sp>
             </mc:Choice>
-            <mc:Fallback>
+            <mc:Fallback xmlns="">
               <p:sp>
                 <p:nvSpPr>
                   <p:cNvPr id="55" name="TextBox 54">
@@ -11713,8 +11593,8 @@
               </p:txBody>
             </p:sp>
           </p:grpSp>
-          <mc:AlternateContent xmlns:mc="http://schemas.openxmlformats.org/markup-compatibility/2006">
-            <mc:Choice xmlns:a14="http://schemas.microsoft.com/office/drawing/2010/main" Requires="a14">
+          <mc:AlternateContent xmlns:mc="http://schemas.openxmlformats.org/markup-compatibility/2006" xmlns:a14="http://schemas.microsoft.com/office/drawing/2010/main">
+            <mc:Choice Requires="a14">
               <p:sp>
                 <p:nvSpPr>
                   <p:cNvPr id="41" name="TextBox 40">
@@ -11746,14 +11626,11 @@
                     <a:pPr/>
                     <a14:m>
                       <m:oMathPara xmlns:m="http://schemas.openxmlformats.org/officeDocument/2006/math">
-                        <m:oMathParaPr>
-                          <m:jc m:val="centerGroup"/>
-                        </m:oMathParaPr>
-                        <m:oMath xmlns:m="http://schemas.openxmlformats.org/officeDocument/2006/math">
+                        <m:oMath>
                           <m:sSub>
                             <m:sSubPr>
                               <m:ctrlPr>
-                                <a:rPr lang="en-US" sz="3200" i="1" smtClean="0">
+                                <a:rPr lang="en-US" sz="3200" i="1">
                                   <a:latin typeface="Cambria Math" panose="02040503050406030204" pitchFamily="18" charset="0"/>
                                 </a:rPr>
                               </m:ctrlPr>
@@ -11783,7 +11660,7 @@
                 </p:txBody>
               </p:sp>
             </mc:Choice>
-            <mc:Fallback>
+            <mc:Fallback xmlns="">
               <p:sp>
                 <p:nvSpPr>
                   <p:cNvPr id="41" name="TextBox 40">
@@ -11828,8 +11705,8 @@
               </p:sp>
             </mc:Fallback>
           </mc:AlternateContent>
-          <mc:AlternateContent xmlns:mc="http://schemas.openxmlformats.org/markup-compatibility/2006">
-            <mc:Choice xmlns:a14="http://schemas.microsoft.com/office/drawing/2010/main" Requires="a14">
+          <mc:AlternateContent xmlns:mc="http://schemas.openxmlformats.org/markup-compatibility/2006" xmlns:a14="http://schemas.microsoft.com/office/drawing/2010/main">
+            <mc:Choice Requires="a14">
               <p:sp>
                 <p:nvSpPr>
                   <p:cNvPr id="56" name="TextBox 55">
@@ -11861,10 +11738,7 @@
                     <a:pPr/>
                     <a14:m>
                       <m:oMathPara xmlns:m="http://schemas.openxmlformats.org/officeDocument/2006/math">
-                        <m:oMathParaPr>
-                          <m:jc m:val="centerGroup"/>
-                        </m:oMathParaPr>
-                        <m:oMath xmlns:m="http://schemas.openxmlformats.org/officeDocument/2006/math">
+                        <m:oMath>
                           <m:r>
                             <a:rPr lang="en-US" sz="1400" i="1" smtClean="0">
                               <a:latin typeface="Cambria Math" panose="02040503050406030204" pitchFamily="18" charset="0"/>
@@ -11910,7 +11784,7 @@
                 </p:txBody>
               </p:sp>
             </mc:Choice>
-            <mc:Fallback>
+            <mc:Fallback xmlns="">
               <p:sp>
                 <p:nvSpPr>
                   <p:cNvPr id="56" name="TextBox 55">
@@ -11955,8 +11829,8 @@
               </p:sp>
             </mc:Fallback>
           </mc:AlternateContent>
-          <mc:AlternateContent xmlns:mc="http://schemas.openxmlformats.org/markup-compatibility/2006">
-            <mc:Choice xmlns:a14="http://schemas.microsoft.com/office/drawing/2010/main" Requires="a14">
+          <mc:AlternateContent xmlns:mc="http://schemas.openxmlformats.org/markup-compatibility/2006" xmlns:a14="http://schemas.microsoft.com/office/drawing/2010/main">
+            <mc:Choice Requires="a14">
               <p:sp>
                 <p:nvSpPr>
                   <p:cNvPr id="57" name="TextBox 56">
@@ -11988,10 +11862,7 @@
                     <a:pPr/>
                     <a14:m>
                       <m:oMathPara xmlns:m="http://schemas.openxmlformats.org/officeDocument/2006/math">
-                        <m:oMathParaPr>
-                          <m:jc m:val="centerGroup"/>
-                        </m:oMathParaPr>
-                        <m:oMath xmlns:m="http://schemas.openxmlformats.org/officeDocument/2006/math">
+                        <m:oMath>
                           <m:r>
                             <a:rPr lang="en-US" sz="1400" i="1" smtClean="0">
                               <a:latin typeface="Cambria Math" panose="02040503050406030204" pitchFamily="18" charset="0"/>
@@ -12037,7 +11908,7 @@
                 </p:txBody>
               </p:sp>
             </mc:Choice>
-            <mc:Fallback>
+            <mc:Fallback xmlns="">
               <p:sp>
                 <p:nvSpPr>
                   <p:cNvPr id="57" name="TextBox 56">
@@ -12082,8 +11953,8 @@
               </p:sp>
             </mc:Fallback>
           </mc:AlternateContent>
-          <mc:AlternateContent xmlns:mc="http://schemas.openxmlformats.org/markup-compatibility/2006">
-            <mc:Choice xmlns:a14="http://schemas.microsoft.com/office/drawing/2010/main" Requires="a14">
+          <mc:AlternateContent xmlns:mc="http://schemas.openxmlformats.org/markup-compatibility/2006" xmlns:a14="http://schemas.microsoft.com/office/drawing/2010/main">
+            <mc:Choice Requires="a14">
               <p:sp>
                 <p:nvSpPr>
                   <p:cNvPr id="58" name="TextBox 57">
@@ -12115,10 +11986,7 @@
                     <a:pPr/>
                     <a14:m>
                       <m:oMathPara xmlns:m="http://schemas.openxmlformats.org/officeDocument/2006/math">
-                        <m:oMathParaPr>
-                          <m:jc m:val="centerGroup"/>
-                        </m:oMathParaPr>
-                        <m:oMath xmlns:m="http://schemas.openxmlformats.org/officeDocument/2006/math">
+                        <m:oMath>
                           <m:r>
                             <a:rPr lang="en-US" sz="1400" i="1" smtClean="0">
                               <a:latin typeface="Cambria Math" panose="02040503050406030204" pitchFamily="18" charset="0"/>
@@ -12164,7 +12032,7 @@
                 </p:txBody>
               </p:sp>
             </mc:Choice>
-            <mc:Fallback>
+            <mc:Fallback xmlns="">
               <p:sp>
                 <p:nvSpPr>
                   <p:cNvPr id="58" name="TextBox 57">
@@ -12209,8 +12077,8 @@
               </p:sp>
             </mc:Fallback>
           </mc:AlternateContent>
-          <mc:AlternateContent xmlns:mc="http://schemas.openxmlformats.org/markup-compatibility/2006">
-            <mc:Choice xmlns:a14="http://schemas.microsoft.com/office/drawing/2010/main" Requires="a14">
+          <mc:AlternateContent xmlns:mc="http://schemas.openxmlformats.org/markup-compatibility/2006" xmlns:a14="http://schemas.microsoft.com/office/drawing/2010/main">
+            <mc:Choice Requires="a14">
               <p:sp>
                 <p:nvSpPr>
                   <p:cNvPr id="59" name="TextBox 58">
@@ -12242,14 +12110,11 @@
                     <a:pPr/>
                     <a14:m>
                       <m:oMathPara xmlns:m="http://schemas.openxmlformats.org/officeDocument/2006/math">
-                        <m:oMathParaPr>
-                          <m:jc m:val="centerGroup"/>
-                        </m:oMathParaPr>
-                        <m:oMath xmlns:m="http://schemas.openxmlformats.org/officeDocument/2006/math">
+                        <m:oMath>
                           <m:sSub>
                             <m:sSubPr>
                               <m:ctrlPr>
-                                <a:rPr lang="en-US" i="1" smtClean="0">
+                                <a:rPr lang="en-US" i="1">
                                   <a:latin typeface="Cambria Math" panose="02040503050406030204" pitchFamily="18" charset="0"/>
                                 </a:rPr>
                               </m:ctrlPr>
@@ -12285,7 +12150,7 @@
                 </p:txBody>
               </p:sp>
             </mc:Choice>
-            <mc:Fallback>
+            <mc:Fallback xmlns="">
               <p:sp>
                 <p:nvSpPr>
                   <p:cNvPr id="59" name="TextBox 58">
@@ -12940,8 +12805,8 @@
               </p:sp>
             </p:grpSp>
           </p:grpSp>
-          <mc:AlternateContent xmlns:mc="http://schemas.openxmlformats.org/markup-compatibility/2006">
-            <mc:Choice xmlns:a14="http://schemas.microsoft.com/office/drawing/2010/main" Requires="a14">
+          <mc:AlternateContent xmlns:mc="http://schemas.openxmlformats.org/markup-compatibility/2006" xmlns:a14="http://schemas.microsoft.com/office/drawing/2010/main">
+            <mc:Choice Requires="a14">
               <p:sp>
                 <p:nvSpPr>
                   <p:cNvPr id="42" name="TextBox 41">
@@ -12973,14 +12838,11 @@
                     <a:pPr/>
                     <a14:m>
                       <m:oMathPara xmlns:m="http://schemas.openxmlformats.org/officeDocument/2006/math">
-                        <m:oMathParaPr>
-                          <m:jc m:val="centerGroup"/>
-                        </m:oMathParaPr>
-                        <m:oMath xmlns:m="http://schemas.openxmlformats.org/officeDocument/2006/math">
+                        <m:oMath>
                           <m:sSub>
                             <m:sSubPr>
                               <m:ctrlPr>
-                                <a:rPr lang="en-US" sz="3200" i="1" smtClean="0">
+                                <a:rPr lang="en-US" sz="3200" i="1">
                                   <a:latin typeface="Cambria Math" panose="02040503050406030204" pitchFamily="18" charset="0"/>
                                 </a:rPr>
                               </m:ctrlPr>
@@ -13010,7 +12872,7 @@
                 </p:txBody>
               </p:sp>
             </mc:Choice>
-            <mc:Fallback>
+            <mc:Fallback xmlns="">
               <p:sp>
                 <p:nvSpPr>
                   <p:cNvPr id="42" name="TextBox 41">
@@ -13055,8 +12917,8 @@
               </p:sp>
             </mc:Fallback>
           </mc:AlternateContent>
-          <mc:AlternateContent xmlns:mc="http://schemas.openxmlformats.org/markup-compatibility/2006">
-            <mc:Choice xmlns:a14="http://schemas.microsoft.com/office/drawing/2010/main" Requires="a14">
+          <mc:AlternateContent xmlns:mc="http://schemas.openxmlformats.org/markup-compatibility/2006" xmlns:a14="http://schemas.microsoft.com/office/drawing/2010/main">
+            <mc:Choice Requires="a14">
               <p:sp>
                 <p:nvSpPr>
                   <p:cNvPr id="60" name="TextBox 59">
@@ -13088,14 +12950,11 @@
                     <a:pPr/>
                     <a14:m>
                       <m:oMathPara xmlns:m="http://schemas.openxmlformats.org/officeDocument/2006/math">
-                        <m:oMathParaPr>
-                          <m:jc m:val="centerGroup"/>
-                        </m:oMathParaPr>
-                        <m:oMath xmlns:m="http://schemas.openxmlformats.org/officeDocument/2006/math">
+                        <m:oMath>
                           <m:sSub>
                             <m:sSubPr>
                               <m:ctrlPr>
-                                <a:rPr lang="en-US" i="1" smtClean="0">
+                                <a:rPr lang="en-US" i="1">
                                   <a:latin typeface="Cambria Math" panose="02040503050406030204" pitchFamily="18" charset="0"/>
                                 </a:rPr>
                               </m:ctrlPr>
@@ -13131,7 +12990,7 @@
                 </p:txBody>
               </p:sp>
             </mc:Choice>
-            <mc:Fallback>
+            <mc:Fallback xmlns="">
               <p:sp>
                 <p:nvSpPr>
                   <p:cNvPr id="60" name="TextBox 59">
@@ -13176,8 +13035,8 @@
               </p:sp>
             </mc:Fallback>
           </mc:AlternateContent>
-          <mc:AlternateContent xmlns:mc="http://schemas.openxmlformats.org/markup-compatibility/2006">
-            <mc:Choice xmlns:a14="http://schemas.microsoft.com/office/drawing/2010/main" Requires="a14">
+          <mc:AlternateContent xmlns:mc="http://schemas.openxmlformats.org/markup-compatibility/2006" xmlns:a14="http://schemas.microsoft.com/office/drawing/2010/main">
+            <mc:Choice Requires="a14">
               <p:sp>
                 <p:nvSpPr>
                   <p:cNvPr id="61" name="TextBox 60">
@@ -13209,10 +13068,7 @@
                     <a:pPr/>
                     <a14:m>
                       <m:oMathPara xmlns:m="http://schemas.openxmlformats.org/officeDocument/2006/math">
-                        <m:oMathParaPr>
-                          <m:jc m:val="centerGroup"/>
-                        </m:oMathParaPr>
-                        <m:oMath xmlns:m="http://schemas.openxmlformats.org/officeDocument/2006/math">
+                        <m:oMath>
                           <m:r>
                             <a:rPr lang="en-US" sz="1400" i="1" smtClean="0">
                               <a:latin typeface="Cambria Math" panose="02040503050406030204" pitchFamily="18" charset="0"/>
@@ -13258,7 +13114,7 @@
                 </p:txBody>
               </p:sp>
             </mc:Choice>
-            <mc:Fallback>
+            <mc:Fallback xmlns="">
               <p:sp>
                 <p:nvSpPr>
                   <p:cNvPr id="61" name="TextBox 60">
@@ -13303,8 +13159,8 @@
               </p:sp>
             </mc:Fallback>
           </mc:AlternateContent>
-          <mc:AlternateContent xmlns:mc="http://schemas.openxmlformats.org/markup-compatibility/2006">
-            <mc:Choice xmlns:a14="http://schemas.microsoft.com/office/drawing/2010/main" Requires="a14">
+          <mc:AlternateContent xmlns:mc="http://schemas.openxmlformats.org/markup-compatibility/2006" xmlns:a14="http://schemas.microsoft.com/office/drawing/2010/main">
+            <mc:Choice Requires="a14">
               <p:sp>
                 <p:nvSpPr>
                   <p:cNvPr id="62" name="TextBox 61">
@@ -13336,10 +13192,7 @@
                     <a:pPr/>
                     <a14:m>
                       <m:oMathPara xmlns:m="http://schemas.openxmlformats.org/officeDocument/2006/math">
-                        <m:oMathParaPr>
-                          <m:jc m:val="centerGroup"/>
-                        </m:oMathParaPr>
-                        <m:oMath xmlns:m="http://schemas.openxmlformats.org/officeDocument/2006/math">
+                        <m:oMath>
                           <m:r>
                             <a:rPr lang="en-US" sz="1400" i="1" smtClean="0">
                               <a:latin typeface="Cambria Math" panose="02040503050406030204" pitchFamily="18" charset="0"/>
@@ -13385,7 +13238,7 @@
                 </p:txBody>
               </p:sp>
             </mc:Choice>
-            <mc:Fallback>
+            <mc:Fallback xmlns="">
               <p:sp>
                 <p:nvSpPr>
                   <p:cNvPr id="62" name="TextBox 61">
@@ -13430,8 +13283,8 @@
               </p:sp>
             </mc:Fallback>
           </mc:AlternateContent>
-          <mc:AlternateContent xmlns:mc="http://schemas.openxmlformats.org/markup-compatibility/2006">
-            <mc:Choice xmlns:a14="http://schemas.microsoft.com/office/drawing/2010/main" Requires="a14">
+          <mc:AlternateContent xmlns:mc="http://schemas.openxmlformats.org/markup-compatibility/2006" xmlns:a14="http://schemas.microsoft.com/office/drawing/2010/main">
+            <mc:Choice Requires="a14">
               <p:sp>
                 <p:nvSpPr>
                   <p:cNvPr id="63" name="TextBox 62">
@@ -13463,10 +13316,7 @@
                     <a:pPr/>
                     <a14:m>
                       <m:oMathPara xmlns:m="http://schemas.openxmlformats.org/officeDocument/2006/math">
-                        <m:oMathParaPr>
-                          <m:jc m:val="centerGroup"/>
-                        </m:oMathParaPr>
-                        <m:oMath xmlns:m="http://schemas.openxmlformats.org/officeDocument/2006/math">
+                        <m:oMath>
                           <m:r>
                             <a:rPr lang="en-US" sz="1400" i="1" smtClean="0">
                               <a:latin typeface="Cambria Math" panose="02040503050406030204" pitchFamily="18" charset="0"/>
@@ -13512,7 +13362,7 @@
                 </p:txBody>
               </p:sp>
             </mc:Choice>
-            <mc:Fallback>
+            <mc:Fallback xmlns="">
               <p:sp>
                 <p:nvSpPr>
                   <p:cNvPr id="63" name="TextBox 62">
@@ -13557,8 +13407,8 @@
               </p:sp>
             </mc:Fallback>
           </mc:AlternateContent>
-          <mc:AlternateContent xmlns:mc="http://schemas.openxmlformats.org/markup-compatibility/2006">
-            <mc:Choice xmlns:a14="http://schemas.microsoft.com/office/drawing/2010/main" Requires="a14">
+          <mc:AlternateContent xmlns:mc="http://schemas.openxmlformats.org/markup-compatibility/2006" xmlns:a14="http://schemas.microsoft.com/office/drawing/2010/main">
+            <mc:Choice Requires="a14">
               <p:sp>
                 <p:nvSpPr>
                   <p:cNvPr id="64" name="TextBox 63">
@@ -13590,10 +13440,7 @@
                     <a:pPr/>
                     <a14:m>
                       <m:oMathPara xmlns:m="http://schemas.openxmlformats.org/officeDocument/2006/math">
-                        <m:oMathParaPr>
-                          <m:jc m:val="centerGroup"/>
-                        </m:oMathParaPr>
-                        <m:oMath xmlns:m="http://schemas.openxmlformats.org/officeDocument/2006/math">
+                        <m:oMath>
                           <m:r>
                             <a:rPr lang="en-US" sz="1400" i="1" smtClean="0">
                               <a:latin typeface="Cambria Math" panose="02040503050406030204" pitchFamily="18" charset="0"/>
@@ -13639,7 +13486,7 @@
                 </p:txBody>
               </p:sp>
             </mc:Choice>
-            <mc:Fallback>
+            <mc:Fallback xmlns="">
               <p:sp>
                 <p:nvSpPr>
                   <p:cNvPr id="64" name="TextBox 63">
@@ -13722,8 +13569,8 @@
           <a:chExt cx="0" cy="0"/>
         </a:xfrm>
       </p:grpSpPr>
-      <mc:AlternateContent xmlns:mc="http://schemas.openxmlformats.org/markup-compatibility/2006">
-        <mc:Choice xmlns:a14="http://schemas.microsoft.com/office/drawing/2010/main" Requires="a14">
+      <mc:AlternateContent xmlns:mc="http://schemas.openxmlformats.org/markup-compatibility/2006" xmlns:a14="http://schemas.microsoft.com/office/drawing/2010/main">
+        <mc:Choice Requires="a14">
           <p:sp>
             <p:nvSpPr>
               <p:cNvPr id="2" name="TextBox 1">
@@ -13755,10 +13602,7 @@
                 <a:pPr/>
                 <a14:m>
                   <m:oMathPara xmlns:m="http://schemas.openxmlformats.org/officeDocument/2006/math">
-                    <m:oMathParaPr>
-                      <m:jc m:val="centerGroup"/>
-                    </m:oMathParaPr>
-                    <m:oMath xmlns:m="http://schemas.openxmlformats.org/officeDocument/2006/math">
+                    <m:oMath>
                       <m:sSub>
                         <m:sSubPr>
                           <m:ctrlPr>
@@ -13792,7 +13636,7 @@
             </p:txBody>
           </p:sp>
         </mc:Choice>
-        <mc:Fallback>
+        <mc:Fallback xmlns="">
           <p:sp>
             <p:nvSpPr>
               <p:cNvPr id="2" name="TextBox 1">
@@ -15068,8 +14912,8 @@
           </a:p>
         </p:txBody>
       </p:sp>
-      <mc:AlternateContent xmlns:mc="http://schemas.openxmlformats.org/markup-compatibility/2006">
-        <mc:Choice xmlns:a14="http://schemas.microsoft.com/office/drawing/2010/main" Requires="a14">
+      <mc:AlternateContent xmlns:mc="http://schemas.openxmlformats.org/markup-compatibility/2006" xmlns:a14="http://schemas.microsoft.com/office/drawing/2010/main">
+        <mc:Choice Requires="a14">
           <p:sp>
             <p:nvSpPr>
               <p:cNvPr id="40" name="TextBox 39">
@@ -15101,10 +14945,7 @@
                 <a:pPr/>
                 <a14:m>
                   <m:oMathPara xmlns:m="http://schemas.openxmlformats.org/officeDocument/2006/math">
-                    <m:oMathParaPr>
-                      <m:jc m:val="centerGroup"/>
-                    </m:oMathParaPr>
-                    <m:oMath xmlns:m="http://schemas.openxmlformats.org/officeDocument/2006/math">
+                    <m:oMath>
                       <m:sSub>
                         <m:sSubPr>
                           <m:ctrlPr>
@@ -15138,7 +14979,7 @@
             </p:txBody>
           </p:sp>
         </mc:Choice>
-        <mc:Fallback>
+        <mc:Fallback xmlns="">
           <p:sp>
             <p:nvSpPr>
               <p:cNvPr id="40" name="TextBox 39">
@@ -15183,8 +15024,8 @@
           </p:sp>
         </mc:Fallback>
       </mc:AlternateContent>
-      <mc:AlternateContent xmlns:mc="http://schemas.openxmlformats.org/markup-compatibility/2006">
-        <mc:Choice xmlns:a14="http://schemas.microsoft.com/office/drawing/2010/main" Requires="a14">
+      <mc:AlternateContent xmlns:mc="http://schemas.openxmlformats.org/markup-compatibility/2006" xmlns:a14="http://schemas.microsoft.com/office/drawing/2010/main">
+        <mc:Choice Requires="a14">
           <p:sp>
             <p:nvSpPr>
               <p:cNvPr id="41" name="TextBox 40">
@@ -15216,10 +15057,7 @@
                 <a:pPr/>
                 <a14:m>
                   <m:oMathPara xmlns:m="http://schemas.openxmlformats.org/officeDocument/2006/math">
-                    <m:oMathParaPr>
-                      <m:jc m:val="centerGroup"/>
-                    </m:oMathParaPr>
-                    <m:oMath xmlns:m="http://schemas.openxmlformats.org/officeDocument/2006/math">
+                    <m:oMath>
                       <m:sSub>
                         <m:sSubPr>
                           <m:ctrlPr>
@@ -15253,7 +15091,7 @@
             </p:txBody>
           </p:sp>
         </mc:Choice>
-        <mc:Fallback>
+        <mc:Fallback xmlns="">
           <p:sp>
             <p:nvSpPr>
               <p:cNvPr id="41" name="TextBox 40">
@@ -15298,8 +15136,8 @@
           </p:sp>
         </mc:Fallback>
       </mc:AlternateContent>
-      <mc:AlternateContent xmlns:mc="http://schemas.openxmlformats.org/markup-compatibility/2006">
-        <mc:Choice xmlns:a14="http://schemas.microsoft.com/office/drawing/2010/main" Requires="a14">
+      <mc:AlternateContent xmlns:mc="http://schemas.openxmlformats.org/markup-compatibility/2006" xmlns:a14="http://schemas.microsoft.com/office/drawing/2010/main">
+        <mc:Choice Requires="a14">
           <p:sp>
             <p:nvSpPr>
               <p:cNvPr id="42" name="TextBox 41">
@@ -15331,10 +15169,7 @@
                 <a:pPr/>
                 <a14:m>
                   <m:oMathPara xmlns:m="http://schemas.openxmlformats.org/officeDocument/2006/math">
-                    <m:oMathParaPr>
-                      <m:jc m:val="centerGroup"/>
-                    </m:oMathParaPr>
-                    <m:oMath xmlns:m="http://schemas.openxmlformats.org/officeDocument/2006/math">
+                    <m:oMath>
                       <m:sSub>
                         <m:sSubPr>
                           <m:ctrlPr>
@@ -15368,7 +15203,7 @@
             </p:txBody>
           </p:sp>
         </mc:Choice>
-        <mc:Fallback>
+        <mc:Fallback xmlns="">
           <p:sp>
             <p:nvSpPr>
               <p:cNvPr id="42" name="TextBox 41">
@@ -15413,8 +15248,8 @@
           </p:sp>
         </mc:Fallback>
       </mc:AlternateContent>
-      <mc:AlternateContent xmlns:mc="http://schemas.openxmlformats.org/markup-compatibility/2006">
-        <mc:Choice xmlns:a14="http://schemas.microsoft.com/office/drawing/2010/main" Requires="a14">
+      <mc:AlternateContent xmlns:mc="http://schemas.openxmlformats.org/markup-compatibility/2006" xmlns:a14="http://schemas.microsoft.com/office/drawing/2010/main">
+        <mc:Choice Requires="a14">
           <p:sp>
             <p:nvSpPr>
               <p:cNvPr id="43" name="TextBox 42">
@@ -15446,10 +15281,7 @@
                 <a:pPr/>
                 <a14:m>
                   <m:oMathPara xmlns:m="http://schemas.openxmlformats.org/officeDocument/2006/math">
-                    <m:oMathParaPr>
-                      <m:jc m:val="centerGroup"/>
-                    </m:oMathParaPr>
-                    <m:oMath xmlns:m="http://schemas.openxmlformats.org/officeDocument/2006/math">
+                    <m:oMath>
                       <m:r>
                         <a:rPr lang="en-US" sz="1400" i="1">
                           <a:latin typeface="Cambria Math" panose="02040503050406030204" pitchFamily="18" charset="0"/>
@@ -15495,7 +15327,7 @@
             </p:txBody>
           </p:sp>
         </mc:Choice>
-        <mc:Fallback>
+        <mc:Fallback xmlns="">
           <p:sp>
             <p:nvSpPr>
               <p:cNvPr id="43" name="TextBox 42">
@@ -15540,8 +15372,8 @@
           </p:sp>
         </mc:Fallback>
       </mc:AlternateContent>
-      <mc:AlternateContent xmlns:mc="http://schemas.openxmlformats.org/markup-compatibility/2006">
-        <mc:Choice xmlns:a14="http://schemas.microsoft.com/office/drawing/2010/main" Requires="a14">
+      <mc:AlternateContent xmlns:mc="http://schemas.openxmlformats.org/markup-compatibility/2006" xmlns:a14="http://schemas.microsoft.com/office/drawing/2010/main">
+        <mc:Choice Requires="a14">
           <p:sp>
             <p:nvSpPr>
               <p:cNvPr id="46" name="TextBox 45">
@@ -15573,10 +15405,7 @@
                 <a:pPr/>
                 <a14:m>
                   <m:oMathPara xmlns:m="http://schemas.openxmlformats.org/officeDocument/2006/math">
-                    <m:oMathParaPr>
-                      <m:jc m:val="centerGroup"/>
-                    </m:oMathParaPr>
-                    <m:oMath xmlns:m="http://schemas.openxmlformats.org/officeDocument/2006/math">
+                    <m:oMath>
                       <m:sSub>
                         <m:sSubPr>
                           <m:ctrlPr>
@@ -15616,7 +15445,7 @@
             </p:txBody>
           </p:sp>
         </mc:Choice>
-        <mc:Fallback>
+        <mc:Fallback xmlns="">
           <p:sp>
             <p:nvSpPr>
               <p:cNvPr id="46" name="TextBox 45">
@@ -15822,8 +15651,8 @@
           </a:fontRef>
         </p:style>
       </p:cxnSp>
-      <mc:AlternateContent xmlns:mc="http://schemas.openxmlformats.org/markup-compatibility/2006">
-        <mc:Choice xmlns:a14="http://schemas.microsoft.com/office/drawing/2010/main" Requires="a14">
+      <mc:AlternateContent xmlns:mc="http://schemas.openxmlformats.org/markup-compatibility/2006" xmlns:a14="http://schemas.microsoft.com/office/drawing/2010/main">
+        <mc:Choice Requires="a14">
           <p:sp>
             <p:nvSpPr>
               <p:cNvPr id="54" name="TextBox 53">
@@ -15855,10 +15684,7 @@
                 <a:pPr/>
                 <a14:m>
                   <m:oMathPara xmlns:m="http://schemas.openxmlformats.org/officeDocument/2006/math">
-                    <m:oMathParaPr>
-                      <m:jc m:val="centerGroup"/>
-                    </m:oMathParaPr>
-                    <m:oMath xmlns:m="http://schemas.openxmlformats.org/officeDocument/2006/math">
+                    <m:oMath>
                       <m:r>
                         <a:rPr lang="en-US" sz="1400" i="1">
                           <a:latin typeface="Cambria Math" panose="02040503050406030204" pitchFamily="18" charset="0"/>
@@ -15904,7 +15730,7 @@
             </p:txBody>
           </p:sp>
         </mc:Choice>
-        <mc:Fallback>
+        <mc:Fallback xmlns="">
           <p:sp>
             <p:nvSpPr>
               <p:cNvPr id="54" name="TextBox 53">
@@ -15949,8 +15775,8 @@
           </p:sp>
         </mc:Fallback>
       </mc:AlternateContent>
-      <mc:AlternateContent xmlns:mc="http://schemas.openxmlformats.org/markup-compatibility/2006">
-        <mc:Choice xmlns:a14="http://schemas.microsoft.com/office/drawing/2010/main" Requires="a14">
+      <mc:AlternateContent xmlns:mc="http://schemas.openxmlformats.org/markup-compatibility/2006" xmlns:a14="http://schemas.microsoft.com/office/drawing/2010/main">
+        <mc:Choice Requires="a14">
           <p:sp>
             <p:nvSpPr>
               <p:cNvPr id="55" name="TextBox 54">
@@ -15982,10 +15808,7 @@
                 <a:pPr/>
                 <a14:m>
                   <m:oMathPara xmlns:m="http://schemas.openxmlformats.org/officeDocument/2006/math">
-                    <m:oMathParaPr>
-                      <m:jc m:val="centerGroup"/>
-                    </m:oMathParaPr>
-                    <m:oMath xmlns:m="http://schemas.openxmlformats.org/officeDocument/2006/math">
+                    <m:oMath>
                       <m:r>
                         <a:rPr lang="en-US" sz="1400" i="1">
                           <a:latin typeface="Cambria Math" panose="02040503050406030204" pitchFamily="18" charset="0"/>
@@ -16031,7 +15854,7 @@
             </p:txBody>
           </p:sp>
         </mc:Choice>
-        <mc:Fallback>
+        <mc:Fallback xmlns="">
           <p:sp>
             <p:nvSpPr>
               <p:cNvPr id="55" name="TextBox 54">
@@ -16076,8 +15899,8 @@
           </p:sp>
         </mc:Fallback>
       </mc:AlternateContent>
-      <mc:AlternateContent xmlns:mc="http://schemas.openxmlformats.org/markup-compatibility/2006">
-        <mc:Choice xmlns:a14="http://schemas.microsoft.com/office/drawing/2010/main" Requires="a14">
+      <mc:AlternateContent xmlns:mc="http://schemas.openxmlformats.org/markup-compatibility/2006" xmlns:a14="http://schemas.microsoft.com/office/drawing/2010/main">
+        <mc:Choice Requires="a14">
           <p:sp>
             <p:nvSpPr>
               <p:cNvPr id="56" name="TextBox 55">
@@ -16109,10 +15932,7 @@
                 <a:pPr/>
                 <a14:m>
                   <m:oMathPara xmlns:m="http://schemas.openxmlformats.org/officeDocument/2006/math">
-                    <m:oMathParaPr>
-                      <m:jc m:val="centerGroup"/>
-                    </m:oMathParaPr>
-                    <m:oMath xmlns:m="http://schemas.openxmlformats.org/officeDocument/2006/math">
+                    <m:oMath>
                       <m:r>
                         <a:rPr lang="en-US" sz="1400" i="1">
                           <a:latin typeface="Cambria Math" panose="02040503050406030204" pitchFamily="18" charset="0"/>
@@ -16158,7 +15978,7 @@
             </p:txBody>
           </p:sp>
         </mc:Choice>
-        <mc:Fallback>
+        <mc:Fallback xmlns="">
           <p:sp>
             <p:nvSpPr>
               <p:cNvPr id="56" name="TextBox 55">
@@ -16203,8 +16023,8 @@
           </p:sp>
         </mc:Fallback>
       </mc:AlternateContent>
-      <mc:AlternateContent xmlns:mc="http://schemas.openxmlformats.org/markup-compatibility/2006">
-        <mc:Choice xmlns:a14="http://schemas.microsoft.com/office/drawing/2010/main" Requires="a14">
+      <mc:AlternateContent xmlns:mc="http://schemas.openxmlformats.org/markup-compatibility/2006" xmlns:a14="http://schemas.microsoft.com/office/drawing/2010/main">
+        <mc:Choice Requires="a14">
           <p:sp>
             <p:nvSpPr>
               <p:cNvPr id="57" name="TextBox 56">
@@ -16236,10 +16056,7 @@
                 <a:pPr/>
                 <a14:m>
                   <m:oMathPara xmlns:m="http://schemas.openxmlformats.org/officeDocument/2006/math">
-                    <m:oMathParaPr>
-                      <m:jc m:val="centerGroup"/>
-                    </m:oMathParaPr>
-                    <m:oMath xmlns:m="http://schemas.openxmlformats.org/officeDocument/2006/math">
+                    <m:oMath>
                       <m:r>
                         <a:rPr lang="en-US" sz="1400" i="1">
                           <a:latin typeface="Cambria Math" panose="02040503050406030204" pitchFamily="18" charset="0"/>
@@ -16285,7 +16102,7 @@
             </p:txBody>
           </p:sp>
         </mc:Choice>
-        <mc:Fallback>
+        <mc:Fallback xmlns="">
           <p:sp>
             <p:nvSpPr>
               <p:cNvPr id="57" name="TextBox 56">
@@ -16330,8 +16147,8 @@
           </p:sp>
         </mc:Fallback>
       </mc:AlternateContent>
-      <mc:AlternateContent xmlns:mc="http://schemas.openxmlformats.org/markup-compatibility/2006">
-        <mc:Choice xmlns:a14="http://schemas.microsoft.com/office/drawing/2010/main" Requires="a14">
+      <mc:AlternateContent xmlns:mc="http://schemas.openxmlformats.org/markup-compatibility/2006" xmlns:a14="http://schemas.microsoft.com/office/drawing/2010/main">
+        <mc:Choice Requires="a14">
           <p:sp>
             <p:nvSpPr>
               <p:cNvPr id="58" name="TextBox 57">
@@ -16363,10 +16180,7 @@
                 <a:pPr/>
                 <a14:m>
                   <m:oMathPara xmlns:m="http://schemas.openxmlformats.org/officeDocument/2006/math">
-                    <m:oMathParaPr>
-                      <m:jc m:val="centerGroup"/>
-                    </m:oMathParaPr>
-                    <m:oMath xmlns:m="http://schemas.openxmlformats.org/officeDocument/2006/math">
+                    <m:oMath>
                       <m:r>
                         <a:rPr lang="en-US" sz="1400" i="1">
                           <a:latin typeface="Cambria Math" panose="02040503050406030204" pitchFamily="18" charset="0"/>
@@ -16412,7 +16226,7 @@
             </p:txBody>
           </p:sp>
         </mc:Choice>
-        <mc:Fallback>
+        <mc:Fallback xmlns="">
           <p:sp>
             <p:nvSpPr>
               <p:cNvPr id="58" name="TextBox 57">
@@ -16457,8 +16271,8 @@
           </p:sp>
         </mc:Fallback>
       </mc:AlternateContent>
-      <mc:AlternateContent xmlns:mc="http://schemas.openxmlformats.org/markup-compatibility/2006">
-        <mc:Choice xmlns:a14="http://schemas.microsoft.com/office/drawing/2010/main" Requires="a14">
+      <mc:AlternateContent xmlns:mc="http://schemas.openxmlformats.org/markup-compatibility/2006" xmlns:a14="http://schemas.microsoft.com/office/drawing/2010/main">
+        <mc:Choice Requires="a14">
           <p:sp>
             <p:nvSpPr>
               <p:cNvPr id="59" name="TextBox 58">
@@ -16490,10 +16304,7 @@
                 <a:pPr/>
                 <a14:m>
                   <m:oMathPara xmlns:m="http://schemas.openxmlformats.org/officeDocument/2006/math">
-                    <m:oMathParaPr>
-                      <m:jc m:val="centerGroup"/>
-                    </m:oMathParaPr>
-                    <m:oMath xmlns:m="http://schemas.openxmlformats.org/officeDocument/2006/math">
+                    <m:oMath>
                       <m:sSub>
                         <m:sSubPr>
                           <m:ctrlPr>
@@ -16533,7 +16344,7 @@
             </p:txBody>
           </p:sp>
         </mc:Choice>
-        <mc:Fallback>
+        <mc:Fallback xmlns="">
           <p:sp>
             <p:nvSpPr>
               <p:cNvPr id="59" name="TextBox 58">
@@ -16578,8 +16389,8 @@
           </p:sp>
         </mc:Fallback>
       </mc:AlternateContent>
-      <mc:AlternateContent xmlns:mc="http://schemas.openxmlformats.org/markup-compatibility/2006">
-        <mc:Choice xmlns:a14="http://schemas.microsoft.com/office/drawing/2010/main" Requires="a14">
+      <mc:AlternateContent xmlns:mc="http://schemas.openxmlformats.org/markup-compatibility/2006" xmlns:a14="http://schemas.microsoft.com/office/drawing/2010/main">
+        <mc:Choice Requires="a14">
           <p:sp>
             <p:nvSpPr>
               <p:cNvPr id="60" name="TextBox 59">
@@ -16611,10 +16422,7 @@
                 <a:pPr/>
                 <a14:m>
                   <m:oMathPara xmlns:m="http://schemas.openxmlformats.org/officeDocument/2006/math">
-                    <m:oMathParaPr>
-                      <m:jc m:val="centerGroup"/>
-                    </m:oMathParaPr>
-                    <m:oMath xmlns:m="http://schemas.openxmlformats.org/officeDocument/2006/math">
+                    <m:oMath>
                       <m:sSub>
                         <m:sSubPr>
                           <m:ctrlPr>
@@ -16654,7 +16462,7 @@
             </p:txBody>
           </p:sp>
         </mc:Choice>
-        <mc:Fallback>
+        <mc:Fallback xmlns="">
           <p:sp>
             <p:nvSpPr>
               <p:cNvPr id="60" name="TextBox 59">
@@ -16699,8 +16507,8 @@
           </p:sp>
         </mc:Fallback>
       </mc:AlternateContent>
-      <mc:AlternateContent xmlns:mc="http://schemas.openxmlformats.org/markup-compatibility/2006">
-        <mc:Choice xmlns:a14="http://schemas.microsoft.com/office/drawing/2010/main" Requires="a14">
+      <mc:AlternateContent xmlns:mc="http://schemas.openxmlformats.org/markup-compatibility/2006" xmlns:a14="http://schemas.microsoft.com/office/drawing/2010/main">
+        <mc:Choice Requires="a14">
           <p:sp>
             <p:nvSpPr>
               <p:cNvPr id="61" name="TextBox 60">
@@ -16732,10 +16540,7 @@
                 <a:pPr/>
                 <a14:m>
                   <m:oMathPara xmlns:m="http://schemas.openxmlformats.org/officeDocument/2006/math">
-                    <m:oMathParaPr>
-                      <m:jc m:val="centerGroup"/>
-                    </m:oMathParaPr>
-                    <m:oMath xmlns:m="http://schemas.openxmlformats.org/officeDocument/2006/math">
+                    <m:oMath>
                       <m:r>
                         <a:rPr lang="en-US" sz="1400" i="1">
                           <a:latin typeface="Cambria Math" panose="02040503050406030204" pitchFamily="18" charset="0"/>
@@ -16781,7 +16586,7 @@
             </p:txBody>
           </p:sp>
         </mc:Choice>
-        <mc:Fallback>
+        <mc:Fallback xmlns="">
           <p:sp>
             <p:nvSpPr>
               <p:cNvPr id="61" name="TextBox 60">
@@ -16826,8 +16631,8 @@
           </p:sp>
         </mc:Fallback>
       </mc:AlternateContent>
-      <mc:AlternateContent xmlns:mc="http://schemas.openxmlformats.org/markup-compatibility/2006">
-        <mc:Choice xmlns:a14="http://schemas.microsoft.com/office/drawing/2010/main" Requires="a14">
+      <mc:AlternateContent xmlns:mc="http://schemas.openxmlformats.org/markup-compatibility/2006" xmlns:a14="http://schemas.microsoft.com/office/drawing/2010/main">
+        <mc:Choice Requires="a14">
           <p:sp>
             <p:nvSpPr>
               <p:cNvPr id="62" name="TextBox 61">
@@ -16859,10 +16664,7 @@
                 <a:pPr/>
                 <a14:m>
                   <m:oMathPara xmlns:m="http://schemas.openxmlformats.org/officeDocument/2006/math">
-                    <m:oMathParaPr>
-                      <m:jc m:val="centerGroup"/>
-                    </m:oMathParaPr>
-                    <m:oMath xmlns:m="http://schemas.openxmlformats.org/officeDocument/2006/math">
+                    <m:oMath>
                       <m:r>
                         <a:rPr lang="en-US" sz="1400" i="1">
                           <a:latin typeface="Cambria Math" panose="02040503050406030204" pitchFamily="18" charset="0"/>
@@ -16908,7 +16710,7 @@
             </p:txBody>
           </p:sp>
         </mc:Choice>
-        <mc:Fallback>
+        <mc:Fallback xmlns="">
           <p:sp>
             <p:nvSpPr>
               <p:cNvPr id="62" name="TextBox 61">
@@ -16953,8 +16755,8 @@
           </p:sp>
         </mc:Fallback>
       </mc:AlternateContent>
-      <mc:AlternateContent xmlns:mc="http://schemas.openxmlformats.org/markup-compatibility/2006">
-        <mc:Choice xmlns:a14="http://schemas.microsoft.com/office/drawing/2010/main" Requires="a14">
+      <mc:AlternateContent xmlns:mc="http://schemas.openxmlformats.org/markup-compatibility/2006" xmlns:a14="http://schemas.microsoft.com/office/drawing/2010/main">
+        <mc:Choice Requires="a14">
           <p:sp>
             <p:nvSpPr>
               <p:cNvPr id="63" name="TextBox 62">
@@ -16986,10 +16788,7 @@
                 <a:pPr/>
                 <a14:m>
                   <m:oMathPara xmlns:m="http://schemas.openxmlformats.org/officeDocument/2006/math">
-                    <m:oMathParaPr>
-                      <m:jc m:val="centerGroup"/>
-                    </m:oMathParaPr>
-                    <m:oMath xmlns:m="http://schemas.openxmlformats.org/officeDocument/2006/math">
+                    <m:oMath>
                       <m:r>
                         <a:rPr lang="en-US" sz="1400" i="1">
                           <a:latin typeface="Cambria Math" panose="02040503050406030204" pitchFamily="18" charset="0"/>
@@ -17035,7 +16834,7 @@
             </p:txBody>
           </p:sp>
         </mc:Choice>
-        <mc:Fallback>
+        <mc:Fallback xmlns="">
           <p:sp>
             <p:nvSpPr>
               <p:cNvPr id="63" name="TextBox 62">
@@ -17080,8 +16879,8 @@
           </p:sp>
         </mc:Fallback>
       </mc:AlternateContent>
-      <mc:AlternateContent xmlns:mc="http://schemas.openxmlformats.org/markup-compatibility/2006">
-        <mc:Choice xmlns:a14="http://schemas.microsoft.com/office/drawing/2010/main" Requires="a14">
+      <mc:AlternateContent xmlns:mc="http://schemas.openxmlformats.org/markup-compatibility/2006" xmlns:a14="http://schemas.microsoft.com/office/drawing/2010/main">
+        <mc:Choice Requires="a14">
           <p:sp>
             <p:nvSpPr>
               <p:cNvPr id="64" name="TextBox 63">
@@ -17113,10 +16912,7 @@
                 <a:pPr/>
                 <a14:m>
                   <m:oMathPara xmlns:m="http://schemas.openxmlformats.org/officeDocument/2006/math">
-                    <m:oMathParaPr>
-                      <m:jc m:val="centerGroup"/>
-                    </m:oMathParaPr>
-                    <m:oMath xmlns:m="http://schemas.openxmlformats.org/officeDocument/2006/math">
+                    <m:oMath>
                       <m:r>
                         <a:rPr lang="en-US" sz="1400" i="1">
                           <a:latin typeface="Cambria Math" panose="02040503050406030204" pitchFamily="18" charset="0"/>
@@ -17162,7 +16958,7 @@
             </p:txBody>
           </p:sp>
         </mc:Choice>
-        <mc:Fallback>
+        <mc:Fallback xmlns="">
           <p:sp>
             <p:nvSpPr>
               <p:cNvPr id="64" name="TextBox 63">
@@ -17207,8 +17003,8 @@
           </p:sp>
         </mc:Fallback>
       </mc:AlternateContent>
-      <mc:AlternateContent xmlns:mc="http://schemas.openxmlformats.org/markup-compatibility/2006">
-        <mc:Choice xmlns:a14="http://schemas.microsoft.com/office/drawing/2010/main" Requires="a14">
+      <mc:AlternateContent xmlns:mc="http://schemas.openxmlformats.org/markup-compatibility/2006" xmlns:a14="http://schemas.microsoft.com/office/drawing/2010/main">
+        <mc:Choice Requires="a14">
           <p:sp>
             <p:nvSpPr>
               <p:cNvPr id="3" name="TextBox 2">
@@ -17240,10 +17036,7 @@
                 <a:pPr/>
                 <a14:m>
                   <m:oMathPara xmlns:m="http://schemas.openxmlformats.org/officeDocument/2006/math">
-                    <m:oMathParaPr>
-                      <m:jc m:val="centerGroup"/>
-                    </m:oMathParaPr>
-                    <m:oMath xmlns:m="http://schemas.openxmlformats.org/officeDocument/2006/math">
+                    <m:oMath>
                       <m:sSub>
                         <m:sSubPr>
                           <m:ctrlPr>
@@ -17277,7 +17070,7 @@
             </p:txBody>
           </p:sp>
         </mc:Choice>
-        <mc:Fallback>
+        <mc:Fallback xmlns="">
           <p:sp>
             <p:nvSpPr>
               <p:cNvPr id="3" name="TextBox 2">
@@ -19258,8 +19051,8 @@
           </a:p>
         </p:txBody>
       </p:sp>
-      <mc:AlternateContent xmlns:mc="http://schemas.openxmlformats.org/markup-compatibility/2006">
-        <mc:Choice xmlns:a14="http://schemas.microsoft.com/office/drawing/2010/main" Requires="a14">
+      <mc:AlternateContent xmlns:mc="http://schemas.openxmlformats.org/markup-compatibility/2006" xmlns:a14="http://schemas.microsoft.com/office/drawing/2010/main">
+        <mc:Choice Requires="a14">
           <p:sp>
             <p:nvSpPr>
               <p:cNvPr id="84" name="TextBox 83">
@@ -19291,10 +19084,7 @@
                 <a:pPr/>
                 <a14:m>
                   <m:oMathPara xmlns:m="http://schemas.openxmlformats.org/officeDocument/2006/math">
-                    <m:oMathParaPr>
-                      <m:jc m:val="centerGroup"/>
-                    </m:oMathParaPr>
-                    <m:oMath xmlns:m="http://schemas.openxmlformats.org/officeDocument/2006/math">
+                    <m:oMath>
                       <m:r>
                         <a:rPr lang="en-US" sz="1400" i="1">
                           <a:latin typeface="Cambria Math" panose="02040503050406030204" pitchFamily="18" charset="0"/>
@@ -19340,7 +19130,7 @@
             </p:txBody>
           </p:sp>
         </mc:Choice>
-        <mc:Fallback>
+        <mc:Fallback xmlns="">
           <p:sp>
             <p:nvSpPr>
               <p:cNvPr id="84" name="TextBox 83">
@@ -19385,8 +19175,8 @@
           </p:sp>
         </mc:Fallback>
       </mc:AlternateContent>
-      <mc:AlternateContent xmlns:mc="http://schemas.openxmlformats.org/markup-compatibility/2006">
-        <mc:Choice xmlns:a14="http://schemas.microsoft.com/office/drawing/2010/main" Requires="a14">
+      <mc:AlternateContent xmlns:mc="http://schemas.openxmlformats.org/markup-compatibility/2006" xmlns:a14="http://schemas.microsoft.com/office/drawing/2010/main">
+        <mc:Choice Requires="a14">
           <p:sp>
             <p:nvSpPr>
               <p:cNvPr id="85" name="TextBox 84">
@@ -19418,10 +19208,7 @@
                 <a:pPr/>
                 <a14:m>
                   <m:oMathPara xmlns:m="http://schemas.openxmlformats.org/officeDocument/2006/math">
-                    <m:oMathParaPr>
-                      <m:jc m:val="centerGroup"/>
-                    </m:oMathParaPr>
-                    <m:oMath xmlns:m="http://schemas.openxmlformats.org/officeDocument/2006/math">
+                    <m:oMath>
                       <m:sSub>
                         <m:sSubPr>
                           <m:ctrlPr>
@@ -19461,7 +19248,7 @@
             </p:txBody>
           </p:sp>
         </mc:Choice>
-        <mc:Fallback>
+        <mc:Fallback xmlns="">
           <p:sp>
             <p:nvSpPr>
               <p:cNvPr id="85" name="TextBox 84">
@@ -19506,8 +19293,8 @@
           </p:sp>
         </mc:Fallback>
       </mc:AlternateContent>
-      <mc:AlternateContent xmlns:mc="http://schemas.openxmlformats.org/markup-compatibility/2006">
-        <mc:Choice xmlns:a14="http://schemas.microsoft.com/office/drawing/2010/main" Requires="a14">
+      <mc:AlternateContent xmlns:mc="http://schemas.openxmlformats.org/markup-compatibility/2006" xmlns:a14="http://schemas.microsoft.com/office/drawing/2010/main">
+        <mc:Choice Requires="a14">
           <p:sp>
             <p:nvSpPr>
               <p:cNvPr id="86" name="TextBox 85">
@@ -19539,10 +19326,7 @@
                 <a:pPr/>
                 <a14:m>
                   <m:oMathPara xmlns:m="http://schemas.openxmlformats.org/officeDocument/2006/math">
-                    <m:oMathParaPr>
-                      <m:jc m:val="centerGroup"/>
-                    </m:oMathParaPr>
-                    <m:oMath xmlns:m="http://schemas.openxmlformats.org/officeDocument/2006/math">
+                    <m:oMath>
                       <m:r>
                         <a:rPr lang="en-US" sz="1400" i="1">
                           <a:latin typeface="Cambria Math" panose="02040503050406030204" pitchFamily="18" charset="0"/>
@@ -19588,7 +19372,7 @@
             </p:txBody>
           </p:sp>
         </mc:Choice>
-        <mc:Fallback>
+        <mc:Fallback xmlns="">
           <p:sp>
             <p:nvSpPr>
               <p:cNvPr id="86" name="TextBox 85">
@@ -19633,8 +19417,8 @@
           </p:sp>
         </mc:Fallback>
       </mc:AlternateContent>
-      <mc:AlternateContent xmlns:mc="http://schemas.openxmlformats.org/markup-compatibility/2006">
-        <mc:Choice xmlns:a14="http://schemas.microsoft.com/office/drawing/2010/main" Requires="a14">
+      <mc:AlternateContent xmlns:mc="http://schemas.openxmlformats.org/markup-compatibility/2006" xmlns:a14="http://schemas.microsoft.com/office/drawing/2010/main">
+        <mc:Choice Requires="a14">
           <p:sp>
             <p:nvSpPr>
               <p:cNvPr id="87" name="TextBox 86">
@@ -19666,10 +19450,7 @@
                 <a:pPr/>
                 <a14:m>
                   <m:oMathPara xmlns:m="http://schemas.openxmlformats.org/officeDocument/2006/math">
-                    <m:oMathParaPr>
-                      <m:jc m:val="centerGroup"/>
-                    </m:oMathParaPr>
-                    <m:oMath xmlns:m="http://schemas.openxmlformats.org/officeDocument/2006/math">
+                    <m:oMath>
                       <m:r>
                         <a:rPr lang="en-US" sz="1400" i="1">
                           <a:latin typeface="Cambria Math" panose="02040503050406030204" pitchFamily="18" charset="0"/>
@@ -19715,7 +19496,7 @@
             </p:txBody>
           </p:sp>
         </mc:Choice>
-        <mc:Fallback>
+        <mc:Fallback xmlns="">
           <p:sp>
             <p:nvSpPr>
               <p:cNvPr id="87" name="TextBox 86">
@@ -19760,8 +19541,8 @@
           </p:sp>
         </mc:Fallback>
       </mc:AlternateContent>
-      <mc:AlternateContent xmlns:mc="http://schemas.openxmlformats.org/markup-compatibility/2006">
-        <mc:Choice xmlns:a14="http://schemas.microsoft.com/office/drawing/2010/main" Requires="a14">
+      <mc:AlternateContent xmlns:mc="http://schemas.openxmlformats.org/markup-compatibility/2006" xmlns:a14="http://schemas.microsoft.com/office/drawing/2010/main">
+        <mc:Choice Requires="a14">
           <p:sp>
             <p:nvSpPr>
               <p:cNvPr id="88" name="TextBox 87">
@@ -19793,10 +19574,7 @@
                 <a:pPr/>
                 <a14:m>
                   <m:oMathPara xmlns:m="http://schemas.openxmlformats.org/officeDocument/2006/math">
-                    <m:oMathParaPr>
-                      <m:jc m:val="centerGroup"/>
-                    </m:oMathParaPr>
-                    <m:oMath xmlns:m="http://schemas.openxmlformats.org/officeDocument/2006/math">
+                    <m:oMath>
                       <m:r>
                         <a:rPr lang="en-US" sz="1400" i="1">
                           <a:latin typeface="Cambria Math" panose="02040503050406030204" pitchFamily="18" charset="0"/>
@@ -19842,7 +19620,7 @@
             </p:txBody>
           </p:sp>
         </mc:Choice>
-        <mc:Fallback>
+        <mc:Fallback xmlns="">
           <p:sp>
             <p:nvSpPr>
               <p:cNvPr id="88" name="TextBox 87">
@@ -19887,8 +19665,8 @@
           </p:sp>
         </mc:Fallback>
       </mc:AlternateContent>
-      <mc:AlternateContent xmlns:mc="http://schemas.openxmlformats.org/markup-compatibility/2006">
-        <mc:Choice xmlns:a14="http://schemas.microsoft.com/office/drawing/2010/main" Requires="a14">
+      <mc:AlternateContent xmlns:mc="http://schemas.openxmlformats.org/markup-compatibility/2006" xmlns:a14="http://schemas.microsoft.com/office/drawing/2010/main">
+        <mc:Choice Requires="a14">
           <p:sp>
             <p:nvSpPr>
               <p:cNvPr id="89" name="TextBox 88">
@@ -19920,10 +19698,7 @@
                 <a:pPr/>
                 <a14:m>
                   <m:oMathPara xmlns:m="http://schemas.openxmlformats.org/officeDocument/2006/math">
-                    <m:oMathParaPr>
-                      <m:jc m:val="centerGroup"/>
-                    </m:oMathParaPr>
-                    <m:oMath xmlns:m="http://schemas.openxmlformats.org/officeDocument/2006/math">
+                    <m:oMath>
                       <m:r>
                         <a:rPr lang="en-US" sz="1400" i="1">
                           <a:latin typeface="Cambria Math" panose="02040503050406030204" pitchFamily="18" charset="0"/>
@@ -19969,7 +19744,7 @@
             </p:txBody>
           </p:sp>
         </mc:Choice>
-        <mc:Fallback>
+        <mc:Fallback xmlns="">
           <p:sp>
             <p:nvSpPr>
               <p:cNvPr id="89" name="TextBox 88">
@@ -20014,8 +19789,8 @@
           </p:sp>
         </mc:Fallback>
       </mc:AlternateContent>
-      <mc:AlternateContent xmlns:mc="http://schemas.openxmlformats.org/markup-compatibility/2006">
-        <mc:Choice xmlns:a14="http://schemas.microsoft.com/office/drawing/2010/main" Requires="a14">
+      <mc:AlternateContent xmlns:mc="http://schemas.openxmlformats.org/markup-compatibility/2006" xmlns:a14="http://schemas.microsoft.com/office/drawing/2010/main">
+        <mc:Choice Requires="a14">
           <p:sp>
             <p:nvSpPr>
               <p:cNvPr id="90" name="TextBox 89">
@@ -20047,10 +19822,7 @@
                 <a:pPr/>
                 <a14:m>
                   <m:oMathPara xmlns:m="http://schemas.openxmlformats.org/officeDocument/2006/math">
-                    <m:oMathParaPr>
-                      <m:jc m:val="centerGroup"/>
-                    </m:oMathParaPr>
-                    <m:oMath xmlns:m="http://schemas.openxmlformats.org/officeDocument/2006/math">
+                    <m:oMath>
                       <m:r>
                         <a:rPr lang="en-US" sz="1400" i="1">
                           <a:latin typeface="Cambria Math" panose="02040503050406030204" pitchFamily="18" charset="0"/>
@@ -20096,7 +19868,7 @@
             </p:txBody>
           </p:sp>
         </mc:Choice>
-        <mc:Fallback>
+        <mc:Fallback xmlns="">
           <p:sp>
             <p:nvSpPr>
               <p:cNvPr id="90" name="TextBox 89">
@@ -20141,8 +19913,8 @@
           </p:sp>
         </mc:Fallback>
       </mc:AlternateContent>
-      <mc:AlternateContent xmlns:mc="http://schemas.openxmlformats.org/markup-compatibility/2006">
-        <mc:Choice xmlns:a14="http://schemas.microsoft.com/office/drawing/2010/main" Requires="a14">
+      <mc:AlternateContent xmlns:mc="http://schemas.openxmlformats.org/markup-compatibility/2006" xmlns:a14="http://schemas.microsoft.com/office/drawing/2010/main">
+        <mc:Choice Requires="a14">
           <p:sp>
             <p:nvSpPr>
               <p:cNvPr id="91" name="TextBox 90">
@@ -20174,10 +19946,7 @@
                 <a:pPr/>
                 <a14:m>
                   <m:oMathPara xmlns:m="http://schemas.openxmlformats.org/officeDocument/2006/math">
-                    <m:oMathParaPr>
-                      <m:jc m:val="centerGroup"/>
-                    </m:oMathParaPr>
-                    <m:oMath xmlns:m="http://schemas.openxmlformats.org/officeDocument/2006/math">
+                    <m:oMath>
                       <m:sSub>
                         <m:sSubPr>
                           <m:ctrlPr>
@@ -20217,7 +19986,7 @@
             </p:txBody>
           </p:sp>
         </mc:Choice>
-        <mc:Fallback>
+        <mc:Fallback xmlns="">
           <p:sp>
             <p:nvSpPr>
               <p:cNvPr id="91" name="TextBox 90">
@@ -20262,8 +20031,8 @@
           </p:sp>
         </mc:Fallback>
       </mc:AlternateContent>
-      <mc:AlternateContent xmlns:mc="http://schemas.openxmlformats.org/markup-compatibility/2006">
-        <mc:Choice xmlns:a14="http://schemas.microsoft.com/office/drawing/2010/main" Requires="a14">
+      <mc:AlternateContent xmlns:mc="http://schemas.openxmlformats.org/markup-compatibility/2006" xmlns:a14="http://schemas.microsoft.com/office/drawing/2010/main">
+        <mc:Choice Requires="a14">
           <p:sp>
             <p:nvSpPr>
               <p:cNvPr id="92" name="TextBox 91">
@@ -20295,10 +20064,7 @@
                 <a:pPr/>
                 <a14:m>
                   <m:oMathPara xmlns:m="http://schemas.openxmlformats.org/officeDocument/2006/math">
-                    <m:oMathParaPr>
-                      <m:jc m:val="centerGroup"/>
-                    </m:oMathParaPr>
-                    <m:oMath xmlns:m="http://schemas.openxmlformats.org/officeDocument/2006/math">
+                    <m:oMath>
                       <m:sSub>
                         <m:sSubPr>
                           <m:ctrlPr>
@@ -20338,7 +20104,7 @@
             </p:txBody>
           </p:sp>
         </mc:Choice>
-        <mc:Fallback>
+        <mc:Fallback xmlns="">
           <p:sp>
             <p:nvSpPr>
               <p:cNvPr id="92" name="TextBox 91">
@@ -20383,8 +20149,8 @@
           </p:sp>
         </mc:Fallback>
       </mc:AlternateContent>
-      <mc:AlternateContent xmlns:mc="http://schemas.openxmlformats.org/markup-compatibility/2006">
-        <mc:Choice xmlns:a14="http://schemas.microsoft.com/office/drawing/2010/main" Requires="a14">
+      <mc:AlternateContent xmlns:mc="http://schemas.openxmlformats.org/markup-compatibility/2006" xmlns:a14="http://schemas.microsoft.com/office/drawing/2010/main">
+        <mc:Choice Requires="a14">
           <p:sp>
             <p:nvSpPr>
               <p:cNvPr id="93" name="TextBox 92">
@@ -20416,10 +20182,7 @@
                 <a:pPr/>
                 <a14:m>
                   <m:oMathPara xmlns:m="http://schemas.openxmlformats.org/officeDocument/2006/math">
-                    <m:oMathParaPr>
-                      <m:jc m:val="centerGroup"/>
-                    </m:oMathParaPr>
-                    <m:oMath xmlns:m="http://schemas.openxmlformats.org/officeDocument/2006/math">
+                    <m:oMath>
                       <m:r>
                         <a:rPr lang="en-US" sz="1400" i="1">
                           <a:latin typeface="Cambria Math" panose="02040503050406030204" pitchFamily="18" charset="0"/>
@@ -20465,7 +20228,7 @@
             </p:txBody>
           </p:sp>
         </mc:Choice>
-        <mc:Fallback>
+        <mc:Fallback xmlns="">
           <p:sp>
             <p:nvSpPr>
               <p:cNvPr id="93" name="TextBox 92">
@@ -20510,8 +20273,8 @@
           </p:sp>
         </mc:Fallback>
       </mc:AlternateContent>
-      <mc:AlternateContent xmlns:mc="http://schemas.openxmlformats.org/markup-compatibility/2006">
-        <mc:Choice xmlns:a14="http://schemas.microsoft.com/office/drawing/2010/main" Requires="a14">
+      <mc:AlternateContent xmlns:mc="http://schemas.openxmlformats.org/markup-compatibility/2006" xmlns:a14="http://schemas.microsoft.com/office/drawing/2010/main">
+        <mc:Choice Requires="a14">
           <p:sp>
             <p:nvSpPr>
               <p:cNvPr id="94" name="TextBox 93">
@@ -20543,10 +20306,7 @@
                 <a:pPr/>
                 <a14:m>
                   <m:oMathPara xmlns:m="http://schemas.openxmlformats.org/officeDocument/2006/math">
-                    <m:oMathParaPr>
-                      <m:jc m:val="centerGroup"/>
-                    </m:oMathParaPr>
-                    <m:oMath xmlns:m="http://schemas.openxmlformats.org/officeDocument/2006/math">
+                    <m:oMath>
                       <m:r>
                         <a:rPr lang="en-US" sz="1400" i="1">
                           <a:latin typeface="Cambria Math" panose="02040503050406030204" pitchFamily="18" charset="0"/>
@@ -20592,7 +20352,7 @@
             </p:txBody>
           </p:sp>
         </mc:Choice>
-        <mc:Fallback>
+        <mc:Fallback xmlns="">
           <p:sp>
             <p:nvSpPr>
               <p:cNvPr id="94" name="TextBox 93">
@@ -20637,8 +20397,8 @@
           </p:sp>
         </mc:Fallback>
       </mc:AlternateContent>
-      <mc:AlternateContent xmlns:mc="http://schemas.openxmlformats.org/markup-compatibility/2006">
-        <mc:Choice xmlns:a14="http://schemas.microsoft.com/office/drawing/2010/main" Requires="a14">
+      <mc:AlternateContent xmlns:mc="http://schemas.openxmlformats.org/markup-compatibility/2006" xmlns:a14="http://schemas.microsoft.com/office/drawing/2010/main">
+        <mc:Choice Requires="a14">
           <p:sp>
             <p:nvSpPr>
               <p:cNvPr id="95" name="TextBox 94">
@@ -20670,10 +20430,7 @@
                 <a:pPr/>
                 <a14:m>
                   <m:oMathPara xmlns:m="http://schemas.openxmlformats.org/officeDocument/2006/math">
-                    <m:oMathParaPr>
-                      <m:jc m:val="centerGroup"/>
-                    </m:oMathParaPr>
-                    <m:oMath xmlns:m="http://schemas.openxmlformats.org/officeDocument/2006/math">
+                    <m:oMath>
                       <m:r>
                         <a:rPr lang="en-US" sz="1400" i="1">
                           <a:latin typeface="Cambria Math" panose="02040503050406030204" pitchFamily="18" charset="0"/>
@@ -20719,7 +20476,7 @@
             </p:txBody>
           </p:sp>
         </mc:Choice>
-        <mc:Fallback>
+        <mc:Fallback xmlns="">
           <p:sp>
             <p:nvSpPr>
               <p:cNvPr id="95" name="TextBox 94">
@@ -20764,8 +20521,8 @@
           </p:sp>
         </mc:Fallback>
       </mc:AlternateContent>
-      <mc:AlternateContent xmlns:mc="http://schemas.openxmlformats.org/markup-compatibility/2006">
-        <mc:Choice xmlns:a14="http://schemas.microsoft.com/office/drawing/2010/main" Requires="a14">
+      <mc:AlternateContent xmlns:mc="http://schemas.openxmlformats.org/markup-compatibility/2006" xmlns:a14="http://schemas.microsoft.com/office/drawing/2010/main">
+        <mc:Choice Requires="a14">
           <p:sp>
             <p:nvSpPr>
               <p:cNvPr id="96" name="TextBox 95">
@@ -20797,10 +20554,7 @@
                 <a:pPr/>
                 <a14:m>
                   <m:oMathPara xmlns:m="http://schemas.openxmlformats.org/officeDocument/2006/math">
-                    <m:oMathParaPr>
-                      <m:jc m:val="centerGroup"/>
-                    </m:oMathParaPr>
-                    <m:oMath xmlns:m="http://schemas.openxmlformats.org/officeDocument/2006/math">
+                    <m:oMath>
                       <m:r>
                         <a:rPr lang="en-US" sz="1400" i="1">
                           <a:latin typeface="Cambria Math" panose="02040503050406030204" pitchFamily="18" charset="0"/>
@@ -20846,7 +20600,7 @@
             </p:txBody>
           </p:sp>
         </mc:Choice>
-        <mc:Fallback>
+        <mc:Fallback xmlns="">
           <p:sp>
             <p:nvSpPr>
               <p:cNvPr id="96" name="TextBox 95">
@@ -21094,8 +20848,8 @@
           </a:p>
         </p:txBody>
       </p:sp>
-      <mc:AlternateContent xmlns:mc="http://schemas.openxmlformats.org/markup-compatibility/2006">
-        <mc:Choice xmlns:a14="http://schemas.microsoft.com/office/drawing/2010/main" Requires="a14">
+      <mc:AlternateContent xmlns:mc="http://schemas.openxmlformats.org/markup-compatibility/2006" xmlns:a14="http://schemas.microsoft.com/office/drawing/2010/main">
+        <mc:Choice Requires="a14">
           <p:sp>
             <p:nvSpPr>
               <p:cNvPr id="6" name="Rectangle 5">
@@ -21167,10 +20921,7 @@
                 <a:pPr algn="ctr"/>
                 <a14:m>
                   <m:oMathPara xmlns:m="http://schemas.openxmlformats.org/officeDocument/2006/math">
-                    <m:oMathParaPr>
-                      <m:jc m:val="centerGroup"/>
-                    </m:oMathParaPr>
-                    <m:oMath xmlns:m="http://schemas.openxmlformats.org/officeDocument/2006/math">
+                    <m:oMath>
                       <m:r>
                         <a:rPr lang="en-US" sz="1600" i="1">
                           <a:latin typeface="Cambria Math" panose="02040503050406030204" pitchFamily="18" charset="0"/>
@@ -21191,7 +20942,7 @@
             </p:txBody>
           </p:sp>
         </mc:Choice>
-        <mc:Fallback>
+        <mc:Fallback xmlns="">
           <p:sp>
             <p:nvSpPr>
               <p:cNvPr id="6" name="Rectangle 5">
@@ -21237,8 +20988,8 @@
           </p:sp>
         </mc:Fallback>
       </mc:AlternateContent>
-      <mc:AlternateContent xmlns:mc="http://schemas.openxmlformats.org/markup-compatibility/2006">
-        <mc:Choice xmlns:a14="http://schemas.microsoft.com/office/drawing/2010/main" Requires="a14">
+      <mc:AlternateContent xmlns:mc="http://schemas.openxmlformats.org/markup-compatibility/2006" xmlns:a14="http://schemas.microsoft.com/office/drawing/2010/main">
+        <mc:Choice Requires="a14">
           <p:sp>
             <p:nvSpPr>
               <p:cNvPr id="7" name="Rectangle 6">
@@ -21323,7 +21074,7 @@
             </p:txBody>
           </p:sp>
         </mc:Choice>
-        <mc:Fallback>
+        <mc:Fallback xmlns="">
           <p:sp>
             <p:nvSpPr>
               <p:cNvPr id="7" name="Rectangle 6">
@@ -21373,8 +21124,8 @@
           </p:sp>
         </mc:Fallback>
       </mc:AlternateContent>
-      <mc:AlternateContent xmlns:mc="http://schemas.openxmlformats.org/markup-compatibility/2006">
-        <mc:Choice xmlns:a14="http://schemas.microsoft.com/office/drawing/2010/main" Requires="a14">
+      <mc:AlternateContent xmlns:mc="http://schemas.openxmlformats.org/markup-compatibility/2006" xmlns:a14="http://schemas.microsoft.com/office/drawing/2010/main">
+        <mc:Choice Requires="a14">
           <p:sp>
             <p:nvSpPr>
               <p:cNvPr id="8" name="Rectangle 7">
@@ -21447,10 +21198,7 @@
                 <a:pPr algn="ctr"/>
                 <a14:m>
                   <m:oMathPara xmlns:m="http://schemas.openxmlformats.org/officeDocument/2006/math">
-                    <m:oMathParaPr>
-                      <m:jc m:val="centerGroup"/>
-                    </m:oMathParaPr>
-                    <m:oMath xmlns:m="http://schemas.openxmlformats.org/officeDocument/2006/math">
+                    <m:oMath>
                       <m:r>
                         <a:rPr lang="en-US" sz="1600" i="1">
                           <a:latin typeface="Cambria Math" panose="02040503050406030204" pitchFamily="18" charset="0"/>
@@ -21471,7 +21219,7 @@
             </p:txBody>
           </p:sp>
         </mc:Choice>
-        <mc:Fallback>
+        <mc:Fallback xmlns="">
           <p:sp>
             <p:nvSpPr>
               <p:cNvPr id="8" name="Rectangle 7">
@@ -21521,8 +21269,8 @@
           </p:sp>
         </mc:Fallback>
       </mc:AlternateContent>
-      <mc:AlternateContent xmlns:mc="http://schemas.openxmlformats.org/markup-compatibility/2006">
-        <mc:Choice xmlns:a14="http://schemas.microsoft.com/office/drawing/2010/main" Requires="a14">
+      <mc:AlternateContent xmlns:mc="http://schemas.openxmlformats.org/markup-compatibility/2006" xmlns:a14="http://schemas.microsoft.com/office/drawing/2010/main">
+        <mc:Choice Requires="a14">
           <p:sp>
             <p:nvSpPr>
               <p:cNvPr id="9" name="Rectangle 8">
@@ -21584,10 +21332,7 @@
                 <a:pPr algn="ctr"/>
                 <a14:m>
                   <m:oMathPara xmlns:m="http://schemas.openxmlformats.org/officeDocument/2006/math">
-                    <m:oMathParaPr>
-                      <m:jc m:val="centerGroup"/>
-                    </m:oMathParaPr>
-                    <m:oMath xmlns:m="http://schemas.openxmlformats.org/officeDocument/2006/math">
+                    <m:oMath>
                       <m:r>
                         <a:rPr lang="en-US" sz="1600" i="1">
                           <a:latin typeface="Cambria Math" panose="02040503050406030204" pitchFamily="18" charset="0"/>
@@ -21608,7 +21353,7 @@
             </p:txBody>
           </p:sp>
         </mc:Choice>
-        <mc:Fallback>
+        <mc:Fallback xmlns="">
           <p:sp>
             <p:nvSpPr>
               <p:cNvPr id="9" name="Rectangle 8">
@@ -21658,8 +21403,8 @@
           </p:sp>
         </mc:Fallback>
       </mc:AlternateContent>
-      <mc:AlternateContent xmlns:mc="http://schemas.openxmlformats.org/markup-compatibility/2006">
-        <mc:Choice xmlns:a14="http://schemas.microsoft.com/office/drawing/2010/main" Requires="a14">
+      <mc:AlternateContent xmlns:mc="http://schemas.openxmlformats.org/markup-compatibility/2006" xmlns:a14="http://schemas.microsoft.com/office/drawing/2010/main">
+        <mc:Choice Requires="a14">
           <p:sp>
             <p:nvSpPr>
               <p:cNvPr id="10" name="Rectangle 9">
@@ -21729,10 +21474,7 @@
                 <a:pPr algn="ctr"/>
                 <a14:m>
                   <m:oMathPara xmlns:m="http://schemas.openxmlformats.org/officeDocument/2006/math">
-                    <m:oMathParaPr>
-                      <m:jc m:val="centerGroup"/>
-                    </m:oMathParaPr>
-                    <m:oMath xmlns:m="http://schemas.openxmlformats.org/officeDocument/2006/math">
+                    <m:oMath>
                       <m:r>
                         <a:rPr lang="en-US" sz="1600" i="1">
                           <a:latin typeface="Cambria Math" panose="02040503050406030204" pitchFamily="18" charset="0"/>
@@ -21765,7 +21507,7 @@
             </p:txBody>
           </p:sp>
         </mc:Choice>
-        <mc:Fallback>
+        <mc:Fallback xmlns="">
           <p:sp>
             <p:nvSpPr>
               <p:cNvPr id="10" name="Rectangle 9">
@@ -22330,8 +22072,8 @@
           </a:fontRef>
         </p:style>
       </p:cxnSp>
-      <mc:AlternateContent xmlns:mc="http://schemas.openxmlformats.org/markup-compatibility/2006">
-        <mc:Choice xmlns:a14="http://schemas.microsoft.com/office/drawing/2010/main" Requires="a14">
+      <mc:AlternateContent xmlns:mc="http://schemas.openxmlformats.org/markup-compatibility/2006" xmlns:a14="http://schemas.microsoft.com/office/drawing/2010/main">
+        <mc:Choice Requires="a14">
           <p:sp>
             <p:nvSpPr>
               <p:cNvPr id="36" name="TextBox 35">
@@ -22363,10 +22105,7 @@
                 <a:pPr/>
                 <a14:m>
                   <m:oMathPara xmlns:m="http://schemas.openxmlformats.org/officeDocument/2006/math">
-                    <m:oMathParaPr>
-                      <m:jc m:val="centerGroup"/>
-                    </m:oMathParaPr>
-                    <m:oMath xmlns:m="http://schemas.openxmlformats.org/officeDocument/2006/math">
+                    <m:oMath>
                       <m:r>
                         <a:rPr lang="en-US" sz="1200" i="1">
                           <a:latin typeface="Cambria Math" panose="02040503050406030204" pitchFamily="18" charset="0"/>
@@ -22423,7 +22162,7 @@
             </p:txBody>
           </p:sp>
         </mc:Choice>
-        <mc:Fallback>
+        <mc:Fallback xmlns="">
           <p:sp>
             <p:nvSpPr>
               <p:cNvPr id="36" name="TextBox 35">
@@ -22468,8 +22207,8 @@
           </p:sp>
         </mc:Fallback>
       </mc:AlternateContent>
-      <mc:AlternateContent xmlns:mc="http://schemas.openxmlformats.org/markup-compatibility/2006">
-        <mc:Choice xmlns:a14="http://schemas.microsoft.com/office/drawing/2010/main" Requires="a14">
+      <mc:AlternateContent xmlns:mc="http://schemas.openxmlformats.org/markup-compatibility/2006" xmlns:a14="http://schemas.microsoft.com/office/drawing/2010/main">
+        <mc:Choice Requires="a14">
           <p:sp>
             <p:nvSpPr>
               <p:cNvPr id="39" name="TextBox 38">
@@ -22501,10 +22240,7 @@
                 <a:pPr/>
                 <a14:m>
                   <m:oMathPara xmlns:m="http://schemas.openxmlformats.org/officeDocument/2006/math">
-                    <m:oMathParaPr>
-                      <m:jc m:val="centerGroup"/>
-                    </m:oMathParaPr>
-                    <m:oMath xmlns:m="http://schemas.openxmlformats.org/officeDocument/2006/math">
+                    <m:oMath>
                       <m:r>
                         <a:rPr lang="en-US" sz="1200" i="1">
                           <a:latin typeface="Cambria Math" panose="02040503050406030204" pitchFamily="18" charset="0"/>
@@ -22531,7 +22267,7 @@
             </p:txBody>
           </p:sp>
         </mc:Choice>
-        <mc:Fallback>
+        <mc:Fallback xmlns="">
           <p:sp>
             <p:nvSpPr>
               <p:cNvPr id="39" name="TextBox 38">
@@ -22576,8 +22312,8 @@
           </p:sp>
         </mc:Fallback>
       </mc:AlternateContent>
-      <mc:AlternateContent xmlns:mc="http://schemas.openxmlformats.org/markup-compatibility/2006">
-        <mc:Choice xmlns:a14="http://schemas.microsoft.com/office/drawing/2010/main" Requires="a14">
+      <mc:AlternateContent xmlns:mc="http://schemas.openxmlformats.org/markup-compatibility/2006" xmlns:a14="http://schemas.microsoft.com/office/drawing/2010/main">
+        <mc:Choice Requires="a14">
           <p:sp>
             <p:nvSpPr>
               <p:cNvPr id="40" name="TextBox 39">
@@ -22609,10 +22345,7 @@
                 <a:pPr/>
                 <a14:m>
                   <m:oMathPara xmlns:m="http://schemas.openxmlformats.org/officeDocument/2006/math">
-                    <m:oMathParaPr>
-                      <m:jc m:val="centerGroup"/>
-                    </m:oMathParaPr>
-                    <m:oMath xmlns:m="http://schemas.openxmlformats.org/officeDocument/2006/math">
+                    <m:oMath>
                       <m:r>
                         <a:rPr lang="en-US" sz="1200" i="1">
                           <a:latin typeface="Cambria Math" panose="02040503050406030204" pitchFamily="18" charset="0"/>
@@ -22669,7 +22402,7 @@
             </p:txBody>
           </p:sp>
         </mc:Choice>
-        <mc:Fallback>
+        <mc:Fallback xmlns="">
           <p:sp>
             <p:nvSpPr>
               <p:cNvPr id="40" name="TextBox 39">
@@ -22714,8 +22447,8 @@
           </p:sp>
         </mc:Fallback>
       </mc:AlternateContent>
-      <mc:AlternateContent xmlns:mc="http://schemas.openxmlformats.org/markup-compatibility/2006">
-        <mc:Choice xmlns:a14="http://schemas.microsoft.com/office/drawing/2010/main" Requires="a14">
+      <mc:AlternateContent xmlns:mc="http://schemas.openxmlformats.org/markup-compatibility/2006" xmlns:a14="http://schemas.microsoft.com/office/drawing/2010/main">
+        <mc:Choice Requires="a14">
           <p:sp>
             <p:nvSpPr>
               <p:cNvPr id="44" name="TextBox 43">
@@ -22747,10 +22480,7 @@
                 <a:pPr/>
                 <a14:m>
                   <m:oMathPara xmlns:m="http://schemas.openxmlformats.org/officeDocument/2006/math">
-                    <m:oMathParaPr>
-                      <m:jc m:val="centerGroup"/>
-                    </m:oMathParaPr>
-                    <m:oMath xmlns:m="http://schemas.openxmlformats.org/officeDocument/2006/math">
+                    <m:oMath>
                       <m:r>
                         <a:rPr lang="en-US" sz="1200" i="1">
                           <a:latin typeface="Cambria Math" panose="02040503050406030204" pitchFamily="18" charset="0"/>
@@ -22777,7 +22507,7 @@
             </p:txBody>
           </p:sp>
         </mc:Choice>
-        <mc:Fallback>
+        <mc:Fallback xmlns="">
           <p:sp>
             <p:nvSpPr>
               <p:cNvPr id="44" name="TextBox 43">
@@ -22822,8 +22552,8 @@
           </p:sp>
         </mc:Fallback>
       </mc:AlternateContent>
-      <mc:AlternateContent xmlns:mc="http://schemas.openxmlformats.org/markup-compatibility/2006">
-        <mc:Choice xmlns:a14="http://schemas.microsoft.com/office/drawing/2010/main" Requires="a14">
+      <mc:AlternateContent xmlns:mc="http://schemas.openxmlformats.org/markup-compatibility/2006" xmlns:a14="http://schemas.microsoft.com/office/drawing/2010/main">
+        <mc:Choice Requires="a14">
           <p:sp>
             <p:nvSpPr>
               <p:cNvPr id="72" name="TextBox 71">
@@ -22855,10 +22585,7 @@
                 <a:pPr/>
                 <a14:m>
                   <m:oMathPara xmlns:m="http://schemas.openxmlformats.org/officeDocument/2006/math">
-                    <m:oMathParaPr>
-                      <m:jc m:val="centerGroup"/>
-                    </m:oMathParaPr>
-                    <m:oMath xmlns:m="http://schemas.openxmlformats.org/officeDocument/2006/math">
+                    <m:oMath>
                       <m:r>
                         <a:rPr lang="en-US" sz="1200" i="1">
                           <a:latin typeface="Cambria Math" panose="02040503050406030204" pitchFamily="18" charset="0"/>
@@ -22891,7 +22618,7 @@
             </p:txBody>
           </p:sp>
         </mc:Choice>
-        <mc:Fallback>
+        <mc:Fallback xmlns="">
           <p:sp>
             <p:nvSpPr>
               <p:cNvPr id="72" name="TextBox 71">
@@ -22936,8 +22663,8 @@
           </p:sp>
         </mc:Fallback>
       </mc:AlternateContent>
-      <mc:AlternateContent xmlns:mc="http://schemas.openxmlformats.org/markup-compatibility/2006">
-        <mc:Choice xmlns:a14="http://schemas.microsoft.com/office/drawing/2010/main" Requires="a14">
+      <mc:AlternateContent xmlns:mc="http://schemas.openxmlformats.org/markup-compatibility/2006" xmlns:a14="http://schemas.microsoft.com/office/drawing/2010/main">
+        <mc:Choice Requires="a14">
           <p:sp>
             <p:nvSpPr>
               <p:cNvPr id="74" name="TextBox 73">
@@ -22969,10 +22696,7 @@
                 <a:pPr/>
                 <a14:m>
                   <m:oMathPara xmlns:m="http://schemas.openxmlformats.org/officeDocument/2006/math">
-                    <m:oMathParaPr>
-                      <m:jc m:val="centerGroup"/>
-                    </m:oMathParaPr>
-                    <m:oMath xmlns:m="http://schemas.openxmlformats.org/officeDocument/2006/math">
+                    <m:oMath>
                       <m:r>
                         <a:rPr lang="en-US" sz="1200" i="1">
                           <a:latin typeface="Cambria Math" panose="02040503050406030204" pitchFamily="18" charset="0"/>
@@ -23018,7 +22742,7 @@
             </p:txBody>
           </p:sp>
         </mc:Choice>
-        <mc:Fallback>
+        <mc:Fallback xmlns="">
           <p:sp>
             <p:nvSpPr>
               <p:cNvPr id="74" name="TextBox 73">
@@ -23063,8 +22787,8 @@
           </p:sp>
         </mc:Fallback>
       </mc:AlternateContent>
-      <mc:AlternateContent xmlns:mc="http://schemas.openxmlformats.org/markup-compatibility/2006">
-        <mc:Choice xmlns:a14="http://schemas.microsoft.com/office/drawing/2010/main" Requires="a14">
+      <mc:AlternateContent xmlns:mc="http://schemas.openxmlformats.org/markup-compatibility/2006" xmlns:a14="http://schemas.microsoft.com/office/drawing/2010/main">
+        <mc:Choice Requires="a14">
           <p:sp>
             <p:nvSpPr>
               <p:cNvPr id="75" name="TextBox 74">
@@ -23096,10 +22820,7 @@
                 <a:pPr/>
                 <a14:m>
                   <m:oMathPara xmlns:m="http://schemas.openxmlformats.org/officeDocument/2006/math">
-                    <m:oMathParaPr>
-                      <m:jc m:val="centerGroup"/>
-                    </m:oMathParaPr>
-                    <m:oMath xmlns:m="http://schemas.openxmlformats.org/officeDocument/2006/math">
+                    <m:oMath>
                       <m:r>
                         <a:rPr lang="en-US" sz="1200" i="1">
                           <a:latin typeface="Cambria Math" panose="02040503050406030204" pitchFamily="18" charset="0"/>
@@ -23127,7 +22848,7 @@
             </p:txBody>
           </p:sp>
         </mc:Choice>
-        <mc:Fallback>
+        <mc:Fallback xmlns="">
           <p:sp>
             <p:nvSpPr>
               <p:cNvPr id="75" name="TextBox 74">
@@ -23172,8 +22893,8 @@
           </p:sp>
         </mc:Fallback>
       </mc:AlternateContent>
-      <mc:AlternateContent xmlns:mc="http://schemas.openxmlformats.org/markup-compatibility/2006">
-        <mc:Choice xmlns:a14="http://schemas.microsoft.com/office/drawing/2010/main" Requires="a14">
+      <mc:AlternateContent xmlns:mc="http://schemas.openxmlformats.org/markup-compatibility/2006" xmlns:a14="http://schemas.microsoft.com/office/drawing/2010/main">
+        <mc:Choice Requires="a14">
           <p:sp>
             <p:nvSpPr>
               <p:cNvPr id="76" name="TextBox 75">
@@ -23205,10 +22926,7 @@
                 <a:pPr/>
                 <a14:m>
                   <m:oMathPara xmlns:m="http://schemas.openxmlformats.org/officeDocument/2006/math">
-                    <m:oMathParaPr>
-                      <m:jc m:val="centerGroup"/>
-                    </m:oMathParaPr>
-                    <m:oMath xmlns:m="http://schemas.openxmlformats.org/officeDocument/2006/math">
+                    <m:oMath>
                       <m:r>
                         <a:rPr lang="en-US" sz="1200" i="1">
                           <a:latin typeface="Cambria Math" panose="02040503050406030204" pitchFamily="18" charset="0"/>
@@ -23229,7 +22947,7 @@
             </p:txBody>
           </p:sp>
         </mc:Choice>
-        <mc:Fallback>
+        <mc:Fallback xmlns="">
           <p:sp>
             <p:nvSpPr>
               <p:cNvPr id="76" name="TextBox 75">
@@ -23274,8 +22992,8 @@
           </p:sp>
         </mc:Fallback>
       </mc:AlternateContent>
-      <mc:AlternateContent xmlns:mc="http://schemas.openxmlformats.org/markup-compatibility/2006">
-        <mc:Choice xmlns:a14="http://schemas.microsoft.com/office/drawing/2010/main" Requires="a14">
+      <mc:AlternateContent xmlns:mc="http://schemas.openxmlformats.org/markup-compatibility/2006" xmlns:a14="http://schemas.microsoft.com/office/drawing/2010/main">
+        <mc:Choice Requires="a14">
           <p:sp>
             <p:nvSpPr>
               <p:cNvPr id="77" name="TextBox 76">
@@ -23307,10 +23025,7 @@
                 <a:pPr/>
                 <a14:m>
                   <m:oMathPara xmlns:m="http://schemas.openxmlformats.org/officeDocument/2006/math">
-                    <m:oMathParaPr>
-                      <m:jc m:val="centerGroup"/>
-                    </m:oMathParaPr>
-                    <m:oMath xmlns:m="http://schemas.openxmlformats.org/officeDocument/2006/math">
+                    <m:oMath>
                       <m:r>
                         <a:rPr lang="en-US" sz="1200" i="1">
                           <a:latin typeface="Cambria Math" panose="02040503050406030204" pitchFamily="18" charset="0"/>
@@ -23343,7 +23058,7 @@
             </p:txBody>
           </p:sp>
         </mc:Choice>
-        <mc:Fallback>
+        <mc:Fallback xmlns="">
           <p:sp>
             <p:nvSpPr>
               <p:cNvPr id="77" name="TextBox 76">
@@ -23388,8 +23103,8 @@
           </p:sp>
         </mc:Fallback>
       </mc:AlternateContent>
-      <mc:AlternateContent xmlns:mc="http://schemas.openxmlformats.org/markup-compatibility/2006">
-        <mc:Choice xmlns:a14="http://schemas.microsoft.com/office/drawing/2010/main" Requires="a14">
+      <mc:AlternateContent xmlns:mc="http://schemas.openxmlformats.org/markup-compatibility/2006" xmlns:a14="http://schemas.microsoft.com/office/drawing/2010/main">
+        <mc:Choice Requires="a14">
           <p:sp>
             <p:nvSpPr>
               <p:cNvPr id="78" name="TextBox 77">
@@ -23421,10 +23136,7 @@
                 <a:pPr/>
                 <a14:m>
                   <m:oMathPara xmlns:m="http://schemas.openxmlformats.org/officeDocument/2006/math">
-                    <m:oMathParaPr>
-                      <m:jc m:val="centerGroup"/>
-                    </m:oMathParaPr>
-                    <m:oMath xmlns:m="http://schemas.openxmlformats.org/officeDocument/2006/math">
+                    <m:oMath>
                       <m:r>
                         <a:rPr lang="en-US" sz="1200" i="1">
                           <a:latin typeface="Cambria Math" panose="02040503050406030204" pitchFamily="18" charset="0"/>
@@ -23445,7 +23157,7 @@
             </p:txBody>
           </p:sp>
         </mc:Choice>
-        <mc:Fallback>
+        <mc:Fallback xmlns="">
           <p:sp>
             <p:nvSpPr>
               <p:cNvPr id="78" name="TextBox 77">
@@ -23490,8 +23202,8 @@
           </p:sp>
         </mc:Fallback>
       </mc:AlternateContent>
-      <mc:AlternateContent xmlns:mc="http://schemas.openxmlformats.org/markup-compatibility/2006">
-        <mc:Choice xmlns:a14="http://schemas.microsoft.com/office/drawing/2010/main" Requires="a14">
+      <mc:AlternateContent xmlns:mc="http://schemas.openxmlformats.org/markup-compatibility/2006" xmlns:a14="http://schemas.microsoft.com/office/drawing/2010/main">
+        <mc:Choice Requires="a14">
           <p:sp>
             <p:nvSpPr>
               <p:cNvPr id="79" name="TextBox 78">
@@ -23523,10 +23235,7 @@
                 <a:pPr/>
                 <a14:m>
                   <m:oMathPara xmlns:m="http://schemas.openxmlformats.org/officeDocument/2006/math">
-                    <m:oMathParaPr>
-                      <m:jc m:val="centerGroup"/>
-                    </m:oMathParaPr>
-                    <m:oMath xmlns:m="http://schemas.openxmlformats.org/officeDocument/2006/math">
+                    <m:oMath>
                       <m:r>
                         <a:rPr lang="en-US" sz="1200" i="1">
                           <a:latin typeface="Cambria Math" panose="02040503050406030204" pitchFamily="18" charset="0"/>
@@ -23547,7 +23256,7 @@
             </p:txBody>
           </p:sp>
         </mc:Choice>
-        <mc:Fallback>
+        <mc:Fallback xmlns="">
           <p:sp>
             <p:nvSpPr>
               <p:cNvPr id="79" name="TextBox 78">
@@ -23592,8 +23301,8 @@
           </p:sp>
         </mc:Fallback>
       </mc:AlternateContent>
-      <mc:AlternateContent xmlns:mc="http://schemas.openxmlformats.org/markup-compatibility/2006">
-        <mc:Choice xmlns:a14="http://schemas.microsoft.com/office/drawing/2010/main" Requires="a14">
+      <mc:AlternateContent xmlns:mc="http://schemas.openxmlformats.org/markup-compatibility/2006" xmlns:a14="http://schemas.microsoft.com/office/drawing/2010/main">
+        <mc:Choice Requires="a14">
           <p:sp>
             <p:nvSpPr>
               <p:cNvPr id="80" name="TextBox 79">
@@ -23625,10 +23334,7 @@
                 <a:pPr/>
                 <a14:m>
                   <m:oMathPara xmlns:m="http://schemas.openxmlformats.org/officeDocument/2006/math">
-                    <m:oMathParaPr>
-                      <m:jc m:val="centerGroup"/>
-                    </m:oMathParaPr>
-                    <m:oMath xmlns:m="http://schemas.openxmlformats.org/officeDocument/2006/math">
+                    <m:oMath>
                       <m:r>
                         <a:rPr lang="en-US" sz="1200" i="1">
                           <a:latin typeface="Cambria Math" panose="02040503050406030204" pitchFamily="18" charset="0"/>
@@ -23661,7 +23367,7 @@
             </p:txBody>
           </p:sp>
         </mc:Choice>
-        <mc:Fallback>
+        <mc:Fallback xmlns="">
           <p:sp>
             <p:nvSpPr>
               <p:cNvPr id="80" name="TextBox 79">
@@ -23841,7 +23547,9 @@
             <a:prstGeom prst="rect">
               <a:avLst/>
             </a:prstGeom>
-            <a:ln w="57150"/>
+            <a:ln w="57150">
+              <a:prstDash val="lgDash"/>
+            </a:ln>
           </p:spPr>
           <p:style>
             <a:lnRef idx="2">
@@ -23921,8 +23629,8 @@
             </a:p>
           </p:txBody>
         </p:sp>
-        <mc:AlternateContent xmlns:mc="http://schemas.openxmlformats.org/markup-compatibility/2006" xmlns:a14="http://schemas.microsoft.com/office/drawing/2010/main">
-          <mc:Choice Requires="a14">
+        <mc:AlternateContent xmlns:mc="http://schemas.openxmlformats.org/markup-compatibility/2006">
+          <mc:Choice xmlns:a14="http://schemas.microsoft.com/office/drawing/2010/main" Requires="a14">
             <p:sp>
               <p:nvSpPr>
                 <p:cNvPr id="6" name="Rectangle 5">
@@ -23943,7 +23651,9 @@
                 <a:prstGeom prst="rect">
                   <a:avLst/>
                 </a:prstGeom>
-                <a:ln w="57150"/>
+                <a:ln w="57150">
+                  <a:prstDash val="lgDash"/>
+                </a:ln>
               </p:spPr>
               <p:style>
                 <a:lnRef idx="2">
@@ -23980,10 +23690,7 @@
                   <a:pPr algn="ctr"/>
                   <a14:m>
                     <m:oMathPara xmlns:m="http://schemas.openxmlformats.org/officeDocument/2006/math">
-                      <m:oMathParaPr>
-                        <m:jc m:val="centerGroup"/>
-                      </m:oMathParaPr>
-                      <m:oMath xmlns:m="http://schemas.openxmlformats.org/officeDocument/2006/math">
+                      <m:oMath>
                         <m:r>
                           <a:rPr lang="en-US" sz="1600" i="1">
                             <a:latin typeface="Cambria Math" panose="02040503050406030204" pitchFamily="18" charset="0"/>
@@ -24004,7 +23711,7 @@
               </p:txBody>
             </p:sp>
           </mc:Choice>
-          <mc:Fallback xmlns="">
+          <mc:Fallback>
             <p:sp>
               <p:nvSpPr>
                 <p:cNvPr id="6" name="Rectangle 5">
@@ -24033,7 +23740,9 @@
                     <a:fillRect/>
                   </a:stretch>
                 </a:blipFill>
-                <a:ln w="57150"/>
+                <a:ln w="57150">
+                  <a:prstDash val="lgDash"/>
+                </a:ln>
               </p:spPr>
               <p:txBody>
                 <a:bodyPr/>
@@ -24050,8 +23759,8 @@
             </p:sp>
           </mc:Fallback>
         </mc:AlternateContent>
-        <mc:AlternateContent xmlns:mc="http://schemas.openxmlformats.org/markup-compatibility/2006" xmlns:a14="http://schemas.microsoft.com/office/drawing/2010/main">
-          <mc:Choice Requires="a14">
+        <mc:AlternateContent xmlns:mc="http://schemas.openxmlformats.org/markup-compatibility/2006">
+          <mc:Choice xmlns:a14="http://schemas.microsoft.com/office/drawing/2010/main" Requires="a14">
             <p:sp>
               <p:nvSpPr>
                 <p:cNvPr id="7" name="Rectangle 6">
@@ -24106,7 +23815,7 @@
                   <a:pPr algn="ctr"/>
                   <a:r>
                     <a:rPr lang="en-US" sz="1600" i="1" dirty="0"/>
-                    <a:t>(Blum &amp; Francois 2005)</a:t>
+                    <a:t>(Blum &amp; François 2005)</a:t>
                   </a:r>
                 </a:p>
                 <a:p>
@@ -24130,7 +23839,7 @@
               </p:txBody>
             </p:sp>
           </mc:Choice>
-          <mc:Fallback xmlns="">
+          <mc:Fallback>
             <p:sp>
               <p:nvSpPr>
                 <p:cNvPr id="7" name="Rectangle 6">
@@ -24180,8 +23889,8 @@
             </p:sp>
           </mc:Fallback>
         </mc:AlternateContent>
-        <mc:AlternateContent xmlns:mc="http://schemas.openxmlformats.org/markup-compatibility/2006" xmlns:a14="http://schemas.microsoft.com/office/drawing/2010/main">
-          <mc:Choice Requires="a14">
+        <mc:AlternateContent xmlns:mc="http://schemas.openxmlformats.org/markup-compatibility/2006">
+          <mc:Choice xmlns:a14="http://schemas.microsoft.com/office/drawing/2010/main" Requires="a14">
             <p:sp>
               <p:nvSpPr>
                 <p:cNvPr id="8" name="Rectangle 7">
@@ -24236,17 +23945,14 @@
                   <a:pPr algn="ctr"/>
                   <a:r>
                     <a:rPr lang="en-US" sz="1600" i="1" dirty="0"/>
-                    <a:t>(Blum &amp; Francois 2005)</a:t>
+                    <a:t>(Blum &amp; François 2005)</a:t>
                   </a:r>
                 </a:p>
                 <a:p>
                   <a:pPr algn="ctr"/>
                   <a14:m>
                     <m:oMathPara xmlns:m="http://schemas.openxmlformats.org/officeDocument/2006/math">
-                      <m:oMathParaPr>
-                        <m:jc m:val="centerGroup"/>
-                      </m:oMathParaPr>
-                      <m:oMath xmlns:m="http://schemas.openxmlformats.org/officeDocument/2006/math">
+                      <m:oMath>
                         <m:r>
                           <a:rPr lang="en-US" sz="1600" i="1">
                             <a:latin typeface="Cambria Math" panose="02040503050406030204" pitchFamily="18" charset="0"/>
@@ -24267,7 +23973,7 @@
               </p:txBody>
             </p:sp>
           </mc:Choice>
-          <mc:Fallback xmlns="">
+          <mc:Fallback>
             <p:sp>
               <p:nvSpPr>
                 <p:cNvPr id="8" name="Rectangle 7">
@@ -24317,8 +24023,8 @@
             </p:sp>
           </mc:Fallback>
         </mc:AlternateContent>
-        <mc:AlternateContent xmlns:mc="http://schemas.openxmlformats.org/markup-compatibility/2006" xmlns:a14="http://schemas.microsoft.com/office/drawing/2010/main">
-          <mc:Choice Requires="a14">
+        <mc:AlternateContent xmlns:mc="http://schemas.openxmlformats.org/markup-compatibility/2006">
+          <mc:Choice xmlns:a14="http://schemas.microsoft.com/office/drawing/2010/main" Requires="a14">
             <p:sp>
               <p:nvSpPr>
                 <p:cNvPr id="9" name="Rectangle 8">
@@ -24373,17 +24079,14 @@
                   <a:pPr algn="ctr"/>
                   <a:r>
                     <a:rPr lang="en-US" sz="1600" i="1" dirty="0"/>
-                    <a:t>(Blum &amp; Francois 2006)</a:t>
+                    <a:t>(Blum &amp; François 2006)</a:t>
                   </a:r>
                 </a:p>
                 <a:p>
                   <a:pPr algn="ctr"/>
                   <a14:m>
                     <m:oMathPara xmlns:m="http://schemas.openxmlformats.org/officeDocument/2006/math">
-                      <m:oMathParaPr>
-                        <m:jc m:val="centerGroup"/>
-                      </m:oMathParaPr>
-                      <m:oMath xmlns:m="http://schemas.openxmlformats.org/officeDocument/2006/math">
+                      <m:oMath>
                         <m:r>
                           <a:rPr lang="en-US" sz="1600" i="1">
                             <a:latin typeface="Cambria Math" panose="02040503050406030204" pitchFamily="18" charset="0"/>
@@ -24404,7 +24107,7 @@
               </p:txBody>
             </p:sp>
           </mc:Choice>
-          <mc:Fallback xmlns="">
+          <mc:Fallback>
             <p:sp>
               <p:nvSpPr>
                 <p:cNvPr id="9" name="Rectangle 8">
@@ -24529,10 +24232,7 @@
                   <a:pPr algn="ctr"/>
                   <a14:m>
                     <m:oMathPara xmlns:m="http://schemas.openxmlformats.org/officeDocument/2006/math">
-                      <m:oMathParaPr>
-                        <m:jc m:val="centerGroup"/>
-                      </m:oMathParaPr>
-                      <m:oMath xmlns:m="http://schemas.openxmlformats.org/officeDocument/2006/math">
+                      <m:oMath>
                         <m:r>
                           <a:rPr lang="en-US" sz="1600" i="1">
                             <a:latin typeface="Cambria Math" panose="02040503050406030204" pitchFamily="18" charset="0"/>
@@ -25125,8 +24825,8 @@
             </a:fontRef>
           </p:style>
         </p:cxnSp>
-        <mc:AlternateContent xmlns:mc="http://schemas.openxmlformats.org/markup-compatibility/2006">
-          <mc:Choice xmlns:a14="http://schemas.microsoft.com/office/drawing/2010/main" Requires="a14">
+        <mc:AlternateContent xmlns:mc="http://schemas.openxmlformats.org/markup-compatibility/2006" xmlns:a14="http://schemas.microsoft.com/office/drawing/2010/main">
+          <mc:Choice Requires="a14">
             <p:sp>
               <p:nvSpPr>
                 <p:cNvPr id="36" name="TextBox 35">
@@ -25158,10 +24858,7 @@
                   <a:pPr/>
                   <a14:m>
                     <m:oMathPara xmlns:m="http://schemas.openxmlformats.org/officeDocument/2006/math">
-                      <m:oMathParaPr>
-                        <m:jc m:val="centerGroup"/>
-                      </m:oMathParaPr>
-                      <m:oMath xmlns:m="http://schemas.openxmlformats.org/officeDocument/2006/math">
+                      <m:oMath>
                         <m:r>
                           <a:rPr lang="en-US" sz="1400" i="1">
                             <a:latin typeface="Cambria Math" panose="02040503050406030204" pitchFamily="18" charset="0"/>
@@ -25218,7 +24915,7 @@
               </p:txBody>
             </p:sp>
           </mc:Choice>
-          <mc:Fallback>
+          <mc:Fallback xmlns="">
             <p:sp>
               <p:nvSpPr>
                 <p:cNvPr id="36" name="TextBox 35">
@@ -25263,8 +24960,8 @@
             </p:sp>
           </mc:Fallback>
         </mc:AlternateContent>
-        <mc:AlternateContent xmlns:mc="http://schemas.openxmlformats.org/markup-compatibility/2006">
-          <mc:Choice xmlns:a14="http://schemas.microsoft.com/office/drawing/2010/main" Requires="a14">
+        <mc:AlternateContent xmlns:mc="http://schemas.openxmlformats.org/markup-compatibility/2006" xmlns:a14="http://schemas.microsoft.com/office/drawing/2010/main">
+          <mc:Choice Requires="a14">
             <p:sp>
               <p:nvSpPr>
                 <p:cNvPr id="39" name="TextBox 38">
@@ -25296,10 +24993,7 @@
                   <a:pPr/>
                   <a14:m>
                     <m:oMathPara xmlns:m="http://schemas.openxmlformats.org/officeDocument/2006/math">
-                      <m:oMathParaPr>
-                        <m:jc m:val="centerGroup"/>
-                      </m:oMathParaPr>
-                      <m:oMath xmlns:m="http://schemas.openxmlformats.org/officeDocument/2006/math">
+                      <m:oMath>
                         <m:r>
                           <a:rPr lang="en-US" sz="1400" i="1">
                             <a:latin typeface="Cambria Math" panose="02040503050406030204" pitchFamily="18" charset="0"/>
@@ -25326,7 +25020,7 @@
               </p:txBody>
             </p:sp>
           </mc:Choice>
-          <mc:Fallback>
+          <mc:Fallback xmlns="">
             <p:sp>
               <p:nvSpPr>
                 <p:cNvPr id="39" name="TextBox 38">
@@ -25371,8 +25065,8 @@
             </p:sp>
           </mc:Fallback>
         </mc:AlternateContent>
-        <mc:AlternateContent xmlns:mc="http://schemas.openxmlformats.org/markup-compatibility/2006">
-          <mc:Choice xmlns:a14="http://schemas.microsoft.com/office/drawing/2010/main" Requires="a14">
+        <mc:AlternateContent xmlns:mc="http://schemas.openxmlformats.org/markup-compatibility/2006" xmlns:a14="http://schemas.microsoft.com/office/drawing/2010/main">
+          <mc:Choice Requires="a14">
             <p:sp>
               <p:nvSpPr>
                 <p:cNvPr id="40" name="TextBox 39">
@@ -25404,10 +25098,7 @@
                   <a:pPr/>
                   <a14:m>
                     <m:oMathPara xmlns:m="http://schemas.openxmlformats.org/officeDocument/2006/math">
-                      <m:oMathParaPr>
-                        <m:jc m:val="centerGroup"/>
-                      </m:oMathParaPr>
-                      <m:oMath xmlns:m="http://schemas.openxmlformats.org/officeDocument/2006/math">
+                      <m:oMath>
                         <m:r>
                           <a:rPr lang="en-US" sz="1400" i="1">
                             <a:latin typeface="Cambria Math" panose="02040503050406030204" pitchFamily="18" charset="0"/>
@@ -25464,7 +25155,7 @@
               </p:txBody>
             </p:sp>
           </mc:Choice>
-          <mc:Fallback>
+          <mc:Fallback xmlns="">
             <p:sp>
               <p:nvSpPr>
                 <p:cNvPr id="40" name="TextBox 39">
@@ -25509,8 +25200,8 @@
             </p:sp>
           </mc:Fallback>
         </mc:AlternateContent>
-        <mc:AlternateContent xmlns:mc="http://schemas.openxmlformats.org/markup-compatibility/2006">
-          <mc:Choice xmlns:a14="http://schemas.microsoft.com/office/drawing/2010/main" Requires="a14">
+        <mc:AlternateContent xmlns:mc="http://schemas.openxmlformats.org/markup-compatibility/2006" xmlns:a14="http://schemas.microsoft.com/office/drawing/2010/main">
+          <mc:Choice Requires="a14">
             <p:sp>
               <p:nvSpPr>
                 <p:cNvPr id="44" name="TextBox 43">
@@ -25542,10 +25233,7 @@
                   <a:pPr/>
                   <a14:m>
                     <m:oMathPara xmlns:m="http://schemas.openxmlformats.org/officeDocument/2006/math">
-                      <m:oMathParaPr>
-                        <m:jc m:val="centerGroup"/>
-                      </m:oMathParaPr>
-                      <m:oMath xmlns:m="http://schemas.openxmlformats.org/officeDocument/2006/math">
+                      <m:oMath>
                         <m:r>
                           <a:rPr lang="en-US" sz="1400" i="1">
                             <a:latin typeface="Cambria Math" panose="02040503050406030204" pitchFamily="18" charset="0"/>
@@ -25572,7 +25260,7 @@
               </p:txBody>
             </p:sp>
           </mc:Choice>
-          <mc:Fallback>
+          <mc:Fallback xmlns="">
             <p:sp>
               <p:nvSpPr>
                 <p:cNvPr id="44" name="TextBox 43">
@@ -25617,8 +25305,8 @@
             </p:sp>
           </mc:Fallback>
         </mc:AlternateContent>
-        <mc:AlternateContent xmlns:mc="http://schemas.openxmlformats.org/markup-compatibility/2006">
-          <mc:Choice xmlns:a14="http://schemas.microsoft.com/office/drawing/2010/main" Requires="a14">
+        <mc:AlternateContent xmlns:mc="http://schemas.openxmlformats.org/markup-compatibility/2006" xmlns:a14="http://schemas.microsoft.com/office/drawing/2010/main">
+          <mc:Choice Requires="a14">
             <p:sp>
               <p:nvSpPr>
                 <p:cNvPr id="72" name="TextBox 71">
@@ -25650,10 +25338,7 @@
                   <a:pPr/>
                   <a14:m>
                     <m:oMathPara xmlns:m="http://schemas.openxmlformats.org/officeDocument/2006/math">
-                      <m:oMathParaPr>
-                        <m:jc m:val="centerGroup"/>
-                      </m:oMathParaPr>
-                      <m:oMath xmlns:m="http://schemas.openxmlformats.org/officeDocument/2006/math">
+                      <m:oMath>
                         <m:r>
                           <a:rPr lang="en-US" sz="1400" i="1">
                             <a:latin typeface="Cambria Math" panose="02040503050406030204" pitchFamily="18" charset="0"/>
@@ -25686,7 +25371,7 @@
               </p:txBody>
             </p:sp>
           </mc:Choice>
-          <mc:Fallback>
+          <mc:Fallback xmlns="">
             <p:sp>
               <p:nvSpPr>
                 <p:cNvPr id="72" name="TextBox 71">
@@ -25731,8 +25416,8 @@
             </p:sp>
           </mc:Fallback>
         </mc:AlternateContent>
-        <mc:AlternateContent xmlns:mc="http://schemas.openxmlformats.org/markup-compatibility/2006">
-          <mc:Choice xmlns:a14="http://schemas.microsoft.com/office/drawing/2010/main" Requires="a14">
+        <mc:AlternateContent xmlns:mc="http://schemas.openxmlformats.org/markup-compatibility/2006" xmlns:a14="http://schemas.microsoft.com/office/drawing/2010/main">
+          <mc:Choice Requires="a14">
             <p:sp>
               <p:nvSpPr>
                 <p:cNvPr id="74" name="TextBox 73">
@@ -25764,10 +25449,7 @@
                   <a:pPr/>
                   <a14:m>
                     <m:oMathPara xmlns:m="http://schemas.openxmlformats.org/officeDocument/2006/math">
-                      <m:oMathParaPr>
-                        <m:jc m:val="centerGroup"/>
-                      </m:oMathParaPr>
-                      <m:oMath xmlns:m="http://schemas.openxmlformats.org/officeDocument/2006/math">
+                      <m:oMath>
                         <m:r>
                           <a:rPr lang="en-US" sz="1400" i="1">
                             <a:latin typeface="Cambria Math" panose="02040503050406030204" pitchFamily="18" charset="0"/>
@@ -25813,7 +25495,7 @@
               </p:txBody>
             </p:sp>
           </mc:Choice>
-          <mc:Fallback>
+          <mc:Fallback xmlns="">
             <p:sp>
               <p:nvSpPr>
                 <p:cNvPr id="74" name="TextBox 73">
@@ -25858,8 +25540,8 @@
             </p:sp>
           </mc:Fallback>
         </mc:AlternateContent>
-        <mc:AlternateContent xmlns:mc="http://schemas.openxmlformats.org/markup-compatibility/2006">
-          <mc:Choice xmlns:a14="http://schemas.microsoft.com/office/drawing/2010/main" Requires="a14">
+        <mc:AlternateContent xmlns:mc="http://schemas.openxmlformats.org/markup-compatibility/2006" xmlns:a14="http://schemas.microsoft.com/office/drawing/2010/main">
+          <mc:Choice Requires="a14">
             <p:sp>
               <p:nvSpPr>
                 <p:cNvPr id="75" name="TextBox 74">
@@ -25891,10 +25573,7 @@
                   <a:pPr/>
                   <a14:m>
                     <m:oMathPara xmlns:m="http://schemas.openxmlformats.org/officeDocument/2006/math">
-                      <m:oMathParaPr>
-                        <m:jc m:val="centerGroup"/>
-                      </m:oMathParaPr>
-                      <m:oMath xmlns:m="http://schemas.openxmlformats.org/officeDocument/2006/math">
+                      <m:oMath>
                         <m:r>
                           <a:rPr lang="en-US" sz="1400" i="1">
                             <a:latin typeface="Cambria Math" panose="02040503050406030204" pitchFamily="18" charset="0"/>
@@ -25922,7 +25601,7 @@
               </p:txBody>
             </p:sp>
           </mc:Choice>
-          <mc:Fallback>
+          <mc:Fallback xmlns="">
             <p:sp>
               <p:nvSpPr>
                 <p:cNvPr id="75" name="TextBox 74">
@@ -25967,8 +25646,8 @@
             </p:sp>
           </mc:Fallback>
         </mc:AlternateContent>
-        <mc:AlternateContent xmlns:mc="http://schemas.openxmlformats.org/markup-compatibility/2006">
-          <mc:Choice xmlns:a14="http://schemas.microsoft.com/office/drawing/2010/main" Requires="a14">
+        <mc:AlternateContent xmlns:mc="http://schemas.openxmlformats.org/markup-compatibility/2006" xmlns:a14="http://schemas.microsoft.com/office/drawing/2010/main">
+          <mc:Choice Requires="a14">
             <p:sp>
               <p:nvSpPr>
                 <p:cNvPr id="76" name="TextBox 75">
@@ -26000,10 +25679,7 @@
                   <a:pPr/>
                   <a14:m>
                     <m:oMathPara xmlns:m="http://schemas.openxmlformats.org/officeDocument/2006/math">
-                      <m:oMathParaPr>
-                        <m:jc m:val="centerGroup"/>
-                      </m:oMathParaPr>
-                      <m:oMath xmlns:m="http://schemas.openxmlformats.org/officeDocument/2006/math">
+                      <m:oMath>
                         <m:r>
                           <a:rPr lang="en-US" sz="1400" i="1">
                             <a:latin typeface="Cambria Math" panose="02040503050406030204" pitchFamily="18" charset="0"/>
@@ -26024,7 +25700,7 @@
               </p:txBody>
             </p:sp>
           </mc:Choice>
-          <mc:Fallback>
+          <mc:Fallback xmlns="">
             <p:sp>
               <p:nvSpPr>
                 <p:cNvPr id="76" name="TextBox 75">
@@ -26069,8 +25745,8 @@
             </p:sp>
           </mc:Fallback>
         </mc:AlternateContent>
-        <mc:AlternateContent xmlns:mc="http://schemas.openxmlformats.org/markup-compatibility/2006">
-          <mc:Choice xmlns:a14="http://schemas.microsoft.com/office/drawing/2010/main" Requires="a14">
+        <mc:AlternateContent xmlns:mc="http://schemas.openxmlformats.org/markup-compatibility/2006" xmlns:a14="http://schemas.microsoft.com/office/drawing/2010/main">
+          <mc:Choice Requires="a14">
             <p:sp>
               <p:nvSpPr>
                 <p:cNvPr id="77" name="TextBox 76">
@@ -26102,10 +25778,7 @@
                   <a:pPr/>
                   <a14:m>
                     <m:oMathPara xmlns:m="http://schemas.openxmlformats.org/officeDocument/2006/math">
-                      <m:oMathParaPr>
-                        <m:jc m:val="centerGroup"/>
-                      </m:oMathParaPr>
-                      <m:oMath xmlns:m="http://schemas.openxmlformats.org/officeDocument/2006/math">
+                      <m:oMath>
                         <m:r>
                           <a:rPr lang="en-US" sz="1400" i="1">
                             <a:latin typeface="Cambria Math" panose="02040503050406030204" pitchFamily="18" charset="0"/>
@@ -26138,7 +25811,7 @@
               </p:txBody>
             </p:sp>
           </mc:Choice>
-          <mc:Fallback>
+          <mc:Fallback xmlns="">
             <p:sp>
               <p:nvSpPr>
                 <p:cNvPr id="77" name="TextBox 76">
@@ -26183,8 +25856,8 @@
             </p:sp>
           </mc:Fallback>
         </mc:AlternateContent>
-        <mc:AlternateContent xmlns:mc="http://schemas.openxmlformats.org/markup-compatibility/2006">
-          <mc:Choice xmlns:a14="http://schemas.microsoft.com/office/drawing/2010/main" Requires="a14">
+        <mc:AlternateContent xmlns:mc="http://schemas.openxmlformats.org/markup-compatibility/2006" xmlns:a14="http://schemas.microsoft.com/office/drawing/2010/main">
+          <mc:Choice Requires="a14">
             <p:sp>
               <p:nvSpPr>
                 <p:cNvPr id="78" name="TextBox 77">
@@ -26216,10 +25889,7 @@
                   <a:pPr/>
                   <a14:m>
                     <m:oMathPara xmlns:m="http://schemas.openxmlformats.org/officeDocument/2006/math">
-                      <m:oMathParaPr>
-                        <m:jc m:val="centerGroup"/>
-                      </m:oMathParaPr>
-                      <m:oMath xmlns:m="http://schemas.openxmlformats.org/officeDocument/2006/math">
+                      <m:oMath>
                         <m:r>
                           <a:rPr lang="en-US" sz="1400" i="1">
                             <a:latin typeface="Cambria Math" panose="02040503050406030204" pitchFamily="18" charset="0"/>
@@ -26240,7 +25910,7 @@
               </p:txBody>
             </p:sp>
           </mc:Choice>
-          <mc:Fallback>
+          <mc:Fallback xmlns="">
             <p:sp>
               <p:nvSpPr>
                 <p:cNvPr id="78" name="TextBox 77">
@@ -26285,8 +25955,8 @@
             </p:sp>
           </mc:Fallback>
         </mc:AlternateContent>
-        <mc:AlternateContent xmlns:mc="http://schemas.openxmlformats.org/markup-compatibility/2006">
-          <mc:Choice xmlns:a14="http://schemas.microsoft.com/office/drawing/2010/main" Requires="a14">
+        <mc:AlternateContent xmlns:mc="http://schemas.openxmlformats.org/markup-compatibility/2006" xmlns:a14="http://schemas.microsoft.com/office/drawing/2010/main">
+          <mc:Choice Requires="a14">
             <p:sp>
               <p:nvSpPr>
                 <p:cNvPr id="79" name="TextBox 78">
@@ -26318,10 +25988,7 @@
                   <a:pPr/>
                   <a14:m>
                     <m:oMathPara xmlns:m="http://schemas.openxmlformats.org/officeDocument/2006/math">
-                      <m:oMathParaPr>
-                        <m:jc m:val="centerGroup"/>
-                      </m:oMathParaPr>
-                      <m:oMath xmlns:m="http://schemas.openxmlformats.org/officeDocument/2006/math">
+                      <m:oMath>
                         <m:r>
                           <a:rPr lang="en-US" sz="1400" i="1">
                             <a:latin typeface="Cambria Math" panose="02040503050406030204" pitchFamily="18" charset="0"/>
@@ -26342,7 +26009,7 @@
               </p:txBody>
             </p:sp>
           </mc:Choice>
-          <mc:Fallback>
+          <mc:Fallback xmlns="">
             <p:sp>
               <p:nvSpPr>
                 <p:cNvPr id="79" name="TextBox 78">
@@ -26387,8 +26054,8 @@
             </p:sp>
           </mc:Fallback>
         </mc:AlternateContent>
-        <mc:AlternateContent xmlns:mc="http://schemas.openxmlformats.org/markup-compatibility/2006">
-          <mc:Choice xmlns:a14="http://schemas.microsoft.com/office/drawing/2010/main" Requires="a14">
+        <mc:AlternateContent xmlns:mc="http://schemas.openxmlformats.org/markup-compatibility/2006" xmlns:a14="http://schemas.microsoft.com/office/drawing/2010/main">
+          <mc:Choice Requires="a14">
             <p:sp>
               <p:nvSpPr>
                 <p:cNvPr id="80" name="TextBox 79">
@@ -26420,10 +26087,7 @@
                   <a:pPr/>
                   <a14:m>
                     <m:oMathPara xmlns:m="http://schemas.openxmlformats.org/officeDocument/2006/math">
-                      <m:oMathParaPr>
-                        <m:jc m:val="centerGroup"/>
-                      </m:oMathParaPr>
-                      <m:oMath xmlns:m="http://schemas.openxmlformats.org/officeDocument/2006/math">
+                      <m:oMath>
                         <m:r>
                           <a:rPr lang="en-US" sz="1400" i="1">
                             <a:latin typeface="Cambria Math" panose="02040503050406030204" pitchFamily="18" charset="0"/>
@@ -26456,7 +26120,7 @@
               </p:txBody>
             </p:sp>
           </mc:Choice>
-          <mc:Fallback>
+          <mc:Fallback xmlns="">
             <p:sp>
               <p:nvSpPr>
                 <p:cNvPr id="80" name="TextBox 79">
